--- a/sales-deck/PM-Control-Tower-Sales-Deck.pptx
+++ b/sales-deck/PM-Control-Tower-Sales-Deck.pptx
@@ -4,6 +4,9 @@
   <p:sldMasterIdLst>
     <p:sldMasterId id="2147483648" r:id="rId1"/>
   </p:sldMasterIdLst>
+  <p:notesMasterIdLst>
+    <p:notesMasterId r:id="rId20"/>
+  </p:notesMasterIdLst>
   <p:sldIdLst>
     <p:sldId id="256" r:id="rId2"/>
     <p:sldId id="257" r:id="rId3"/>
@@ -24,9 +27,6 @@
     <p:sldId id="272" r:id="rId18"/>
     <p:sldId id="273" r:id="rId19"/>
   </p:sldIdLst>
-  <p:notesMasterIdLst>
-    <p:notesMasterId r:id="rId20"/>
-  </p:notesMasterIdLst>
   <p:sldSz cx="12192000" cy="6858000"/>
   <p:notesSz cx="6858000" cy="12192000"/>
   <p:defaultTextStyle>
@@ -121,13 +121,20 @@
       </a:defRPr>
     </a:lvl9pPr>
   </p:defaultTextStyle>
+  <p:extLst>
+    <p:ext uri="{EFAFB233-063F-42B5-8137-9DF3F51BA10A}">
+      <p15:sldGuideLst xmlns:p15="http://schemas.microsoft.com/office/powerpoint/2012/main"/>
+    </p:ext>
+  </p:extLst>
 </p:presentation>
 </file>
 
 <file path=ppt/charts/chart1.xml><?xml version="1.0" encoding="utf-8"?>
-<c:chartSpace xmlns:c="http://schemas.openxmlformats.org/drawingml/2006/chart" xmlns:a="http://schemas.openxmlformats.org/drawingml/2006/main" xmlns:r="http://schemas.openxmlformats.org/officeDocument/2006/relationships">
+<c:chartSpace xmlns:c="http://schemas.openxmlformats.org/drawingml/2006/chart" xmlns:a="http://schemas.openxmlformats.org/drawingml/2006/main" xmlns:r="http://schemas.openxmlformats.org/officeDocument/2006/relationships" xmlns:c16r2="http://schemas.microsoft.com/office/drawing/2015/06/chart">
   <c:date1904 val="0"/>
+  <c:lang val="en-US"/>
   <c:roundedCorners val="1"/>
+  <c:style val="2"/>
   <c:chart>
     <c:autoTitleDeleted val="1"/>
     <c:plotArea>
@@ -159,18 +166,26 @@
           <c:invertIfNegative val="0"/>
           <c:dLbls>
             <c:numFmt formatCode="0.00" sourceLinked="0"/>
+            <c:spPr>
+              <a:noFill/>
+              <a:ln>
+                <a:noFill/>
+              </a:ln>
+              <a:effectLst/>
+            </c:spPr>
             <c:txPr>
               <a:bodyPr/>
               <a:lstStyle/>
               <a:p>
                 <a:pPr>
-                  <a:defRPr b="0" i="0" strike="noStrike" sz="1000" u="none">
+                  <a:defRPr sz="1000" b="0" i="0" u="none" strike="noStrike">
                     <a:solidFill>
                       <a:srgbClr val="0E2240"/>
                     </a:solidFill>
                     <a:latin typeface="Arial"/>
                   </a:defRPr>
                 </a:pPr>
+                <a:endParaRPr lang="en-US"/>
               </a:p>
             </c:txPr>
             <c:showLegendKey val="0"/>
@@ -180,28 +195,31 @@
             <c:showPercent val="0"/>
             <c:showBubbleSize val="0"/>
             <c:showLeaderLines val="0"/>
+            <c:extLst>
+              <c:ext xmlns:c15="http://schemas.microsoft.com/office/drawing/2012/chart" uri="{CE6537A1-D6FC-4f65-9D91-7224C49458BB}">
+                <c15:showLeaderLines val="0"/>
+              </c:ext>
+            </c:extLst>
           </c:dLbls>
           <c:cat>
-            <c:multiLvlStrRef>
+            <c:strRef>
               <c:f>Sheet1!$A$2:$A$5</c:f>
-              <c:multiLvlStrCache>
+              <c:strCache>
                 <c:ptCount val="4"/>
-                <c:lvl>
-                  <c:pt idx="0">
-                    <c:v>ERP-001</c:v>
-                  </c:pt>
-                  <c:pt idx="1">
-                    <c:v>DATA-002</c:v>
-                  </c:pt>
-                  <c:pt idx="2">
-                    <c:v>PORT-003</c:v>
-                  </c:pt>
-                  <c:pt idx="3">
-                    <c:v>MOB-004</c:v>
-                  </c:pt>
-                </c:lvl>
-              </c:multiLvlStrCache>
-            </c:multiLvlStrRef>
+                <c:pt idx="0">
+                  <c:v>ERP-001</c:v>
+                </c:pt>
+                <c:pt idx="1">
+                  <c:v>DATA-002</c:v>
+                </c:pt>
+                <c:pt idx="2">
+                  <c:v>PORT-003</c:v>
+                </c:pt>
+                <c:pt idx="3">
+                  <c:v>MOB-004</c:v>
+                </c:pt>
+              </c:strCache>
+            </c:strRef>
           </c:cat>
           <c:val>
             <c:numRef>
@@ -224,6 +242,11 @@
               </c:numCache>
             </c:numRef>
           </c:val>
+          <c:extLst>
+            <c:ext xmlns:c16="http://schemas.microsoft.com/office/drawing/2014/chart" uri="{C3380CC4-5D6E-409C-BE32-E72D297353CC}">
+              <c16:uniqueId val="{00000000-3AE9-443C-AC70-AAE6F998E8C3}"/>
+            </c:ext>
+          </c:extLst>
         </c:ser>
         <c:ser>
           <c:idx val="1"/>
@@ -248,18 +271,26 @@
           <c:invertIfNegative val="0"/>
           <c:dLbls>
             <c:numFmt formatCode="0.00" sourceLinked="0"/>
+            <c:spPr>
+              <a:noFill/>
+              <a:ln>
+                <a:noFill/>
+              </a:ln>
+              <a:effectLst/>
+            </c:spPr>
             <c:txPr>
               <a:bodyPr/>
               <a:lstStyle/>
               <a:p>
                 <a:pPr>
-                  <a:defRPr b="0" i="0" strike="noStrike" sz="1000" u="none">
+                  <a:defRPr sz="1000" b="0" i="0" u="none" strike="noStrike">
                     <a:solidFill>
                       <a:srgbClr val="0E2240"/>
                     </a:solidFill>
                     <a:latin typeface="Arial"/>
                   </a:defRPr>
                 </a:pPr>
+                <a:endParaRPr lang="en-US"/>
               </a:p>
             </c:txPr>
             <c:showLegendKey val="0"/>
@@ -269,28 +300,31 @@
             <c:showPercent val="0"/>
             <c:showBubbleSize val="0"/>
             <c:showLeaderLines val="0"/>
+            <c:extLst>
+              <c:ext xmlns:c15="http://schemas.microsoft.com/office/drawing/2012/chart" uri="{CE6537A1-D6FC-4f65-9D91-7224C49458BB}">
+                <c15:showLeaderLines val="0"/>
+              </c:ext>
+            </c:extLst>
           </c:dLbls>
           <c:cat>
-            <c:multiLvlStrRef>
+            <c:strRef>
               <c:f>Sheet1!$A$2:$A$5</c:f>
-              <c:multiLvlStrCache>
+              <c:strCache>
                 <c:ptCount val="4"/>
-                <c:lvl>
-                  <c:pt idx="0">
-                    <c:v>ERP-001</c:v>
-                  </c:pt>
-                  <c:pt idx="1">
-                    <c:v>DATA-002</c:v>
-                  </c:pt>
-                  <c:pt idx="2">
-                    <c:v>PORT-003</c:v>
-                  </c:pt>
-                  <c:pt idx="3">
-                    <c:v>MOB-004</c:v>
-                  </c:pt>
-                </c:lvl>
-              </c:multiLvlStrCache>
-            </c:multiLvlStrRef>
+                <c:pt idx="0">
+                  <c:v>ERP-001</c:v>
+                </c:pt>
+                <c:pt idx="1">
+                  <c:v>DATA-002</c:v>
+                </c:pt>
+                <c:pt idx="2">
+                  <c:v>PORT-003</c:v>
+                </c:pt>
+                <c:pt idx="3">
+                  <c:v>MOB-004</c:v>
+                </c:pt>
+              </c:strCache>
+            </c:strRef>
           </c:cat>
           <c:val>
             <c:numRef>
@@ -313,36 +347,23 @@
               </c:numCache>
             </c:numRef>
           </c:val>
+          <c:extLst>
+            <c:ext xmlns:c16="http://schemas.microsoft.com/office/drawing/2014/chart" uri="{C3380CC4-5D6E-409C-BE32-E72D297353CC}">
+              <c16:uniqueId val="{00000001-3AE9-443C-AC70-AAE6F998E8C3}"/>
+            </c:ext>
+          </c:extLst>
         </c:ser>
         <c:dLbls>
-          <c:numFmt formatCode="0.00" sourceLinked="0"/>
-          <c:txPr>
-            <a:bodyPr/>
-            <a:lstStyle/>
-            <a:p>
-              <a:pPr>
-                <a:defRPr b="0" i="0" strike="noStrike" sz="1000" u="none">
-                  <a:solidFill>
-                    <a:srgbClr val="0E2240"/>
-                  </a:solidFill>
-                  <a:latin typeface="Arial"/>
-                </a:defRPr>
-              </a:pPr>
-            </a:p>
-          </c:txPr>
           <c:showLegendKey val="0"/>
           <c:showVal val="1"/>
           <c:showCatName val="0"/>
           <c:showSerName val="0"/>
           <c:showPercent val="0"/>
           <c:showBubbleSize val="0"/>
-          <c:showLeaderLines val="0"/>
         </c:dLbls>
         <c:gapWidth val="60"/>
-        <c:overlap val="0"/>
         <c:axId val="2094734554"/>
         <c:axId val="2094734552"/>
-        <c:axId val="2094734556"/>
       </c:barChart>
       <c:catAx>
         <c:axId val="2094734554"/>
@@ -383,6 +404,7 @@
         <c:crosses val="autoZero"/>
         <c:auto val="1"/>
         <c:lblAlgn val="ctr"/>
+        <c:lblOffset val="100"/>
         <c:noMultiLvlLbl val="1"/>
       </c:catAx>
       <c:valAx>
@@ -465,6 +487,7 @@
     </c:legend>
     <c:plotVisOnly val="1"/>
     <c:dispBlanksAs val="span"/>
+    <c:showDLblsOverMax val="1"/>
   </c:chart>
   <c:spPr>
     <a:solidFill>
@@ -482,9 +505,11 @@
 </file>
 
 <file path=ppt/charts/chart2.xml><?xml version="1.0" encoding="utf-8"?>
-<c:chartSpace xmlns:c="http://schemas.openxmlformats.org/drawingml/2006/chart" xmlns:a="http://schemas.openxmlformats.org/drawingml/2006/main" xmlns:r="http://schemas.openxmlformats.org/officeDocument/2006/relationships">
+<c:chartSpace xmlns:c="http://schemas.openxmlformats.org/drawingml/2006/chart" xmlns:a="http://schemas.openxmlformats.org/drawingml/2006/main" xmlns:r="http://schemas.openxmlformats.org/officeDocument/2006/relationships" xmlns:c16r2="http://schemas.microsoft.com/office/drawing/2015/06/chart">
   <c:date1904 val="0"/>
+  <c:lang val="en-US"/>
   <c:roundedCorners val="1"/>
+  <c:style val="2"/>
   <c:chart>
     <c:autoTitleDeleted val="1"/>
     <c:plotArea>
@@ -514,40 +539,15 @@
             <a:effectLst/>
           </c:spPr>
           <c:invertIfNegative val="0"/>
-          <c:dLbls>
-            <c:numFmt formatCode="#,##0" sourceLinked="0"/>
-            <c:txPr>
-              <a:bodyPr/>
-              <a:lstStyle/>
-              <a:p>
-                <a:pPr>
-                  <a:defRPr b="0" i="0" strike="noStrike" sz="1200" u="none">
-                    <a:solidFill>
-                      <a:srgbClr val="0E2240"/>
-                    </a:solidFill>
-                    <a:latin typeface="Arial"/>
-                  </a:defRPr>
-                </a:pPr>
-              </a:p>
-            </c:txPr>
-            <c:showLegendKey val="0"/>
-            <c:showVal val="1"/>
-            <c:showCatName val="0"/>
-            <c:showSerName val="0"/>
-            <c:showPercent val="0"/>
-            <c:showBubbleSize val="0"/>
-            <c:showLeaderLines val="0"/>
-          </c:dLbls>
           <c:dPt>
             <c:idx val="0"/>
             <c:invertIfNegative val="0"/>
             <c:bubble3D val="0"/>
-            <c:spPr>
-              <a:solidFill>
-                <a:srgbClr val="DC2626"/>
-              </a:solidFill>
-              <a:effectLst/>
-            </c:spPr>
+            <c:extLst>
+              <c:ext xmlns:c16="http://schemas.microsoft.com/office/drawing/2014/chart" uri="{C3380CC4-5D6E-409C-BE32-E72D297353CC}">
+                <c16:uniqueId val="{00000001-3C03-41B0-A70C-1AACD5A4794D}"/>
+              </c:ext>
+            </c:extLst>
           </c:dPt>
           <c:dPt>
             <c:idx val="1"/>
@@ -559,22 +559,62 @@
               </a:solidFill>
               <a:effectLst/>
             </c:spPr>
+            <c:extLst>
+              <c:ext xmlns:c16="http://schemas.microsoft.com/office/drawing/2014/chart" uri="{C3380CC4-5D6E-409C-BE32-E72D297353CC}">
+                <c16:uniqueId val="{00000003-3C03-41B0-A70C-1AACD5A4794D}"/>
+              </c:ext>
+            </c:extLst>
           </c:dPt>
+          <c:dLbls>
+            <c:numFmt formatCode="#,##0" sourceLinked="0"/>
+            <c:spPr>
+              <a:noFill/>
+              <a:ln>
+                <a:noFill/>
+              </a:ln>
+              <a:effectLst/>
+            </c:spPr>
+            <c:txPr>
+              <a:bodyPr/>
+              <a:lstStyle/>
+              <a:p>
+                <a:pPr>
+                  <a:defRPr sz="1200" b="0" i="0" u="none" strike="noStrike">
+                    <a:solidFill>
+                      <a:srgbClr val="0E2240"/>
+                    </a:solidFill>
+                    <a:latin typeface="Arial"/>
+                  </a:defRPr>
+                </a:pPr>
+                <a:endParaRPr lang="en-US"/>
+              </a:p>
+            </c:txPr>
+            <c:showLegendKey val="0"/>
+            <c:showVal val="1"/>
+            <c:showCatName val="0"/>
+            <c:showSerName val="0"/>
+            <c:showPercent val="0"/>
+            <c:showBubbleSize val="0"/>
+            <c:showLeaderLines val="0"/>
+            <c:extLst>
+              <c:ext xmlns:c15="http://schemas.microsoft.com/office/drawing/2012/chart" uri="{CE6537A1-D6FC-4f65-9D91-7224C49458BB}">
+                <c15:showLeaderLines val="0"/>
+              </c:ext>
+            </c:extLst>
+          </c:dLbls>
           <c:cat>
-            <c:multiLvlStrRef>
+            <c:strRef>
               <c:f>Sheet1!$A$2:$A$3</c:f>
-              <c:multiLvlStrCache>
+              <c:strCache>
                 <c:ptCount val="2"/>
-                <c:lvl>
-                  <c:pt idx="0">
-                    <c:v>Spreadsheets &amp; decks</c:v>
-                  </c:pt>
-                  <c:pt idx="1">
-                    <c:v>With PM Control Tower</c:v>
-                  </c:pt>
-                </c:lvl>
-              </c:multiLvlStrCache>
-            </c:multiLvlStrRef>
+                <c:pt idx="0">
+                  <c:v>Spreadsheets &amp; decks</c:v>
+                </c:pt>
+                <c:pt idx="1">
+                  <c:v>With PM Control Tower</c:v>
+                </c:pt>
+              </c:strCache>
+            </c:strRef>
           </c:cat>
           <c:val>
             <c:numRef>
@@ -591,36 +631,23 @@
               </c:numCache>
             </c:numRef>
           </c:val>
+          <c:extLst>
+            <c:ext xmlns:c16="http://schemas.microsoft.com/office/drawing/2014/chart" uri="{C3380CC4-5D6E-409C-BE32-E72D297353CC}">
+              <c16:uniqueId val="{00000004-3C03-41B0-A70C-1AACD5A4794D}"/>
+            </c:ext>
+          </c:extLst>
         </c:ser>
         <c:dLbls>
-          <c:numFmt formatCode="#,##0" sourceLinked="0"/>
-          <c:txPr>
-            <a:bodyPr/>
-            <a:lstStyle/>
-            <a:p>
-              <a:pPr>
-                <a:defRPr b="0" i="0" strike="noStrike" sz="1200" u="none">
-                  <a:solidFill>
-                    <a:srgbClr val="0E2240"/>
-                  </a:solidFill>
-                  <a:latin typeface="Arial"/>
-                </a:defRPr>
-              </a:pPr>
-            </a:p>
-          </c:txPr>
           <c:showLegendKey val="0"/>
           <c:showVal val="1"/>
           <c:showCatName val="0"/>
           <c:showSerName val="0"/>
           <c:showPercent val="0"/>
           <c:showBubbleSize val="0"/>
-          <c:showLeaderLines val="0"/>
         </c:dLbls>
         <c:gapWidth val="45"/>
-        <c:overlap val="0"/>
         <c:axId val="2094734554"/>
         <c:axId val="2094734552"/>
-        <c:axId val="2094734556"/>
       </c:barChart>
       <c:catAx>
         <c:axId val="2094734554"/>
@@ -661,6 +688,7 @@
         <c:crosses val="autoZero"/>
         <c:auto val="1"/>
         <c:lblAlgn val="ctr"/>
+        <c:lblOffset val="100"/>
         <c:noMultiLvlLbl val="1"/>
       </c:catAx>
       <c:valAx>
@@ -674,30 +702,6 @@
         <c:majorTickMark val="out"/>
         <c:minorTickMark val="none"/>
         <c:tickLblPos val="low"/>
-        <c:spPr>
-          <a:ln w="12700" cap="flat">
-            <a:solidFill>
-              <a:srgbClr val="888888"/>
-            </a:solidFill>
-            <a:prstDash val="solid"/>
-            <a:round/>
-          </a:ln>
-        </c:spPr>
-        <c:txPr>
-          <a:bodyPr/>
-          <a:lstStyle/>
-          <a:p>
-            <a:pPr>
-              <a:defRPr sz="1000" b="0" i="0" u="none" strike="noStrike">
-                <a:solidFill>
-                  <a:srgbClr val="5D6E85"/>
-                </a:solidFill>
-                <a:latin typeface="Arial"/>
-              </a:defRPr>
-            </a:pPr>
-            <a:endParaRPr lang="en-US"/>
-          </a:p>
-        </c:txPr>
         <c:crossAx val="2094734554"/>
         <c:crosses val="autoZero"/>
         <c:crossBetween val="between"/>
@@ -712,6 +716,7 @@
     </c:plotArea>
     <c:plotVisOnly val="1"/>
     <c:dispBlanksAs val="span"/>
+    <c:showDLblsOverMax val="1"/>
   </c:chart>
   <c:spPr>
     <a:solidFill>
@@ -750,234 +755,10 @@
           <a:chExt cx="0" cy="0"/>
         </a:xfrm>
       </p:grpSpPr>
-      <p:sp>
-        <p:nvSpPr>
-          <p:cNvPr id="2" name="Header Placeholder 1"/>
-          <p:cNvSpPr>
-            <a:spLocks noGrp="1"/>
-          </p:cNvSpPr>
-          <p:nvPr>
-            <p:ph type="hdr" sz="quarter"/>
-          </p:nvPr>
-        </p:nvSpPr>
-        <p:spPr>
-          <a:xfrm>
-            <a:off x="0" y="0"/>
-            <a:ext cx="2971800" cy="458788"/>
-          </a:xfrm>
-          <a:prstGeom prst="rect">
-            <a:avLst/>
-          </a:prstGeom>
-        </p:spPr>
-        <p:txBody>
-          <a:bodyPr vert="horz" lIns="91440" tIns="45720" rIns="91440" bIns="45720" rtlCol="0"/>
-          <a:lstStyle>
-            <a:lvl1pPr algn="l">
-              <a:defRPr sz="1200"/>
-            </a:lvl1pPr>
-          </a:lstStyle>
-          <a:p>
-            <a:endParaRPr lang="en-US"/>
-          </a:p>
-        </p:txBody>
-      </p:sp>
-      <p:sp>
-        <p:nvSpPr>
-          <p:cNvPr id="3" name="Date Placeholder 2"/>
-          <p:cNvSpPr>
-            <a:spLocks noGrp="1"/>
-          </p:cNvSpPr>
-          <p:nvPr>
-            <p:ph type="dt" idx="1"/>
-          </p:nvPr>
-        </p:nvSpPr>
-        <p:spPr>
-          <a:xfrm>
-            <a:off x="3884613" y="0"/>
-            <a:ext cx="2971800" cy="458788"/>
-          </a:xfrm>
-          <a:prstGeom prst="rect">
-            <a:avLst/>
-          </a:prstGeom>
-        </p:spPr>
-        <p:txBody>
-          <a:bodyPr vert="horz" lIns="91440" tIns="45720" rIns="91440" bIns="45720" rtlCol="0"/>
-          <a:lstStyle>
-            <a:lvl1pPr algn="r">
-              <a:defRPr sz="1200"/>
-            </a:lvl1pPr>
-          </a:lstStyle>
-          <a:p>
-            <a:fld id="{5282F153-3F37-0F45-9E97-73ACFA13230C}" type="datetimeFigureOut">
-              <a:rPr lang="en-US"/>
-              <a:t>7/23/19</a:t>
-            </a:fld>
-            <a:endParaRPr lang="en-US"/>
-          </a:p>
-        </p:txBody>
-      </p:sp>
-      <p:sp>
-        <p:nvSpPr>
-          <p:cNvPr id="4" name="Slide Image Placeholder 3"/>
-          <p:cNvSpPr>
-            <a:spLocks noGrp="1" noRot="1" noChangeAspect="1"/>
-          </p:cNvSpPr>
-          <p:nvPr>
-            <p:ph type="sldImg" idx="2"/>
-          </p:nvPr>
-        </p:nvSpPr>
-        <p:spPr>
-          <a:xfrm>
-            <a:off x="685800" y="1143000"/>
-            <a:ext cx="5486400" cy="3086100"/>
-          </a:xfrm>
-          <a:prstGeom prst="rect">
-            <a:avLst/>
-          </a:prstGeom>
-          <a:noFill/>
-          <a:ln w="12700">
-            <a:solidFill>
-              <a:prstClr val="black"/>
-            </a:solidFill>
-          </a:ln>
-        </p:spPr>
-        <p:txBody>
-          <a:bodyPr vert="horz" lIns="91440" tIns="45720" rIns="91440" bIns="45720" rtlCol="0" anchor="ctr"/>
-          <a:lstStyle/>
-          <a:p>
-            <a:endParaRPr lang="en-US"/>
-          </a:p>
-        </p:txBody>
-      </p:sp>
-      <p:sp>
-        <p:nvSpPr>
-          <p:cNvPr id="5" name="Notes Placeholder 4"/>
-          <p:cNvSpPr>
-            <a:spLocks noGrp="1"/>
-          </p:cNvSpPr>
-          <p:nvPr>
-            <p:ph type="body" sz="quarter" idx="3"/>
-          </p:nvPr>
-        </p:nvSpPr>
-        <p:spPr>
-          <a:xfrm>
-            <a:off x="685800" y="4400550"/>
-            <a:ext cx="5486400" cy="3600450"/>
-          </a:xfrm>
-          <a:prstGeom prst="rect">
-            <a:avLst/>
-          </a:prstGeom>
-        </p:spPr>
-        <p:txBody>
-          <a:bodyPr vert="horz" lIns="91440" tIns="45720" rIns="91440" bIns="45720" rtlCol="0"/>
-          <a:lstStyle/>
-          <a:p>
-            <a:pPr lvl="0"/>
-            <a:r>
-              <a:rPr lang="en-US"/>
-              <a:t>Click to edit Master text styles</a:t>
-            </a:r>
-          </a:p>
-          <a:p>
-            <a:pPr lvl="1"/>
-            <a:r>
-              <a:rPr lang="en-US"/>
-              <a:t>Second level</a:t>
-            </a:r>
-          </a:p>
-          <a:p>
-            <a:pPr lvl="2"/>
-            <a:r>
-              <a:rPr lang="en-US"/>
-              <a:t>Third level</a:t>
-            </a:r>
-          </a:p>
-          <a:p>
-            <a:pPr lvl="3"/>
-            <a:r>
-              <a:rPr lang="en-US"/>
-              <a:t>Fourth level</a:t>
-            </a:r>
-          </a:p>
-          <a:p>
-            <a:pPr lvl="4"/>
-            <a:r>
-              <a:rPr lang="en-US"/>
-              <a:t>Fifth level</a:t>
-            </a:r>
-          </a:p>
-        </p:txBody>
-      </p:sp>
-      <p:sp>
-        <p:nvSpPr>
-          <p:cNvPr id="6" name="Footer Placeholder 5"/>
-          <p:cNvSpPr>
-            <a:spLocks noGrp="1"/>
-          </p:cNvSpPr>
-          <p:nvPr>
-            <p:ph type="ftr" sz="quarter" idx="4"/>
-          </p:nvPr>
-        </p:nvSpPr>
-        <p:spPr>
-          <a:xfrm>
-            <a:off x="0" y="8685213"/>
-            <a:ext cx="2971800" cy="458787"/>
-          </a:xfrm>
-          <a:prstGeom prst="rect">
-            <a:avLst/>
-          </a:prstGeom>
-        </p:spPr>
-        <p:txBody>
-          <a:bodyPr vert="horz" lIns="91440" tIns="45720" rIns="91440" bIns="45720" rtlCol="0" anchor="b"/>
-          <a:lstStyle>
-            <a:lvl1pPr algn="l">
-              <a:defRPr sz="1200"/>
-            </a:lvl1pPr>
-          </a:lstStyle>
-          <a:p>
-            <a:endParaRPr lang="en-US"/>
-          </a:p>
-        </p:txBody>
-      </p:sp>
-      <p:sp>
-        <p:nvSpPr>
-          <p:cNvPr id="7" name="Slide Number Placeholder 6"/>
-          <p:cNvSpPr>
-            <a:spLocks noGrp="1"/>
-          </p:cNvSpPr>
-          <p:nvPr>
-            <p:ph type="sldNum" sz="quarter" idx="5"/>
-          </p:nvPr>
-        </p:nvSpPr>
-        <p:spPr>
-          <a:xfrm>
-            <a:off x="3884613" y="8685213"/>
-            <a:ext cx="2971800" cy="458787"/>
-          </a:xfrm>
-          <a:prstGeom prst="rect">
-            <a:avLst/>
-          </a:prstGeom>
-        </p:spPr>
-        <p:txBody>
-          <a:bodyPr vert="horz" lIns="91440" tIns="45720" rIns="91440" bIns="45720" rtlCol="0" anchor="b"/>
-          <a:lstStyle>
-            <a:lvl1pPr algn="r">
-              <a:defRPr sz="1200"/>
-            </a:lvl1pPr>
-          </a:lstStyle>
-          <a:p>
-            <a:fld id="{CE5E9CC1-C706-0F49-92D6-E571CC5EEA8F}" type="slidenum">
-              <a:rPr lang="en-US"/>
-              <a:t>‹#›</a:t>
-            </a:fld>
-            <a:endParaRPr lang="en-US"/>
-          </a:p>
-        </p:txBody>
-      </p:sp>
     </p:spTree>
     <p:extLst>
       <p:ext uri="{BB962C8B-B14F-4D97-AF65-F5344CB8AC3E}">
-        <p14:creationId xmlns:p14="http://schemas.microsoft.com/office/powerpoint/2010/main" val="1024086991"/>
+        <p14:creationId xmlns:p14="http://schemas.microsoft.com/office/powerpoint/2010/main" val="2090600541"/>
       </p:ext>
     </p:extLst>
   </p:cSld>
@@ -1121,10 +902,6 @@
           <a:bodyPr/>
           <a:lstStyle/>
           <a:p>
-            <a:r>
-              <a:rPr lang="en-US" dirty="0"/>
-              <a:t/>
-            </a:r>
             <a:endParaRPr lang="en-US" dirty="0"/>
           </a:p>
         </p:txBody>
@@ -1209,10 +986,6 @@
           <a:bodyPr/>
           <a:lstStyle/>
           <a:p>
-            <a:r>
-              <a:rPr lang="en-US" dirty="0"/>
-              <a:t/>
-            </a:r>
             <a:endParaRPr lang="en-US" dirty="0"/>
           </a:p>
         </p:txBody>
@@ -1297,10 +1070,6 @@
           <a:bodyPr/>
           <a:lstStyle/>
           <a:p>
-            <a:r>
-              <a:rPr lang="en-US" dirty="0"/>
-              <a:t/>
-            </a:r>
             <a:endParaRPr lang="en-US" dirty="0"/>
           </a:p>
         </p:txBody>
@@ -1385,10 +1154,6 @@
           <a:bodyPr/>
           <a:lstStyle/>
           <a:p>
-            <a:r>
-              <a:rPr lang="en-US" dirty="0"/>
-              <a:t/>
-            </a:r>
             <a:endParaRPr lang="en-US" dirty="0"/>
           </a:p>
         </p:txBody>
@@ -1473,10 +1238,6 @@
           <a:bodyPr/>
           <a:lstStyle/>
           <a:p>
-            <a:r>
-              <a:rPr lang="en-US" dirty="0"/>
-              <a:t/>
-            </a:r>
             <a:endParaRPr lang="en-US" dirty="0"/>
           </a:p>
         </p:txBody>
@@ -1561,10 +1322,6 @@
           <a:bodyPr/>
           <a:lstStyle/>
           <a:p>
-            <a:r>
-              <a:rPr lang="en-US" dirty="0"/>
-              <a:t/>
-            </a:r>
             <a:endParaRPr lang="en-US" dirty="0"/>
           </a:p>
         </p:txBody>
@@ -1649,10 +1406,6 @@
           <a:bodyPr/>
           <a:lstStyle/>
           <a:p>
-            <a:r>
-              <a:rPr lang="en-US" dirty="0"/>
-              <a:t/>
-            </a:r>
             <a:endParaRPr lang="en-US" dirty="0"/>
           </a:p>
         </p:txBody>
@@ -1737,10 +1490,6 @@
           <a:bodyPr/>
           <a:lstStyle/>
           <a:p>
-            <a:r>
-              <a:rPr lang="en-US" dirty="0"/>
-              <a:t/>
-            </a:r>
             <a:endParaRPr lang="en-US" dirty="0"/>
           </a:p>
         </p:txBody>
@@ -1825,10 +1574,6 @@
           <a:bodyPr/>
           <a:lstStyle/>
           <a:p>
-            <a:r>
-              <a:rPr lang="en-US" dirty="0"/>
-              <a:t/>
-            </a:r>
             <a:endParaRPr lang="en-US" dirty="0"/>
           </a:p>
         </p:txBody>
@@ -1913,10 +1658,6 @@
           <a:bodyPr/>
           <a:lstStyle/>
           <a:p>
-            <a:r>
-              <a:rPr lang="en-US" dirty="0"/>
-              <a:t/>
-            </a:r>
             <a:endParaRPr lang="en-US" dirty="0"/>
           </a:p>
         </p:txBody>
@@ -2001,10 +1742,6 @@
           <a:bodyPr/>
           <a:lstStyle/>
           <a:p>
-            <a:r>
-              <a:rPr lang="en-US" dirty="0"/>
-              <a:t/>
-            </a:r>
             <a:endParaRPr lang="en-US" dirty="0"/>
           </a:p>
         </p:txBody>
@@ -2089,10 +1826,6 @@
           <a:bodyPr/>
           <a:lstStyle/>
           <a:p>
-            <a:r>
-              <a:rPr lang="en-US" dirty="0"/>
-              <a:t/>
-            </a:r>
             <a:endParaRPr lang="en-US" dirty="0"/>
           </a:p>
         </p:txBody>
@@ -2177,10 +1910,6 @@
           <a:bodyPr/>
           <a:lstStyle/>
           <a:p>
-            <a:r>
-              <a:rPr lang="en-US" dirty="0"/>
-              <a:t/>
-            </a:r>
             <a:endParaRPr lang="en-US" dirty="0"/>
           </a:p>
         </p:txBody>
@@ -2265,10 +1994,6 @@
           <a:bodyPr/>
           <a:lstStyle/>
           <a:p>
-            <a:r>
-              <a:rPr lang="en-US" dirty="0"/>
-              <a:t/>
-            </a:r>
             <a:endParaRPr lang="en-US" dirty="0"/>
           </a:p>
         </p:txBody>
@@ -2353,10 +2078,6 @@
           <a:bodyPr/>
           <a:lstStyle/>
           <a:p>
-            <a:r>
-              <a:rPr lang="en-US" dirty="0"/>
-              <a:t/>
-            </a:r>
             <a:endParaRPr lang="en-US" dirty="0"/>
           </a:p>
         </p:txBody>
@@ -2441,10 +2162,6 @@
           <a:bodyPr/>
           <a:lstStyle/>
           <a:p>
-            <a:r>
-              <a:rPr lang="en-US" dirty="0"/>
-              <a:t/>
-            </a:r>
             <a:endParaRPr lang="en-US" dirty="0"/>
           </a:p>
         </p:txBody>
@@ -2529,10 +2246,6 @@
           <a:bodyPr/>
           <a:lstStyle/>
           <a:p>
-            <a:r>
-              <a:rPr lang="en-US" dirty="0"/>
-              <a:t/>
-            </a:r>
             <a:endParaRPr lang="en-US" dirty="0"/>
           </a:p>
         </p:txBody>
@@ -2617,10 +2330,6 @@
           <a:bodyPr/>
           <a:lstStyle/>
           <a:p>
-            <a:r>
-              <a:rPr lang="en-US" dirty="0"/>
-              <a:t/>
-            </a:r>
             <a:endParaRPr lang="en-US" dirty="0"/>
           </a:p>
         </p:txBody>
@@ -2694,6 +2403,11 @@
 <file path=ppt/slideMasters/slideMaster1.xml><?xml version="1.0" encoding="utf-8"?>
 <p:sldMaster xmlns:a="http://schemas.openxmlformats.org/drawingml/2006/main" xmlns:r="http://schemas.openxmlformats.org/officeDocument/2006/relationships" xmlns:p="http://schemas.openxmlformats.org/presentationml/2006/main">
   <p:cSld>
+    <p:bg>
+      <p:bgRef idx="1001">
+        <a:schemeClr val="bg1"/>
+      </p:bgRef>
+    </p:bg>
     <p:spTree>
       <p:nvGrpSpPr>
         <p:cNvPr id="1" name=""/>
@@ -2976,6 +2690,7 @@
         <a:solidFill>
           <a:srgbClr val="0A1C33"/>
         </a:solidFill>
+        <a:effectLst/>
       </p:bgPr>
     </p:bg>
     <p:spTree>
@@ -3243,7 +2958,7 @@
           <a:bodyPr wrap="square" lIns="0" tIns="0" rIns="0" bIns="0" rtlCol="0" anchor="ctr"/>
           <a:lstStyle/>
           <a:p>
-            <a:pPr algn="ctr" indent="0" marL="0">
+            <a:pPr marL="0" indent="0" algn="ctr">
               <a:buNone/>
             </a:pPr>
             <a:r>
@@ -3282,11 +2997,11 @@
           <a:bodyPr wrap="square" lIns="0" tIns="0" rIns="0" bIns="0" rtlCol="0" anchor="ctr"/>
           <a:lstStyle/>
           <a:p>
-            <a:pPr indent="0" marL="0">
-              <a:buNone/>
-            </a:pPr>
-            <a:r>
-              <a:rPr lang="en-US" sz="1300" b="1" spc="300" kern="0" dirty="0">
+            <a:pPr marL="0" indent="0">
+              <a:buNone/>
+            </a:pPr>
+            <a:r>
+              <a:rPr lang="en-US" sz="1300" b="1" kern="0" spc="300" dirty="0">
                 <a:solidFill>
                   <a:srgbClr val="F59E0B"/>
                 </a:solidFill>
@@ -3321,7 +3036,7 @@
           <a:bodyPr wrap="square" lIns="0" tIns="0" rIns="0" bIns="0" rtlCol="0" anchor="ctr"/>
           <a:lstStyle/>
           <a:p>
-            <a:pPr indent="0" marL="0">
+            <a:pPr marL="0" indent="0">
               <a:lnSpc>
                 <a:spcPct val="98000"/>
               </a:lnSpc>
@@ -3341,7 +3056,7 @@
             <a:endParaRPr lang="en-US" sz="6600" dirty="0"/>
           </a:p>
           <a:p>
-            <a:pPr indent="0" marL="0">
+            <a:pPr marL="0" indent="0">
               <a:lnSpc>
                 <a:spcPct val="98000"/>
               </a:lnSpc>
@@ -3383,7 +3098,7 @@
           <a:bodyPr wrap="square" lIns="0" tIns="0" rIns="0" bIns="0" rtlCol="0" anchor="ctr"/>
           <a:lstStyle/>
           <a:p>
-            <a:pPr indent="0" marL="0">
+            <a:pPr marL="0" indent="0">
               <a:buNone/>
             </a:pPr>
             <a:r>
@@ -3397,9 +3112,6 @@
               </a:rPr>
               <a:t>One platform. Complete project intelligence. </a:t>
             </a:r>
-            <a:pPr indent="0" marL="0">
-              <a:buNone/>
-            </a:pPr>
             <a:r>
               <a:rPr lang="en-US" sz="2400" b="1" dirty="0">
                 <a:solidFill>
@@ -3436,7 +3148,7 @@
           <a:bodyPr wrap="square" lIns="0" tIns="0" rIns="0" bIns="0" rtlCol="0" anchor="ctr"/>
           <a:lstStyle/>
           <a:p>
-            <a:pPr indent="0" marL="0">
+            <a:pPr marL="0" indent="0">
               <a:buNone/>
             </a:pPr>
             <a:r>
@@ -3498,7 +3210,7 @@
           <a:bodyPr wrap="square" lIns="0" tIns="0" rIns="0" bIns="0" rtlCol="0" anchor="ctr"/>
           <a:lstStyle/>
           <a:p>
-            <a:pPr indent="0" marL="0">
+            <a:pPr marL="0" indent="0">
               <a:buNone/>
             </a:pPr>
             <a:r>
@@ -3510,7 +3222,7 @@
                 <a:ea typeface="Segoe UI" pitchFamily="34" charset="-122"/>
                 <a:cs typeface="Segoe UI" pitchFamily="34" charset="-120"/>
               </a:rPr>
-              <a:t>dynamiq Solutions  ·  Corporate Sales Presentation  ·  2026</a:t>
+              <a:t>Corporate Sales Presentation  ·  2026</a:t>
             </a:r>
             <a:endParaRPr lang="en-US" sz="1200" dirty="0"/>
           </a:p>
@@ -3532,6 +3244,7 @@
         <a:solidFill>
           <a:srgbClr val="FFFFFF"/>
         </a:solidFill>
+        <a:effectLst/>
       </p:bgPr>
     </p:bg>
     <p:spTree>
@@ -3569,11 +3282,11 @@
           <a:bodyPr wrap="square" lIns="0" tIns="0" rIns="0" bIns="0" rtlCol="0" anchor="ctr"/>
           <a:lstStyle/>
           <a:p>
-            <a:pPr indent="0" marL="0">
-              <a:buNone/>
-            </a:pPr>
-            <a:r>
-              <a:rPr lang="en-US" sz="1200" b="1" spc="300" kern="0" dirty="0">
+            <a:pPr marL="0" indent="0">
+              <a:buNone/>
+            </a:pPr>
+            <a:r>
+              <a:rPr lang="en-US" sz="1200" b="1" kern="0" spc="300" dirty="0">
                 <a:solidFill>
                   <a:srgbClr val="1D4ED8"/>
                 </a:solidFill>
@@ -3608,7 +3321,7 @@
           <a:bodyPr wrap="square" lIns="0" tIns="0" rIns="0" bIns="0" rtlCol="0" anchor="ctr"/>
           <a:lstStyle/>
           <a:p>
-            <a:pPr indent="0" marL="0">
+            <a:pPr marL="0" indent="0">
               <a:buNone/>
             </a:pPr>
             <a:r>
@@ -3652,7 +3365,7 @@
             <a:prstDash val="solid"/>
           </a:ln>
           <a:effectLst>
-            <a:outerShdw sx="100000" sy="100000" kx="0" ky="0" algn="bl" rotWithShape="0" blurRad="88900" dist="25400" dir="5400000">
+            <a:outerShdw blurRad="88900" dist="25400" dir="5400000" algn="bl" rotWithShape="0">
               <a:srgbClr val="0A1C33">
                 <a:alpha val="16000"/>
               </a:srgbClr>
@@ -3703,7 +3416,7 @@
           <a:bodyPr wrap="square" lIns="0" tIns="0" rIns="0" bIns="0" rtlCol="0" anchor="ctr"/>
           <a:lstStyle/>
           <a:p>
-            <a:pPr algn="ctr" indent="0" marL="0">
+            <a:pPr marL="0" indent="0" algn="ctr">
               <a:buNone/>
             </a:pPr>
             <a:r>
@@ -3853,7 +3566,7 @@
             <a:prstDash val="solid"/>
           </a:ln>
           <a:effectLst>
-            <a:outerShdw sx="100000" sy="100000" kx="0" ky="0" algn="bl" rotWithShape="0" blurRad="88900" dist="25400" dir="5400000">
+            <a:outerShdw blurRad="88900" dist="25400" dir="5400000" algn="bl" rotWithShape="0">
               <a:srgbClr val="0A1C33">
                 <a:alpha val="16000"/>
               </a:srgbClr>
@@ -3904,7 +3617,7 @@
           <a:bodyPr wrap="square" lIns="0" tIns="0" rIns="0" bIns="0" rtlCol="0" anchor="ctr"/>
           <a:lstStyle/>
           <a:p>
-            <a:pPr algn="ctr" indent="0" marL="0">
+            <a:pPr marL="0" indent="0" algn="ctr">
               <a:buNone/>
             </a:pPr>
             <a:r>
@@ -4054,7 +3767,7 @@
             <a:prstDash val="solid"/>
           </a:ln>
           <a:effectLst>
-            <a:outerShdw sx="100000" sy="100000" kx="0" ky="0" algn="bl" rotWithShape="0" blurRad="88900" dist="25400" dir="5400000">
+            <a:outerShdw blurRad="88900" dist="25400" dir="5400000" algn="bl" rotWithShape="0">
               <a:srgbClr val="0A1C33">
                 <a:alpha val="16000"/>
               </a:srgbClr>
@@ -4105,7 +3818,7 @@
           <a:bodyPr wrap="square" lIns="0" tIns="0" rIns="0" bIns="0" rtlCol="0" anchor="ctr"/>
           <a:lstStyle/>
           <a:p>
-            <a:pPr algn="ctr" indent="0" marL="0">
+            <a:pPr marL="0" indent="0" algn="ctr">
               <a:buNone/>
             </a:pPr>
             <a:r>
@@ -4250,7 +3963,7 @@
           <a:bodyPr wrap="square" lIns="0" tIns="0" rIns="0" bIns="0" rtlCol="0" anchor="ctr"/>
           <a:lstStyle/>
           <a:p>
-            <a:pPr indent="0" marL="0">
+            <a:pPr marL="0" indent="0">
               <a:buNone/>
             </a:pPr>
             <a:r>
@@ -4264,9 +3977,6 @@
               </a:rPr>
               <a:t>GREY honesty: </a:t>
             </a:r>
-            <a:pPr indent="0" marL="0">
-              <a:buNone/>
-            </a:pPr>
             <a:r>
               <a:rPr lang="en-US" sz="1300" dirty="0">
                 <a:solidFill>
@@ -4303,7 +4013,7 @@
           <a:bodyPr wrap="square" lIns="0" tIns="0" rIns="0" bIns="0" rtlCol="0" anchor="ctr"/>
           <a:lstStyle/>
           <a:p>
-            <a:pPr algn="r" indent="0" marL="0">
+            <a:pPr marL="0" indent="0" algn="r">
               <a:buNone/>
             </a:pPr>
             <a:r>
@@ -4337,6 +4047,7 @@
         <a:solidFill>
           <a:srgbClr val="FFFFFF"/>
         </a:solidFill>
+        <a:effectLst/>
       </p:bgPr>
     </p:bg>
     <p:spTree>
@@ -4374,11 +4085,11 @@
           <a:bodyPr wrap="square" lIns="0" tIns="0" rIns="0" bIns="0" rtlCol="0" anchor="ctr"/>
           <a:lstStyle/>
           <a:p>
-            <a:pPr indent="0" marL="0">
-              <a:buNone/>
-            </a:pPr>
-            <a:r>
-              <a:rPr lang="en-US" sz="1200" b="1" spc="300" kern="0" dirty="0">
+            <a:pPr marL="0" indent="0">
+              <a:buNone/>
+            </a:pPr>
+            <a:r>
+              <a:rPr lang="en-US" sz="1200" b="1" kern="0" spc="300" dirty="0">
                 <a:solidFill>
                   <a:srgbClr val="1D4ED8"/>
                 </a:solidFill>
@@ -4413,7 +4124,7 @@
           <a:bodyPr wrap="square" lIns="0" tIns="0" rIns="0" bIns="0" rtlCol="0" anchor="ctr"/>
           <a:lstStyle/>
           <a:p>
-            <a:pPr indent="0" marL="0">
+            <a:pPr marL="0" indent="0">
               <a:buNone/>
             </a:pPr>
             <a:r>
@@ -4457,7 +4168,7 @@
             <a:prstDash val="solid"/>
           </a:ln>
           <a:effectLst>
-            <a:outerShdw sx="100000" sy="100000" kx="0" ky="0" algn="bl" rotWithShape="0" blurRad="88900" dist="25400" dir="5400000">
+            <a:outerShdw blurRad="88900" dist="25400" dir="5400000" algn="bl" rotWithShape="0">
               <a:srgbClr val="0A1C33">
                 <a:alpha val="16000"/>
               </a:srgbClr>
@@ -4486,7 +4197,7 @@
           <a:bodyPr wrap="square" lIns="0" tIns="0" rIns="0" bIns="0" rtlCol="0" anchor="ctr"/>
           <a:lstStyle/>
           <a:p>
-            <a:pPr indent="0" marL="0">
+            <a:pPr marL="0" indent="0">
               <a:buNone/>
             </a:pPr>
             <a:r>
@@ -4506,7 +4217,7 @@
       </p:sp>
       <p:graphicFrame>
         <p:nvGraphicFramePr>
-          <p:cNvPr id="6" name="Chart 0" descr=""/>
+          <p:cNvPr id="6" name="Chart 0"/>
           <p:cNvGraphicFramePr/>
           <p:nvPr/>
         </p:nvGraphicFramePr>
@@ -4514,9 +4225,9 @@
           <a:off x="685800" y="2057400"/>
           <a:ext cx="5669280" cy="3291840"/>
         </p:xfrm>
-        <a:graphic xmlns:a="http://schemas.openxmlformats.org/drawingml/2006/main">
+        <a:graphic>
           <a:graphicData uri="http://schemas.openxmlformats.org/drawingml/2006/chart">
-            <c:chart xmlns:c="http://schemas.openxmlformats.org/drawingml/2006/chart" r:id="rId1"/>
+            <c:chart xmlns:c="http://schemas.openxmlformats.org/drawingml/2006/chart" xmlns:r="http://schemas.openxmlformats.org/officeDocument/2006/relationships" r:id="rId3"/>
           </a:graphicData>
         </a:graphic>
       </p:graphicFrame>
@@ -4546,7 +4257,7 @@
             <a:prstDash val="solid"/>
           </a:ln>
           <a:effectLst>
-            <a:outerShdw sx="100000" sy="100000" kx="0" ky="0" algn="bl" rotWithShape="0" blurRad="88900" dist="25400" dir="5400000">
+            <a:outerShdw blurRad="88900" dist="25400" dir="5400000" algn="bl" rotWithShape="0">
               <a:srgbClr val="0A1C33">
                 <a:alpha val="16000"/>
               </a:srgbClr>
@@ -4575,7 +4286,7 @@
           <a:bodyPr wrap="square" lIns="0" tIns="0" rIns="0" bIns="0" rtlCol="0" anchor="ctr"/>
           <a:lstStyle/>
           <a:p>
-            <a:pPr indent="0" marL="0">
+            <a:pPr marL="0" indent="0">
               <a:buNone/>
             </a:pPr>
             <a:r>
@@ -4614,7 +4325,7 @@
           <a:bodyPr wrap="square" lIns="0" tIns="0" rIns="0" bIns="0" rtlCol="0" anchor="ctr"/>
           <a:lstStyle/>
           <a:p>
-            <a:pPr indent="0" marL="0">
+            <a:pPr marL="0" indent="0">
               <a:buNone/>
             </a:pPr>
             <a:r>
@@ -4658,7 +4369,7 @@
             <a:prstDash val="solid"/>
           </a:ln>
           <a:effectLst>
-            <a:outerShdw sx="100000" sy="100000" kx="0" ky="0" algn="bl" rotWithShape="0" blurRad="88900" dist="25400" dir="5400000">
+            <a:outerShdw blurRad="88900" dist="25400" dir="5400000" algn="bl" rotWithShape="0">
               <a:srgbClr val="0A1C33">
                 <a:alpha val="16000"/>
               </a:srgbClr>
@@ -4687,7 +4398,7 @@
           <a:bodyPr wrap="square" lIns="0" tIns="0" rIns="0" bIns="0" rtlCol="0" anchor="ctr"/>
           <a:lstStyle/>
           <a:p>
-            <a:pPr indent="0" marL="0">
+            <a:pPr marL="0" indent="0">
               <a:buNone/>
             </a:pPr>
             <a:r>
@@ -4726,7 +4437,7 @@
           <a:bodyPr wrap="square" lIns="0" tIns="0" rIns="0" bIns="0" rtlCol="0" anchor="ctr"/>
           <a:lstStyle/>
           <a:p>
-            <a:pPr indent="0" marL="0">
+            <a:pPr marL="0" indent="0">
               <a:buNone/>
             </a:pPr>
             <a:r>
@@ -4770,7 +4481,7 @@
             <a:prstDash val="solid"/>
           </a:ln>
           <a:effectLst>
-            <a:outerShdw sx="100000" sy="100000" kx="0" ky="0" algn="bl" rotWithShape="0" blurRad="88900" dist="25400" dir="5400000">
+            <a:outerShdw blurRad="88900" dist="25400" dir="5400000" algn="bl" rotWithShape="0">
               <a:srgbClr val="0A1C33">
                 <a:alpha val="16000"/>
               </a:srgbClr>
@@ -4799,7 +4510,7 @@
           <a:bodyPr wrap="square" lIns="0" tIns="0" rIns="0" bIns="0" rtlCol="0" anchor="ctr"/>
           <a:lstStyle/>
           <a:p>
-            <a:pPr indent="0" marL="0">
+            <a:pPr marL="0" indent="0">
               <a:buNone/>
             </a:pPr>
             <a:r>
@@ -4838,7 +4549,7 @@
           <a:bodyPr wrap="square" lIns="0" tIns="0" rIns="0" bIns="0" rtlCol="0" anchor="ctr"/>
           <a:lstStyle/>
           <a:p>
-            <a:pPr indent="0" marL="0">
+            <a:pPr marL="0" indent="0">
               <a:buNone/>
             </a:pPr>
             <a:r>
@@ -4882,7 +4593,7 @@
             <a:prstDash val="solid"/>
           </a:ln>
           <a:effectLst>
-            <a:outerShdw sx="100000" sy="100000" kx="0" ky="0" algn="bl" rotWithShape="0" blurRad="88900" dist="25400" dir="5400000">
+            <a:outerShdw blurRad="88900" dist="25400" dir="5400000" algn="bl" rotWithShape="0">
               <a:srgbClr val="0A1C33">
                 <a:alpha val="16000"/>
               </a:srgbClr>
@@ -4911,7 +4622,7 @@
           <a:bodyPr wrap="square" lIns="0" tIns="0" rIns="0" bIns="0" rtlCol="0" anchor="ctr"/>
           <a:lstStyle/>
           <a:p>
-            <a:pPr indent="0" marL="0">
+            <a:pPr marL="0" indent="0">
               <a:buNone/>
             </a:pPr>
             <a:r>
@@ -4950,7 +4661,7 @@
           <a:bodyPr wrap="square" lIns="0" tIns="0" rIns="0" bIns="0" rtlCol="0" anchor="ctr"/>
           <a:lstStyle/>
           <a:p>
-            <a:pPr indent="0" marL="0">
+            <a:pPr marL="0" indent="0">
               <a:buNone/>
             </a:pPr>
             <a:r>
@@ -4994,7 +4705,7 @@
             <a:prstDash val="solid"/>
           </a:ln>
           <a:effectLst>
-            <a:outerShdw sx="100000" sy="100000" kx="0" ky="0" algn="bl" rotWithShape="0" blurRad="88900" dist="25400" dir="5400000">
+            <a:outerShdw blurRad="88900" dist="25400" dir="5400000" algn="bl" rotWithShape="0">
               <a:srgbClr val="0A1C33">
                 <a:alpha val="16000"/>
               </a:srgbClr>
@@ -5023,7 +4734,7 @@
           <a:bodyPr wrap="square" lIns="0" tIns="0" rIns="0" bIns="0" rtlCol="0" anchor="ctr"/>
           <a:lstStyle/>
           <a:p>
-            <a:pPr indent="0" marL="0">
+            <a:pPr marL="0" indent="0">
               <a:buNone/>
             </a:pPr>
             <a:r>
@@ -5062,7 +4773,7 @@
           <a:bodyPr wrap="square" lIns="0" tIns="0" rIns="0" bIns="0" rtlCol="0" anchor="ctr"/>
           <a:lstStyle/>
           <a:p>
-            <a:pPr indent="0" marL="0">
+            <a:pPr marL="0" indent="0">
               <a:buNone/>
             </a:pPr>
             <a:r>
@@ -5101,7 +4812,7 @@
           <a:bodyPr wrap="square" lIns="0" tIns="0" rIns="0" bIns="0" rtlCol="0" anchor="ctr"/>
           <a:lstStyle/>
           <a:p>
-            <a:pPr indent="0" marL="0">
+            <a:pPr marL="0" indent="0">
               <a:buNone/>
             </a:pPr>
             <a:r>
@@ -5140,7 +4851,7 @@
           <a:bodyPr wrap="square" lIns="0" tIns="0" rIns="0" bIns="0" rtlCol="0" anchor="ctr"/>
           <a:lstStyle/>
           <a:p>
-            <a:pPr algn="r" indent="0" marL="0">
+            <a:pPr marL="0" indent="0" algn="r">
               <a:buNone/>
             </a:pPr>
             <a:r>
@@ -5174,6 +4885,7 @@
         <a:solidFill>
           <a:srgbClr val="FFFFFF"/>
         </a:solidFill>
+        <a:effectLst/>
       </p:bgPr>
     </p:bg>
     <p:spTree>
@@ -5211,11 +4923,11 @@
           <a:bodyPr wrap="square" lIns="0" tIns="0" rIns="0" bIns="0" rtlCol="0" anchor="ctr"/>
           <a:lstStyle/>
           <a:p>
-            <a:pPr indent="0" marL="0">
-              <a:buNone/>
-            </a:pPr>
-            <a:r>
-              <a:rPr lang="en-US" sz="1200" b="1" spc="300" kern="0" dirty="0">
+            <a:pPr marL="0" indent="0">
+              <a:buNone/>
+            </a:pPr>
+            <a:r>
+              <a:rPr lang="en-US" sz="1200" b="1" kern="0" spc="300" dirty="0">
                 <a:solidFill>
                   <a:srgbClr val="1D4ED8"/>
                 </a:solidFill>
@@ -5250,7 +4962,7 @@
           <a:bodyPr wrap="square" lIns="0" tIns="0" rIns="0" bIns="0" rtlCol="0" anchor="ctr"/>
           <a:lstStyle/>
           <a:p>
-            <a:pPr indent="0" marL="0">
+            <a:pPr marL="0" indent="0">
               <a:buNone/>
             </a:pPr>
             <a:r>
@@ -5294,7 +5006,7 @@
             <a:prstDash val="solid"/>
           </a:ln>
           <a:effectLst>
-            <a:outerShdw sx="100000" sy="100000" kx="0" ky="0" algn="bl" rotWithShape="0" blurRad="88900" dist="25400" dir="5400000">
+            <a:outerShdw blurRad="88900" dist="25400" dir="5400000" algn="bl" rotWithShape="0">
               <a:srgbClr val="0A1C33">
                 <a:alpha val="16000"/>
               </a:srgbClr>
@@ -5323,7 +5035,7 @@
           <a:bodyPr wrap="square" lIns="0" tIns="0" rIns="0" bIns="0" rtlCol="0" anchor="ctr"/>
           <a:lstStyle/>
           <a:p>
-            <a:pPr algn="ctr" indent="0" marL="0">
+            <a:pPr marL="0" indent="0" algn="ctr">
               <a:buNone/>
             </a:pPr>
             <a:r>
@@ -5362,7 +5074,7 @@
           <a:bodyPr wrap="square" lIns="0" tIns="0" rIns="0" bIns="0" rtlCol="0" anchor="ctr"/>
           <a:lstStyle/>
           <a:p>
-            <a:pPr algn="ctr" indent="0" marL="0">
+            <a:pPr marL="0" indent="0" algn="ctr">
               <a:buNone/>
             </a:pPr>
             <a:r>
@@ -5406,7 +5118,7 @@
             <a:prstDash val="solid"/>
           </a:ln>
           <a:effectLst>
-            <a:outerShdw sx="100000" sy="100000" kx="0" ky="0" algn="bl" rotWithShape="0" blurRad="88900" dist="25400" dir="5400000">
+            <a:outerShdw blurRad="88900" dist="25400" dir="5400000" algn="bl" rotWithShape="0">
               <a:srgbClr val="0A1C33">
                 <a:alpha val="16000"/>
               </a:srgbClr>
@@ -5435,7 +5147,7 @@
           <a:bodyPr wrap="square" lIns="0" tIns="0" rIns="0" bIns="0" rtlCol="0" anchor="ctr"/>
           <a:lstStyle/>
           <a:p>
-            <a:pPr algn="ctr" indent="0" marL="0">
+            <a:pPr marL="0" indent="0" algn="ctr">
               <a:buNone/>
             </a:pPr>
             <a:r>
@@ -5474,7 +5186,7 @@
           <a:bodyPr wrap="square" lIns="0" tIns="0" rIns="0" bIns="0" rtlCol="0" anchor="ctr"/>
           <a:lstStyle/>
           <a:p>
-            <a:pPr algn="ctr" indent="0" marL="0">
+            <a:pPr marL="0" indent="0" algn="ctr">
               <a:buNone/>
             </a:pPr>
             <a:r>
@@ -5518,7 +5230,7 @@
             <a:prstDash val="solid"/>
           </a:ln>
           <a:effectLst>
-            <a:outerShdw sx="100000" sy="100000" kx="0" ky="0" algn="bl" rotWithShape="0" blurRad="88900" dist="25400" dir="5400000">
+            <a:outerShdw blurRad="88900" dist="25400" dir="5400000" algn="bl" rotWithShape="0">
               <a:srgbClr val="0A1C33">
                 <a:alpha val="16000"/>
               </a:srgbClr>
@@ -5547,7 +5259,7 @@
           <a:bodyPr wrap="square" lIns="0" tIns="0" rIns="0" bIns="0" rtlCol="0" anchor="ctr"/>
           <a:lstStyle/>
           <a:p>
-            <a:pPr algn="ctr" indent="0" marL="0">
+            <a:pPr marL="0" indent="0" algn="ctr">
               <a:buNone/>
             </a:pPr>
             <a:r>
@@ -5586,7 +5298,7 @@
           <a:bodyPr wrap="square" lIns="0" tIns="0" rIns="0" bIns="0" rtlCol="0" anchor="ctr"/>
           <a:lstStyle/>
           <a:p>
-            <a:pPr algn="ctr" indent="0" marL="0">
+            <a:pPr marL="0" indent="0" algn="ctr">
               <a:buNone/>
             </a:pPr>
             <a:r>
@@ -5630,7 +5342,7 @@
             <a:prstDash val="solid"/>
           </a:ln>
           <a:effectLst>
-            <a:outerShdw sx="100000" sy="100000" kx="0" ky="0" algn="bl" rotWithShape="0" blurRad="88900" dist="25400" dir="5400000">
+            <a:outerShdw blurRad="88900" dist="25400" dir="5400000" algn="bl" rotWithShape="0">
               <a:srgbClr val="0A1C33">
                 <a:alpha val="16000"/>
               </a:srgbClr>
@@ -5659,7 +5371,7 @@
           <a:bodyPr wrap="square" lIns="0" tIns="0" rIns="0" bIns="0" rtlCol="0" anchor="ctr"/>
           <a:lstStyle/>
           <a:p>
-            <a:pPr indent="0" marL="0">
+            <a:pPr marL="0" indent="0">
               <a:buNone/>
             </a:pPr>
             <a:r>
@@ -5679,7 +5391,7 @@
       </p:sp>
       <p:graphicFrame>
         <p:nvGraphicFramePr>
-          <p:cNvPr id="15" name="Chart 0" descr=""/>
+          <p:cNvPr id="15" name="Chart 0"/>
           <p:cNvGraphicFramePr/>
           <p:nvPr/>
         </p:nvGraphicFramePr>
@@ -5687,9 +5399,9 @@
           <a:off x="685800" y="4389120"/>
           <a:ext cx="5669280" cy="1463040"/>
         </p:xfrm>
-        <a:graphic xmlns:a="http://schemas.openxmlformats.org/drawingml/2006/main">
+        <a:graphic>
           <a:graphicData uri="http://schemas.openxmlformats.org/drawingml/2006/chart">
-            <c:chart xmlns:c="http://schemas.openxmlformats.org/drawingml/2006/chart" r:id="rId1"/>
+            <c:chart xmlns:c="http://schemas.openxmlformats.org/drawingml/2006/chart" xmlns:r="http://schemas.openxmlformats.org/officeDocument/2006/relationships" r:id="rId3"/>
           </a:graphicData>
         </a:graphic>
       </p:graphicFrame>
@@ -5719,7 +5431,7 @@
             <a:prstDash val="solid"/>
           </a:ln>
           <a:effectLst>
-            <a:outerShdw sx="100000" sy="100000" kx="0" ky="0" algn="bl" rotWithShape="0" blurRad="88900" dist="25400" dir="5400000">
+            <a:outerShdw blurRad="88900" dist="25400" dir="5400000" algn="bl" rotWithShape="0">
               <a:srgbClr val="0A1C33">
                 <a:alpha val="16000"/>
               </a:srgbClr>
@@ -5748,7 +5460,7 @@
           <a:bodyPr wrap="square" lIns="0" tIns="0" rIns="0" bIns="0" rtlCol="0" anchor="ctr"/>
           <a:lstStyle/>
           <a:p>
-            <a:pPr indent="0" marL="0">
+            <a:pPr marL="0" indent="0">
               <a:buNone/>
             </a:pPr>
             <a:r>
@@ -5872,7 +5584,7 @@
           <a:bodyPr wrap="square" lIns="0" tIns="0" rIns="0" bIns="0" rtlCol="0" anchor="ctr"/>
           <a:lstStyle/>
           <a:p>
-            <a:pPr indent="0" marL="0">
+            <a:pPr marL="0" indent="0">
               <a:buNone/>
             </a:pPr>
             <a:r>
@@ -5911,7 +5623,7 @@
           <a:bodyPr wrap="square" lIns="0" tIns="0" rIns="0" bIns="0" rtlCol="0" anchor="ctr"/>
           <a:lstStyle/>
           <a:p>
-            <a:pPr algn="r" indent="0" marL="0">
+            <a:pPr marL="0" indent="0" algn="r">
               <a:buNone/>
             </a:pPr>
             <a:r>
@@ -5945,6 +5657,7 @@
         <a:solidFill>
           <a:srgbClr val="FFFFFF"/>
         </a:solidFill>
+        <a:effectLst/>
       </p:bgPr>
     </p:bg>
     <p:spTree>
@@ -5982,11 +5695,11 @@
           <a:bodyPr wrap="square" lIns="0" tIns="0" rIns="0" bIns="0" rtlCol="0" anchor="ctr"/>
           <a:lstStyle/>
           <a:p>
-            <a:pPr indent="0" marL="0">
-              <a:buNone/>
-            </a:pPr>
-            <a:r>
-              <a:rPr lang="en-US" sz="1200" b="1" spc="300" kern="0" dirty="0">
+            <a:pPr marL="0" indent="0">
+              <a:buNone/>
+            </a:pPr>
+            <a:r>
+              <a:rPr lang="en-US" sz="1200" b="1" kern="0" spc="300" dirty="0">
                 <a:solidFill>
                   <a:srgbClr val="1D4ED8"/>
                 </a:solidFill>
@@ -6021,7 +5734,7 @@
           <a:bodyPr wrap="square" lIns="0" tIns="0" rIns="0" bIns="0" rtlCol="0" anchor="ctr"/>
           <a:lstStyle/>
           <a:p>
-            <a:pPr indent="0" marL="0">
+            <a:pPr marL="0" indent="0">
               <a:buNone/>
             </a:pPr>
             <a:r>
@@ -6065,7 +5778,7 @@
             <a:prstDash val="solid"/>
           </a:ln>
           <a:effectLst>
-            <a:outerShdw sx="100000" sy="100000" kx="0" ky="0" algn="bl" rotWithShape="0" blurRad="88900" dist="25400" dir="5400000">
+            <a:outerShdw blurRad="88900" dist="25400" dir="5400000" algn="bl" rotWithShape="0">
               <a:srgbClr val="0A1C33">
                 <a:alpha val="16000"/>
               </a:srgbClr>
@@ -6116,7 +5829,7 @@
           <a:bodyPr wrap="square" lIns="0" tIns="0" rIns="0" bIns="0" rtlCol="0" anchor="ctr"/>
           <a:lstStyle/>
           <a:p>
-            <a:pPr algn="ctr" indent="0" marL="0">
+            <a:pPr marL="0" indent="0" algn="ctr">
               <a:buNone/>
             </a:pPr>
             <a:r>
@@ -6155,7 +5868,7 @@
           <a:bodyPr wrap="square" lIns="0" tIns="0" rIns="0" bIns="0" rtlCol="0" anchor="ctr"/>
           <a:lstStyle/>
           <a:p>
-            <a:pPr indent="0" marL="0">
+            <a:pPr marL="0" indent="0">
               <a:buNone/>
             </a:pPr>
             <a:r>
@@ -6194,7 +5907,7 @@
           <a:bodyPr wrap="square" lIns="0" tIns="0" rIns="0" bIns="0" rtlCol="0" anchor="ctr"/>
           <a:lstStyle/>
           <a:p>
-            <a:pPr indent="0" marL="0">
+            <a:pPr marL="0" indent="0">
               <a:buNone/>
             </a:pPr>
             <a:r>
@@ -6238,7 +5951,7 @@
             <a:prstDash val="solid"/>
           </a:ln>
           <a:effectLst>
-            <a:outerShdw sx="100000" sy="100000" kx="0" ky="0" algn="bl" rotWithShape="0" blurRad="88900" dist="25400" dir="5400000">
+            <a:outerShdw blurRad="88900" dist="25400" dir="5400000" algn="bl" rotWithShape="0">
               <a:srgbClr val="0A1C33">
                 <a:alpha val="16000"/>
               </a:srgbClr>
@@ -6289,7 +6002,7 @@
           <a:bodyPr wrap="square" lIns="0" tIns="0" rIns="0" bIns="0" rtlCol="0" anchor="ctr"/>
           <a:lstStyle/>
           <a:p>
-            <a:pPr algn="ctr" indent="0" marL="0">
+            <a:pPr marL="0" indent="0" algn="ctr">
               <a:buNone/>
             </a:pPr>
             <a:r>
@@ -6328,7 +6041,7 @@
           <a:bodyPr wrap="square" lIns="0" tIns="0" rIns="0" bIns="0" rtlCol="0" anchor="ctr"/>
           <a:lstStyle/>
           <a:p>
-            <a:pPr indent="0" marL="0">
+            <a:pPr marL="0" indent="0">
               <a:buNone/>
             </a:pPr>
             <a:r>
@@ -6367,7 +6080,7 @@
           <a:bodyPr wrap="square" lIns="0" tIns="0" rIns="0" bIns="0" rtlCol="0" anchor="ctr"/>
           <a:lstStyle/>
           <a:p>
-            <a:pPr indent="0" marL="0">
+            <a:pPr marL="0" indent="0">
               <a:buNone/>
             </a:pPr>
             <a:r>
@@ -6411,7 +6124,7 @@
             <a:prstDash val="solid"/>
           </a:ln>
           <a:effectLst>
-            <a:outerShdw sx="100000" sy="100000" kx="0" ky="0" algn="bl" rotWithShape="0" blurRad="88900" dist="25400" dir="5400000">
+            <a:outerShdw blurRad="88900" dist="25400" dir="5400000" algn="bl" rotWithShape="0">
               <a:srgbClr val="0A1C33">
                 <a:alpha val="16000"/>
               </a:srgbClr>
@@ -6462,7 +6175,7 @@
           <a:bodyPr wrap="square" lIns="0" tIns="0" rIns="0" bIns="0" rtlCol="0" anchor="ctr"/>
           <a:lstStyle/>
           <a:p>
-            <a:pPr algn="ctr" indent="0" marL="0">
+            <a:pPr marL="0" indent="0" algn="ctr">
               <a:buNone/>
             </a:pPr>
             <a:r>
@@ -6501,7 +6214,7 @@
           <a:bodyPr wrap="square" lIns="0" tIns="0" rIns="0" bIns="0" rtlCol="0" anchor="ctr"/>
           <a:lstStyle/>
           <a:p>
-            <a:pPr indent="0" marL="0">
+            <a:pPr marL="0" indent="0">
               <a:buNone/>
             </a:pPr>
             <a:r>
@@ -6540,7 +6253,7 @@
           <a:bodyPr wrap="square" lIns="0" tIns="0" rIns="0" bIns="0" rtlCol="0" anchor="ctr"/>
           <a:lstStyle/>
           <a:p>
-            <a:pPr indent="0" marL="0">
+            <a:pPr marL="0" indent="0">
               <a:buNone/>
             </a:pPr>
             <a:r>
@@ -6584,7 +6297,7 @@
             <a:prstDash val="solid"/>
           </a:ln>
           <a:effectLst>
-            <a:outerShdw sx="100000" sy="100000" kx="0" ky="0" algn="bl" rotWithShape="0" blurRad="88900" dist="25400" dir="5400000">
+            <a:outerShdw blurRad="88900" dist="25400" dir="5400000" algn="bl" rotWithShape="0">
               <a:srgbClr val="0A1C33">
                 <a:alpha val="16000"/>
               </a:srgbClr>
@@ -6635,7 +6348,7 @@
           <a:bodyPr wrap="square" lIns="0" tIns="0" rIns="0" bIns="0" rtlCol="0" anchor="ctr"/>
           <a:lstStyle/>
           <a:p>
-            <a:pPr algn="ctr" indent="0" marL="0">
+            <a:pPr marL="0" indent="0" algn="ctr">
               <a:buNone/>
             </a:pPr>
             <a:r>
@@ -6674,7 +6387,7 @@
           <a:bodyPr wrap="square" lIns="0" tIns="0" rIns="0" bIns="0" rtlCol="0" anchor="ctr"/>
           <a:lstStyle/>
           <a:p>
-            <a:pPr indent="0" marL="0">
+            <a:pPr marL="0" indent="0">
               <a:buNone/>
             </a:pPr>
             <a:r>
@@ -6713,7 +6426,7 @@
           <a:bodyPr wrap="square" lIns="0" tIns="0" rIns="0" bIns="0" rtlCol="0" anchor="ctr"/>
           <a:lstStyle/>
           <a:p>
-            <a:pPr indent="0" marL="0">
+            <a:pPr marL="0" indent="0">
               <a:buNone/>
             </a:pPr>
             <a:r>
@@ -6752,7 +6465,7 @@
           <a:bodyPr wrap="square" lIns="0" tIns="0" rIns="0" bIns="0" rtlCol="0" anchor="ctr"/>
           <a:lstStyle/>
           <a:p>
-            <a:pPr algn="r" indent="0" marL="0">
+            <a:pPr marL="0" indent="0" algn="r">
               <a:buNone/>
             </a:pPr>
             <a:r>
@@ -6786,6 +6499,7 @@
         <a:solidFill>
           <a:srgbClr val="0A1C33"/>
         </a:solidFill>
+        <a:effectLst/>
       </p:bgPr>
     </p:bg>
     <p:spTree>
@@ -6911,11 +6625,11 @@
           <a:bodyPr wrap="square" lIns="0" tIns="0" rIns="0" bIns="0" rtlCol="0" anchor="ctr"/>
           <a:lstStyle/>
           <a:p>
-            <a:pPr indent="0" marL="0">
-              <a:buNone/>
-            </a:pPr>
-            <a:r>
-              <a:rPr lang="en-US" sz="1200" b="1" spc="300" kern="0" dirty="0">
+            <a:pPr marL="0" indent="0">
+              <a:buNone/>
+            </a:pPr>
+            <a:r>
+              <a:rPr lang="en-US" sz="1200" b="1" kern="0" spc="300" dirty="0">
                 <a:solidFill>
                   <a:srgbClr val="F59E0B"/>
                 </a:solidFill>
@@ -6950,7 +6664,7 @@
           <a:bodyPr wrap="square" lIns="0" tIns="0" rIns="0" bIns="0" rtlCol="0" anchor="ctr"/>
           <a:lstStyle/>
           <a:p>
-            <a:pPr indent="0" marL="0">
+            <a:pPr marL="0" indent="0">
               <a:lnSpc>
                 <a:spcPct val="102000"/>
               </a:lnSpc>
@@ -6970,7 +6684,7 @@
             <a:endParaRPr lang="en-US" sz="4000" dirty="0"/>
           </a:p>
           <a:p>
-            <a:pPr indent="0" marL="0">
+            <a:pPr marL="0" indent="0">
               <a:lnSpc>
                 <a:spcPct val="102000"/>
               </a:lnSpc>
@@ -7039,7 +6753,7 @@
           <a:bodyPr wrap="square" lIns="0" tIns="0" rIns="0" bIns="0" rtlCol="0" anchor="ctr"/>
           <a:lstStyle/>
           <a:p>
-            <a:pPr indent="0" marL="0">
+            <a:pPr marL="0" indent="0">
               <a:buNone/>
             </a:pPr>
             <a:r>
@@ -7078,7 +6792,7 @@
           <a:bodyPr wrap="square" lIns="0" tIns="0" rIns="0" bIns="0" rtlCol="0" anchor="ctr"/>
           <a:lstStyle/>
           <a:p>
-            <a:pPr indent="0" marL="0">
+            <a:pPr marL="0" indent="0">
               <a:buNone/>
             </a:pPr>
             <a:r>
@@ -7144,7 +6858,7 @@
           <a:bodyPr wrap="square" lIns="0" tIns="0" rIns="0" bIns="0" rtlCol="0" anchor="ctr"/>
           <a:lstStyle/>
           <a:p>
-            <a:pPr indent="0" marL="0">
+            <a:pPr marL="0" indent="0">
               <a:buNone/>
             </a:pPr>
             <a:r>
@@ -7183,7 +6897,7 @@
           <a:bodyPr wrap="square" lIns="0" tIns="0" rIns="0" bIns="0" rtlCol="0" anchor="ctr"/>
           <a:lstStyle/>
           <a:p>
-            <a:pPr indent="0" marL="0">
+            <a:pPr marL="0" indent="0">
               <a:buNone/>
             </a:pPr>
             <a:r>
@@ -7249,7 +6963,7 @@
           <a:bodyPr wrap="square" lIns="0" tIns="0" rIns="0" bIns="0" rtlCol="0" anchor="ctr"/>
           <a:lstStyle/>
           <a:p>
-            <a:pPr indent="0" marL="0">
+            <a:pPr marL="0" indent="0">
               <a:buNone/>
             </a:pPr>
             <a:r>
@@ -7288,7 +7002,7 @@
           <a:bodyPr wrap="square" lIns="0" tIns="0" rIns="0" bIns="0" rtlCol="0" anchor="ctr"/>
           <a:lstStyle/>
           <a:p>
-            <a:pPr indent="0" marL="0">
+            <a:pPr marL="0" indent="0">
               <a:buNone/>
             </a:pPr>
             <a:r>
@@ -7354,7 +7068,7 @@
           <a:bodyPr wrap="square" lIns="0" tIns="0" rIns="0" bIns="0" rtlCol="0" anchor="ctr"/>
           <a:lstStyle/>
           <a:p>
-            <a:pPr indent="0" marL="0">
+            <a:pPr marL="0" indent="0">
               <a:buNone/>
             </a:pPr>
             <a:r>
@@ -7393,7 +7107,7 @@
           <a:bodyPr wrap="square" lIns="0" tIns="0" rIns="0" bIns="0" rtlCol="0" anchor="ctr"/>
           <a:lstStyle/>
           <a:p>
-            <a:pPr indent="0" marL="0">
+            <a:pPr marL="0" indent="0">
               <a:buNone/>
             </a:pPr>
             <a:r>
@@ -7432,7 +7146,7 @@
           <a:bodyPr wrap="square" lIns="0" tIns="0" rIns="0" bIns="0" rtlCol="0" anchor="ctr"/>
           <a:lstStyle/>
           <a:p>
-            <a:pPr algn="r" indent="0" marL="0">
+            <a:pPr marL="0" indent="0" algn="r">
               <a:buNone/>
             </a:pPr>
             <a:r>
@@ -7466,6 +7180,7 @@
         <a:solidFill>
           <a:srgbClr val="FFFFFF"/>
         </a:solidFill>
+        <a:effectLst/>
       </p:bgPr>
     </p:bg>
     <p:spTree>
@@ -7503,11 +7218,11 @@
           <a:bodyPr wrap="square" lIns="0" tIns="0" rIns="0" bIns="0" rtlCol="0" anchor="ctr"/>
           <a:lstStyle/>
           <a:p>
-            <a:pPr indent="0" marL="0">
-              <a:buNone/>
-            </a:pPr>
-            <a:r>
-              <a:rPr lang="en-US" sz="1200" b="1" spc="300" kern="0" dirty="0">
+            <a:pPr marL="0" indent="0">
+              <a:buNone/>
+            </a:pPr>
+            <a:r>
+              <a:rPr lang="en-US" sz="1200" b="1" kern="0" spc="300" dirty="0">
                 <a:solidFill>
                   <a:srgbClr val="1D4ED8"/>
                 </a:solidFill>
@@ -7542,7 +7257,7 @@
           <a:bodyPr wrap="square" lIns="0" tIns="0" rIns="0" bIns="0" rtlCol="0" anchor="ctr"/>
           <a:lstStyle/>
           <a:p>
-            <a:pPr indent="0" marL="0">
+            <a:pPr marL="0" indent="0">
               <a:buNone/>
             </a:pPr>
             <a:r>
@@ -7586,7 +7301,7 @@
             <a:prstDash val="solid"/>
           </a:ln>
           <a:effectLst>
-            <a:outerShdw sx="100000" sy="100000" kx="0" ky="0" algn="bl" rotWithShape="0" blurRad="88900" dist="25400" dir="5400000">
+            <a:outerShdw blurRad="88900" dist="25400" dir="5400000" algn="bl" rotWithShape="0">
               <a:srgbClr val="0A1C33">
                 <a:alpha val="16000"/>
               </a:srgbClr>
@@ -7635,7 +7350,7 @@
           <a:bodyPr wrap="square" lIns="0" tIns="0" rIns="0" bIns="0" rtlCol="0" anchor="ctr"/>
           <a:lstStyle/>
           <a:p>
-            <a:pPr algn="ctr" indent="0" marL="0">
+            <a:pPr marL="0" indent="0" algn="ctr">
               <a:buNone/>
             </a:pPr>
             <a:r>
@@ -7674,7 +7389,7 @@
           <a:bodyPr wrap="square" lIns="0" tIns="0" rIns="0" bIns="0" rtlCol="0" anchor="ctr"/>
           <a:lstStyle/>
           <a:p>
-            <a:pPr indent="0" marL="0">
+            <a:pPr marL="0" indent="0">
               <a:buNone/>
             </a:pPr>
             <a:r>
@@ -7735,7 +7450,7 @@
           <a:bodyPr wrap="square" lIns="0" tIns="0" rIns="0" bIns="0" rtlCol="0" anchor="ctr"/>
           <a:lstStyle/>
           <a:p>
-            <a:pPr algn="ctr" indent="0" marL="0">
+            <a:pPr marL="0" indent="0" algn="ctr">
               <a:buNone/>
             </a:pPr>
             <a:r>
@@ -7774,7 +7489,7 @@
           <a:bodyPr wrap="square" lIns="0" tIns="0" rIns="0" bIns="0" rtlCol="0" anchor="ctr"/>
           <a:lstStyle/>
           <a:p>
-            <a:pPr indent="0" marL="0">
+            <a:pPr marL="0" indent="0">
               <a:buNone/>
             </a:pPr>
             <a:r>
@@ -7838,7 +7553,7 @@
             <a:prstDash val="solid"/>
           </a:ln>
           <a:effectLst>
-            <a:outerShdw sx="100000" sy="100000" kx="0" ky="0" algn="bl" rotWithShape="0" blurRad="88900" dist="25400" dir="5400000">
+            <a:outerShdw blurRad="88900" dist="25400" dir="5400000" algn="bl" rotWithShape="0">
               <a:srgbClr val="0A1C33">
                 <a:alpha val="16000"/>
               </a:srgbClr>
@@ -7887,7 +7602,7 @@
           <a:bodyPr wrap="square" lIns="0" tIns="0" rIns="0" bIns="0" rtlCol="0" anchor="ctr"/>
           <a:lstStyle/>
           <a:p>
-            <a:pPr algn="ctr" indent="0" marL="0">
+            <a:pPr marL="0" indent="0" algn="ctr">
               <a:buNone/>
             </a:pPr>
             <a:r>
@@ -7926,7 +7641,7 @@
           <a:bodyPr wrap="square" lIns="0" tIns="0" rIns="0" bIns="0" rtlCol="0" anchor="ctr"/>
           <a:lstStyle/>
           <a:p>
-            <a:pPr indent="0" marL="0">
+            <a:pPr marL="0" indent="0">
               <a:buNone/>
             </a:pPr>
             <a:r>
@@ -7987,7 +7702,7 @@
           <a:bodyPr wrap="square" lIns="0" tIns="0" rIns="0" bIns="0" rtlCol="0" anchor="ctr"/>
           <a:lstStyle/>
           <a:p>
-            <a:pPr algn="ctr" indent="0" marL="0">
+            <a:pPr marL="0" indent="0" algn="ctr">
               <a:buNone/>
             </a:pPr>
             <a:r>
@@ -8026,7 +7741,7 @@
           <a:bodyPr wrap="square" lIns="0" tIns="0" rIns="0" bIns="0" rtlCol="0" anchor="ctr"/>
           <a:lstStyle/>
           <a:p>
-            <a:pPr indent="0" marL="0">
+            <a:pPr marL="0" indent="0">
               <a:buNone/>
             </a:pPr>
             <a:r>
@@ -8090,7 +7805,7 @@
             <a:prstDash val="solid"/>
           </a:ln>
           <a:effectLst>
-            <a:outerShdw sx="100000" sy="100000" kx="0" ky="0" algn="bl" rotWithShape="0" blurRad="88900" dist="25400" dir="5400000">
+            <a:outerShdw blurRad="88900" dist="25400" dir="5400000" algn="bl" rotWithShape="0">
               <a:srgbClr val="0A1C33">
                 <a:alpha val="16000"/>
               </a:srgbClr>
@@ -8139,7 +7854,7 @@
           <a:bodyPr wrap="square" lIns="0" tIns="0" rIns="0" bIns="0" rtlCol="0" anchor="ctr"/>
           <a:lstStyle/>
           <a:p>
-            <a:pPr algn="ctr" indent="0" marL="0">
+            <a:pPr marL="0" indent="0" algn="ctr">
               <a:buNone/>
             </a:pPr>
             <a:r>
@@ -8178,7 +7893,7 @@
           <a:bodyPr wrap="square" lIns="0" tIns="0" rIns="0" bIns="0" rtlCol="0" anchor="ctr"/>
           <a:lstStyle/>
           <a:p>
-            <a:pPr indent="0" marL="0">
+            <a:pPr marL="0" indent="0">
               <a:buNone/>
             </a:pPr>
             <a:r>
@@ -8239,7 +7954,7 @@
           <a:bodyPr wrap="square" lIns="0" tIns="0" rIns="0" bIns="0" rtlCol="0" anchor="ctr"/>
           <a:lstStyle/>
           <a:p>
-            <a:pPr algn="ctr" indent="0" marL="0">
+            <a:pPr marL="0" indent="0" algn="ctr">
               <a:buNone/>
             </a:pPr>
             <a:r>
@@ -8278,7 +7993,7 @@
           <a:bodyPr wrap="square" lIns="0" tIns="0" rIns="0" bIns="0" rtlCol="0" anchor="ctr"/>
           <a:lstStyle/>
           <a:p>
-            <a:pPr indent="0" marL="0">
+            <a:pPr marL="0" indent="0">
               <a:buNone/>
             </a:pPr>
             <a:r>
@@ -8342,7 +8057,7 @@
             <a:prstDash val="solid"/>
           </a:ln>
           <a:effectLst>
-            <a:outerShdw sx="100000" sy="100000" kx="0" ky="0" algn="bl" rotWithShape="0" blurRad="88900" dist="25400" dir="5400000">
+            <a:outerShdw blurRad="88900" dist="25400" dir="5400000" algn="bl" rotWithShape="0">
               <a:srgbClr val="0A1C33">
                 <a:alpha val="16000"/>
               </a:srgbClr>
@@ -8391,7 +8106,7 @@
           <a:bodyPr wrap="square" lIns="0" tIns="0" rIns="0" bIns="0" rtlCol="0" anchor="ctr"/>
           <a:lstStyle/>
           <a:p>
-            <a:pPr algn="ctr" indent="0" marL="0">
+            <a:pPr marL="0" indent="0" algn="ctr">
               <a:buNone/>
             </a:pPr>
             <a:r>
@@ -8430,7 +8145,7 @@
           <a:bodyPr wrap="square" lIns="0" tIns="0" rIns="0" bIns="0" rtlCol="0" anchor="ctr"/>
           <a:lstStyle/>
           <a:p>
-            <a:pPr indent="0" marL="0">
+            <a:pPr marL="0" indent="0">
               <a:buNone/>
             </a:pPr>
             <a:r>
@@ -8491,7 +8206,7 @@
           <a:bodyPr wrap="square" lIns="0" tIns="0" rIns="0" bIns="0" rtlCol="0" anchor="ctr"/>
           <a:lstStyle/>
           <a:p>
-            <a:pPr algn="ctr" indent="0" marL="0">
+            <a:pPr marL="0" indent="0" algn="ctr">
               <a:buNone/>
             </a:pPr>
             <a:r>
@@ -8530,7 +8245,7 @@
           <a:bodyPr wrap="square" lIns="0" tIns="0" rIns="0" bIns="0" rtlCol="0" anchor="ctr"/>
           <a:lstStyle/>
           <a:p>
-            <a:pPr indent="0" marL="0">
+            <a:pPr marL="0" indent="0">
               <a:buNone/>
             </a:pPr>
             <a:r>
@@ -8574,7 +8289,7 @@
             <a:prstDash val="solid"/>
           </a:ln>
           <a:effectLst>
-            <a:outerShdw sx="100000" sy="100000" kx="0" ky="0" algn="bl" rotWithShape="0" blurRad="88900" dist="25400" dir="5400000">
+            <a:outerShdw blurRad="88900" dist="25400" dir="5400000" algn="bl" rotWithShape="0">
               <a:srgbClr val="0A1C33">
                 <a:alpha val="16000"/>
               </a:srgbClr>
@@ -8603,7 +8318,7 @@
           <a:bodyPr wrap="square" lIns="0" tIns="0" rIns="0" bIns="0" rtlCol="0" anchor="ctr"/>
           <a:lstStyle/>
           <a:p>
-            <a:pPr indent="0" marL="0">
+            <a:pPr marL="0" indent="0">
               <a:buNone/>
             </a:pPr>
             <a:r>
@@ -8617,9 +8332,6 @@
               </a:rPr>
               <a:t>Included from day one:  </a:t>
             </a:r>
-            <a:pPr indent="0" marL="0">
-              <a:buNone/>
-            </a:pPr>
             <a:r>
               <a:rPr lang="en-US" sz="1350" dirty="0">
                 <a:solidFill>
@@ -8656,7 +8368,7 @@
           <a:bodyPr wrap="square" lIns="0" tIns="0" rIns="0" bIns="0" rtlCol="0" anchor="ctr"/>
           <a:lstStyle/>
           <a:p>
-            <a:pPr algn="r" indent="0" marL="0">
+            <a:pPr marL="0" indent="0" algn="r">
               <a:buNone/>
             </a:pPr>
             <a:r>
@@ -8690,6 +8402,7 @@
         <a:solidFill>
           <a:srgbClr val="FFFFFF"/>
         </a:solidFill>
+        <a:effectLst/>
       </p:bgPr>
     </p:bg>
     <p:spTree>
@@ -8727,11 +8440,11 @@
           <a:bodyPr wrap="square" lIns="0" tIns="0" rIns="0" bIns="0" rtlCol="0" anchor="ctr"/>
           <a:lstStyle/>
           <a:p>
-            <a:pPr indent="0" marL="0">
-              <a:buNone/>
-            </a:pPr>
-            <a:r>
-              <a:rPr lang="en-US" sz="1200" b="1" spc="300" kern="0" dirty="0">
+            <a:pPr marL="0" indent="0">
+              <a:buNone/>
+            </a:pPr>
+            <a:r>
+              <a:rPr lang="en-US" sz="1200" b="1" kern="0" spc="300" dirty="0">
                 <a:solidFill>
                   <a:srgbClr val="1D4ED8"/>
                 </a:solidFill>
@@ -8766,7 +8479,7 @@
           <a:bodyPr wrap="square" lIns="0" tIns="0" rIns="0" bIns="0" rtlCol="0" anchor="ctr"/>
           <a:lstStyle/>
           <a:p>
-            <a:pPr indent="0" marL="0">
+            <a:pPr marL="0" indent="0">
               <a:buNone/>
             </a:pPr>
             <a:r>
@@ -8810,7 +8523,7 @@
             <a:prstDash val="solid"/>
           </a:ln>
           <a:effectLst>
-            <a:outerShdw sx="100000" sy="100000" kx="0" ky="0" algn="bl" rotWithShape="0" blurRad="88900" dist="25400" dir="5400000">
+            <a:outerShdw blurRad="88900" dist="25400" dir="5400000" algn="bl" rotWithShape="0">
               <a:srgbClr val="0A1C33">
                 <a:alpha val="16000"/>
               </a:srgbClr>
@@ -8859,7 +8572,7 @@
           <a:bodyPr wrap="square" lIns="0" tIns="0" rIns="0" bIns="0" rtlCol="0" anchor="ctr"/>
           <a:lstStyle/>
           <a:p>
-            <a:pPr indent="0" marL="0">
+            <a:pPr marL="0" indent="0">
               <a:buNone/>
             </a:pPr>
             <a:r>
@@ -8898,7 +8611,7 @@
           <a:bodyPr wrap="square" lIns="0" tIns="0" rIns="0" bIns="0" rtlCol="0" anchor="ctr"/>
           <a:lstStyle/>
           <a:p>
-            <a:pPr indent="0" marL="0">
+            <a:pPr marL="0" indent="0">
               <a:buNone/>
             </a:pPr>
             <a:r>
@@ -8942,7 +8655,7 @@
             <a:prstDash val="solid"/>
           </a:ln>
           <a:effectLst>
-            <a:outerShdw sx="100000" sy="100000" kx="0" ky="0" algn="bl" rotWithShape="0" blurRad="88900" dist="25400" dir="5400000">
+            <a:outerShdw blurRad="88900" dist="25400" dir="5400000" algn="bl" rotWithShape="0">
               <a:srgbClr val="0A1C33">
                 <a:alpha val="16000"/>
               </a:srgbClr>
@@ -8991,7 +8704,7 @@
           <a:bodyPr wrap="square" lIns="0" tIns="0" rIns="0" bIns="0" rtlCol="0" anchor="ctr"/>
           <a:lstStyle/>
           <a:p>
-            <a:pPr indent="0" marL="0">
+            <a:pPr marL="0" indent="0">
               <a:buNone/>
             </a:pPr>
             <a:r>
@@ -9030,7 +8743,7 @@
           <a:bodyPr wrap="square" lIns="0" tIns="0" rIns="0" bIns="0" rtlCol="0" anchor="ctr"/>
           <a:lstStyle/>
           <a:p>
-            <a:pPr indent="0" marL="0">
+            <a:pPr marL="0" indent="0">
               <a:buNone/>
             </a:pPr>
             <a:r>
@@ -9074,7 +8787,7 @@
             <a:prstDash val="solid"/>
           </a:ln>
           <a:effectLst>
-            <a:outerShdw sx="100000" sy="100000" kx="0" ky="0" algn="bl" rotWithShape="0" blurRad="88900" dist="25400" dir="5400000">
+            <a:outerShdw blurRad="88900" dist="25400" dir="5400000" algn="bl" rotWithShape="0">
               <a:srgbClr val="0A1C33">
                 <a:alpha val="16000"/>
               </a:srgbClr>
@@ -9123,7 +8836,7 @@
           <a:bodyPr wrap="square" lIns="0" tIns="0" rIns="0" bIns="0" rtlCol="0" anchor="ctr"/>
           <a:lstStyle/>
           <a:p>
-            <a:pPr indent="0" marL="0">
+            <a:pPr marL="0" indent="0">
               <a:buNone/>
             </a:pPr>
             <a:r>
@@ -9162,7 +8875,7 @@
           <a:bodyPr wrap="square" lIns="0" tIns="0" rIns="0" bIns="0" rtlCol="0" anchor="ctr"/>
           <a:lstStyle/>
           <a:p>
-            <a:pPr indent="0" marL="0">
+            <a:pPr marL="0" indent="0">
               <a:buNone/>
             </a:pPr>
             <a:r>
@@ -9206,7 +8919,7 @@
             <a:prstDash val="solid"/>
           </a:ln>
           <a:effectLst>
-            <a:outerShdw sx="100000" sy="100000" kx="0" ky="0" algn="bl" rotWithShape="0" blurRad="88900" dist="25400" dir="5400000">
+            <a:outerShdw blurRad="88900" dist="25400" dir="5400000" algn="bl" rotWithShape="0">
               <a:srgbClr val="0A1C33">
                 <a:alpha val="16000"/>
               </a:srgbClr>
@@ -9255,7 +8968,7 @@
           <a:bodyPr wrap="square" lIns="0" tIns="0" rIns="0" bIns="0" rtlCol="0" anchor="ctr"/>
           <a:lstStyle/>
           <a:p>
-            <a:pPr indent="0" marL="0">
+            <a:pPr marL="0" indent="0">
               <a:buNone/>
             </a:pPr>
             <a:r>
@@ -9294,7 +9007,7 @@
           <a:bodyPr wrap="square" lIns="0" tIns="0" rIns="0" bIns="0" rtlCol="0" anchor="ctr"/>
           <a:lstStyle/>
           <a:p>
-            <a:pPr indent="0" marL="0">
+            <a:pPr marL="0" indent="0">
               <a:buNone/>
             </a:pPr>
             <a:r>
@@ -9338,7 +9051,7 @@
             <a:prstDash val="solid"/>
           </a:ln>
           <a:effectLst>
-            <a:outerShdw sx="100000" sy="100000" kx="0" ky="0" algn="bl" rotWithShape="0" blurRad="88900" dist="25400" dir="5400000">
+            <a:outerShdw blurRad="88900" dist="25400" dir="5400000" algn="bl" rotWithShape="0">
               <a:srgbClr val="0A1C33">
                 <a:alpha val="16000"/>
               </a:srgbClr>
@@ -9387,7 +9100,7 @@
           <a:bodyPr wrap="square" lIns="0" tIns="0" rIns="0" bIns="0" rtlCol="0" anchor="ctr"/>
           <a:lstStyle/>
           <a:p>
-            <a:pPr indent="0" marL="0">
+            <a:pPr marL="0" indent="0">
               <a:buNone/>
             </a:pPr>
             <a:r>
@@ -9426,7 +9139,7 @@
           <a:bodyPr wrap="square" lIns="0" tIns="0" rIns="0" bIns="0" rtlCol="0" anchor="ctr"/>
           <a:lstStyle/>
           <a:p>
-            <a:pPr indent="0" marL="0">
+            <a:pPr marL="0" indent="0">
               <a:buNone/>
             </a:pPr>
             <a:r>
@@ -9470,7 +9183,7 @@
             <a:prstDash val="solid"/>
           </a:ln>
           <a:effectLst>
-            <a:outerShdw sx="100000" sy="100000" kx="0" ky="0" algn="bl" rotWithShape="0" blurRad="88900" dist="25400" dir="5400000">
+            <a:outerShdw blurRad="88900" dist="25400" dir="5400000" algn="bl" rotWithShape="0">
               <a:srgbClr val="0A1C33">
                 <a:alpha val="16000"/>
               </a:srgbClr>
@@ -9519,7 +9232,7 @@
           <a:bodyPr wrap="square" lIns="0" tIns="0" rIns="0" bIns="0" rtlCol="0" anchor="ctr"/>
           <a:lstStyle/>
           <a:p>
-            <a:pPr indent="0" marL="0">
+            <a:pPr marL="0" indent="0">
               <a:buNone/>
             </a:pPr>
             <a:r>
@@ -9558,7 +9271,7 @@
           <a:bodyPr wrap="square" lIns="0" tIns="0" rIns="0" bIns="0" rtlCol="0" anchor="ctr"/>
           <a:lstStyle/>
           <a:p>
-            <a:pPr indent="0" marL="0">
+            <a:pPr marL="0" indent="0">
               <a:buNone/>
             </a:pPr>
             <a:r>
@@ -9597,7 +9310,7 @@
           <a:bodyPr wrap="square" lIns="0" tIns="0" rIns="0" bIns="0" rtlCol="0" anchor="ctr"/>
           <a:lstStyle/>
           <a:p>
-            <a:pPr indent="0" marL="0">
+            <a:pPr marL="0" indent="0">
               <a:buNone/>
             </a:pPr>
             <a:r>
@@ -9636,7 +9349,7 @@
           <a:bodyPr wrap="square" lIns="0" tIns="0" rIns="0" bIns="0" rtlCol="0" anchor="ctr"/>
           <a:lstStyle/>
           <a:p>
-            <a:pPr algn="r" indent="0" marL="0">
+            <a:pPr marL="0" indent="0" algn="r">
               <a:buNone/>
             </a:pPr>
             <a:r>
@@ -9670,6 +9383,7 @@
         <a:solidFill>
           <a:srgbClr val="FFFFFF"/>
         </a:solidFill>
+        <a:effectLst/>
       </p:bgPr>
     </p:bg>
     <p:spTree>
@@ -9707,11 +9421,11 @@
           <a:bodyPr wrap="square" lIns="0" tIns="0" rIns="0" bIns="0" rtlCol="0" anchor="ctr"/>
           <a:lstStyle/>
           <a:p>
-            <a:pPr indent="0" marL="0">
-              <a:buNone/>
-            </a:pPr>
-            <a:r>
-              <a:rPr lang="en-US" sz="1200" b="1" spc="300" kern="0" dirty="0">
+            <a:pPr marL="0" indent="0">
+              <a:buNone/>
+            </a:pPr>
+            <a:r>
+              <a:rPr lang="en-US" sz="1200" b="1" kern="0" spc="300" dirty="0">
                 <a:solidFill>
                   <a:srgbClr val="1D4ED8"/>
                 </a:solidFill>
@@ -9746,7 +9460,7 @@
           <a:bodyPr wrap="square" lIns="0" tIns="0" rIns="0" bIns="0" rtlCol="0" anchor="ctr"/>
           <a:lstStyle/>
           <a:p>
-            <a:pPr indent="0" marL="0">
+            <a:pPr marL="0" indent="0">
               <a:buNone/>
             </a:pPr>
             <a:r>
@@ -9787,10 +9501,34 @@
             <a:tbl>
               <a:tblPr/>
               <a:tblGrid>
-                <a:gridCol w="2468880"/>
-                <a:gridCol w="3026664"/>
-                <a:gridCol w="2889504"/>
-                <a:gridCol w="2889504"/>
+                <a:gridCol w="2468880">
+                  <a:extLst>
+                    <a:ext uri="{9D8B030D-6E8A-4147-A177-3AD203B41FA5}">
+                      <a16:colId xmlns:a16="http://schemas.microsoft.com/office/drawing/2014/main" val="20000"/>
+                    </a:ext>
+                  </a:extLst>
+                </a:gridCol>
+                <a:gridCol w="3026664">
+                  <a:extLst>
+                    <a:ext uri="{9D8B030D-6E8A-4147-A177-3AD203B41FA5}">
+                      <a16:colId xmlns:a16="http://schemas.microsoft.com/office/drawing/2014/main" val="20001"/>
+                    </a:ext>
+                  </a:extLst>
+                </a:gridCol>
+                <a:gridCol w="2889504">
+                  <a:extLst>
+                    <a:ext uri="{9D8B030D-6E8A-4147-A177-3AD203B41FA5}">
+                      <a16:colId xmlns:a16="http://schemas.microsoft.com/office/drawing/2014/main" val="20002"/>
+                    </a:ext>
+                  </a:extLst>
+                </a:gridCol>
+                <a:gridCol w="2889504">
+                  <a:extLst>
+                    <a:ext uri="{9D8B030D-6E8A-4147-A177-3AD203B41FA5}">
+                      <a16:colId xmlns:a16="http://schemas.microsoft.com/office/drawing/2014/main" val="20003"/>
+                    </a:ext>
+                  </a:extLst>
+                </a:gridCol>
               </a:tblGrid>
               <a:tr h="475488">
                 <a:tc>
@@ -9798,7 +9536,7 @@
                     <a:bodyPr/>
                     <a:lstStyle/>
                     <a:p>
-                      <a:pPr algn="l" indent="0" marL="0">
+                      <a:pPr marL="0" indent="0" algn="l">
                         <a:buNone/>
                       </a:pPr>
                       <a:endParaRPr lang="en-US" sz="1250" dirty="0">
@@ -9855,7 +9593,7 @@
                     <a:bodyPr/>
                     <a:lstStyle/>
                     <a:p>
-                      <a:pPr algn="ctr" indent="0" marL="0">
+                      <a:pPr marL="0" indent="0" algn="ctr">
                         <a:buNone/>
                       </a:pPr>
                       <a:r>
@@ -9923,7 +9661,7 @@
                     <a:bodyPr/>
                     <a:lstStyle/>
                     <a:p>
-                      <a:pPr algn="ctr" indent="0" marL="0">
+                      <a:pPr marL="0" indent="0" algn="ctr">
                         <a:buNone/>
                       </a:pPr>
                       <a:r>
@@ -9991,7 +9729,7 @@
                     <a:bodyPr/>
                     <a:lstStyle/>
                     <a:p>
-                      <a:pPr algn="ctr" indent="0" marL="0">
+                      <a:pPr marL="0" indent="0" algn="ctr">
                         <a:buNone/>
                       </a:pPr>
                       <a:r>
@@ -10054,6 +9792,11 @@
                     </a:solidFill>
                   </a:tcPr>
                 </a:tc>
+                <a:extLst>
+                  <a:ext uri="{0D108BD9-81ED-4DB2-BD59-A6C34878D82A}">
+                    <a16:rowId xmlns:a16="http://schemas.microsoft.com/office/drawing/2014/main" val="10000"/>
+                  </a:ext>
+                </a:extLst>
               </a:tr>
               <a:tr h="475488">
                 <a:tc>
@@ -10061,7 +9804,7 @@
                     <a:bodyPr/>
                     <a:lstStyle/>
                     <a:p>
-                      <a:pPr algn="l" indent="0" marL="0">
+                      <a:pPr marL="0" indent="0" algn="l">
                         <a:buNone/>
                       </a:pPr>
                       <a:r>
@@ -10129,7 +9872,7 @@
                     <a:bodyPr/>
                     <a:lstStyle/>
                     <a:p>
-                      <a:pPr algn="ctr" indent="0" marL="0">
+                      <a:pPr marL="0" indent="0" algn="ctr">
                         <a:buNone/>
                       </a:pPr>
                       <a:r>
@@ -10197,7 +9940,7 @@
                     <a:bodyPr/>
                     <a:lstStyle/>
                     <a:p>
-                      <a:pPr algn="ctr" indent="0" marL="0">
+                      <a:pPr marL="0" indent="0" algn="ctr">
                         <a:buNone/>
                       </a:pPr>
                       <a:r>
@@ -10265,7 +10008,7 @@
                     <a:bodyPr/>
                     <a:lstStyle/>
                     <a:p>
-                      <a:pPr algn="ctr" indent="0" marL="0">
+                      <a:pPr marL="0" indent="0" algn="ctr">
                         <a:buNone/>
                       </a:pPr>
                       <a:r>
@@ -10328,6 +10071,11 @@
                     </a:solidFill>
                   </a:tcPr>
                 </a:tc>
+                <a:extLst>
+                  <a:ext uri="{0D108BD9-81ED-4DB2-BD59-A6C34878D82A}">
+                    <a16:rowId xmlns:a16="http://schemas.microsoft.com/office/drawing/2014/main" val="10001"/>
+                  </a:ext>
+                </a:extLst>
               </a:tr>
               <a:tr h="475488">
                 <a:tc>
@@ -10335,7 +10083,7 @@
                     <a:bodyPr/>
                     <a:lstStyle/>
                     <a:p>
-                      <a:pPr algn="l" indent="0" marL="0">
+                      <a:pPr marL="0" indent="0" algn="l">
                         <a:buNone/>
                       </a:pPr>
                       <a:r>
@@ -10403,7 +10151,7 @@
                     <a:bodyPr/>
                     <a:lstStyle/>
                     <a:p>
-                      <a:pPr algn="ctr" indent="0" marL="0">
+                      <a:pPr marL="0" indent="0" algn="ctr">
                         <a:buNone/>
                       </a:pPr>
                       <a:r>
@@ -10471,7 +10219,7 @@
                     <a:bodyPr/>
                     <a:lstStyle/>
                     <a:p>
-                      <a:pPr algn="ctr" indent="0" marL="0">
+                      <a:pPr marL="0" indent="0" algn="ctr">
                         <a:buNone/>
                       </a:pPr>
                       <a:r>
@@ -10539,7 +10287,7 @@
                     <a:bodyPr/>
                     <a:lstStyle/>
                     <a:p>
-                      <a:pPr algn="ctr" indent="0" marL="0">
+                      <a:pPr marL="0" indent="0" algn="ctr">
                         <a:buNone/>
                       </a:pPr>
                       <a:r>
@@ -10602,6 +10350,11 @@
                     </a:solidFill>
                   </a:tcPr>
                 </a:tc>
+                <a:extLst>
+                  <a:ext uri="{0D108BD9-81ED-4DB2-BD59-A6C34878D82A}">
+                    <a16:rowId xmlns:a16="http://schemas.microsoft.com/office/drawing/2014/main" val="10002"/>
+                  </a:ext>
+                </a:extLst>
               </a:tr>
               <a:tr h="475488">
                 <a:tc>
@@ -10609,7 +10362,7 @@
                     <a:bodyPr/>
                     <a:lstStyle/>
                     <a:p>
-                      <a:pPr algn="l" indent="0" marL="0">
+                      <a:pPr marL="0" indent="0" algn="l">
                         <a:buNone/>
                       </a:pPr>
                       <a:r>
@@ -10677,7 +10430,7 @@
                     <a:bodyPr/>
                     <a:lstStyle/>
                     <a:p>
-                      <a:pPr algn="ctr" indent="0" marL="0">
+                      <a:pPr marL="0" indent="0" algn="ctr">
                         <a:buNone/>
                       </a:pPr>
                       <a:r>
@@ -10745,7 +10498,7 @@
                     <a:bodyPr/>
                     <a:lstStyle/>
                     <a:p>
-                      <a:pPr algn="ctr" indent="0" marL="0">
+                      <a:pPr marL="0" indent="0" algn="ctr">
                         <a:buNone/>
                       </a:pPr>
                       <a:r>
@@ -10813,7 +10566,7 @@
                     <a:bodyPr/>
                     <a:lstStyle/>
                     <a:p>
-                      <a:pPr algn="ctr" indent="0" marL="0">
+                      <a:pPr marL="0" indent="0" algn="ctr">
                         <a:buNone/>
                       </a:pPr>
                       <a:r>
@@ -10876,6 +10629,11 @@
                     </a:solidFill>
                   </a:tcPr>
                 </a:tc>
+                <a:extLst>
+                  <a:ext uri="{0D108BD9-81ED-4DB2-BD59-A6C34878D82A}">
+                    <a16:rowId xmlns:a16="http://schemas.microsoft.com/office/drawing/2014/main" val="10003"/>
+                  </a:ext>
+                </a:extLst>
               </a:tr>
               <a:tr h="475488">
                 <a:tc>
@@ -10883,7 +10641,7 @@
                     <a:bodyPr/>
                     <a:lstStyle/>
                     <a:p>
-                      <a:pPr algn="l" indent="0" marL="0">
+                      <a:pPr marL="0" indent="0" algn="l">
                         <a:buNone/>
                       </a:pPr>
                       <a:r>
@@ -10951,7 +10709,7 @@
                     <a:bodyPr/>
                     <a:lstStyle/>
                     <a:p>
-                      <a:pPr algn="ctr" indent="0" marL="0">
+                      <a:pPr marL="0" indent="0" algn="ctr">
                         <a:buNone/>
                       </a:pPr>
                       <a:r>
@@ -11019,7 +10777,7 @@
                     <a:bodyPr/>
                     <a:lstStyle/>
                     <a:p>
-                      <a:pPr algn="ctr" indent="0" marL="0">
+                      <a:pPr marL="0" indent="0" algn="ctr">
                         <a:buNone/>
                       </a:pPr>
                       <a:r>
@@ -11087,7 +10845,7 @@
                     <a:bodyPr/>
                     <a:lstStyle/>
                     <a:p>
-                      <a:pPr algn="ctr" indent="0" marL="0">
+                      <a:pPr marL="0" indent="0" algn="ctr">
                         <a:buNone/>
                       </a:pPr>
                       <a:r>
@@ -11150,6 +10908,11 @@
                     </a:solidFill>
                   </a:tcPr>
                 </a:tc>
+                <a:extLst>
+                  <a:ext uri="{0D108BD9-81ED-4DB2-BD59-A6C34878D82A}">
+                    <a16:rowId xmlns:a16="http://schemas.microsoft.com/office/drawing/2014/main" val="10004"/>
+                  </a:ext>
+                </a:extLst>
               </a:tr>
               <a:tr h="475488">
                 <a:tc>
@@ -11157,7 +10920,7 @@
                     <a:bodyPr/>
                     <a:lstStyle/>
                     <a:p>
-                      <a:pPr algn="l" indent="0" marL="0">
+                      <a:pPr marL="0" indent="0" algn="l">
                         <a:buNone/>
                       </a:pPr>
                       <a:r>
@@ -11225,7 +10988,7 @@
                     <a:bodyPr/>
                     <a:lstStyle/>
                     <a:p>
-                      <a:pPr algn="ctr" indent="0" marL="0">
+                      <a:pPr marL="0" indent="0" algn="ctr">
                         <a:buNone/>
                       </a:pPr>
                       <a:r>
@@ -11293,7 +11056,7 @@
                     <a:bodyPr/>
                     <a:lstStyle/>
                     <a:p>
-                      <a:pPr algn="ctr" indent="0" marL="0">
+                      <a:pPr marL="0" indent="0" algn="ctr">
                         <a:buNone/>
                       </a:pPr>
                       <a:r>
@@ -11361,7 +11124,7 @@
                     <a:bodyPr/>
                     <a:lstStyle/>
                     <a:p>
-                      <a:pPr algn="ctr" indent="0" marL="0">
+                      <a:pPr marL="0" indent="0" algn="ctr">
                         <a:buNone/>
                       </a:pPr>
                       <a:r>
@@ -11424,6 +11187,11 @@
                     </a:solidFill>
                   </a:tcPr>
                 </a:tc>
+                <a:extLst>
+                  <a:ext uri="{0D108BD9-81ED-4DB2-BD59-A6C34878D82A}">
+                    <a16:rowId xmlns:a16="http://schemas.microsoft.com/office/drawing/2014/main" val="10005"/>
+                  </a:ext>
+                </a:extLst>
               </a:tr>
               <a:tr h="475488">
                 <a:tc>
@@ -11431,7 +11199,7 @@
                     <a:bodyPr/>
                     <a:lstStyle/>
                     <a:p>
-                      <a:pPr algn="l" indent="0" marL="0">
+                      <a:pPr marL="0" indent="0" algn="l">
                         <a:buNone/>
                       </a:pPr>
                       <a:r>
@@ -11499,7 +11267,7 @@
                     <a:bodyPr/>
                     <a:lstStyle/>
                     <a:p>
-                      <a:pPr algn="ctr" indent="0" marL="0">
+                      <a:pPr marL="0" indent="0" algn="ctr">
                         <a:buNone/>
                       </a:pPr>
                       <a:r>
@@ -11567,7 +11335,7 @@
                     <a:bodyPr/>
                     <a:lstStyle/>
                     <a:p>
-                      <a:pPr algn="ctr" indent="0" marL="0">
+                      <a:pPr marL="0" indent="0" algn="ctr">
                         <a:buNone/>
                       </a:pPr>
                       <a:r>
@@ -11635,7 +11403,7 @@
                     <a:bodyPr/>
                     <a:lstStyle/>
                     <a:p>
-                      <a:pPr algn="ctr" indent="0" marL="0">
+                      <a:pPr marL="0" indent="0" algn="ctr">
                         <a:buNone/>
                       </a:pPr>
                       <a:r>
@@ -11698,6 +11466,11 @@
                     </a:solidFill>
                   </a:tcPr>
                 </a:tc>
+                <a:extLst>
+                  <a:ext uri="{0D108BD9-81ED-4DB2-BD59-A6C34878D82A}">
+                    <a16:rowId xmlns:a16="http://schemas.microsoft.com/office/drawing/2014/main" val="10006"/>
+                  </a:ext>
+                </a:extLst>
               </a:tr>
               <a:tr h="475488">
                 <a:tc>
@@ -11705,7 +11478,7 @@
                     <a:bodyPr/>
                     <a:lstStyle/>
                     <a:p>
-                      <a:pPr algn="l" indent="0" marL="0">
+                      <a:pPr marL="0" indent="0" algn="l">
                         <a:buNone/>
                       </a:pPr>
                       <a:r>
@@ -11773,7 +11546,7 @@
                     <a:bodyPr/>
                     <a:lstStyle/>
                     <a:p>
-                      <a:pPr algn="ctr" indent="0" marL="0">
+                      <a:pPr marL="0" indent="0" algn="ctr">
                         <a:buNone/>
                       </a:pPr>
                       <a:r>
@@ -11841,7 +11614,7 @@
                     <a:bodyPr/>
                     <a:lstStyle/>
                     <a:p>
-                      <a:pPr algn="ctr" indent="0" marL="0">
+                      <a:pPr marL="0" indent="0" algn="ctr">
                         <a:buNone/>
                       </a:pPr>
                       <a:r>
@@ -11909,7 +11682,7 @@
                     <a:bodyPr/>
                     <a:lstStyle/>
                     <a:p>
-                      <a:pPr algn="ctr" indent="0" marL="0">
+                      <a:pPr marL="0" indent="0" algn="ctr">
                         <a:buNone/>
                       </a:pPr>
                       <a:r>
@@ -11972,6 +11745,11 @@
                     </a:solidFill>
                   </a:tcPr>
                 </a:tc>
+                <a:extLst>
+                  <a:ext uri="{0D108BD9-81ED-4DB2-BD59-A6C34878D82A}">
+                    <a16:rowId xmlns:a16="http://schemas.microsoft.com/office/drawing/2014/main" val="10007"/>
+                  </a:ext>
+                </a:extLst>
               </a:tr>
             </a:tbl>
           </a:graphicData>
@@ -11998,7 +11776,7 @@
           <a:bodyPr wrap="square" lIns="0" tIns="0" rIns="0" bIns="0" rtlCol="0" anchor="ctr"/>
           <a:lstStyle/>
           <a:p>
-            <a:pPr indent="0" marL="0">
+            <a:pPr marL="0" indent="0">
               <a:buNone/>
             </a:pPr>
             <a:r>
@@ -12012,9 +11790,6 @@
               </a:rPr>
               <a:t>The difference that matters:  </a:t>
             </a:r>
-            <a:pPr indent="0" marL="0">
-              <a:buNone/>
-            </a:pPr>
             <a:r>
               <a:rPr lang="en-US" sz="1300" dirty="0">
                 <a:solidFill>
@@ -12051,7 +11826,7 @@
           <a:bodyPr wrap="square" lIns="0" tIns="0" rIns="0" bIns="0" rtlCol="0" anchor="ctr"/>
           <a:lstStyle/>
           <a:p>
-            <a:pPr algn="r" indent="0" marL="0">
+            <a:pPr marL="0" indent="0" algn="r">
               <a:buNone/>
             </a:pPr>
             <a:r>
@@ -12085,6 +11860,7 @@
         <a:solidFill>
           <a:srgbClr val="0A1C33"/>
         </a:solidFill>
+        <a:effectLst/>
       </p:bgPr>
     </p:bg>
     <p:spTree>
@@ -12210,11 +11986,11 @@
           <a:bodyPr wrap="square" lIns="0" tIns="0" rIns="0" bIns="0" rtlCol="0" anchor="ctr"/>
           <a:lstStyle/>
           <a:p>
-            <a:pPr indent="0" marL="0">
-              <a:buNone/>
-            </a:pPr>
-            <a:r>
-              <a:rPr lang="en-US" sz="1200" b="1" spc="300" kern="0" dirty="0">
+            <a:pPr marL="0" indent="0">
+              <a:buNone/>
+            </a:pPr>
+            <a:r>
+              <a:rPr lang="en-US" sz="1200" b="1" kern="0" spc="300" dirty="0">
                 <a:solidFill>
                   <a:srgbClr val="F59E0B"/>
                 </a:solidFill>
@@ -12249,7 +12025,7 @@
           <a:bodyPr wrap="square" lIns="0" tIns="0" rIns="0" bIns="0" rtlCol="0" anchor="ctr"/>
           <a:lstStyle/>
           <a:p>
-            <a:pPr indent="0" marL="0">
+            <a:pPr marL="0" indent="0">
               <a:buNone/>
             </a:pPr>
             <a:r>
@@ -12288,7 +12064,7 @@
           <a:bodyPr wrap="square" lIns="0" tIns="0" rIns="0" bIns="0" rtlCol="0" anchor="ctr"/>
           <a:lstStyle/>
           <a:p>
-            <a:pPr indent="0" marL="0">
+            <a:pPr marL="0" indent="0">
               <a:buNone/>
             </a:pPr>
             <a:r>
@@ -12374,7 +12150,7 @@
           <a:bodyPr wrap="square" lIns="0" tIns="0" rIns="0" bIns="0" rtlCol="0" anchor="ctr"/>
           <a:lstStyle/>
           <a:p>
-            <a:pPr algn="ctr" indent="0" marL="0">
+            <a:pPr marL="0" indent="0" algn="ctr">
               <a:buNone/>
             </a:pPr>
             <a:r>
@@ -12413,7 +12189,7 @@
           <a:bodyPr wrap="square" lIns="0" tIns="0" rIns="0" bIns="0" rtlCol="0" anchor="ctr"/>
           <a:lstStyle/>
           <a:p>
-            <a:pPr indent="0" marL="0">
+            <a:pPr marL="0" indent="0">
               <a:buNone/>
             </a:pPr>
             <a:r>
@@ -12452,7 +12228,7 @@
           <a:bodyPr wrap="square" lIns="0" tIns="0" rIns="0" bIns="0" rtlCol="0" anchor="ctr"/>
           <a:lstStyle/>
           <a:p>
-            <a:pPr indent="0" marL="0">
+            <a:pPr marL="0" indent="0">
               <a:buNone/>
             </a:pPr>
             <a:r>
@@ -12538,7 +12314,7 @@
           <a:bodyPr wrap="square" lIns="0" tIns="0" rIns="0" bIns="0" rtlCol="0" anchor="ctr"/>
           <a:lstStyle/>
           <a:p>
-            <a:pPr algn="ctr" indent="0" marL="0">
+            <a:pPr marL="0" indent="0" algn="ctr">
               <a:buNone/>
             </a:pPr>
             <a:r>
@@ -12577,7 +12353,7 @@
           <a:bodyPr wrap="square" lIns="0" tIns="0" rIns="0" bIns="0" rtlCol="0" anchor="ctr"/>
           <a:lstStyle/>
           <a:p>
-            <a:pPr indent="0" marL="0">
+            <a:pPr marL="0" indent="0">
               <a:buNone/>
             </a:pPr>
             <a:r>
@@ -12616,7 +12392,7 @@
           <a:bodyPr wrap="square" lIns="0" tIns="0" rIns="0" bIns="0" rtlCol="0" anchor="ctr"/>
           <a:lstStyle/>
           <a:p>
-            <a:pPr indent="0" marL="0">
+            <a:pPr marL="0" indent="0">
               <a:buNone/>
             </a:pPr>
             <a:r>
@@ -12702,7 +12478,7 @@
           <a:bodyPr wrap="square" lIns="0" tIns="0" rIns="0" bIns="0" rtlCol="0" anchor="ctr"/>
           <a:lstStyle/>
           <a:p>
-            <a:pPr algn="ctr" indent="0" marL="0">
+            <a:pPr marL="0" indent="0" algn="ctr">
               <a:buNone/>
             </a:pPr>
             <a:r>
@@ -12741,7 +12517,7 @@
           <a:bodyPr wrap="square" lIns="0" tIns="0" rIns="0" bIns="0" rtlCol="0" anchor="ctr"/>
           <a:lstStyle/>
           <a:p>
-            <a:pPr indent="0" marL="0">
+            <a:pPr marL="0" indent="0">
               <a:buNone/>
             </a:pPr>
             <a:r>
@@ -12780,7 +12556,7 @@
           <a:bodyPr wrap="square" lIns="0" tIns="0" rIns="0" bIns="0" rtlCol="0" anchor="ctr"/>
           <a:lstStyle/>
           <a:p>
-            <a:pPr indent="0" marL="0">
+            <a:pPr marL="0" indent="0">
               <a:buNone/>
             </a:pPr>
             <a:r>
@@ -12842,7 +12618,7 @@
           <a:bodyPr wrap="square" lIns="0" tIns="0" rIns="0" bIns="0" rtlCol="0" anchor="ctr"/>
           <a:lstStyle/>
           <a:p>
-            <a:pPr indent="0" marL="0">
+            <a:pPr marL="0" indent="0">
               <a:spcAft>
                 <a:spcPts val="400"/>
               </a:spcAft>
@@ -12862,7 +12638,7 @@
             <a:endParaRPr lang="en-US" sz="1350" dirty="0"/>
           </a:p>
           <a:p>
-            <a:pPr indent="0" marL="0">
+            <a:pPr marL="0" indent="0">
               <a:spcAft>
                 <a:spcPts val="400"/>
               </a:spcAft>
@@ -12904,11 +12680,11 @@
           <a:bodyPr wrap="square" lIns="0" tIns="0" rIns="0" bIns="0" rtlCol="0" anchor="ctr"/>
           <a:lstStyle/>
           <a:p>
-            <a:pPr algn="r" indent="0" marL="0">
-              <a:buNone/>
-            </a:pPr>
-            <a:r>
-              <a:rPr lang="en-US" sz="1200" b="1" spc="200" kern="0" dirty="0">
+            <a:pPr marL="0" indent="0" algn="r">
+              <a:buNone/>
+            </a:pPr>
+            <a:r>
+              <a:rPr lang="en-US" sz="1200" b="1" kern="0" spc="200" dirty="0">
                 <a:solidFill>
                   <a:srgbClr val="F59E0B"/>
                 </a:solidFill>
@@ -12938,6 +12714,7 @@
         <a:solidFill>
           <a:srgbClr val="FFFFFF"/>
         </a:solidFill>
+        <a:effectLst/>
       </p:bgPr>
     </p:bg>
     <p:spTree>
@@ -12975,11 +12752,11 @@
           <a:bodyPr wrap="square" lIns="0" tIns="0" rIns="0" bIns="0" rtlCol="0" anchor="ctr"/>
           <a:lstStyle/>
           <a:p>
-            <a:pPr indent="0" marL="0">
-              <a:buNone/>
-            </a:pPr>
-            <a:r>
-              <a:rPr lang="en-US" sz="1200" b="1" spc="300" kern="0" dirty="0">
+            <a:pPr marL="0" indent="0">
+              <a:buNone/>
+            </a:pPr>
+            <a:r>
+              <a:rPr lang="en-US" sz="1200" b="1" kern="0" spc="300" dirty="0">
                 <a:solidFill>
                   <a:srgbClr val="1D4ED8"/>
                 </a:solidFill>
@@ -13014,7 +12791,7 @@
           <a:bodyPr wrap="square" lIns="0" tIns="0" rIns="0" bIns="0" rtlCol="0" anchor="ctr"/>
           <a:lstStyle/>
           <a:p>
-            <a:pPr indent="0" marL="0">
+            <a:pPr marL="0" indent="0">
               <a:buNone/>
             </a:pPr>
             <a:r>
@@ -13053,7 +12830,7 @@
           <a:bodyPr wrap="square" lIns="0" tIns="0" rIns="0" bIns="0" rtlCol="0" anchor="ctr"/>
           <a:lstStyle/>
           <a:p>
-            <a:pPr indent="0" marL="0">
+            <a:pPr marL="0" indent="0">
               <a:buNone/>
             </a:pPr>
             <a:r>
@@ -13067,9 +12844,6 @@
               </a:rPr>
               <a:t>Leadership never has to ask a project manager for status. </a:t>
             </a:r>
-            <a:pPr indent="0" marL="0">
-              <a:buNone/>
-            </a:pPr>
             <a:r>
               <a:rPr lang="en-US" sz="1600" dirty="0">
                 <a:solidFill>
@@ -13106,7 +12880,7 @@
           </a:solidFill>
           <a:ln/>
           <a:effectLst>
-            <a:outerShdw sx="100000" sy="100000" kx="0" ky="0" algn="bl" rotWithShape="0" blurRad="88900" dist="25400" dir="5400000">
+            <a:outerShdw blurRad="88900" dist="25400" dir="5400000" algn="bl" rotWithShape="0">
               <a:srgbClr val="0A1C33">
                 <a:alpha val="16000"/>
               </a:srgbClr>
@@ -13135,7 +12909,7 @@
           <a:bodyPr wrap="square" lIns="254" tIns="254" rIns="254" bIns="254" rtlCol="0" anchor="ctr"/>
           <a:lstStyle/>
           <a:p>
-            <a:pPr algn="ctr" indent="0" marL="0">
+            <a:pPr marL="0" indent="0" algn="ctr">
               <a:buNone/>
             </a:pPr>
             <a:r>
@@ -13194,7 +12968,7 @@
           </a:solidFill>
           <a:ln/>
           <a:effectLst>
-            <a:outerShdw sx="100000" sy="100000" kx="0" ky="0" algn="bl" rotWithShape="0" blurRad="88900" dist="25400" dir="5400000">
+            <a:outerShdw blurRad="88900" dist="25400" dir="5400000" algn="bl" rotWithShape="0">
               <a:srgbClr val="0A1C33">
                 <a:alpha val="16000"/>
               </a:srgbClr>
@@ -13223,7 +12997,7 @@
           <a:bodyPr wrap="square" lIns="254" tIns="254" rIns="254" bIns="254" rtlCol="0" anchor="ctr"/>
           <a:lstStyle/>
           <a:p>
-            <a:pPr algn="ctr" indent="0" marL="0">
+            <a:pPr marL="0" indent="0" algn="ctr">
               <a:buNone/>
             </a:pPr>
             <a:r>
@@ -13282,7 +13056,7 @@
           </a:solidFill>
           <a:ln/>
           <a:effectLst>
-            <a:outerShdw sx="100000" sy="100000" kx="0" ky="0" algn="bl" rotWithShape="0" blurRad="88900" dist="25400" dir="5400000">
+            <a:outerShdw blurRad="88900" dist="25400" dir="5400000" algn="bl" rotWithShape="0">
               <a:srgbClr val="0A1C33">
                 <a:alpha val="16000"/>
               </a:srgbClr>
@@ -13311,7 +13085,7 @@
           <a:bodyPr wrap="square" lIns="254" tIns="254" rIns="254" bIns="254" rtlCol="0" anchor="ctr"/>
           <a:lstStyle/>
           <a:p>
-            <a:pPr algn="ctr" indent="0" marL="0">
+            <a:pPr marL="0" indent="0" algn="ctr">
               <a:buNone/>
             </a:pPr>
             <a:r>
@@ -13370,7 +13144,7 @@
           </a:solidFill>
           <a:ln/>
           <a:effectLst>
-            <a:outerShdw sx="100000" sy="100000" kx="0" ky="0" algn="bl" rotWithShape="0" blurRad="88900" dist="25400" dir="5400000">
+            <a:outerShdw blurRad="88900" dist="25400" dir="5400000" algn="bl" rotWithShape="0">
               <a:srgbClr val="0A1C33">
                 <a:alpha val="16000"/>
               </a:srgbClr>
@@ -13399,7 +13173,7 @@
           <a:bodyPr wrap="square" lIns="254" tIns="254" rIns="254" bIns="254" rtlCol="0" anchor="ctr"/>
           <a:lstStyle/>
           <a:p>
-            <a:pPr algn="ctr" indent="0" marL="0">
+            <a:pPr marL="0" indent="0" algn="ctr">
               <a:buNone/>
             </a:pPr>
             <a:r>
@@ -13458,7 +13232,7 @@
           </a:solidFill>
           <a:ln/>
           <a:effectLst>
-            <a:outerShdw sx="100000" sy="100000" kx="0" ky="0" algn="bl" rotWithShape="0" blurRad="88900" dist="25400" dir="5400000">
+            <a:outerShdw blurRad="88900" dist="25400" dir="5400000" algn="bl" rotWithShape="0">
               <a:srgbClr val="0A1C33">
                 <a:alpha val="16000"/>
               </a:srgbClr>
@@ -13487,7 +13261,7 @@
           <a:bodyPr wrap="square" lIns="254" tIns="254" rIns="254" bIns="254" rtlCol="0" anchor="ctr"/>
           <a:lstStyle/>
           <a:p>
-            <a:pPr algn="ctr" indent="0" marL="0">
+            <a:pPr marL="0" indent="0" algn="ctr">
               <a:buNone/>
             </a:pPr>
             <a:r>
@@ -13546,7 +13320,7 @@
           </a:solidFill>
           <a:ln/>
           <a:effectLst>
-            <a:outerShdw sx="100000" sy="100000" kx="0" ky="0" algn="bl" rotWithShape="0" blurRad="88900" dist="25400" dir="5400000">
+            <a:outerShdw blurRad="88900" dist="25400" dir="5400000" algn="bl" rotWithShape="0">
               <a:srgbClr val="0A1C33">
                 <a:alpha val="16000"/>
               </a:srgbClr>
@@ -13575,7 +13349,7 @@
           <a:bodyPr wrap="square" lIns="254" tIns="254" rIns="254" bIns="254" rtlCol="0" anchor="ctr"/>
           <a:lstStyle/>
           <a:p>
-            <a:pPr algn="ctr" indent="0" marL="0">
+            <a:pPr marL="0" indent="0" algn="ctr">
               <a:buNone/>
             </a:pPr>
             <a:r>
@@ -13634,7 +13408,7 @@
           </a:solidFill>
           <a:ln/>
           <a:effectLst>
-            <a:outerShdw sx="100000" sy="100000" kx="0" ky="0" algn="bl" rotWithShape="0" blurRad="88900" dist="25400" dir="5400000">
+            <a:outerShdw blurRad="88900" dist="25400" dir="5400000" algn="bl" rotWithShape="0">
               <a:srgbClr val="0A1C33">
                 <a:alpha val="16000"/>
               </a:srgbClr>
@@ -13663,7 +13437,7 @@
           <a:bodyPr wrap="square" lIns="254" tIns="254" rIns="254" bIns="254" rtlCol="0" anchor="ctr"/>
           <a:lstStyle/>
           <a:p>
-            <a:pPr algn="ctr" indent="0" marL="0">
+            <a:pPr marL="0" indent="0" algn="ctr">
               <a:buNone/>
             </a:pPr>
             <a:r>
@@ -13722,7 +13496,7 @@
           </a:solidFill>
           <a:ln/>
           <a:effectLst>
-            <a:outerShdw sx="100000" sy="100000" kx="0" ky="0" algn="bl" rotWithShape="0" blurRad="88900" dist="25400" dir="5400000">
+            <a:outerShdw blurRad="88900" dist="25400" dir="5400000" algn="bl" rotWithShape="0">
               <a:srgbClr val="0A1C33">
                 <a:alpha val="16000"/>
               </a:srgbClr>
@@ -13751,7 +13525,7 @@
           <a:bodyPr wrap="square" lIns="254" tIns="254" rIns="254" bIns="254" rtlCol="0" anchor="ctr"/>
           <a:lstStyle/>
           <a:p>
-            <a:pPr algn="ctr" indent="0" marL="0">
+            <a:pPr marL="0" indent="0" algn="ctr">
               <a:buNone/>
             </a:pPr>
             <a:r>
@@ -13790,7 +13564,7 @@
           <a:bodyPr wrap="square" lIns="0" tIns="0" rIns="0" bIns="0" rtlCol="0" anchor="ctr"/>
           <a:lstStyle/>
           <a:p>
-            <a:pPr indent="0" marL="0">
+            <a:pPr marL="0" indent="0">
               <a:buNone/>
             </a:pPr>
             <a:r>
@@ -13834,7 +13608,7 @@
             <a:prstDash val="solid"/>
           </a:ln>
           <a:effectLst>
-            <a:outerShdw sx="100000" sy="100000" kx="0" ky="0" algn="bl" rotWithShape="0" blurRad="88900" dist="25400" dir="5400000">
+            <a:outerShdw blurRad="88900" dist="25400" dir="5400000" algn="bl" rotWithShape="0">
               <a:srgbClr val="0A1C33">
                 <a:alpha val="16000"/>
               </a:srgbClr>
@@ -13863,7 +13637,7 @@
           <a:bodyPr wrap="square" lIns="0" tIns="0" rIns="0" bIns="0" rtlCol="0" anchor="ctr"/>
           <a:lstStyle/>
           <a:p>
-            <a:pPr algn="ctr" indent="0" marL="0">
+            <a:pPr marL="0" indent="0" algn="ctr">
               <a:buNone/>
             </a:pPr>
             <a:r>
@@ -13902,7 +13676,7 @@
           <a:bodyPr wrap="square" lIns="0" tIns="0" rIns="0" bIns="0" rtlCol="0" anchor="ctr"/>
           <a:lstStyle/>
           <a:p>
-            <a:pPr algn="ctr" indent="0" marL="0">
+            <a:pPr marL="0" indent="0" algn="ctr">
               <a:buNone/>
             </a:pPr>
             <a:r>
@@ -13946,7 +13720,7 @@
             <a:prstDash val="solid"/>
           </a:ln>
           <a:effectLst>
-            <a:outerShdw sx="100000" sy="100000" kx="0" ky="0" algn="bl" rotWithShape="0" blurRad="88900" dist="25400" dir="5400000">
+            <a:outerShdw blurRad="88900" dist="25400" dir="5400000" algn="bl" rotWithShape="0">
               <a:srgbClr val="0A1C33">
                 <a:alpha val="16000"/>
               </a:srgbClr>
@@ -13975,7 +13749,7 @@
           <a:bodyPr wrap="square" lIns="0" tIns="0" rIns="0" bIns="0" rtlCol="0" anchor="ctr"/>
           <a:lstStyle/>
           <a:p>
-            <a:pPr algn="ctr" indent="0" marL="0">
+            <a:pPr marL="0" indent="0" algn="ctr">
               <a:buNone/>
             </a:pPr>
             <a:r>
@@ -14014,7 +13788,7 @@
           <a:bodyPr wrap="square" lIns="0" tIns="0" rIns="0" bIns="0" rtlCol="0" anchor="ctr"/>
           <a:lstStyle/>
           <a:p>
-            <a:pPr algn="ctr" indent="0" marL="0">
+            <a:pPr marL="0" indent="0" algn="ctr">
               <a:buNone/>
             </a:pPr>
             <a:r>
@@ -14058,7 +13832,7 @@
             <a:prstDash val="solid"/>
           </a:ln>
           <a:effectLst>
-            <a:outerShdw sx="100000" sy="100000" kx="0" ky="0" algn="bl" rotWithShape="0" blurRad="88900" dist="25400" dir="5400000">
+            <a:outerShdw blurRad="88900" dist="25400" dir="5400000" algn="bl" rotWithShape="0">
               <a:srgbClr val="0A1C33">
                 <a:alpha val="16000"/>
               </a:srgbClr>
@@ -14087,7 +13861,7 @@
           <a:bodyPr wrap="square" lIns="0" tIns="0" rIns="0" bIns="0" rtlCol="0" anchor="ctr"/>
           <a:lstStyle/>
           <a:p>
-            <a:pPr algn="ctr" indent="0" marL="0">
+            <a:pPr marL="0" indent="0" algn="ctr">
               <a:buNone/>
             </a:pPr>
             <a:r>
@@ -14126,7 +13900,7 @@
           <a:bodyPr wrap="square" lIns="0" tIns="0" rIns="0" bIns="0" rtlCol="0" anchor="ctr"/>
           <a:lstStyle/>
           <a:p>
-            <a:pPr algn="ctr" indent="0" marL="0">
+            <a:pPr marL="0" indent="0" algn="ctr">
               <a:buNone/>
             </a:pPr>
             <a:r>
@@ -14170,7 +13944,7 @@
             <a:prstDash val="solid"/>
           </a:ln>
           <a:effectLst>
-            <a:outerShdw sx="100000" sy="100000" kx="0" ky="0" algn="bl" rotWithShape="0" blurRad="88900" dist="25400" dir="5400000">
+            <a:outerShdw blurRad="88900" dist="25400" dir="5400000" algn="bl" rotWithShape="0">
               <a:srgbClr val="0A1C33">
                 <a:alpha val="16000"/>
               </a:srgbClr>
@@ -14199,7 +13973,7 @@
           <a:bodyPr wrap="square" lIns="0" tIns="0" rIns="0" bIns="0" rtlCol="0" anchor="ctr"/>
           <a:lstStyle/>
           <a:p>
-            <a:pPr algn="ctr" indent="0" marL="0">
+            <a:pPr marL="0" indent="0" algn="ctr">
               <a:buNone/>
             </a:pPr>
             <a:r>
@@ -14238,7 +14012,7 @@
           <a:bodyPr wrap="square" lIns="0" tIns="0" rIns="0" bIns="0" rtlCol="0" anchor="ctr"/>
           <a:lstStyle/>
           <a:p>
-            <a:pPr algn="ctr" indent="0" marL="0">
+            <a:pPr marL="0" indent="0" algn="ctr">
               <a:buNone/>
             </a:pPr>
             <a:r>
@@ -14282,7 +14056,7 @@
             <a:prstDash val="solid"/>
           </a:ln>
           <a:effectLst>
-            <a:outerShdw sx="100000" sy="100000" kx="0" ky="0" algn="bl" rotWithShape="0" blurRad="88900" dist="25400" dir="5400000">
+            <a:outerShdw blurRad="88900" dist="25400" dir="5400000" algn="bl" rotWithShape="0">
               <a:srgbClr val="0A1C33">
                 <a:alpha val="16000"/>
               </a:srgbClr>
@@ -14311,7 +14085,7 @@
           <a:bodyPr wrap="square" lIns="0" tIns="0" rIns="0" bIns="0" rtlCol="0" anchor="ctr"/>
           <a:lstStyle/>
           <a:p>
-            <a:pPr algn="ctr" indent="0" marL="0">
+            <a:pPr marL="0" indent="0" algn="ctr">
               <a:buNone/>
             </a:pPr>
             <a:r>
@@ -14350,7 +14124,7 @@
           <a:bodyPr wrap="square" lIns="0" tIns="0" rIns="0" bIns="0" rtlCol="0" anchor="ctr"/>
           <a:lstStyle/>
           <a:p>
-            <a:pPr algn="ctr" indent="0" marL="0">
+            <a:pPr marL="0" indent="0" algn="ctr">
               <a:buNone/>
             </a:pPr>
             <a:r>
@@ -14389,7 +14163,7 @@
           <a:bodyPr wrap="square" lIns="0" tIns="0" rIns="0" bIns="0" rtlCol="0" anchor="ctr"/>
           <a:lstStyle/>
           <a:p>
-            <a:pPr indent="0" marL="0">
+            <a:pPr marL="0" indent="0">
               <a:buNone/>
             </a:pPr>
             <a:r>
@@ -14428,7 +14202,7 @@
           <a:bodyPr wrap="square" lIns="0" tIns="0" rIns="0" bIns="0" rtlCol="0" anchor="ctr"/>
           <a:lstStyle/>
           <a:p>
-            <a:pPr algn="r" indent="0" marL="0">
+            <a:pPr marL="0" indent="0" algn="r">
               <a:buNone/>
             </a:pPr>
             <a:r>
@@ -14462,6 +14236,7 @@
         <a:solidFill>
           <a:srgbClr val="FFFFFF"/>
         </a:solidFill>
+        <a:effectLst/>
       </p:bgPr>
     </p:bg>
     <p:spTree>
@@ -14499,11 +14274,11 @@
           <a:bodyPr wrap="square" lIns="0" tIns="0" rIns="0" bIns="0" rtlCol="0" anchor="ctr"/>
           <a:lstStyle/>
           <a:p>
-            <a:pPr indent="0" marL="0">
-              <a:buNone/>
-            </a:pPr>
-            <a:r>
-              <a:rPr lang="en-US" sz="1200" b="1" spc="300" kern="0" dirty="0">
+            <a:pPr marL="0" indent="0">
+              <a:buNone/>
+            </a:pPr>
+            <a:r>
+              <a:rPr lang="en-US" sz="1200" b="1" kern="0" spc="300" dirty="0">
                 <a:solidFill>
                   <a:srgbClr val="1D4ED8"/>
                 </a:solidFill>
@@ -14538,7 +14313,7 @@
           <a:bodyPr wrap="square" lIns="0" tIns="0" rIns="0" bIns="0" rtlCol="0" anchor="ctr"/>
           <a:lstStyle/>
           <a:p>
-            <a:pPr indent="0" marL="0">
+            <a:pPr marL="0" indent="0">
               <a:buNone/>
             </a:pPr>
             <a:r>
@@ -14582,7 +14357,7 @@
             <a:prstDash val="solid"/>
           </a:ln>
           <a:effectLst>
-            <a:outerShdw sx="100000" sy="100000" kx="0" ky="0" algn="bl" rotWithShape="0" blurRad="88900" dist="25400" dir="5400000">
+            <a:outerShdw blurRad="88900" dist="25400" dir="5400000" algn="bl" rotWithShape="0">
               <a:srgbClr val="0A1C33">
                 <a:alpha val="16000"/>
               </a:srgbClr>
@@ -14631,7 +14406,7 @@
           <a:bodyPr wrap="square" lIns="0" tIns="0" rIns="0" bIns="0" rtlCol="0" anchor="ctr"/>
           <a:lstStyle/>
           <a:p>
-            <a:pPr indent="0" marL="0">
+            <a:pPr marL="0" indent="0">
               <a:buNone/>
             </a:pPr>
             <a:r>
@@ -14670,7 +14445,7 @@
           <a:bodyPr wrap="square" lIns="0" tIns="0" rIns="0" bIns="0" rtlCol="0" anchor="ctr"/>
           <a:lstStyle/>
           <a:p>
-            <a:pPr indent="0" marL="0">
+            <a:pPr marL="0" indent="0">
               <a:buNone/>
             </a:pPr>
             <a:r>
@@ -14714,7 +14489,7 @@
             <a:prstDash val="solid"/>
           </a:ln>
           <a:effectLst>
-            <a:outerShdw sx="100000" sy="100000" kx="0" ky="0" algn="bl" rotWithShape="0" blurRad="88900" dist="25400" dir="5400000">
+            <a:outerShdw blurRad="88900" dist="25400" dir="5400000" algn="bl" rotWithShape="0">
               <a:srgbClr val="0A1C33">
                 <a:alpha val="16000"/>
               </a:srgbClr>
@@ -14763,7 +14538,7 @@
           <a:bodyPr wrap="square" lIns="0" tIns="0" rIns="0" bIns="0" rtlCol="0" anchor="ctr"/>
           <a:lstStyle/>
           <a:p>
-            <a:pPr indent="0" marL="0">
+            <a:pPr marL="0" indent="0">
               <a:buNone/>
             </a:pPr>
             <a:r>
@@ -14802,7 +14577,7 @@
           <a:bodyPr wrap="square" lIns="0" tIns="0" rIns="0" bIns="0" rtlCol="0" anchor="ctr"/>
           <a:lstStyle/>
           <a:p>
-            <a:pPr indent="0" marL="0">
+            <a:pPr marL="0" indent="0">
               <a:buNone/>
             </a:pPr>
             <a:r>
@@ -14846,7 +14621,7 @@
             <a:prstDash val="solid"/>
           </a:ln>
           <a:effectLst>
-            <a:outerShdw sx="100000" sy="100000" kx="0" ky="0" algn="bl" rotWithShape="0" blurRad="88900" dist="25400" dir="5400000">
+            <a:outerShdw blurRad="88900" dist="25400" dir="5400000" algn="bl" rotWithShape="0">
               <a:srgbClr val="0A1C33">
                 <a:alpha val="16000"/>
               </a:srgbClr>
@@ -14895,7 +14670,7 @@
           <a:bodyPr wrap="square" lIns="0" tIns="0" rIns="0" bIns="0" rtlCol="0" anchor="ctr"/>
           <a:lstStyle/>
           <a:p>
-            <a:pPr indent="0" marL="0">
+            <a:pPr marL="0" indent="0">
               <a:buNone/>
             </a:pPr>
             <a:r>
@@ -14934,7 +14709,7 @@
           <a:bodyPr wrap="square" lIns="0" tIns="0" rIns="0" bIns="0" rtlCol="0" anchor="ctr"/>
           <a:lstStyle/>
           <a:p>
-            <a:pPr indent="0" marL="0">
+            <a:pPr marL="0" indent="0">
               <a:buNone/>
             </a:pPr>
             <a:r>
@@ -14978,7 +14753,7 @@
             <a:prstDash val="solid"/>
           </a:ln>
           <a:effectLst>
-            <a:outerShdw sx="100000" sy="100000" kx="0" ky="0" algn="bl" rotWithShape="0" blurRad="88900" dist="25400" dir="5400000">
+            <a:outerShdw blurRad="88900" dist="25400" dir="5400000" algn="bl" rotWithShape="0">
               <a:srgbClr val="0A1C33">
                 <a:alpha val="16000"/>
               </a:srgbClr>
@@ -15027,7 +14802,7 @@
           <a:bodyPr wrap="square" lIns="0" tIns="0" rIns="0" bIns="0" rtlCol="0" anchor="ctr"/>
           <a:lstStyle/>
           <a:p>
-            <a:pPr indent="0" marL="0">
+            <a:pPr marL="0" indent="0">
               <a:buNone/>
             </a:pPr>
             <a:r>
@@ -15066,7 +14841,7 @@
           <a:bodyPr wrap="square" lIns="0" tIns="0" rIns="0" bIns="0" rtlCol="0" anchor="ctr"/>
           <a:lstStyle/>
           <a:p>
-            <a:pPr indent="0" marL="0">
+            <a:pPr marL="0" indent="0">
               <a:buNone/>
             </a:pPr>
             <a:r>
@@ -15110,7 +14885,7 @@
             <a:prstDash val="solid"/>
           </a:ln>
           <a:effectLst>
-            <a:outerShdw sx="100000" sy="100000" kx="0" ky="0" algn="bl" rotWithShape="0" blurRad="88900" dist="25400" dir="5400000">
+            <a:outerShdw blurRad="88900" dist="25400" dir="5400000" algn="bl" rotWithShape="0">
               <a:srgbClr val="0A1C33">
                 <a:alpha val="16000"/>
               </a:srgbClr>
@@ -15159,7 +14934,7 @@
           <a:bodyPr wrap="square" lIns="0" tIns="0" rIns="0" bIns="0" rtlCol="0" anchor="ctr"/>
           <a:lstStyle/>
           <a:p>
-            <a:pPr indent="0" marL="0">
+            <a:pPr marL="0" indent="0">
               <a:buNone/>
             </a:pPr>
             <a:r>
@@ -15198,7 +14973,7 @@
           <a:bodyPr wrap="square" lIns="0" tIns="0" rIns="0" bIns="0" rtlCol="0" anchor="ctr"/>
           <a:lstStyle/>
           <a:p>
-            <a:pPr indent="0" marL="0">
+            <a:pPr marL="0" indent="0">
               <a:buNone/>
             </a:pPr>
             <a:r>
@@ -15242,7 +15017,7 @@
             <a:prstDash val="solid"/>
           </a:ln>
           <a:effectLst>
-            <a:outerShdw sx="100000" sy="100000" kx="0" ky="0" algn="bl" rotWithShape="0" blurRad="88900" dist="25400" dir="5400000">
+            <a:outerShdw blurRad="88900" dist="25400" dir="5400000" algn="bl" rotWithShape="0">
               <a:srgbClr val="0A1C33">
                 <a:alpha val="16000"/>
               </a:srgbClr>
@@ -15291,7 +15066,7 @@
           <a:bodyPr wrap="square" lIns="0" tIns="0" rIns="0" bIns="0" rtlCol="0" anchor="ctr"/>
           <a:lstStyle/>
           <a:p>
-            <a:pPr indent="0" marL="0">
+            <a:pPr marL="0" indent="0">
               <a:buNone/>
             </a:pPr>
             <a:r>
@@ -15330,7 +15105,7 @@
           <a:bodyPr wrap="square" lIns="0" tIns="0" rIns="0" bIns="0" rtlCol="0" anchor="ctr"/>
           <a:lstStyle/>
           <a:p>
-            <a:pPr indent="0" marL="0">
+            <a:pPr marL="0" indent="0">
               <a:buNone/>
             </a:pPr>
             <a:r>
@@ -15374,7 +15149,7 @@
             <a:prstDash val="solid"/>
           </a:ln>
           <a:effectLst>
-            <a:outerShdw sx="100000" sy="100000" kx="0" ky="0" algn="bl" rotWithShape="0" blurRad="88900" dist="25400" dir="5400000">
+            <a:outerShdw blurRad="88900" dist="25400" dir="5400000" algn="bl" rotWithShape="0">
               <a:srgbClr val="0A1C33">
                 <a:alpha val="16000"/>
               </a:srgbClr>
@@ -15423,7 +15198,7 @@
           <a:bodyPr wrap="square" lIns="0" tIns="0" rIns="0" bIns="0" rtlCol="0" anchor="ctr"/>
           <a:lstStyle/>
           <a:p>
-            <a:pPr indent="0" marL="0">
+            <a:pPr marL="0" indent="0">
               <a:buNone/>
             </a:pPr>
             <a:r>
@@ -15462,7 +15237,7 @@
           <a:bodyPr wrap="square" lIns="0" tIns="0" rIns="0" bIns="0" rtlCol="0" anchor="ctr"/>
           <a:lstStyle/>
           <a:p>
-            <a:pPr indent="0" marL="0">
+            <a:pPr marL="0" indent="0">
               <a:buNone/>
             </a:pPr>
             <a:r>
@@ -15506,7 +15281,7 @@
             <a:prstDash val="solid"/>
           </a:ln>
           <a:effectLst>
-            <a:outerShdw sx="100000" sy="100000" kx="0" ky="0" algn="bl" rotWithShape="0" blurRad="88900" dist="25400" dir="5400000">
+            <a:outerShdw blurRad="88900" dist="25400" dir="5400000" algn="bl" rotWithShape="0">
               <a:srgbClr val="0A1C33">
                 <a:alpha val="16000"/>
               </a:srgbClr>
@@ -15555,7 +15330,7 @@
           <a:bodyPr wrap="square" lIns="0" tIns="0" rIns="0" bIns="0" rtlCol="0" anchor="ctr"/>
           <a:lstStyle/>
           <a:p>
-            <a:pPr indent="0" marL="0">
+            <a:pPr marL="0" indent="0">
               <a:buNone/>
             </a:pPr>
             <a:r>
@@ -15594,7 +15369,7 @@
           <a:bodyPr wrap="square" lIns="0" tIns="0" rIns="0" bIns="0" rtlCol="0" anchor="ctr"/>
           <a:lstStyle/>
           <a:p>
-            <a:pPr indent="0" marL="0">
+            <a:pPr marL="0" indent="0">
               <a:buNone/>
             </a:pPr>
             <a:r>
@@ -15633,7 +15408,7 @@
           <a:bodyPr wrap="square" lIns="0" tIns="0" rIns="0" bIns="0" rtlCol="0" anchor="ctr"/>
           <a:lstStyle/>
           <a:p>
-            <a:pPr indent="0" marL="0">
+            <a:pPr marL="0" indent="0">
               <a:buNone/>
             </a:pPr>
             <a:r>
@@ -15647,9 +15422,6 @@
               </a:rPr>
               <a:t>The moat is not any single feature — </a:t>
             </a:r>
-            <a:pPr indent="0" marL="0">
-              <a:buNone/>
-            </a:pPr>
             <a:r>
               <a:rPr lang="en-US" sz="1300" b="1" dirty="0">
                 <a:solidFill>
@@ -15686,7 +15458,7 @@
           <a:bodyPr wrap="square" lIns="0" tIns="0" rIns="0" bIns="0" rtlCol="0" anchor="ctr"/>
           <a:lstStyle/>
           <a:p>
-            <a:pPr algn="r" indent="0" marL="0">
+            <a:pPr marL="0" indent="0" algn="r">
               <a:buNone/>
             </a:pPr>
             <a:r>
@@ -15720,6 +15492,7 @@
         <a:solidFill>
           <a:srgbClr val="FFFFFF"/>
         </a:solidFill>
+        <a:effectLst/>
       </p:bgPr>
     </p:bg>
     <p:spTree>
@@ -15757,11 +15530,11 @@
           <a:bodyPr wrap="square" lIns="0" tIns="0" rIns="0" bIns="0" rtlCol="0" anchor="ctr"/>
           <a:lstStyle/>
           <a:p>
-            <a:pPr indent="0" marL="0">
-              <a:buNone/>
-            </a:pPr>
-            <a:r>
-              <a:rPr lang="en-US" sz="1200" b="1" spc="300" kern="0" dirty="0">
+            <a:pPr marL="0" indent="0">
+              <a:buNone/>
+            </a:pPr>
+            <a:r>
+              <a:rPr lang="en-US" sz="1200" b="1" kern="0" spc="300" dirty="0">
                 <a:solidFill>
                   <a:srgbClr val="1D4ED8"/>
                 </a:solidFill>
@@ -15796,7 +15569,7 @@
           <a:bodyPr wrap="square" lIns="0" tIns="0" rIns="0" bIns="0" rtlCol="0" anchor="ctr"/>
           <a:lstStyle/>
           <a:p>
-            <a:pPr indent="0" marL="0">
+            <a:pPr marL="0" indent="0">
               <a:buNone/>
             </a:pPr>
             <a:r>
@@ -15840,7 +15613,7 @@
             <a:prstDash val="solid"/>
           </a:ln>
           <a:effectLst>
-            <a:outerShdw sx="100000" sy="100000" kx="0" ky="0" algn="bl" rotWithShape="0" blurRad="88900" dist="25400" dir="5400000">
+            <a:outerShdw blurRad="88900" dist="25400" dir="5400000" algn="bl" rotWithShape="0">
               <a:srgbClr val="0A1C33">
                 <a:alpha val="16000"/>
               </a:srgbClr>
@@ -15869,7 +15642,7 @@
           <a:bodyPr wrap="square" lIns="0" tIns="0" rIns="0" bIns="0" rtlCol="0" anchor="ctr"/>
           <a:lstStyle/>
           <a:p>
-            <a:pPr algn="ctr" indent="0" marL="0">
+            <a:pPr marL="0" indent="0" algn="ctr">
               <a:buNone/>
             </a:pPr>
             <a:r>
@@ -15908,7 +15681,7 @@
           <a:bodyPr wrap="square" lIns="0" tIns="0" rIns="0" bIns="0" rtlCol="0" anchor="ctr"/>
           <a:lstStyle/>
           <a:p>
-            <a:pPr algn="ctr" indent="0" marL="0">
+            <a:pPr marL="0" indent="0" algn="ctr">
               <a:buNone/>
             </a:pPr>
             <a:r>
@@ -15952,7 +15725,7 @@
             <a:prstDash val="solid"/>
           </a:ln>
           <a:effectLst>
-            <a:outerShdw sx="100000" sy="100000" kx="0" ky="0" algn="bl" rotWithShape="0" blurRad="88900" dist="25400" dir="5400000">
+            <a:outerShdw blurRad="88900" dist="25400" dir="5400000" algn="bl" rotWithShape="0">
               <a:srgbClr val="0A1C33">
                 <a:alpha val="16000"/>
               </a:srgbClr>
@@ -15981,7 +15754,7 @@
           <a:bodyPr wrap="square" lIns="0" tIns="0" rIns="0" bIns="0" rtlCol="0" anchor="ctr"/>
           <a:lstStyle/>
           <a:p>
-            <a:pPr algn="ctr" indent="0" marL="0">
+            <a:pPr marL="0" indent="0" algn="ctr">
               <a:buNone/>
             </a:pPr>
             <a:r>
@@ -16020,7 +15793,7 @@
           <a:bodyPr wrap="square" lIns="0" tIns="0" rIns="0" bIns="0" rtlCol="0" anchor="ctr"/>
           <a:lstStyle/>
           <a:p>
-            <a:pPr algn="ctr" indent="0" marL="0">
+            <a:pPr marL="0" indent="0" algn="ctr">
               <a:buNone/>
             </a:pPr>
             <a:r>
@@ -16064,7 +15837,7 @@
             <a:prstDash val="solid"/>
           </a:ln>
           <a:effectLst>
-            <a:outerShdw sx="100000" sy="100000" kx="0" ky="0" algn="bl" rotWithShape="0" blurRad="88900" dist="25400" dir="5400000">
+            <a:outerShdw blurRad="88900" dist="25400" dir="5400000" algn="bl" rotWithShape="0">
               <a:srgbClr val="0A1C33">
                 <a:alpha val="16000"/>
               </a:srgbClr>
@@ -16093,7 +15866,7 @@
           <a:bodyPr wrap="square" lIns="0" tIns="0" rIns="0" bIns="0" rtlCol="0" anchor="ctr"/>
           <a:lstStyle/>
           <a:p>
-            <a:pPr algn="ctr" indent="0" marL="0">
+            <a:pPr marL="0" indent="0" algn="ctr">
               <a:buNone/>
             </a:pPr>
             <a:r>
@@ -16132,7 +15905,7 @@
           <a:bodyPr wrap="square" lIns="0" tIns="0" rIns="0" bIns="0" rtlCol="0" anchor="ctr"/>
           <a:lstStyle/>
           <a:p>
-            <a:pPr algn="ctr" indent="0" marL="0">
+            <a:pPr marL="0" indent="0" algn="ctr">
               <a:buNone/>
             </a:pPr>
             <a:r>
@@ -16176,7 +15949,7 @@
             <a:prstDash val="solid"/>
           </a:ln>
           <a:effectLst>
-            <a:outerShdw sx="100000" sy="100000" kx="0" ky="0" algn="bl" rotWithShape="0" blurRad="88900" dist="25400" dir="5400000">
+            <a:outerShdw blurRad="88900" dist="25400" dir="5400000" algn="bl" rotWithShape="0">
               <a:srgbClr val="0A1C33">
                 <a:alpha val="16000"/>
               </a:srgbClr>
@@ -16205,7 +15978,7 @@
           <a:bodyPr wrap="square" lIns="0" tIns="0" rIns="0" bIns="0" rtlCol="0" anchor="ctr"/>
           <a:lstStyle/>
           <a:p>
-            <a:pPr indent="0" marL="0">
+            <a:pPr marL="0" indent="0">
               <a:buNone/>
             </a:pPr>
             <a:r>
@@ -16329,7 +16102,7 @@
           <a:bodyPr wrap="square" lIns="0" tIns="0" rIns="0" bIns="0" rtlCol="0" anchor="ctr"/>
           <a:lstStyle/>
           <a:p>
-            <a:pPr indent="0" marL="0">
+            <a:pPr marL="0" indent="0">
               <a:buNone/>
             </a:pPr>
             <a:r>
@@ -16368,7 +16141,7 @@
           <a:bodyPr wrap="square" lIns="0" tIns="0" rIns="0" bIns="0" rtlCol="0" anchor="ctr"/>
           <a:lstStyle/>
           <a:p>
-            <a:pPr algn="r" indent="0" marL="0">
+            <a:pPr marL="0" indent="0" algn="r">
               <a:buNone/>
             </a:pPr>
             <a:r>
@@ -16402,6 +16175,7 @@
         <a:solidFill>
           <a:srgbClr val="FFFFFF"/>
         </a:solidFill>
+        <a:effectLst/>
       </p:bgPr>
     </p:bg>
     <p:spTree>
@@ -16439,11 +16213,11 @@
           <a:bodyPr wrap="square" lIns="0" tIns="0" rIns="0" bIns="0" rtlCol="0" anchor="ctr"/>
           <a:lstStyle/>
           <a:p>
-            <a:pPr indent="0" marL="0">
-              <a:buNone/>
-            </a:pPr>
-            <a:r>
-              <a:rPr lang="en-US" sz="1200" b="1" spc="300" kern="0" dirty="0">
+            <a:pPr marL="0" indent="0">
+              <a:buNone/>
+            </a:pPr>
+            <a:r>
+              <a:rPr lang="en-US" sz="1200" b="1" kern="0" spc="300" dirty="0">
                 <a:solidFill>
                   <a:srgbClr val="1D4ED8"/>
                 </a:solidFill>
@@ -16478,7 +16252,7 @@
           <a:bodyPr wrap="square" lIns="0" tIns="0" rIns="0" bIns="0" rtlCol="0" anchor="ctr"/>
           <a:lstStyle/>
           <a:p>
-            <a:pPr indent="0" marL="0">
+            <a:pPr marL="0" indent="0">
               <a:buNone/>
             </a:pPr>
             <a:r>
@@ -16539,7 +16313,7 @@
           <a:bodyPr wrap="square" lIns="0" tIns="0" rIns="0" bIns="0" rtlCol="0" anchor="ctr"/>
           <a:lstStyle/>
           <a:p>
-            <a:pPr indent="0" marL="0">
+            <a:pPr marL="0" indent="0">
               <a:buNone/>
             </a:pPr>
             <a:r>
@@ -16620,7 +16394,7 @@
           <a:bodyPr wrap="square" lIns="0" tIns="0" rIns="0" bIns="0" rtlCol="0" anchor="ctr"/>
           <a:lstStyle/>
           <a:p>
-            <a:pPr indent="0" marL="0">
+            <a:pPr marL="0" indent="0">
               <a:buNone/>
             </a:pPr>
             <a:r>
@@ -16681,7 +16455,7 @@
           <a:bodyPr wrap="square" lIns="0" tIns="0" rIns="0" bIns="0" rtlCol="0" anchor="ctr"/>
           <a:lstStyle/>
           <a:p>
-            <a:pPr indent="0" marL="0">
+            <a:pPr marL="0" indent="0">
               <a:buNone/>
             </a:pPr>
             <a:r>
@@ -16762,7 +16536,7 @@
           <a:bodyPr wrap="square" lIns="0" tIns="0" rIns="0" bIns="0" rtlCol="0" anchor="ctr"/>
           <a:lstStyle/>
           <a:p>
-            <a:pPr indent="0" marL="0">
+            <a:pPr marL="0" indent="0">
               <a:buNone/>
             </a:pPr>
             <a:r>
@@ -16823,7 +16597,7 @@
           <a:bodyPr wrap="square" lIns="0" tIns="0" rIns="0" bIns="0" rtlCol="0" anchor="ctr"/>
           <a:lstStyle/>
           <a:p>
-            <a:pPr indent="0" marL="0">
+            <a:pPr marL="0" indent="0">
               <a:buNone/>
             </a:pPr>
             <a:r>
@@ -16904,7 +16678,7 @@
           <a:bodyPr wrap="square" lIns="0" tIns="0" rIns="0" bIns="0" rtlCol="0" anchor="ctr"/>
           <a:lstStyle/>
           <a:p>
-            <a:pPr indent="0" marL="0">
+            <a:pPr marL="0" indent="0">
               <a:buNone/>
             </a:pPr>
             <a:r>
@@ -16965,7 +16739,7 @@
           <a:bodyPr wrap="square" lIns="0" tIns="0" rIns="0" bIns="0" rtlCol="0" anchor="ctr"/>
           <a:lstStyle/>
           <a:p>
-            <a:pPr indent="0" marL="0">
+            <a:pPr marL="0" indent="0">
               <a:buNone/>
             </a:pPr>
             <a:r>
@@ -17046,7 +16820,7 @@
           <a:bodyPr wrap="square" lIns="0" tIns="0" rIns="0" bIns="0" rtlCol="0" anchor="ctr"/>
           <a:lstStyle/>
           <a:p>
-            <a:pPr indent="0" marL="0">
+            <a:pPr marL="0" indent="0">
               <a:buNone/>
             </a:pPr>
             <a:r>
@@ -17107,7 +16881,7 @@
           <a:bodyPr wrap="square" lIns="0" tIns="0" rIns="0" bIns="0" rtlCol="0" anchor="ctr"/>
           <a:lstStyle/>
           <a:p>
-            <a:pPr indent="0" marL="0">
+            <a:pPr marL="0" indent="0">
               <a:buNone/>
             </a:pPr>
             <a:r>
@@ -17188,7 +16962,7 @@
           <a:bodyPr wrap="square" lIns="0" tIns="0" rIns="0" bIns="0" rtlCol="0" anchor="ctr"/>
           <a:lstStyle/>
           <a:p>
-            <a:pPr indent="0" marL="0">
+            <a:pPr marL="0" indent="0">
               <a:buNone/>
             </a:pPr>
             <a:r>
@@ -17227,7 +17001,7 @@
           <a:bodyPr wrap="square" lIns="0" tIns="0" rIns="0" bIns="0" rtlCol="0" anchor="ctr"/>
           <a:lstStyle/>
           <a:p>
-            <a:pPr algn="r" indent="0" marL="0">
+            <a:pPr marL="0" indent="0" algn="r">
               <a:buNone/>
             </a:pPr>
             <a:r>
@@ -17261,6 +17035,7 @@
         <a:solidFill>
           <a:srgbClr val="FFFFFF"/>
         </a:solidFill>
+        <a:effectLst/>
       </p:bgPr>
     </p:bg>
     <p:spTree>
@@ -17298,11 +17073,11 @@
           <a:bodyPr wrap="square" lIns="0" tIns="0" rIns="0" bIns="0" rtlCol="0" anchor="ctr"/>
           <a:lstStyle/>
           <a:p>
-            <a:pPr indent="0" marL="0">
-              <a:buNone/>
-            </a:pPr>
-            <a:r>
-              <a:rPr lang="en-US" sz="1200" b="1" spc="300" kern="0" dirty="0">
+            <a:pPr marL="0" indent="0">
+              <a:buNone/>
+            </a:pPr>
+            <a:r>
+              <a:rPr lang="en-US" sz="1200" b="1" kern="0" spc="300" dirty="0">
                 <a:solidFill>
                   <a:srgbClr val="1D4ED8"/>
                 </a:solidFill>
@@ -17337,7 +17112,7 @@
           <a:bodyPr wrap="square" lIns="0" tIns="0" rIns="0" bIns="0" rtlCol="0" anchor="ctr"/>
           <a:lstStyle/>
           <a:p>
-            <a:pPr indent="0" marL="0">
+            <a:pPr marL="0" indent="0">
               <a:buNone/>
             </a:pPr>
             <a:r>
@@ -17381,7 +17156,7 @@
             <a:prstDash val="solid"/>
           </a:ln>
           <a:effectLst>
-            <a:outerShdw sx="100000" sy="100000" kx="0" ky="0" algn="bl" rotWithShape="0" blurRad="88900" dist="25400" dir="5400000">
+            <a:outerShdw blurRad="88900" dist="25400" dir="5400000" algn="bl" rotWithShape="0">
               <a:srgbClr val="0A1C33">
                 <a:alpha val="16000"/>
               </a:srgbClr>
@@ -17432,7 +17207,7 @@
           <a:bodyPr wrap="square" lIns="0" tIns="0" rIns="0" bIns="0" rtlCol="0" anchor="ctr"/>
           <a:lstStyle/>
           <a:p>
-            <a:pPr algn="ctr" indent="0" marL="0">
+            <a:pPr marL="0" indent="0" algn="ctr">
               <a:buNone/>
             </a:pPr>
             <a:endParaRPr lang="en-US" sz="1200" dirty="0"/>
@@ -17480,7 +17255,7 @@
           <a:bodyPr wrap="square" lIns="0" tIns="0" rIns="0" bIns="0" rtlCol="0" anchor="ctr"/>
           <a:lstStyle/>
           <a:p>
-            <a:pPr indent="0" marL="0">
+            <a:pPr marL="0" indent="0">
               <a:buNone/>
             </a:pPr>
             <a:r>
@@ -17519,7 +17294,7 @@
           <a:bodyPr wrap="square" lIns="0" tIns="0" rIns="0" bIns="0" rtlCol="0" anchor="ctr"/>
           <a:lstStyle/>
           <a:p>
-            <a:pPr indent="0" marL="0">
+            <a:pPr marL="0" indent="0">
               <a:buNone/>
             </a:pPr>
             <a:r>
@@ -17563,7 +17338,7 @@
             <a:prstDash val="solid"/>
           </a:ln>
           <a:effectLst>
-            <a:outerShdw sx="100000" sy="100000" kx="0" ky="0" algn="bl" rotWithShape="0" blurRad="88900" dist="25400" dir="5400000">
+            <a:outerShdw blurRad="88900" dist="25400" dir="5400000" algn="bl" rotWithShape="0">
               <a:srgbClr val="0A1C33">
                 <a:alpha val="16000"/>
               </a:srgbClr>
@@ -17614,7 +17389,7 @@
           <a:bodyPr wrap="square" lIns="0" tIns="0" rIns="0" bIns="0" rtlCol="0" anchor="ctr"/>
           <a:lstStyle/>
           <a:p>
-            <a:pPr algn="ctr" indent="0" marL="0">
+            <a:pPr marL="0" indent="0" algn="ctr">
               <a:buNone/>
             </a:pPr>
             <a:endParaRPr lang="en-US" sz="1200" dirty="0"/>
@@ -17662,7 +17437,7 @@
           <a:bodyPr wrap="square" lIns="0" tIns="0" rIns="0" bIns="0" rtlCol="0" anchor="ctr"/>
           <a:lstStyle/>
           <a:p>
-            <a:pPr indent="0" marL="0">
+            <a:pPr marL="0" indent="0">
               <a:buNone/>
             </a:pPr>
             <a:r>
@@ -17701,7 +17476,7 @@
           <a:bodyPr wrap="square" lIns="0" tIns="0" rIns="0" bIns="0" rtlCol="0" anchor="ctr"/>
           <a:lstStyle/>
           <a:p>
-            <a:pPr indent="0" marL="0">
+            <a:pPr marL="0" indent="0">
               <a:buNone/>
             </a:pPr>
             <a:r>
@@ -17745,7 +17520,7 @@
             <a:prstDash val="solid"/>
           </a:ln>
           <a:effectLst>
-            <a:outerShdw sx="100000" sy="100000" kx="0" ky="0" algn="bl" rotWithShape="0" blurRad="88900" dist="25400" dir="5400000">
+            <a:outerShdw blurRad="88900" dist="25400" dir="5400000" algn="bl" rotWithShape="0">
               <a:srgbClr val="0A1C33">
                 <a:alpha val="16000"/>
               </a:srgbClr>
@@ -17796,7 +17571,7 @@
           <a:bodyPr wrap="square" lIns="0" tIns="0" rIns="0" bIns="0" rtlCol="0" anchor="ctr"/>
           <a:lstStyle/>
           <a:p>
-            <a:pPr algn="ctr" indent="0" marL="0">
+            <a:pPr marL="0" indent="0" algn="ctr">
               <a:buNone/>
             </a:pPr>
             <a:endParaRPr lang="en-US" sz="1200" dirty="0"/>
@@ -17844,7 +17619,7 @@
           <a:bodyPr wrap="square" lIns="0" tIns="0" rIns="0" bIns="0" rtlCol="0" anchor="ctr"/>
           <a:lstStyle/>
           <a:p>
-            <a:pPr indent="0" marL="0">
+            <a:pPr marL="0" indent="0">
               <a:buNone/>
             </a:pPr>
             <a:r>
@@ -17883,7 +17658,7 @@
           <a:bodyPr wrap="square" lIns="0" tIns="0" rIns="0" bIns="0" rtlCol="0" anchor="ctr"/>
           <a:lstStyle/>
           <a:p>
-            <a:pPr indent="0" marL="0">
+            <a:pPr marL="0" indent="0">
               <a:buNone/>
             </a:pPr>
             <a:r>
@@ -17927,7 +17702,7 @@
             <a:prstDash val="solid"/>
           </a:ln>
           <a:effectLst>
-            <a:outerShdw sx="100000" sy="100000" kx="0" ky="0" algn="bl" rotWithShape="0" blurRad="88900" dist="25400" dir="5400000">
+            <a:outerShdw blurRad="88900" dist="25400" dir="5400000" algn="bl" rotWithShape="0">
               <a:srgbClr val="0A1C33">
                 <a:alpha val="16000"/>
               </a:srgbClr>
@@ -17978,7 +17753,7 @@
           <a:bodyPr wrap="square" lIns="0" tIns="0" rIns="0" bIns="0" rtlCol="0" anchor="ctr"/>
           <a:lstStyle/>
           <a:p>
-            <a:pPr algn="ctr" indent="0" marL="0">
+            <a:pPr marL="0" indent="0" algn="ctr">
               <a:buNone/>
             </a:pPr>
             <a:endParaRPr lang="en-US" sz="1200" dirty="0"/>
@@ -18026,7 +17801,7 @@
           <a:bodyPr wrap="square" lIns="0" tIns="0" rIns="0" bIns="0" rtlCol="0" anchor="ctr"/>
           <a:lstStyle/>
           <a:p>
-            <a:pPr indent="0" marL="0">
+            <a:pPr marL="0" indent="0">
               <a:buNone/>
             </a:pPr>
             <a:r>
@@ -18065,7 +17840,7 @@
           <a:bodyPr wrap="square" lIns="0" tIns="0" rIns="0" bIns="0" rtlCol="0" anchor="ctr"/>
           <a:lstStyle/>
           <a:p>
-            <a:pPr indent="0" marL="0">
+            <a:pPr marL="0" indent="0">
               <a:buNone/>
             </a:pPr>
             <a:r>
@@ -18109,7 +17884,7 @@
             <a:prstDash val="solid"/>
           </a:ln>
           <a:effectLst>
-            <a:outerShdw sx="100000" sy="100000" kx="0" ky="0" algn="bl" rotWithShape="0" blurRad="88900" dist="25400" dir="5400000">
+            <a:outerShdw blurRad="88900" dist="25400" dir="5400000" algn="bl" rotWithShape="0">
               <a:srgbClr val="0A1C33">
                 <a:alpha val="16000"/>
               </a:srgbClr>
@@ -18160,7 +17935,7 @@
           <a:bodyPr wrap="square" lIns="0" tIns="0" rIns="0" bIns="0" rtlCol="0" anchor="ctr"/>
           <a:lstStyle/>
           <a:p>
-            <a:pPr algn="ctr" indent="0" marL="0">
+            <a:pPr marL="0" indent="0" algn="ctr">
               <a:buNone/>
             </a:pPr>
             <a:endParaRPr lang="en-US" sz="1200" dirty="0"/>
@@ -18208,7 +17983,7 @@
           <a:bodyPr wrap="square" lIns="0" tIns="0" rIns="0" bIns="0" rtlCol="0" anchor="ctr"/>
           <a:lstStyle/>
           <a:p>
-            <a:pPr indent="0" marL="0">
+            <a:pPr marL="0" indent="0">
               <a:buNone/>
             </a:pPr>
             <a:r>
@@ -18247,7 +18022,7 @@
           <a:bodyPr wrap="square" lIns="0" tIns="0" rIns="0" bIns="0" rtlCol="0" anchor="ctr"/>
           <a:lstStyle/>
           <a:p>
-            <a:pPr indent="0" marL="0">
+            <a:pPr marL="0" indent="0">
               <a:buNone/>
             </a:pPr>
             <a:r>
@@ -18291,7 +18066,7 @@
             <a:prstDash val="solid"/>
           </a:ln>
           <a:effectLst>
-            <a:outerShdw sx="100000" sy="100000" kx="0" ky="0" algn="bl" rotWithShape="0" blurRad="88900" dist="25400" dir="5400000">
+            <a:outerShdw blurRad="88900" dist="25400" dir="5400000" algn="bl" rotWithShape="0">
               <a:srgbClr val="0A1C33">
                 <a:alpha val="16000"/>
               </a:srgbClr>
@@ -18342,7 +18117,7 @@
           <a:bodyPr wrap="square" lIns="0" tIns="0" rIns="0" bIns="0" rtlCol="0" anchor="ctr"/>
           <a:lstStyle/>
           <a:p>
-            <a:pPr algn="ctr" indent="0" marL="0">
+            <a:pPr marL="0" indent="0" algn="ctr">
               <a:buNone/>
             </a:pPr>
             <a:endParaRPr lang="en-US" sz="1200" dirty="0"/>
@@ -18390,7 +18165,7 @@
           <a:bodyPr wrap="square" lIns="0" tIns="0" rIns="0" bIns="0" rtlCol="0" anchor="ctr"/>
           <a:lstStyle/>
           <a:p>
-            <a:pPr indent="0" marL="0">
+            <a:pPr marL="0" indent="0">
               <a:buNone/>
             </a:pPr>
             <a:r>
@@ -18429,7 +18204,7 @@
           <a:bodyPr wrap="square" lIns="0" tIns="0" rIns="0" bIns="0" rtlCol="0" anchor="ctr"/>
           <a:lstStyle/>
           <a:p>
-            <a:pPr indent="0" marL="0">
+            <a:pPr marL="0" indent="0">
               <a:buNone/>
             </a:pPr>
             <a:r>
@@ -18473,7 +18248,7 @@
             <a:prstDash val="solid"/>
           </a:ln>
           <a:effectLst>
-            <a:outerShdw sx="100000" sy="100000" kx="0" ky="0" algn="bl" rotWithShape="0" blurRad="88900" dist="25400" dir="5400000">
+            <a:outerShdw blurRad="88900" dist="25400" dir="5400000" algn="bl" rotWithShape="0">
               <a:srgbClr val="0A1C33">
                 <a:alpha val="16000"/>
               </a:srgbClr>
@@ -18524,7 +18299,7 @@
           <a:bodyPr wrap="square" lIns="0" tIns="0" rIns="0" bIns="0" rtlCol="0" anchor="ctr"/>
           <a:lstStyle/>
           <a:p>
-            <a:pPr algn="ctr" indent="0" marL="0">
+            <a:pPr marL="0" indent="0" algn="ctr">
               <a:buNone/>
             </a:pPr>
             <a:endParaRPr lang="en-US" sz="1200" dirty="0"/>
@@ -18572,7 +18347,7 @@
           <a:bodyPr wrap="square" lIns="0" tIns="0" rIns="0" bIns="0" rtlCol="0" anchor="ctr"/>
           <a:lstStyle/>
           <a:p>
-            <a:pPr indent="0" marL="0">
+            <a:pPr marL="0" indent="0">
               <a:buNone/>
             </a:pPr>
             <a:r>
@@ -18611,7 +18386,7 @@
           <a:bodyPr wrap="square" lIns="0" tIns="0" rIns="0" bIns="0" rtlCol="0" anchor="ctr"/>
           <a:lstStyle/>
           <a:p>
-            <a:pPr indent="0" marL="0">
+            <a:pPr marL="0" indent="0">
               <a:buNone/>
             </a:pPr>
             <a:r>
@@ -18655,7 +18430,7 @@
             <a:prstDash val="solid"/>
           </a:ln>
           <a:effectLst>
-            <a:outerShdw sx="100000" sy="100000" kx="0" ky="0" algn="bl" rotWithShape="0" blurRad="88900" dist="25400" dir="5400000">
+            <a:outerShdw blurRad="88900" dist="25400" dir="5400000" algn="bl" rotWithShape="0">
               <a:srgbClr val="0A1C33">
                 <a:alpha val="16000"/>
               </a:srgbClr>
@@ -18706,7 +18481,7 @@
           <a:bodyPr wrap="square" lIns="0" tIns="0" rIns="0" bIns="0" rtlCol="0" anchor="ctr"/>
           <a:lstStyle/>
           <a:p>
-            <a:pPr algn="ctr" indent="0" marL="0">
+            <a:pPr marL="0" indent="0" algn="ctr">
               <a:buNone/>
             </a:pPr>
             <a:endParaRPr lang="en-US" sz="1200" dirty="0"/>
@@ -18754,7 +18529,7 @@
           <a:bodyPr wrap="square" lIns="0" tIns="0" rIns="0" bIns="0" rtlCol="0" anchor="ctr"/>
           <a:lstStyle/>
           <a:p>
-            <a:pPr indent="0" marL="0">
+            <a:pPr marL="0" indent="0">
               <a:buNone/>
             </a:pPr>
             <a:r>
@@ -18793,7 +18568,7 @@
           <a:bodyPr wrap="square" lIns="0" tIns="0" rIns="0" bIns="0" rtlCol="0" anchor="ctr"/>
           <a:lstStyle/>
           <a:p>
-            <a:pPr indent="0" marL="0">
+            <a:pPr marL="0" indent="0">
               <a:buNone/>
             </a:pPr>
             <a:r>
@@ -18832,7 +18607,7 @@
           <a:bodyPr wrap="square" lIns="0" tIns="0" rIns="0" bIns="0" rtlCol="0" anchor="ctr"/>
           <a:lstStyle/>
           <a:p>
-            <a:pPr algn="r" indent="0" marL="0">
+            <a:pPr marL="0" indent="0" algn="r">
               <a:buNone/>
             </a:pPr>
             <a:r>
@@ -18866,6 +18641,7 @@
         <a:solidFill>
           <a:srgbClr val="FFFFFF"/>
         </a:solidFill>
+        <a:effectLst/>
       </p:bgPr>
     </p:bg>
     <p:spTree>
@@ -18903,11 +18679,11 @@
           <a:bodyPr wrap="square" lIns="0" tIns="0" rIns="0" bIns="0" rtlCol="0" anchor="ctr"/>
           <a:lstStyle/>
           <a:p>
-            <a:pPr indent="0" marL="0">
-              <a:buNone/>
-            </a:pPr>
-            <a:r>
-              <a:rPr lang="en-US" sz="1200" b="1" spc="300" kern="0" dirty="0">
+            <a:pPr marL="0" indent="0">
+              <a:buNone/>
+            </a:pPr>
+            <a:r>
+              <a:rPr lang="en-US" sz="1200" b="1" kern="0" spc="300" dirty="0">
                 <a:solidFill>
                   <a:srgbClr val="1D4ED8"/>
                 </a:solidFill>
@@ -18942,7 +18718,7 @@
           <a:bodyPr wrap="square" lIns="0" tIns="0" rIns="0" bIns="0" rtlCol="0" anchor="ctr"/>
           <a:lstStyle/>
           <a:p>
-            <a:pPr indent="0" marL="0">
+            <a:pPr marL="0" indent="0">
               <a:buNone/>
             </a:pPr>
             <a:r>
@@ -18986,7 +18762,7 @@
             <a:prstDash val="solid"/>
           </a:ln>
           <a:effectLst>
-            <a:outerShdw sx="100000" sy="100000" kx="0" ky="0" algn="bl" rotWithShape="0" blurRad="88900" dist="25400" dir="5400000">
+            <a:outerShdw blurRad="88900" dist="25400" dir="5400000" algn="bl" rotWithShape="0">
               <a:srgbClr val="0A1C33">
                 <a:alpha val="16000"/>
               </a:srgbClr>
@@ -19037,11 +18813,11 @@
           <a:bodyPr wrap="square" lIns="0" tIns="0" rIns="0" bIns="0" rtlCol="0" anchor="ctr"/>
           <a:lstStyle/>
           <a:p>
-            <a:pPr indent="0" marL="0">
-              <a:buNone/>
-            </a:pPr>
-            <a:r>
-              <a:rPr lang="en-US" sz="1400" b="1" spc="100" kern="0" dirty="0">
+            <a:pPr marL="0" indent="0">
+              <a:buNone/>
+            </a:pPr>
+            <a:r>
+              <a:rPr lang="en-US" sz="1400" b="1" kern="0" spc="100" dirty="0">
                 <a:solidFill>
                   <a:srgbClr val="0E2240"/>
                 </a:solidFill>
@@ -19076,7 +18852,7 @@
           <a:bodyPr wrap="square" lIns="0" tIns="0" rIns="0" bIns="0" rtlCol="0" anchor="ctr"/>
           <a:lstStyle/>
           <a:p>
-            <a:pPr indent="0" marL="0">
+            <a:pPr marL="0" indent="0">
               <a:buNone/>
             </a:pPr>
             <a:r>
@@ -19120,7 +18896,7 @@
             <a:prstDash val="solid"/>
           </a:ln>
           <a:effectLst>
-            <a:outerShdw sx="100000" sy="100000" kx="0" ky="0" algn="bl" rotWithShape="0" blurRad="88900" dist="25400" dir="5400000">
+            <a:outerShdw blurRad="88900" dist="25400" dir="5400000" algn="bl" rotWithShape="0">
               <a:srgbClr val="0A1C33">
                 <a:alpha val="16000"/>
               </a:srgbClr>
@@ -19171,11 +18947,11 @@
           <a:bodyPr wrap="square" lIns="0" tIns="0" rIns="0" bIns="0" rtlCol="0" anchor="ctr"/>
           <a:lstStyle/>
           <a:p>
-            <a:pPr indent="0" marL="0">
-              <a:buNone/>
-            </a:pPr>
-            <a:r>
-              <a:rPr lang="en-US" sz="1400" b="1" spc="100" kern="0" dirty="0">
+            <a:pPr marL="0" indent="0">
+              <a:buNone/>
+            </a:pPr>
+            <a:r>
+              <a:rPr lang="en-US" sz="1400" b="1" kern="0" spc="100" dirty="0">
                 <a:solidFill>
                   <a:srgbClr val="0E2240"/>
                 </a:solidFill>
@@ -19210,7 +18986,7 @@
           <a:bodyPr wrap="square" lIns="0" tIns="0" rIns="0" bIns="0" rtlCol="0" anchor="ctr"/>
           <a:lstStyle/>
           <a:p>
-            <a:pPr indent="0" marL="0">
+            <a:pPr marL="0" indent="0">
               <a:buNone/>
             </a:pPr>
             <a:r>
@@ -19254,7 +19030,7 @@
             <a:prstDash val="solid"/>
           </a:ln>
           <a:effectLst>
-            <a:outerShdw sx="100000" sy="100000" kx="0" ky="0" algn="bl" rotWithShape="0" blurRad="88900" dist="25400" dir="5400000">
+            <a:outerShdw blurRad="88900" dist="25400" dir="5400000" algn="bl" rotWithShape="0">
               <a:srgbClr val="0A1C33">
                 <a:alpha val="16000"/>
               </a:srgbClr>
@@ -19305,11 +19081,11 @@
           <a:bodyPr wrap="square" lIns="0" tIns="0" rIns="0" bIns="0" rtlCol="0" anchor="ctr"/>
           <a:lstStyle/>
           <a:p>
-            <a:pPr indent="0" marL="0">
-              <a:buNone/>
-            </a:pPr>
-            <a:r>
-              <a:rPr lang="en-US" sz="1400" b="1" spc="100" kern="0" dirty="0">
+            <a:pPr marL="0" indent="0">
+              <a:buNone/>
+            </a:pPr>
+            <a:r>
+              <a:rPr lang="en-US" sz="1400" b="1" kern="0" spc="100" dirty="0">
                 <a:solidFill>
                   <a:srgbClr val="0E2240"/>
                 </a:solidFill>
@@ -19344,7 +19120,7 @@
           <a:bodyPr wrap="square" lIns="0" tIns="0" rIns="0" bIns="0" rtlCol="0" anchor="ctr"/>
           <a:lstStyle/>
           <a:p>
-            <a:pPr indent="0" marL="0">
+            <a:pPr marL="0" indent="0">
               <a:buNone/>
             </a:pPr>
             <a:r>
@@ -19388,7 +19164,7 @@
             <a:prstDash val="solid"/>
           </a:ln>
           <a:effectLst>
-            <a:outerShdw sx="100000" sy="100000" kx="0" ky="0" algn="bl" rotWithShape="0" blurRad="88900" dist="25400" dir="5400000">
+            <a:outerShdw blurRad="88900" dist="25400" dir="5400000" algn="bl" rotWithShape="0">
               <a:srgbClr val="0A1C33">
                 <a:alpha val="16000"/>
               </a:srgbClr>
@@ -19439,11 +19215,11 @@
           <a:bodyPr wrap="square" lIns="0" tIns="0" rIns="0" bIns="0" rtlCol="0" anchor="ctr"/>
           <a:lstStyle/>
           <a:p>
-            <a:pPr indent="0" marL="0">
-              <a:buNone/>
-            </a:pPr>
-            <a:r>
-              <a:rPr lang="en-US" sz="1400" b="1" spc="100" kern="0" dirty="0">
+            <a:pPr marL="0" indent="0">
+              <a:buNone/>
+            </a:pPr>
+            <a:r>
+              <a:rPr lang="en-US" sz="1400" b="1" kern="0" spc="100" dirty="0">
                 <a:solidFill>
                   <a:srgbClr val="0E2240"/>
                 </a:solidFill>
@@ -19478,7 +19254,7 @@
           <a:bodyPr wrap="square" lIns="0" tIns="0" rIns="0" bIns="0" rtlCol="0" anchor="ctr"/>
           <a:lstStyle/>
           <a:p>
-            <a:pPr indent="0" marL="0">
+            <a:pPr marL="0" indent="0">
               <a:buNone/>
             </a:pPr>
             <a:r>
@@ -19522,7 +19298,7 @@
             <a:prstDash val="solid"/>
           </a:ln>
           <a:effectLst>
-            <a:outerShdw sx="100000" sy="100000" kx="0" ky="0" algn="bl" rotWithShape="0" blurRad="88900" dist="25400" dir="5400000">
+            <a:outerShdw blurRad="88900" dist="25400" dir="5400000" algn="bl" rotWithShape="0">
               <a:srgbClr val="0A1C33">
                 <a:alpha val="16000"/>
               </a:srgbClr>
@@ -19573,11 +19349,11 @@
           <a:bodyPr wrap="square" lIns="0" tIns="0" rIns="0" bIns="0" rtlCol="0" anchor="ctr"/>
           <a:lstStyle/>
           <a:p>
-            <a:pPr indent="0" marL="0">
-              <a:buNone/>
-            </a:pPr>
-            <a:r>
-              <a:rPr lang="en-US" sz="1400" b="1" spc="100" kern="0" dirty="0">
+            <a:pPr marL="0" indent="0">
+              <a:buNone/>
+            </a:pPr>
+            <a:r>
+              <a:rPr lang="en-US" sz="1400" b="1" kern="0" spc="100" dirty="0">
                 <a:solidFill>
                   <a:srgbClr val="0E2240"/>
                 </a:solidFill>
@@ -19612,7 +19388,7 @@
           <a:bodyPr wrap="square" lIns="0" tIns="0" rIns="0" bIns="0" rtlCol="0" anchor="ctr"/>
           <a:lstStyle/>
           <a:p>
-            <a:pPr indent="0" marL="0">
+            <a:pPr marL="0" indent="0">
               <a:buNone/>
             </a:pPr>
             <a:r>
@@ -19656,7 +19432,7 @@
             <a:prstDash val="solid"/>
           </a:ln>
           <a:effectLst>
-            <a:outerShdw sx="100000" sy="100000" kx="0" ky="0" algn="bl" rotWithShape="0" blurRad="88900" dist="25400" dir="5400000">
+            <a:outerShdw blurRad="88900" dist="25400" dir="5400000" algn="bl" rotWithShape="0">
               <a:srgbClr val="0A1C33">
                 <a:alpha val="16000"/>
               </a:srgbClr>
@@ -19707,11 +19483,11 @@
           <a:bodyPr wrap="square" lIns="0" tIns="0" rIns="0" bIns="0" rtlCol="0" anchor="ctr"/>
           <a:lstStyle/>
           <a:p>
-            <a:pPr indent="0" marL="0">
-              <a:buNone/>
-            </a:pPr>
-            <a:r>
-              <a:rPr lang="en-US" sz="1400" b="1" spc="100" kern="0" dirty="0">
+            <a:pPr marL="0" indent="0">
+              <a:buNone/>
+            </a:pPr>
+            <a:r>
+              <a:rPr lang="en-US" sz="1400" b="1" kern="0" spc="100" dirty="0">
                 <a:solidFill>
                   <a:srgbClr val="0E2240"/>
                 </a:solidFill>
@@ -19746,7 +19522,7 @@
           <a:bodyPr wrap="square" lIns="0" tIns="0" rIns="0" bIns="0" rtlCol="0" anchor="ctr"/>
           <a:lstStyle/>
           <a:p>
-            <a:pPr indent="0" marL="0">
+            <a:pPr marL="0" indent="0">
               <a:buNone/>
             </a:pPr>
             <a:r>
@@ -19790,7 +19566,7 @@
             <a:prstDash val="solid"/>
           </a:ln>
           <a:effectLst>
-            <a:outerShdw sx="100000" sy="100000" kx="0" ky="0" algn="bl" rotWithShape="0" blurRad="88900" dist="25400" dir="5400000">
+            <a:outerShdw blurRad="88900" dist="25400" dir="5400000" algn="bl" rotWithShape="0">
               <a:srgbClr val="0A1C33">
                 <a:alpha val="16000"/>
               </a:srgbClr>
@@ -19841,11 +19617,11 @@
           <a:bodyPr wrap="square" lIns="0" tIns="0" rIns="0" bIns="0" rtlCol="0" anchor="ctr"/>
           <a:lstStyle/>
           <a:p>
-            <a:pPr indent="0" marL="0">
-              <a:buNone/>
-            </a:pPr>
-            <a:r>
-              <a:rPr lang="en-US" sz="1400" b="1" spc="100" kern="0" dirty="0">
+            <a:pPr marL="0" indent="0">
+              <a:buNone/>
+            </a:pPr>
+            <a:r>
+              <a:rPr lang="en-US" sz="1400" b="1" kern="0" spc="100" dirty="0">
                 <a:solidFill>
                   <a:srgbClr val="0E2240"/>
                 </a:solidFill>
@@ -19880,7 +19656,7 @@
           <a:bodyPr wrap="square" lIns="0" tIns="0" rIns="0" bIns="0" rtlCol="0" anchor="ctr"/>
           <a:lstStyle/>
           <a:p>
-            <a:pPr indent="0" marL="0">
+            <a:pPr marL="0" indent="0">
               <a:buNone/>
             </a:pPr>
             <a:r>
@@ -19919,7 +19695,7 @@
           <a:bodyPr wrap="square" lIns="0" tIns="0" rIns="0" bIns="0" rtlCol="0" anchor="ctr"/>
           <a:lstStyle/>
           <a:p>
-            <a:pPr indent="0" marL="0">
+            <a:pPr marL="0" indent="0">
               <a:buNone/>
             </a:pPr>
             <a:r>
@@ -19933,9 +19709,6 @@
               </a:rPr>
               <a:t>62 view modules</a:t>
             </a:r>
-            <a:pPr indent="0" marL="0">
-              <a:buNone/>
-            </a:pPr>
             <a:r>
               <a:rPr lang="en-US" sz="1300" dirty="0">
                 <a:solidFill>
@@ -19972,7 +19745,7 @@
           <a:bodyPr wrap="square" lIns="0" tIns="0" rIns="0" bIns="0" rtlCol="0" anchor="ctr"/>
           <a:lstStyle/>
           <a:p>
-            <a:pPr algn="r" indent="0" marL="0">
+            <a:pPr marL="0" indent="0" algn="r">
               <a:buNone/>
             </a:pPr>
             <a:r>
@@ -20006,6 +19779,7 @@
         <a:solidFill>
           <a:srgbClr val="FFFFFF"/>
         </a:solidFill>
+        <a:effectLst/>
       </p:bgPr>
     </p:bg>
     <p:spTree>
@@ -20043,11 +19817,11 @@
           <a:bodyPr wrap="square" lIns="0" tIns="0" rIns="0" bIns="0" rtlCol="0" anchor="ctr"/>
           <a:lstStyle/>
           <a:p>
-            <a:pPr indent="0" marL="0">
-              <a:buNone/>
-            </a:pPr>
-            <a:r>
-              <a:rPr lang="en-US" sz="1200" b="1" spc="300" kern="0" dirty="0">
+            <a:pPr marL="0" indent="0">
+              <a:buNone/>
+            </a:pPr>
+            <a:r>
+              <a:rPr lang="en-US" sz="1200" b="1" kern="0" spc="300" dirty="0">
                 <a:solidFill>
                   <a:srgbClr val="1D4ED8"/>
                 </a:solidFill>
@@ -20082,7 +19856,7 @@
           <a:bodyPr wrap="square" lIns="0" tIns="0" rIns="0" bIns="0" rtlCol="0" anchor="ctr"/>
           <a:lstStyle/>
           <a:p>
-            <a:pPr indent="0" marL="0">
+            <a:pPr marL="0" indent="0">
               <a:buNone/>
             </a:pPr>
             <a:r>
@@ -20126,7 +19900,7 @@
             <a:prstDash val="solid"/>
           </a:ln>
           <a:effectLst>
-            <a:outerShdw sx="100000" sy="100000" kx="0" ky="0" algn="bl" rotWithShape="0" blurRad="88900" dist="25400" dir="5400000">
+            <a:outerShdw blurRad="88900" dist="25400" dir="5400000" algn="bl" rotWithShape="0">
               <a:srgbClr val="0A1C33">
                 <a:alpha val="16000"/>
               </a:srgbClr>
@@ -20177,7 +19951,7 @@
           <a:bodyPr wrap="square" lIns="0" tIns="0" rIns="0" bIns="0" rtlCol="0" anchor="ctr"/>
           <a:lstStyle/>
           <a:p>
-            <a:pPr algn="ctr" indent="0" marL="0">
+            <a:pPr marL="0" indent="0" algn="ctr">
               <a:buNone/>
             </a:pPr>
             <a:r>
@@ -20216,7 +19990,7 @@
           <a:bodyPr wrap="square" lIns="0" tIns="0" rIns="0" bIns="0" rtlCol="0" anchor="ctr"/>
           <a:lstStyle/>
           <a:p>
-            <a:pPr indent="0" marL="0">
+            <a:pPr marL="0" indent="0">
               <a:buNone/>
             </a:pPr>
             <a:r>
@@ -20260,7 +20034,7 @@
             <a:prstDash val="solid"/>
           </a:ln>
           <a:effectLst>
-            <a:outerShdw sx="100000" sy="100000" kx="0" ky="0" algn="bl" rotWithShape="0" blurRad="88900" dist="25400" dir="5400000">
+            <a:outerShdw blurRad="88900" dist="25400" dir="5400000" algn="bl" rotWithShape="0">
               <a:srgbClr val="0A1C33">
                 <a:alpha val="16000"/>
               </a:srgbClr>
@@ -20311,7 +20085,7 @@
           <a:bodyPr wrap="square" lIns="0" tIns="0" rIns="0" bIns="0" rtlCol="0" anchor="ctr"/>
           <a:lstStyle/>
           <a:p>
-            <a:pPr algn="ctr" indent="0" marL="0">
+            <a:pPr marL="0" indent="0" algn="ctr">
               <a:buNone/>
             </a:pPr>
             <a:r>
@@ -20350,7 +20124,7 @@
           <a:bodyPr wrap="square" lIns="0" tIns="0" rIns="0" bIns="0" rtlCol="0" anchor="ctr"/>
           <a:lstStyle/>
           <a:p>
-            <a:pPr indent="0" marL="0">
+            <a:pPr marL="0" indent="0">
               <a:buNone/>
             </a:pPr>
             <a:r>
@@ -20394,7 +20168,7 @@
             <a:prstDash val="solid"/>
           </a:ln>
           <a:effectLst>
-            <a:outerShdw sx="100000" sy="100000" kx="0" ky="0" algn="bl" rotWithShape="0" blurRad="88900" dist="25400" dir="5400000">
+            <a:outerShdw blurRad="88900" dist="25400" dir="5400000" algn="bl" rotWithShape="0">
               <a:srgbClr val="0A1C33">
                 <a:alpha val="16000"/>
               </a:srgbClr>
@@ -20445,7 +20219,7 @@
           <a:bodyPr wrap="square" lIns="0" tIns="0" rIns="0" bIns="0" rtlCol="0" anchor="ctr"/>
           <a:lstStyle/>
           <a:p>
-            <a:pPr algn="ctr" indent="0" marL="0">
+            <a:pPr marL="0" indent="0" algn="ctr">
               <a:buNone/>
             </a:pPr>
             <a:r>
@@ -20484,7 +20258,7 @@
           <a:bodyPr wrap="square" lIns="0" tIns="0" rIns="0" bIns="0" rtlCol="0" anchor="ctr"/>
           <a:lstStyle/>
           <a:p>
-            <a:pPr indent="0" marL="0">
+            <a:pPr marL="0" indent="0">
               <a:buNone/>
             </a:pPr>
             <a:r>
@@ -20528,7 +20302,7 @@
             <a:prstDash val="solid"/>
           </a:ln>
           <a:effectLst>
-            <a:outerShdw sx="100000" sy="100000" kx="0" ky="0" algn="bl" rotWithShape="0" blurRad="88900" dist="25400" dir="5400000">
+            <a:outerShdw blurRad="88900" dist="25400" dir="5400000" algn="bl" rotWithShape="0">
               <a:srgbClr val="0A1C33">
                 <a:alpha val="16000"/>
               </a:srgbClr>
@@ -20579,7 +20353,7 @@
           <a:bodyPr wrap="square" lIns="0" tIns="0" rIns="0" bIns="0" rtlCol="0" anchor="ctr"/>
           <a:lstStyle/>
           <a:p>
-            <a:pPr algn="ctr" indent="0" marL="0">
+            <a:pPr marL="0" indent="0" algn="ctr">
               <a:buNone/>
             </a:pPr>
             <a:r>
@@ -20618,7 +20392,7 @@
           <a:bodyPr wrap="square" lIns="0" tIns="0" rIns="0" bIns="0" rtlCol="0" anchor="ctr"/>
           <a:lstStyle/>
           <a:p>
-            <a:pPr indent="0" marL="0">
+            <a:pPr marL="0" indent="0">
               <a:buNone/>
             </a:pPr>
             <a:r>
@@ -20657,7 +20431,7 @@
           <a:bodyPr wrap="square" lIns="0" tIns="0" rIns="0" bIns="0" rtlCol="0" anchor="ctr"/>
           <a:lstStyle/>
           <a:p>
-            <a:pPr algn="r" indent="0" marL="0">
+            <a:pPr marL="0" indent="0" algn="r">
               <a:buNone/>
             </a:pPr>
             <a:r>
@@ -20691,6 +20465,7 @@
         <a:solidFill>
           <a:srgbClr val="FFFFFF"/>
         </a:solidFill>
+        <a:effectLst/>
       </p:bgPr>
     </p:bg>
     <p:spTree>
@@ -20728,11 +20503,11 @@
           <a:bodyPr wrap="square" lIns="0" tIns="0" rIns="0" bIns="0" rtlCol="0" anchor="ctr"/>
           <a:lstStyle/>
           <a:p>
-            <a:pPr indent="0" marL="0">
-              <a:buNone/>
-            </a:pPr>
-            <a:r>
-              <a:rPr lang="en-US" sz="1200" b="1" spc="300" kern="0" dirty="0">
+            <a:pPr marL="0" indent="0">
+              <a:buNone/>
+            </a:pPr>
+            <a:r>
+              <a:rPr lang="en-US" sz="1200" b="1" kern="0" spc="300" dirty="0">
                 <a:solidFill>
                   <a:srgbClr val="1D4ED8"/>
                 </a:solidFill>
@@ -20767,7 +20542,7 @@
           <a:bodyPr wrap="square" lIns="0" tIns="0" rIns="0" bIns="0" rtlCol="0" anchor="ctr"/>
           <a:lstStyle/>
           <a:p>
-            <a:pPr indent="0" marL="0">
+            <a:pPr marL="0" indent="0">
               <a:buNone/>
             </a:pPr>
             <a:r>
@@ -20806,7 +20581,7 @@
           </a:solidFill>
           <a:ln/>
           <a:effectLst>
-            <a:outerShdw sx="100000" sy="100000" kx="0" ky="0" algn="bl" rotWithShape="0" blurRad="88900" dist="25400" dir="5400000">
+            <a:outerShdw blurRad="88900" dist="25400" dir="5400000" algn="bl" rotWithShape="0">
               <a:srgbClr val="0A1C33">
                 <a:alpha val="16000"/>
               </a:srgbClr>
@@ -20835,7 +20610,7 @@
           <a:bodyPr wrap="square" lIns="0" tIns="0" rIns="0" bIns="0" rtlCol="0" anchor="ctr"/>
           <a:lstStyle/>
           <a:p>
-            <a:pPr indent="0" marL="0">
+            <a:pPr marL="0" indent="0">
               <a:buNone/>
             </a:pPr>
             <a:r>
@@ -20874,7 +20649,7 @@
           <a:bodyPr wrap="square" lIns="0" tIns="0" rIns="0" bIns="0" rtlCol="0" anchor="ctr"/>
           <a:lstStyle/>
           <a:p>
-            <a:pPr indent="0" marL="0">
+            <a:pPr marL="0" indent="0">
               <a:lnSpc>
                 <a:spcPct val="102000"/>
               </a:lnSpc>
@@ -20894,7 +20669,7 @@
             <a:endParaRPr lang="en-US" sz="1300" dirty="0"/>
           </a:p>
           <a:p>
-            <a:pPr indent="0" marL="0">
+            <a:pPr marL="0" indent="0">
               <a:lnSpc>
                 <a:spcPct val="102000"/>
               </a:lnSpc>
@@ -20956,7 +20731,7 @@
           </a:solidFill>
           <a:ln/>
           <a:effectLst>
-            <a:outerShdw sx="100000" sy="100000" kx="0" ky="0" algn="bl" rotWithShape="0" blurRad="88900" dist="25400" dir="5400000">
+            <a:outerShdw blurRad="88900" dist="25400" dir="5400000" algn="bl" rotWithShape="0">
               <a:srgbClr val="0A1C33">
                 <a:alpha val="16000"/>
               </a:srgbClr>
@@ -20985,7 +20760,7 @@
           <a:bodyPr wrap="square" lIns="0" tIns="0" rIns="0" bIns="0" rtlCol="0" anchor="ctr"/>
           <a:lstStyle/>
           <a:p>
-            <a:pPr indent="0" marL="0">
+            <a:pPr marL="0" indent="0">
               <a:buNone/>
             </a:pPr>
             <a:r>
@@ -21024,7 +20799,7 @@
           <a:bodyPr wrap="square" lIns="0" tIns="0" rIns="0" bIns="0" rtlCol="0" anchor="ctr"/>
           <a:lstStyle/>
           <a:p>
-            <a:pPr indent="0" marL="0">
+            <a:pPr marL="0" indent="0">
               <a:lnSpc>
                 <a:spcPct val="102000"/>
               </a:lnSpc>
@@ -21044,7 +20819,7 @@
             <a:endParaRPr lang="en-US" sz="1300" dirty="0"/>
           </a:p>
           <a:p>
-            <a:pPr indent="0" marL="0">
+            <a:pPr marL="0" indent="0">
               <a:lnSpc>
                 <a:spcPct val="102000"/>
               </a:lnSpc>
@@ -21106,7 +20881,7 @@
           </a:solidFill>
           <a:ln/>
           <a:effectLst>
-            <a:outerShdw sx="100000" sy="100000" kx="0" ky="0" algn="bl" rotWithShape="0" blurRad="88900" dist="25400" dir="5400000">
+            <a:outerShdw blurRad="88900" dist="25400" dir="5400000" algn="bl" rotWithShape="0">
               <a:srgbClr val="0A1C33">
                 <a:alpha val="16000"/>
               </a:srgbClr>
@@ -21135,7 +20910,7 @@
           <a:bodyPr wrap="square" lIns="0" tIns="0" rIns="0" bIns="0" rtlCol="0" anchor="ctr"/>
           <a:lstStyle/>
           <a:p>
-            <a:pPr indent="0" marL="0">
+            <a:pPr marL="0" indent="0">
               <a:buNone/>
             </a:pPr>
             <a:r>
@@ -21174,7 +20949,7 @@
           <a:bodyPr wrap="square" lIns="0" tIns="0" rIns="0" bIns="0" rtlCol="0" anchor="ctr"/>
           <a:lstStyle/>
           <a:p>
-            <a:pPr indent="0" marL="0">
+            <a:pPr marL="0" indent="0">
               <a:lnSpc>
                 <a:spcPct val="102000"/>
               </a:lnSpc>
@@ -21194,7 +20969,7 @@
             <a:endParaRPr lang="en-US" sz="1300" dirty="0"/>
           </a:p>
           <a:p>
-            <a:pPr indent="0" marL="0">
+            <a:pPr marL="0" indent="0">
               <a:lnSpc>
                 <a:spcPct val="102000"/>
               </a:lnSpc>
@@ -21256,7 +21031,7 @@
           </a:solidFill>
           <a:ln/>
           <a:effectLst>
-            <a:outerShdw sx="100000" sy="100000" kx="0" ky="0" algn="bl" rotWithShape="0" blurRad="88900" dist="25400" dir="5400000">
+            <a:outerShdw blurRad="88900" dist="25400" dir="5400000" algn="bl" rotWithShape="0">
               <a:srgbClr val="0A1C33">
                 <a:alpha val="16000"/>
               </a:srgbClr>
@@ -21285,7 +21060,7 @@
           <a:bodyPr wrap="square" lIns="0" tIns="0" rIns="0" bIns="0" rtlCol="0" anchor="ctr"/>
           <a:lstStyle/>
           <a:p>
-            <a:pPr indent="0" marL="0">
+            <a:pPr marL="0" indent="0">
               <a:buNone/>
             </a:pPr>
             <a:r>
@@ -21324,7 +21099,7 @@
           <a:bodyPr wrap="square" lIns="0" tIns="0" rIns="0" bIns="0" rtlCol="0" anchor="ctr"/>
           <a:lstStyle/>
           <a:p>
-            <a:pPr indent="0" marL="0">
+            <a:pPr marL="0" indent="0">
               <a:lnSpc>
                 <a:spcPct val="102000"/>
               </a:lnSpc>
@@ -21344,7 +21119,7 @@
             <a:endParaRPr lang="en-US" sz="1300" dirty="0"/>
           </a:p>
           <a:p>
-            <a:pPr indent="0" marL="0">
+            <a:pPr marL="0" indent="0">
               <a:lnSpc>
                 <a:spcPct val="102000"/>
               </a:lnSpc>
@@ -21406,7 +21181,7 @@
           </a:solidFill>
           <a:ln/>
           <a:effectLst>
-            <a:outerShdw sx="100000" sy="100000" kx="0" ky="0" algn="bl" rotWithShape="0" blurRad="88900" dist="25400" dir="5400000">
+            <a:outerShdw blurRad="88900" dist="25400" dir="5400000" algn="bl" rotWithShape="0">
               <a:srgbClr val="0A1C33">
                 <a:alpha val="16000"/>
               </a:srgbClr>
@@ -21435,7 +21210,7 @@
           <a:bodyPr wrap="square" lIns="0" tIns="0" rIns="0" bIns="0" rtlCol="0" anchor="ctr"/>
           <a:lstStyle/>
           <a:p>
-            <a:pPr indent="0" marL="0">
+            <a:pPr marL="0" indent="0">
               <a:buNone/>
             </a:pPr>
             <a:r>
@@ -21474,7 +21249,7 @@
           <a:bodyPr wrap="square" lIns="0" tIns="0" rIns="0" bIns="0" rtlCol="0" anchor="ctr"/>
           <a:lstStyle/>
           <a:p>
-            <a:pPr indent="0" marL="0">
+            <a:pPr marL="0" indent="0">
               <a:lnSpc>
                 <a:spcPct val="102000"/>
               </a:lnSpc>
@@ -21494,7 +21269,7 @@
             <a:endParaRPr lang="en-US" sz="1300" dirty="0"/>
           </a:p>
           <a:p>
-            <a:pPr indent="0" marL="0">
+            <a:pPr marL="0" indent="0">
               <a:lnSpc>
                 <a:spcPct val="102000"/>
               </a:lnSpc>
@@ -21556,7 +21331,7 @@
           </a:solidFill>
           <a:ln/>
           <a:effectLst>
-            <a:outerShdw sx="100000" sy="100000" kx="0" ky="0" algn="bl" rotWithShape="0" blurRad="88900" dist="25400" dir="5400000">
+            <a:outerShdw blurRad="88900" dist="25400" dir="5400000" algn="bl" rotWithShape="0">
               <a:srgbClr val="0A1C33">
                 <a:alpha val="16000"/>
               </a:srgbClr>
@@ -21585,7 +21360,7 @@
           <a:bodyPr wrap="square" lIns="0" tIns="0" rIns="0" bIns="0" rtlCol="0" anchor="ctr"/>
           <a:lstStyle/>
           <a:p>
-            <a:pPr indent="0" marL="0">
+            <a:pPr marL="0" indent="0">
               <a:buNone/>
             </a:pPr>
             <a:r>
@@ -21624,7 +21399,7 @@
           <a:bodyPr wrap="square" lIns="0" tIns="0" rIns="0" bIns="0" rtlCol="0" anchor="ctr"/>
           <a:lstStyle/>
           <a:p>
-            <a:pPr indent="0" marL="0">
+            <a:pPr marL="0" indent="0">
               <a:lnSpc>
                 <a:spcPct val="102000"/>
               </a:lnSpc>
@@ -21644,7 +21419,7 @@
             <a:endParaRPr lang="en-US" sz="1300" dirty="0"/>
           </a:p>
           <a:p>
-            <a:pPr indent="0" marL="0">
+            <a:pPr marL="0" indent="0">
               <a:lnSpc>
                 <a:spcPct val="102000"/>
               </a:lnSpc>
@@ -21686,7 +21461,7 @@
           <a:bodyPr wrap="square" lIns="0" tIns="0" rIns="0" bIns="0" rtlCol="0" anchor="ctr"/>
           <a:lstStyle/>
           <a:p>
-            <a:pPr indent="0" marL="0">
+            <a:pPr marL="0" indent="0">
               <a:buNone/>
             </a:pPr>
             <a:r>
@@ -21700,9 +21475,6 @@
               </a:rPr>
               <a:t>Step 6 fans out automatically:  </a:t>
             </a:r>
-            <a:pPr indent="0" marL="0">
-              <a:buNone/>
-            </a:pPr>
             <a:r>
               <a:rPr lang="en-US" sz="1400" dirty="0">
                 <a:solidFill>
@@ -21744,7 +21516,7 @@
             <a:prstDash val="solid"/>
           </a:ln>
           <a:effectLst>
-            <a:outerShdw sx="100000" sy="100000" kx="0" ky="0" algn="bl" rotWithShape="0" blurRad="88900" dist="25400" dir="5400000">
+            <a:outerShdw blurRad="88900" dist="25400" dir="5400000" algn="bl" rotWithShape="0">
               <a:srgbClr val="0A1C33">
                 <a:alpha val="16000"/>
               </a:srgbClr>
@@ -21773,7 +21545,7 @@
           <a:bodyPr wrap="square" lIns="0" tIns="0" rIns="0" bIns="0" rtlCol="0" anchor="ctr"/>
           <a:lstStyle/>
           <a:p>
-            <a:pPr indent="0" marL="0">
+            <a:pPr marL="0" indent="0">
               <a:buNone/>
             </a:pPr>
             <a:r>
@@ -21834,7 +21606,7 @@
           <a:bodyPr wrap="square" lIns="0" tIns="0" rIns="0" bIns="0" rtlCol="0" anchor="ctr"/>
           <a:lstStyle/>
           <a:p>
-            <a:pPr algn="ctr" indent="0" marL="0">
+            <a:pPr marL="0" indent="0" algn="ctr">
               <a:buNone/>
             </a:pPr>
             <a:r>
@@ -21873,7 +21645,7 @@
           <a:bodyPr wrap="square" lIns="0" tIns="0" rIns="0" bIns="0" rtlCol="0" anchor="ctr"/>
           <a:lstStyle/>
           <a:p>
-            <a:pPr indent="0" marL="0">
+            <a:pPr marL="0" indent="0">
               <a:buNone/>
             </a:pPr>
             <a:r>
@@ -21934,7 +21706,7 @@
           <a:bodyPr wrap="square" lIns="0" tIns="0" rIns="0" bIns="0" rtlCol="0" anchor="ctr"/>
           <a:lstStyle/>
           <a:p>
-            <a:pPr algn="ctr" indent="0" marL="0">
+            <a:pPr marL="0" indent="0" algn="ctr">
               <a:buNone/>
             </a:pPr>
             <a:r>
@@ -21973,7 +21745,7 @@
           <a:bodyPr wrap="square" lIns="0" tIns="0" rIns="0" bIns="0" rtlCol="0" anchor="ctr"/>
           <a:lstStyle/>
           <a:p>
-            <a:pPr indent="0" marL="0">
+            <a:pPr marL="0" indent="0">
               <a:buNone/>
             </a:pPr>
             <a:r>
@@ -22034,7 +21806,7 @@
           <a:bodyPr wrap="square" lIns="0" tIns="0" rIns="0" bIns="0" rtlCol="0" anchor="ctr"/>
           <a:lstStyle/>
           <a:p>
-            <a:pPr algn="ctr" indent="0" marL="0">
+            <a:pPr marL="0" indent="0" algn="ctr">
               <a:buNone/>
             </a:pPr>
             <a:r>
@@ -22073,7 +21845,7 @@
           <a:bodyPr wrap="square" lIns="0" tIns="0" rIns="0" bIns="0" rtlCol="0" anchor="ctr"/>
           <a:lstStyle/>
           <a:p>
-            <a:pPr indent="0" marL="0">
+            <a:pPr marL="0" indent="0">
               <a:buNone/>
             </a:pPr>
             <a:r>
@@ -22134,7 +21906,7 @@
           <a:bodyPr wrap="square" lIns="0" tIns="0" rIns="0" bIns="0" rtlCol="0" anchor="ctr"/>
           <a:lstStyle/>
           <a:p>
-            <a:pPr algn="ctr" indent="0" marL="0">
+            <a:pPr marL="0" indent="0" algn="ctr">
               <a:buNone/>
             </a:pPr>
             <a:r>
@@ -22173,7 +21945,7 @@
           <a:bodyPr wrap="square" lIns="0" tIns="0" rIns="0" bIns="0" rtlCol="0" anchor="ctr"/>
           <a:lstStyle/>
           <a:p>
-            <a:pPr indent="0" marL="0">
+            <a:pPr marL="0" indent="0">
               <a:buNone/>
             </a:pPr>
             <a:r>
@@ -22212,7 +21984,7 @@
           <a:bodyPr wrap="square" lIns="0" tIns="0" rIns="0" bIns="0" rtlCol="0" anchor="ctr"/>
           <a:lstStyle/>
           <a:p>
-            <a:pPr indent="0" marL="0">
+            <a:pPr marL="0" indent="0">
               <a:buNone/>
             </a:pPr>
             <a:r>
@@ -22251,7 +22023,7 @@
           <a:bodyPr wrap="square" lIns="0" tIns="0" rIns="0" bIns="0" rtlCol="0" anchor="ctr"/>
           <a:lstStyle/>
           <a:p>
-            <a:pPr algn="r" indent="0" marL="0">
+            <a:pPr marL="0" indent="0" algn="r">
               <a:buNone/>
             </a:pPr>
             <a:r>
@@ -22570,4 +22342,319 @@
     </a:ext>
   </a:extLst>
 </a:theme>
+</file>
+
+<file path=ppt/theme/theme2.xml><?xml version="1.0" encoding="utf-8"?>
+<a:theme xmlns:a="http://schemas.openxmlformats.org/drawingml/2006/main" name="Office Theme">
+  <a:themeElements>
+    <a:clrScheme name="Office">
+      <a:dk1>
+        <a:sysClr val="windowText" lastClr="000000"/>
+      </a:dk1>
+      <a:lt1>
+        <a:sysClr val="window" lastClr="FFFFFF"/>
+      </a:lt1>
+      <a:dk2>
+        <a:srgbClr val="0E2841"/>
+      </a:dk2>
+      <a:lt2>
+        <a:srgbClr val="E8E8E8"/>
+      </a:lt2>
+      <a:accent1>
+        <a:srgbClr val="156082"/>
+      </a:accent1>
+      <a:accent2>
+        <a:srgbClr val="E97132"/>
+      </a:accent2>
+      <a:accent3>
+        <a:srgbClr val="196B24"/>
+      </a:accent3>
+      <a:accent4>
+        <a:srgbClr val="0F9ED5"/>
+      </a:accent4>
+      <a:accent5>
+        <a:srgbClr val="A02B93"/>
+      </a:accent5>
+      <a:accent6>
+        <a:srgbClr val="4EA72E"/>
+      </a:accent6>
+      <a:hlink>
+        <a:srgbClr val="467886"/>
+      </a:hlink>
+      <a:folHlink>
+        <a:srgbClr val="96607D"/>
+      </a:folHlink>
+    </a:clrScheme>
+    <a:fontScheme name="Office">
+      <a:majorFont>
+        <a:latin typeface="Aptos Display" panose="02110004020202020204"/>
+        <a:ea typeface=""/>
+        <a:cs typeface=""/>
+        <a:font script="Jpan" typeface="游ゴシック Light"/>
+        <a:font script="Hang" typeface="맑은 고딕"/>
+        <a:font script="Hans" typeface="等线 Light"/>
+        <a:font script="Hant" typeface="新細明體"/>
+        <a:font script="Arab" typeface="Times New Roman"/>
+        <a:font script="Hebr" typeface="Times New Roman"/>
+        <a:font script="Thai" typeface="Angsana New"/>
+        <a:font script="Ethi" typeface="Nyala"/>
+        <a:font script="Beng" typeface="Vrinda"/>
+        <a:font script="Gujr" typeface="Shruti"/>
+        <a:font script="Khmr" typeface="MoolBoran"/>
+        <a:font script="Knda" typeface="Tunga"/>
+        <a:font script="Guru" typeface="Raavi"/>
+        <a:font script="Cans" typeface="Euphemia"/>
+        <a:font script="Cher" typeface="Plantagenet Cherokee"/>
+        <a:font script="Yiii" typeface="Microsoft Yi Baiti"/>
+        <a:font script="Tibt" typeface="Microsoft Himalaya"/>
+        <a:font script="Thaa" typeface="MV Boli"/>
+        <a:font script="Deva" typeface="Mangal"/>
+        <a:font script="Telu" typeface="Gautami"/>
+        <a:font script="Taml" typeface="Latha"/>
+        <a:font script="Syrc" typeface="Estrangelo Edessa"/>
+        <a:font script="Orya" typeface="Kalinga"/>
+        <a:font script="Mlym" typeface="Kartika"/>
+        <a:font script="Laoo" typeface="DokChampa"/>
+        <a:font script="Sinh" typeface="Iskoola Pota"/>
+        <a:font script="Mong" typeface="Mongolian Baiti"/>
+        <a:font script="Viet" typeface="Times New Roman"/>
+        <a:font script="Uigh" typeface="Microsoft Uighur"/>
+        <a:font script="Geor" typeface="Sylfaen"/>
+        <a:font script="Armn" typeface="Arial"/>
+        <a:font script="Bugi" typeface="Leelawadee UI"/>
+        <a:font script="Bopo" typeface="Microsoft JhengHei"/>
+        <a:font script="Java" typeface="Javanese Text"/>
+        <a:font script="Lisu" typeface="Segoe UI"/>
+        <a:font script="Mymr" typeface="Myanmar Text"/>
+        <a:font script="Nkoo" typeface="Ebrima"/>
+        <a:font script="Olck" typeface="Nirmala UI"/>
+        <a:font script="Osma" typeface="Ebrima"/>
+        <a:font script="Phag" typeface="Phagspa"/>
+        <a:font script="Syrn" typeface="Estrangelo Edessa"/>
+        <a:font script="Syrj" typeface="Estrangelo Edessa"/>
+        <a:font script="Syre" typeface="Estrangelo Edessa"/>
+        <a:font script="Sora" typeface="Nirmala UI"/>
+        <a:font script="Tale" typeface="Microsoft Tai Le"/>
+        <a:font script="Talu" typeface="Microsoft New Tai Lue"/>
+        <a:font script="Tfng" typeface="Ebrima"/>
+      </a:majorFont>
+      <a:minorFont>
+        <a:latin typeface="Aptos" panose="02110004020202020204"/>
+        <a:ea typeface=""/>
+        <a:cs typeface=""/>
+        <a:font script="Jpan" typeface="游ゴシック"/>
+        <a:font script="Hang" typeface="맑은 고딕"/>
+        <a:font script="Hans" typeface="等线"/>
+        <a:font script="Hant" typeface="新細明體"/>
+        <a:font script="Arab" typeface="Arial"/>
+        <a:font script="Hebr" typeface="Arial"/>
+        <a:font script="Thai" typeface="Cordia New"/>
+        <a:font script="Ethi" typeface="Nyala"/>
+        <a:font script="Beng" typeface="Vrinda"/>
+        <a:font script="Gujr" typeface="Shruti"/>
+        <a:font script="Khmr" typeface="DaunPenh"/>
+        <a:font script="Knda" typeface="Tunga"/>
+        <a:font script="Guru" typeface="Raavi"/>
+        <a:font script="Cans" typeface="Euphemia"/>
+        <a:font script="Cher" typeface="Plantagenet Cherokee"/>
+        <a:font script="Yiii" typeface="Microsoft Yi Baiti"/>
+        <a:font script="Tibt" typeface="Microsoft Himalaya"/>
+        <a:font script="Thaa" typeface="MV Boli"/>
+        <a:font script="Deva" typeface="Mangal"/>
+        <a:font script="Telu" typeface="Gautami"/>
+        <a:font script="Taml" typeface="Latha"/>
+        <a:font script="Syrc" typeface="Estrangelo Edessa"/>
+        <a:font script="Orya" typeface="Kalinga"/>
+        <a:font script="Mlym" typeface="Kartika"/>
+        <a:font script="Laoo" typeface="DokChampa"/>
+        <a:font script="Sinh" typeface="Iskoola Pota"/>
+        <a:font script="Mong" typeface="Mongolian Baiti"/>
+        <a:font script="Viet" typeface="Arial"/>
+        <a:font script="Uigh" typeface="Microsoft Uighur"/>
+        <a:font script="Geor" typeface="Sylfaen"/>
+        <a:font script="Armn" typeface="Arial"/>
+        <a:font script="Bugi" typeface="Leelawadee UI"/>
+        <a:font script="Bopo" typeface="Microsoft JhengHei"/>
+        <a:font script="Java" typeface="Javanese Text"/>
+        <a:font script="Lisu" typeface="Segoe UI"/>
+        <a:font script="Mymr" typeface="Myanmar Text"/>
+        <a:font script="Nkoo" typeface="Ebrima"/>
+        <a:font script="Olck" typeface="Nirmala UI"/>
+        <a:font script="Osma" typeface="Ebrima"/>
+        <a:font script="Phag" typeface="Phagspa"/>
+        <a:font script="Syrn" typeface="Estrangelo Edessa"/>
+        <a:font script="Syrj" typeface="Estrangelo Edessa"/>
+        <a:font script="Syre" typeface="Estrangelo Edessa"/>
+        <a:font script="Sora" typeface="Nirmala UI"/>
+        <a:font script="Tale" typeface="Microsoft Tai Le"/>
+        <a:font script="Talu" typeface="Microsoft New Tai Lue"/>
+        <a:font script="Tfng" typeface="Ebrima"/>
+      </a:minorFont>
+    </a:fontScheme>
+    <a:fmtScheme name="Office">
+      <a:fillStyleLst>
+        <a:solidFill>
+          <a:schemeClr val="phClr"/>
+        </a:solidFill>
+        <a:gradFill rotWithShape="1">
+          <a:gsLst>
+            <a:gs pos="0">
+              <a:schemeClr val="phClr">
+                <a:lumMod val="110000"/>
+                <a:satMod val="105000"/>
+                <a:tint val="67000"/>
+              </a:schemeClr>
+            </a:gs>
+            <a:gs pos="50000">
+              <a:schemeClr val="phClr">
+                <a:lumMod val="105000"/>
+                <a:satMod val="103000"/>
+                <a:tint val="73000"/>
+              </a:schemeClr>
+            </a:gs>
+            <a:gs pos="100000">
+              <a:schemeClr val="phClr">
+                <a:lumMod val="105000"/>
+                <a:satMod val="109000"/>
+                <a:tint val="81000"/>
+              </a:schemeClr>
+            </a:gs>
+          </a:gsLst>
+          <a:lin ang="5400000" scaled="0"/>
+        </a:gradFill>
+        <a:gradFill rotWithShape="1">
+          <a:gsLst>
+            <a:gs pos="0">
+              <a:schemeClr val="phClr">
+                <a:satMod val="103000"/>
+                <a:lumMod val="102000"/>
+                <a:tint val="94000"/>
+              </a:schemeClr>
+            </a:gs>
+            <a:gs pos="50000">
+              <a:schemeClr val="phClr">
+                <a:satMod val="110000"/>
+                <a:lumMod val="100000"/>
+                <a:shade val="100000"/>
+              </a:schemeClr>
+            </a:gs>
+            <a:gs pos="100000">
+              <a:schemeClr val="phClr">
+                <a:lumMod val="99000"/>
+                <a:satMod val="120000"/>
+                <a:shade val="78000"/>
+              </a:schemeClr>
+            </a:gs>
+          </a:gsLst>
+          <a:lin ang="5400000" scaled="0"/>
+        </a:gradFill>
+      </a:fillStyleLst>
+      <a:lnStyleLst>
+        <a:ln w="12700" cap="flat" cmpd="sng" algn="ctr">
+          <a:solidFill>
+            <a:schemeClr val="phClr"/>
+          </a:solidFill>
+          <a:prstDash val="solid"/>
+          <a:miter lim="800000"/>
+        </a:ln>
+        <a:ln w="19050" cap="flat" cmpd="sng" algn="ctr">
+          <a:solidFill>
+            <a:schemeClr val="phClr"/>
+          </a:solidFill>
+          <a:prstDash val="solid"/>
+          <a:miter lim="800000"/>
+        </a:ln>
+        <a:ln w="25400" cap="flat" cmpd="sng" algn="ctr">
+          <a:solidFill>
+            <a:schemeClr val="phClr"/>
+          </a:solidFill>
+          <a:prstDash val="solid"/>
+          <a:miter lim="800000"/>
+        </a:ln>
+      </a:lnStyleLst>
+      <a:effectStyleLst>
+        <a:effectStyle>
+          <a:effectLst/>
+        </a:effectStyle>
+        <a:effectStyle>
+          <a:effectLst/>
+        </a:effectStyle>
+        <a:effectStyle>
+          <a:effectLst>
+            <a:outerShdw blurRad="57150" dist="19050" dir="5400000" algn="ctr" rotWithShape="0">
+              <a:srgbClr val="000000">
+                <a:alpha val="63000"/>
+              </a:srgbClr>
+            </a:outerShdw>
+          </a:effectLst>
+        </a:effectStyle>
+      </a:effectStyleLst>
+      <a:bgFillStyleLst>
+        <a:solidFill>
+          <a:schemeClr val="phClr"/>
+        </a:solidFill>
+        <a:solidFill>
+          <a:schemeClr val="phClr">
+            <a:tint val="95000"/>
+            <a:satMod val="170000"/>
+          </a:schemeClr>
+        </a:solidFill>
+        <a:gradFill rotWithShape="1">
+          <a:gsLst>
+            <a:gs pos="0">
+              <a:schemeClr val="phClr">
+                <a:tint val="93000"/>
+                <a:satMod val="150000"/>
+                <a:shade val="98000"/>
+                <a:lumMod val="102000"/>
+              </a:schemeClr>
+            </a:gs>
+            <a:gs pos="50000">
+              <a:schemeClr val="phClr">
+                <a:tint val="98000"/>
+                <a:satMod val="130000"/>
+                <a:shade val="90000"/>
+                <a:lumMod val="103000"/>
+              </a:schemeClr>
+            </a:gs>
+            <a:gs pos="100000">
+              <a:schemeClr val="phClr">
+                <a:shade val="63000"/>
+                <a:satMod val="120000"/>
+              </a:schemeClr>
+            </a:gs>
+          </a:gsLst>
+          <a:lin ang="5400000" scaled="0"/>
+        </a:gradFill>
+      </a:bgFillStyleLst>
+    </a:fmtScheme>
+  </a:themeElements>
+  <a:objectDefaults>
+    <a:lnDef>
+      <a:spPr/>
+      <a:bodyPr/>
+      <a:lstStyle/>
+      <a:style>
+        <a:lnRef idx="2">
+          <a:schemeClr val="accent1"/>
+        </a:lnRef>
+        <a:fillRef idx="0">
+          <a:schemeClr val="accent1"/>
+        </a:fillRef>
+        <a:effectRef idx="1">
+          <a:schemeClr val="accent1"/>
+        </a:effectRef>
+        <a:fontRef idx="minor">
+          <a:schemeClr val="tx1"/>
+        </a:fontRef>
+      </a:style>
+    </a:lnDef>
+  </a:objectDefaults>
+  <a:extraClrSchemeLst/>
+  <a:extLst>
+    <a:ext uri="{05A4C25C-085E-4340-85A3-A5531E510DB2}">
+      <thm15:themeFamily xmlns:thm15="http://schemas.microsoft.com/office/thememl/2012/main" name="Office Theme" id="{2E142A2C-CD16-42D6-873A-C26D2A0506FA}" vid="{1BDDFF52-6CD6-40A5-AB3C-68EB2F1E4D0A}"/>
+    </a:ext>
+  </a:extLst>
+</a:theme>
 </file>
--- a/sales-deck/PM-Control-Tower-Sales-Deck.pptx
+++ b/sales-deck/PM-Control-Tower-Sales-Deck.pptx
@@ -4,9 +4,6 @@
   <p:sldMasterIdLst>
     <p:sldMasterId id="2147483648" r:id="rId1"/>
   </p:sldMasterIdLst>
-  <p:notesMasterIdLst>
-    <p:notesMasterId r:id="rId20"/>
-  </p:notesMasterIdLst>
   <p:sldIdLst>
     <p:sldId id="256" r:id="rId2"/>
     <p:sldId id="257" r:id="rId3"/>
@@ -27,6 +24,9 @@
     <p:sldId id="272" r:id="rId18"/>
     <p:sldId id="273" r:id="rId19"/>
   </p:sldIdLst>
+  <p:notesMasterIdLst>
+    <p:notesMasterId r:id="rId20"/>
+  </p:notesMasterIdLst>
   <p:sldSz cx="12192000" cy="6858000"/>
   <p:notesSz cx="6858000" cy="12192000"/>
   <p:defaultTextStyle>
@@ -121,20 +121,13 @@
       </a:defRPr>
     </a:lvl9pPr>
   </p:defaultTextStyle>
-  <p:extLst>
-    <p:ext uri="{EFAFB233-063F-42B5-8137-9DF3F51BA10A}">
-      <p15:sldGuideLst xmlns:p15="http://schemas.microsoft.com/office/powerpoint/2012/main"/>
-    </p:ext>
-  </p:extLst>
 </p:presentation>
 </file>
 
 <file path=ppt/charts/chart1.xml><?xml version="1.0" encoding="utf-8"?>
-<c:chartSpace xmlns:c="http://schemas.openxmlformats.org/drawingml/2006/chart" xmlns:a="http://schemas.openxmlformats.org/drawingml/2006/main" xmlns:r="http://schemas.openxmlformats.org/officeDocument/2006/relationships" xmlns:c16r2="http://schemas.microsoft.com/office/drawing/2015/06/chart">
+<c:chartSpace xmlns:c="http://schemas.openxmlformats.org/drawingml/2006/chart" xmlns:a="http://schemas.openxmlformats.org/drawingml/2006/main" xmlns:r="http://schemas.openxmlformats.org/officeDocument/2006/relationships">
   <c:date1904 val="0"/>
-  <c:lang val="en-US"/>
   <c:roundedCorners val="1"/>
-  <c:style val="2"/>
   <c:chart>
     <c:autoTitleDeleted val="1"/>
     <c:plotArea>
@@ -166,26 +159,18 @@
           <c:invertIfNegative val="0"/>
           <c:dLbls>
             <c:numFmt formatCode="0.00" sourceLinked="0"/>
-            <c:spPr>
-              <a:noFill/>
-              <a:ln>
-                <a:noFill/>
-              </a:ln>
-              <a:effectLst/>
-            </c:spPr>
             <c:txPr>
               <a:bodyPr/>
               <a:lstStyle/>
               <a:p>
                 <a:pPr>
-                  <a:defRPr sz="1000" b="0" i="0" u="none" strike="noStrike">
+                  <a:defRPr b="0" i="0" strike="noStrike" sz="1000" u="none">
                     <a:solidFill>
                       <a:srgbClr val="0E2240"/>
                     </a:solidFill>
                     <a:latin typeface="Arial"/>
                   </a:defRPr>
                 </a:pPr>
-                <a:endParaRPr lang="en-US"/>
               </a:p>
             </c:txPr>
             <c:showLegendKey val="0"/>
@@ -195,31 +180,28 @@
             <c:showPercent val="0"/>
             <c:showBubbleSize val="0"/>
             <c:showLeaderLines val="0"/>
-            <c:extLst>
-              <c:ext xmlns:c15="http://schemas.microsoft.com/office/drawing/2012/chart" uri="{CE6537A1-D6FC-4f65-9D91-7224C49458BB}">
-                <c15:showLeaderLines val="0"/>
-              </c:ext>
-            </c:extLst>
           </c:dLbls>
           <c:cat>
-            <c:strRef>
+            <c:multiLvlStrRef>
               <c:f>Sheet1!$A$2:$A$5</c:f>
-              <c:strCache>
+              <c:multiLvlStrCache>
                 <c:ptCount val="4"/>
-                <c:pt idx="0">
-                  <c:v>ERP-001</c:v>
-                </c:pt>
-                <c:pt idx="1">
-                  <c:v>DATA-002</c:v>
-                </c:pt>
-                <c:pt idx="2">
-                  <c:v>PORT-003</c:v>
-                </c:pt>
-                <c:pt idx="3">
-                  <c:v>MOB-004</c:v>
-                </c:pt>
-              </c:strCache>
-            </c:strRef>
+                <c:lvl>
+                  <c:pt idx="0">
+                    <c:v>ERP-001</c:v>
+                  </c:pt>
+                  <c:pt idx="1">
+                    <c:v>DATA-002</c:v>
+                  </c:pt>
+                  <c:pt idx="2">
+                    <c:v>PORT-003</c:v>
+                  </c:pt>
+                  <c:pt idx="3">
+                    <c:v>MOB-004</c:v>
+                  </c:pt>
+                </c:lvl>
+              </c:multiLvlStrCache>
+            </c:multiLvlStrRef>
           </c:cat>
           <c:val>
             <c:numRef>
@@ -242,11 +224,6 @@
               </c:numCache>
             </c:numRef>
           </c:val>
-          <c:extLst>
-            <c:ext xmlns:c16="http://schemas.microsoft.com/office/drawing/2014/chart" uri="{C3380CC4-5D6E-409C-BE32-E72D297353CC}">
-              <c16:uniqueId val="{00000000-3AE9-443C-AC70-AAE6F998E8C3}"/>
-            </c:ext>
-          </c:extLst>
         </c:ser>
         <c:ser>
           <c:idx val="1"/>
@@ -271,26 +248,18 @@
           <c:invertIfNegative val="0"/>
           <c:dLbls>
             <c:numFmt formatCode="0.00" sourceLinked="0"/>
-            <c:spPr>
-              <a:noFill/>
-              <a:ln>
-                <a:noFill/>
-              </a:ln>
-              <a:effectLst/>
-            </c:spPr>
             <c:txPr>
               <a:bodyPr/>
               <a:lstStyle/>
               <a:p>
                 <a:pPr>
-                  <a:defRPr sz="1000" b="0" i="0" u="none" strike="noStrike">
+                  <a:defRPr b="0" i="0" strike="noStrike" sz="1000" u="none">
                     <a:solidFill>
                       <a:srgbClr val="0E2240"/>
                     </a:solidFill>
                     <a:latin typeface="Arial"/>
                   </a:defRPr>
                 </a:pPr>
-                <a:endParaRPr lang="en-US"/>
               </a:p>
             </c:txPr>
             <c:showLegendKey val="0"/>
@@ -300,31 +269,28 @@
             <c:showPercent val="0"/>
             <c:showBubbleSize val="0"/>
             <c:showLeaderLines val="0"/>
-            <c:extLst>
-              <c:ext xmlns:c15="http://schemas.microsoft.com/office/drawing/2012/chart" uri="{CE6537A1-D6FC-4f65-9D91-7224C49458BB}">
-                <c15:showLeaderLines val="0"/>
-              </c:ext>
-            </c:extLst>
           </c:dLbls>
           <c:cat>
-            <c:strRef>
+            <c:multiLvlStrRef>
               <c:f>Sheet1!$A$2:$A$5</c:f>
-              <c:strCache>
+              <c:multiLvlStrCache>
                 <c:ptCount val="4"/>
-                <c:pt idx="0">
-                  <c:v>ERP-001</c:v>
-                </c:pt>
-                <c:pt idx="1">
-                  <c:v>DATA-002</c:v>
-                </c:pt>
-                <c:pt idx="2">
-                  <c:v>PORT-003</c:v>
-                </c:pt>
-                <c:pt idx="3">
-                  <c:v>MOB-004</c:v>
-                </c:pt>
-              </c:strCache>
-            </c:strRef>
+                <c:lvl>
+                  <c:pt idx="0">
+                    <c:v>ERP-001</c:v>
+                  </c:pt>
+                  <c:pt idx="1">
+                    <c:v>DATA-002</c:v>
+                  </c:pt>
+                  <c:pt idx="2">
+                    <c:v>PORT-003</c:v>
+                  </c:pt>
+                  <c:pt idx="3">
+                    <c:v>MOB-004</c:v>
+                  </c:pt>
+                </c:lvl>
+              </c:multiLvlStrCache>
+            </c:multiLvlStrRef>
           </c:cat>
           <c:val>
             <c:numRef>
@@ -347,23 +313,36 @@
               </c:numCache>
             </c:numRef>
           </c:val>
-          <c:extLst>
-            <c:ext xmlns:c16="http://schemas.microsoft.com/office/drawing/2014/chart" uri="{C3380CC4-5D6E-409C-BE32-E72D297353CC}">
-              <c16:uniqueId val="{00000001-3AE9-443C-AC70-AAE6F998E8C3}"/>
-            </c:ext>
-          </c:extLst>
         </c:ser>
         <c:dLbls>
+          <c:numFmt formatCode="0.00" sourceLinked="0"/>
+          <c:txPr>
+            <a:bodyPr/>
+            <a:lstStyle/>
+            <a:p>
+              <a:pPr>
+                <a:defRPr b="0" i="0" strike="noStrike" sz="1000" u="none">
+                  <a:solidFill>
+                    <a:srgbClr val="0E2240"/>
+                  </a:solidFill>
+                  <a:latin typeface="Arial"/>
+                </a:defRPr>
+              </a:pPr>
+            </a:p>
+          </c:txPr>
           <c:showLegendKey val="0"/>
           <c:showVal val="1"/>
           <c:showCatName val="0"/>
           <c:showSerName val="0"/>
           <c:showPercent val="0"/>
           <c:showBubbleSize val="0"/>
+          <c:showLeaderLines val="0"/>
         </c:dLbls>
         <c:gapWidth val="60"/>
+        <c:overlap val="0"/>
         <c:axId val="2094734554"/>
         <c:axId val="2094734552"/>
+        <c:axId val="2094734556"/>
       </c:barChart>
       <c:catAx>
         <c:axId val="2094734554"/>
@@ -404,7 +383,6 @@
         <c:crosses val="autoZero"/>
         <c:auto val="1"/>
         <c:lblAlgn val="ctr"/>
-        <c:lblOffset val="100"/>
         <c:noMultiLvlLbl val="1"/>
       </c:catAx>
       <c:valAx>
@@ -487,7 +465,6 @@
     </c:legend>
     <c:plotVisOnly val="1"/>
     <c:dispBlanksAs val="span"/>
-    <c:showDLblsOverMax val="1"/>
   </c:chart>
   <c:spPr>
     <a:solidFill>
@@ -505,11 +482,9 @@
 </file>
 
 <file path=ppt/charts/chart2.xml><?xml version="1.0" encoding="utf-8"?>
-<c:chartSpace xmlns:c="http://schemas.openxmlformats.org/drawingml/2006/chart" xmlns:a="http://schemas.openxmlformats.org/drawingml/2006/main" xmlns:r="http://schemas.openxmlformats.org/officeDocument/2006/relationships" xmlns:c16r2="http://schemas.microsoft.com/office/drawing/2015/06/chart">
+<c:chartSpace xmlns:c="http://schemas.openxmlformats.org/drawingml/2006/chart" xmlns:a="http://schemas.openxmlformats.org/drawingml/2006/main" xmlns:r="http://schemas.openxmlformats.org/officeDocument/2006/relationships">
   <c:date1904 val="0"/>
-  <c:lang val="en-US"/>
   <c:roundedCorners val="1"/>
-  <c:style val="2"/>
   <c:chart>
     <c:autoTitleDeleted val="1"/>
     <c:plotArea>
@@ -539,15 +514,40 @@
             <a:effectLst/>
           </c:spPr>
           <c:invertIfNegative val="0"/>
+          <c:dLbls>
+            <c:numFmt formatCode="#,##0" sourceLinked="0"/>
+            <c:txPr>
+              <a:bodyPr/>
+              <a:lstStyle/>
+              <a:p>
+                <a:pPr>
+                  <a:defRPr b="0" i="0" strike="noStrike" sz="1200" u="none">
+                    <a:solidFill>
+                      <a:srgbClr val="0E2240"/>
+                    </a:solidFill>
+                    <a:latin typeface="Arial"/>
+                  </a:defRPr>
+                </a:pPr>
+              </a:p>
+            </c:txPr>
+            <c:showLegendKey val="0"/>
+            <c:showVal val="1"/>
+            <c:showCatName val="0"/>
+            <c:showSerName val="0"/>
+            <c:showPercent val="0"/>
+            <c:showBubbleSize val="0"/>
+            <c:showLeaderLines val="0"/>
+          </c:dLbls>
           <c:dPt>
             <c:idx val="0"/>
             <c:invertIfNegative val="0"/>
             <c:bubble3D val="0"/>
-            <c:extLst>
-              <c:ext xmlns:c16="http://schemas.microsoft.com/office/drawing/2014/chart" uri="{C3380CC4-5D6E-409C-BE32-E72D297353CC}">
-                <c16:uniqueId val="{00000001-3C03-41B0-A70C-1AACD5A4794D}"/>
-              </c:ext>
-            </c:extLst>
+            <c:spPr>
+              <a:solidFill>
+                <a:srgbClr val="DC2626"/>
+              </a:solidFill>
+              <a:effectLst/>
+            </c:spPr>
           </c:dPt>
           <c:dPt>
             <c:idx val="1"/>
@@ -559,62 +559,22 @@
               </a:solidFill>
               <a:effectLst/>
             </c:spPr>
-            <c:extLst>
-              <c:ext xmlns:c16="http://schemas.microsoft.com/office/drawing/2014/chart" uri="{C3380CC4-5D6E-409C-BE32-E72D297353CC}">
-                <c16:uniqueId val="{00000003-3C03-41B0-A70C-1AACD5A4794D}"/>
-              </c:ext>
-            </c:extLst>
           </c:dPt>
-          <c:dLbls>
-            <c:numFmt formatCode="#,##0" sourceLinked="0"/>
-            <c:spPr>
-              <a:noFill/>
-              <a:ln>
-                <a:noFill/>
-              </a:ln>
-              <a:effectLst/>
-            </c:spPr>
-            <c:txPr>
-              <a:bodyPr/>
-              <a:lstStyle/>
-              <a:p>
-                <a:pPr>
-                  <a:defRPr sz="1200" b="0" i="0" u="none" strike="noStrike">
-                    <a:solidFill>
-                      <a:srgbClr val="0E2240"/>
-                    </a:solidFill>
-                    <a:latin typeface="Arial"/>
-                  </a:defRPr>
-                </a:pPr>
-                <a:endParaRPr lang="en-US"/>
-              </a:p>
-            </c:txPr>
-            <c:showLegendKey val="0"/>
-            <c:showVal val="1"/>
-            <c:showCatName val="0"/>
-            <c:showSerName val="0"/>
-            <c:showPercent val="0"/>
-            <c:showBubbleSize val="0"/>
-            <c:showLeaderLines val="0"/>
-            <c:extLst>
-              <c:ext xmlns:c15="http://schemas.microsoft.com/office/drawing/2012/chart" uri="{CE6537A1-D6FC-4f65-9D91-7224C49458BB}">
-                <c15:showLeaderLines val="0"/>
-              </c:ext>
-            </c:extLst>
-          </c:dLbls>
           <c:cat>
-            <c:strRef>
+            <c:multiLvlStrRef>
               <c:f>Sheet1!$A$2:$A$3</c:f>
-              <c:strCache>
+              <c:multiLvlStrCache>
                 <c:ptCount val="2"/>
-                <c:pt idx="0">
-                  <c:v>Spreadsheets &amp; decks</c:v>
-                </c:pt>
-                <c:pt idx="1">
-                  <c:v>With PM Control Tower</c:v>
-                </c:pt>
-              </c:strCache>
-            </c:strRef>
+                <c:lvl>
+                  <c:pt idx="0">
+                    <c:v>Spreadsheets &amp; decks</c:v>
+                  </c:pt>
+                  <c:pt idx="1">
+                    <c:v>With PM Control Tower</c:v>
+                  </c:pt>
+                </c:lvl>
+              </c:multiLvlStrCache>
+            </c:multiLvlStrRef>
           </c:cat>
           <c:val>
             <c:numRef>
@@ -631,23 +591,36 @@
               </c:numCache>
             </c:numRef>
           </c:val>
-          <c:extLst>
-            <c:ext xmlns:c16="http://schemas.microsoft.com/office/drawing/2014/chart" uri="{C3380CC4-5D6E-409C-BE32-E72D297353CC}">
-              <c16:uniqueId val="{00000004-3C03-41B0-A70C-1AACD5A4794D}"/>
-            </c:ext>
-          </c:extLst>
         </c:ser>
         <c:dLbls>
+          <c:numFmt formatCode="#,##0" sourceLinked="0"/>
+          <c:txPr>
+            <a:bodyPr/>
+            <a:lstStyle/>
+            <a:p>
+              <a:pPr>
+                <a:defRPr b="0" i="0" strike="noStrike" sz="1200" u="none">
+                  <a:solidFill>
+                    <a:srgbClr val="0E2240"/>
+                  </a:solidFill>
+                  <a:latin typeface="Arial"/>
+                </a:defRPr>
+              </a:pPr>
+            </a:p>
+          </c:txPr>
           <c:showLegendKey val="0"/>
           <c:showVal val="1"/>
           <c:showCatName val="0"/>
           <c:showSerName val="0"/>
           <c:showPercent val="0"/>
           <c:showBubbleSize val="0"/>
+          <c:showLeaderLines val="0"/>
         </c:dLbls>
         <c:gapWidth val="45"/>
+        <c:overlap val="0"/>
         <c:axId val="2094734554"/>
         <c:axId val="2094734552"/>
+        <c:axId val="2094734556"/>
       </c:barChart>
       <c:catAx>
         <c:axId val="2094734554"/>
@@ -688,7 +661,6 @@
         <c:crosses val="autoZero"/>
         <c:auto val="1"/>
         <c:lblAlgn val="ctr"/>
-        <c:lblOffset val="100"/>
         <c:noMultiLvlLbl val="1"/>
       </c:catAx>
       <c:valAx>
@@ -702,6 +674,30 @@
         <c:majorTickMark val="out"/>
         <c:minorTickMark val="none"/>
         <c:tickLblPos val="low"/>
+        <c:spPr>
+          <a:ln w="12700" cap="flat">
+            <a:solidFill>
+              <a:srgbClr val="888888"/>
+            </a:solidFill>
+            <a:prstDash val="solid"/>
+            <a:round/>
+          </a:ln>
+        </c:spPr>
+        <c:txPr>
+          <a:bodyPr/>
+          <a:lstStyle/>
+          <a:p>
+            <a:pPr>
+              <a:defRPr sz="1000" b="0" i="0" u="none" strike="noStrike">
+                <a:solidFill>
+                  <a:srgbClr val="5D6E85"/>
+                </a:solidFill>
+                <a:latin typeface="Arial"/>
+              </a:defRPr>
+            </a:pPr>
+            <a:endParaRPr lang="en-US"/>
+          </a:p>
+        </c:txPr>
         <c:crossAx val="2094734554"/>
         <c:crosses val="autoZero"/>
         <c:crossBetween val="between"/>
@@ -716,7 +712,6 @@
     </c:plotArea>
     <c:plotVisOnly val="1"/>
     <c:dispBlanksAs val="span"/>
-    <c:showDLblsOverMax val="1"/>
   </c:chart>
   <c:spPr>
     <a:solidFill>
@@ -755,10 +750,234 @@
           <a:chExt cx="0" cy="0"/>
         </a:xfrm>
       </p:grpSpPr>
+      <p:sp>
+        <p:nvSpPr>
+          <p:cNvPr id="2" name="Header Placeholder 1"/>
+          <p:cNvSpPr>
+            <a:spLocks noGrp="1"/>
+          </p:cNvSpPr>
+          <p:nvPr>
+            <p:ph type="hdr" sz="quarter"/>
+          </p:nvPr>
+        </p:nvSpPr>
+        <p:spPr>
+          <a:xfrm>
+            <a:off x="0" y="0"/>
+            <a:ext cx="2971800" cy="458788"/>
+          </a:xfrm>
+          <a:prstGeom prst="rect">
+            <a:avLst/>
+          </a:prstGeom>
+        </p:spPr>
+        <p:txBody>
+          <a:bodyPr vert="horz" lIns="91440" tIns="45720" rIns="91440" bIns="45720" rtlCol="0"/>
+          <a:lstStyle>
+            <a:lvl1pPr algn="l">
+              <a:defRPr sz="1200"/>
+            </a:lvl1pPr>
+          </a:lstStyle>
+          <a:p>
+            <a:endParaRPr lang="en-US"/>
+          </a:p>
+        </p:txBody>
+      </p:sp>
+      <p:sp>
+        <p:nvSpPr>
+          <p:cNvPr id="3" name="Date Placeholder 2"/>
+          <p:cNvSpPr>
+            <a:spLocks noGrp="1"/>
+          </p:cNvSpPr>
+          <p:nvPr>
+            <p:ph type="dt" idx="1"/>
+          </p:nvPr>
+        </p:nvSpPr>
+        <p:spPr>
+          <a:xfrm>
+            <a:off x="3884613" y="0"/>
+            <a:ext cx="2971800" cy="458788"/>
+          </a:xfrm>
+          <a:prstGeom prst="rect">
+            <a:avLst/>
+          </a:prstGeom>
+        </p:spPr>
+        <p:txBody>
+          <a:bodyPr vert="horz" lIns="91440" tIns="45720" rIns="91440" bIns="45720" rtlCol="0"/>
+          <a:lstStyle>
+            <a:lvl1pPr algn="r">
+              <a:defRPr sz="1200"/>
+            </a:lvl1pPr>
+          </a:lstStyle>
+          <a:p>
+            <a:fld id="{5282F153-3F37-0F45-9E97-73ACFA13230C}" type="datetimeFigureOut">
+              <a:rPr lang="en-US"/>
+              <a:t>7/23/19</a:t>
+            </a:fld>
+            <a:endParaRPr lang="en-US"/>
+          </a:p>
+        </p:txBody>
+      </p:sp>
+      <p:sp>
+        <p:nvSpPr>
+          <p:cNvPr id="4" name="Slide Image Placeholder 3"/>
+          <p:cNvSpPr>
+            <a:spLocks noGrp="1" noRot="1" noChangeAspect="1"/>
+          </p:cNvSpPr>
+          <p:nvPr>
+            <p:ph type="sldImg" idx="2"/>
+          </p:nvPr>
+        </p:nvSpPr>
+        <p:spPr>
+          <a:xfrm>
+            <a:off x="685800" y="1143000"/>
+            <a:ext cx="5486400" cy="3086100"/>
+          </a:xfrm>
+          <a:prstGeom prst="rect">
+            <a:avLst/>
+          </a:prstGeom>
+          <a:noFill/>
+          <a:ln w="12700">
+            <a:solidFill>
+              <a:prstClr val="black"/>
+            </a:solidFill>
+          </a:ln>
+        </p:spPr>
+        <p:txBody>
+          <a:bodyPr vert="horz" lIns="91440" tIns="45720" rIns="91440" bIns="45720" rtlCol="0" anchor="ctr"/>
+          <a:lstStyle/>
+          <a:p>
+            <a:endParaRPr lang="en-US"/>
+          </a:p>
+        </p:txBody>
+      </p:sp>
+      <p:sp>
+        <p:nvSpPr>
+          <p:cNvPr id="5" name="Notes Placeholder 4"/>
+          <p:cNvSpPr>
+            <a:spLocks noGrp="1"/>
+          </p:cNvSpPr>
+          <p:nvPr>
+            <p:ph type="body" sz="quarter" idx="3"/>
+          </p:nvPr>
+        </p:nvSpPr>
+        <p:spPr>
+          <a:xfrm>
+            <a:off x="685800" y="4400550"/>
+            <a:ext cx="5486400" cy="3600450"/>
+          </a:xfrm>
+          <a:prstGeom prst="rect">
+            <a:avLst/>
+          </a:prstGeom>
+        </p:spPr>
+        <p:txBody>
+          <a:bodyPr vert="horz" lIns="91440" tIns="45720" rIns="91440" bIns="45720" rtlCol="0"/>
+          <a:lstStyle/>
+          <a:p>
+            <a:pPr lvl="0"/>
+            <a:r>
+              <a:rPr lang="en-US"/>
+              <a:t>Click to edit Master text styles</a:t>
+            </a:r>
+          </a:p>
+          <a:p>
+            <a:pPr lvl="1"/>
+            <a:r>
+              <a:rPr lang="en-US"/>
+              <a:t>Second level</a:t>
+            </a:r>
+          </a:p>
+          <a:p>
+            <a:pPr lvl="2"/>
+            <a:r>
+              <a:rPr lang="en-US"/>
+              <a:t>Third level</a:t>
+            </a:r>
+          </a:p>
+          <a:p>
+            <a:pPr lvl="3"/>
+            <a:r>
+              <a:rPr lang="en-US"/>
+              <a:t>Fourth level</a:t>
+            </a:r>
+          </a:p>
+          <a:p>
+            <a:pPr lvl="4"/>
+            <a:r>
+              <a:rPr lang="en-US"/>
+              <a:t>Fifth level</a:t>
+            </a:r>
+          </a:p>
+        </p:txBody>
+      </p:sp>
+      <p:sp>
+        <p:nvSpPr>
+          <p:cNvPr id="6" name="Footer Placeholder 5"/>
+          <p:cNvSpPr>
+            <a:spLocks noGrp="1"/>
+          </p:cNvSpPr>
+          <p:nvPr>
+            <p:ph type="ftr" sz="quarter" idx="4"/>
+          </p:nvPr>
+        </p:nvSpPr>
+        <p:spPr>
+          <a:xfrm>
+            <a:off x="0" y="8685213"/>
+            <a:ext cx="2971800" cy="458787"/>
+          </a:xfrm>
+          <a:prstGeom prst="rect">
+            <a:avLst/>
+          </a:prstGeom>
+        </p:spPr>
+        <p:txBody>
+          <a:bodyPr vert="horz" lIns="91440" tIns="45720" rIns="91440" bIns="45720" rtlCol="0" anchor="b"/>
+          <a:lstStyle>
+            <a:lvl1pPr algn="l">
+              <a:defRPr sz="1200"/>
+            </a:lvl1pPr>
+          </a:lstStyle>
+          <a:p>
+            <a:endParaRPr lang="en-US"/>
+          </a:p>
+        </p:txBody>
+      </p:sp>
+      <p:sp>
+        <p:nvSpPr>
+          <p:cNvPr id="7" name="Slide Number Placeholder 6"/>
+          <p:cNvSpPr>
+            <a:spLocks noGrp="1"/>
+          </p:cNvSpPr>
+          <p:nvPr>
+            <p:ph type="sldNum" sz="quarter" idx="5"/>
+          </p:nvPr>
+        </p:nvSpPr>
+        <p:spPr>
+          <a:xfrm>
+            <a:off x="3884613" y="8685213"/>
+            <a:ext cx="2971800" cy="458787"/>
+          </a:xfrm>
+          <a:prstGeom prst="rect">
+            <a:avLst/>
+          </a:prstGeom>
+        </p:spPr>
+        <p:txBody>
+          <a:bodyPr vert="horz" lIns="91440" tIns="45720" rIns="91440" bIns="45720" rtlCol="0" anchor="b"/>
+          <a:lstStyle>
+            <a:lvl1pPr algn="r">
+              <a:defRPr sz="1200"/>
+            </a:lvl1pPr>
+          </a:lstStyle>
+          <a:p>
+            <a:fld id="{CE5E9CC1-C706-0F49-92D6-E571CC5EEA8F}" type="slidenum">
+              <a:rPr lang="en-US"/>
+              <a:t>‹#›</a:t>
+            </a:fld>
+            <a:endParaRPr lang="en-US"/>
+          </a:p>
+        </p:txBody>
+      </p:sp>
     </p:spTree>
     <p:extLst>
       <p:ext uri="{BB962C8B-B14F-4D97-AF65-F5344CB8AC3E}">
-        <p14:creationId xmlns:p14="http://schemas.microsoft.com/office/powerpoint/2010/main" val="2090600541"/>
+        <p14:creationId xmlns:p14="http://schemas.microsoft.com/office/powerpoint/2010/main" val="1024086991"/>
       </p:ext>
     </p:extLst>
   </p:cSld>
@@ -902,6 +1121,10 @@
           <a:bodyPr/>
           <a:lstStyle/>
           <a:p>
+            <a:r>
+              <a:rPr lang="en-US" dirty="0"/>
+              <a:t/>
+            </a:r>
             <a:endParaRPr lang="en-US" dirty="0"/>
           </a:p>
         </p:txBody>
@@ -986,6 +1209,10 @@
           <a:bodyPr/>
           <a:lstStyle/>
           <a:p>
+            <a:r>
+              <a:rPr lang="en-US" dirty="0"/>
+              <a:t/>
+            </a:r>
             <a:endParaRPr lang="en-US" dirty="0"/>
           </a:p>
         </p:txBody>
@@ -1070,6 +1297,10 @@
           <a:bodyPr/>
           <a:lstStyle/>
           <a:p>
+            <a:r>
+              <a:rPr lang="en-US" dirty="0"/>
+              <a:t/>
+            </a:r>
             <a:endParaRPr lang="en-US" dirty="0"/>
           </a:p>
         </p:txBody>
@@ -1154,6 +1385,10 @@
           <a:bodyPr/>
           <a:lstStyle/>
           <a:p>
+            <a:r>
+              <a:rPr lang="en-US" dirty="0"/>
+              <a:t/>
+            </a:r>
             <a:endParaRPr lang="en-US" dirty="0"/>
           </a:p>
         </p:txBody>
@@ -1238,6 +1473,10 @@
           <a:bodyPr/>
           <a:lstStyle/>
           <a:p>
+            <a:r>
+              <a:rPr lang="en-US" dirty="0"/>
+              <a:t/>
+            </a:r>
             <a:endParaRPr lang="en-US" dirty="0"/>
           </a:p>
         </p:txBody>
@@ -1322,6 +1561,10 @@
           <a:bodyPr/>
           <a:lstStyle/>
           <a:p>
+            <a:r>
+              <a:rPr lang="en-US" dirty="0"/>
+              <a:t/>
+            </a:r>
             <a:endParaRPr lang="en-US" dirty="0"/>
           </a:p>
         </p:txBody>
@@ -1406,6 +1649,10 @@
           <a:bodyPr/>
           <a:lstStyle/>
           <a:p>
+            <a:r>
+              <a:rPr lang="en-US" dirty="0"/>
+              <a:t/>
+            </a:r>
             <a:endParaRPr lang="en-US" dirty="0"/>
           </a:p>
         </p:txBody>
@@ -1490,6 +1737,10 @@
           <a:bodyPr/>
           <a:lstStyle/>
           <a:p>
+            <a:r>
+              <a:rPr lang="en-US" dirty="0"/>
+              <a:t/>
+            </a:r>
             <a:endParaRPr lang="en-US" dirty="0"/>
           </a:p>
         </p:txBody>
@@ -1574,6 +1825,10 @@
           <a:bodyPr/>
           <a:lstStyle/>
           <a:p>
+            <a:r>
+              <a:rPr lang="en-US" dirty="0"/>
+              <a:t/>
+            </a:r>
             <a:endParaRPr lang="en-US" dirty="0"/>
           </a:p>
         </p:txBody>
@@ -1658,6 +1913,10 @@
           <a:bodyPr/>
           <a:lstStyle/>
           <a:p>
+            <a:r>
+              <a:rPr lang="en-US" dirty="0"/>
+              <a:t/>
+            </a:r>
             <a:endParaRPr lang="en-US" dirty="0"/>
           </a:p>
         </p:txBody>
@@ -1742,6 +2001,10 @@
           <a:bodyPr/>
           <a:lstStyle/>
           <a:p>
+            <a:r>
+              <a:rPr lang="en-US" dirty="0"/>
+              <a:t/>
+            </a:r>
             <a:endParaRPr lang="en-US" dirty="0"/>
           </a:p>
         </p:txBody>
@@ -1826,6 +2089,10 @@
           <a:bodyPr/>
           <a:lstStyle/>
           <a:p>
+            <a:r>
+              <a:rPr lang="en-US" dirty="0"/>
+              <a:t/>
+            </a:r>
             <a:endParaRPr lang="en-US" dirty="0"/>
           </a:p>
         </p:txBody>
@@ -1910,6 +2177,10 @@
           <a:bodyPr/>
           <a:lstStyle/>
           <a:p>
+            <a:r>
+              <a:rPr lang="en-US" dirty="0"/>
+              <a:t/>
+            </a:r>
             <a:endParaRPr lang="en-US" dirty="0"/>
           </a:p>
         </p:txBody>
@@ -1994,6 +2265,10 @@
           <a:bodyPr/>
           <a:lstStyle/>
           <a:p>
+            <a:r>
+              <a:rPr lang="en-US" dirty="0"/>
+              <a:t/>
+            </a:r>
             <a:endParaRPr lang="en-US" dirty="0"/>
           </a:p>
         </p:txBody>
@@ -2078,6 +2353,10 @@
           <a:bodyPr/>
           <a:lstStyle/>
           <a:p>
+            <a:r>
+              <a:rPr lang="en-US" dirty="0"/>
+              <a:t/>
+            </a:r>
             <a:endParaRPr lang="en-US" dirty="0"/>
           </a:p>
         </p:txBody>
@@ -2162,6 +2441,10 @@
           <a:bodyPr/>
           <a:lstStyle/>
           <a:p>
+            <a:r>
+              <a:rPr lang="en-US" dirty="0"/>
+              <a:t/>
+            </a:r>
             <a:endParaRPr lang="en-US" dirty="0"/>
           </a:p>
         </p:txBody>
@@ -2246,6 +2529,10 @@
           <a:bodyPr/>
           <a:lstStyle/>
           <a:p>
+            <a:r>
+              <a:rPr lang="en-US" dirty="0"/>
+              <a:t/>
+            </a:r>
             <a:endParaRPr lang="en-US" dirty="0"/>
           </a:p>
         </p:txBody>
@@ -2330,6 +2617,10 @@
           <a:bodyPr/>
           <a:lstStyle/>
           <a:p>
+            <a:r>
+              <a:rPr lang="en-US" dirty="0"/>
+              <a:t/>
+            </a:r>
             <a:endParaRPr lang="en-US" dirty="0"/>
           </a:p>
         </p:txBody>
@@ -2403,11 +2694,6 @@
 <file path=ppt/slideMasters/slideMaster1.xml><?xml version="1.0" encoding="utf-8"?>
 <p:sldMaster xmlns:a="http://schemas.openxmlformats.org/drawingml/2006/main" xmlns:r="http://schemas.openxmlformats.org/officeDocument/2006/relationships" xmlns:p="http://schemas.openxmlformats.org/presentationml/2006/main">
   <p:cSld>
-    <p:bg>
-      <p:bgRef idx="1001">
-        <a:schemeClr val="bg1"/>
-      </p:bgRef>
-    </p:bg>
     <p:spTree>
       <p:nvGrpSpPr>
         <p:cNvPr id="1" name=""/>
@@ -2690,7 +2976,6 @@
         <a:solidFill>
           <a:srgbClr val="0A1C33"/>
         </a:solidFill>
-        <a:effectLst/>
       </p:bgPr>
     </p:bg>
     <p:spTree>
@@ -2958,7 +3243,7 @@
           <a:bodyPr wrap="square" lIns="0" tIns="0" rIns="0" bIns="0" rtlCol="0" anchor="ctr"/>
           <a:lstStyle/>
           <a:p>
-            <a:pPr marL="0" indent="0" algn="ctr">
+            <a:pPr algn="ctr" indent="0" marL="0">
               <a:buNone/>
             </a:pPr>
             <a:r>
@@ -2997,11 +3282,11 @@
           <a:bodyPr wrap="square" lIns="0" tIns="0" rIns="0" bIns="0" rtlCol="0" anchor="ctr"/>
           <a:lstStyle/>
           <a:p>
-            <a:pPr marL="0" indent="0">
-              <a:buNone/>
-            </a:pPr>
-            <a:r>
-              <a:rPr lang="en-US" sz="1300" b="1" kern="0" spc="300" dirty="0">
+            <a:pPr indent="0" marL="0">
+              <a:buNone/>
+            </a:pPr>
+            <a:r>
+              <a:rPr lang="en-US" sz="1300" b="1" spc="300" kern="0" dirty="0">
                 <a:solidFill>
                   <a:srgbClr val="F59E0B"/>
                 </a:solidFill>
@@ -3036,7 +3321,7 @@
           <a:bodyPr wrap="square" lIns="0" tIns="0" rIns="0" bIns="0" rtlCol="0" anchor="ctr"/>
           <a:lstStyle/>
           <a:p>
-            <a:pPr marL="0" indent="0">
+            <a:pPr indent="0" marL="0">
               <a:lnSpc>
                 <a:spcPct val="98000"/>
               </a:lnSpc>
@@ -3056,7 +3341,7 @@
             <a:endParaRPr lang="en-US" sz="6600" dirty="0"/>
           </a:p>
           <a:p>
-            <a:pPr marL="0" indent="0">
+            <a:pPr indent="0" marL="0">
               <a:lnSpc>
                 <a:spcPct val="98000"/>
               </a:lnSpc>
@@ -3098,7 +3383,7 @@
           <a:bodyPr wrap="square" lIns="0" tIns="0" rIns="0" bIns="0" rtlCol="0" anchor="ctr"/>
           <a:lstStyle/>
           <a:p>
-            <a:pPr marL="0" indent="0">
+            <a:pPr indent="0" marL="0">
               <a:buNone/>
             </a:pPr>
             <a:r>
@@ -3112,6 +3397,9 @@
               </a:rPr>
               <a:t>One platform. Complete project intelligence. </a:t>
             </a:r>
+            <a:pPr indent="0" marL="0">
+              <a:buNone/>
+            </a:pPr>
             <a:r>
               <a:rPr lang="en-US" sz="2400" b="1" dirty="0">
                 <a:solidFill>
@@ -3148,7 +3436,7 @@
           <a:bodyPr wrap="square" lIns="0" tIns="0" rIns="0" bIns="0" rtlCol="0" anchor="ctr"/>
           <a:lstStyle/>
           <a:p>
-            <a:pPr marL="0" indent="0">
+            <a:pPr indent="0" marL="0">
               <a:buNone/>
             </a:pPr>
             <a:r>
@@ -3160,7 +3448,7 @@
                 <a:ea typeface="Segoe UI" pitchFamily="34" charset="-122"/>
                 <a:cs typeface="Segoe UI" pitchFamily="34" charset="-120"/>
               </a:rPr>
-              <a:t>Portfolio → Program → Project → Delivery — one source of truth for scope, schedule, cost, risk, EVM and governance. Self-hosted, realtime, audit-ready — now with the Integrity Layer: honest staleness, evidence chains, P80 forecasting, benefits realization.</a:t>
+              <a:t>Portfolio → Program → Project → Delivery — one source of truth for scope, schedule, cost, risk, EVM and governance. Self-hosted, realtime, audit-ready — Integrity Layer, P80 forecasting, investment &amp; business case analysis (ROI · NPV · IRR · payback) and benefits realization.</a:t>
             </a:r>
             <a:endParaRPr lang="en-US" sz="1400" dirty="0"/>
           </a:p>
@@ -3210,7 +3498,7 @@
           <a:bodyPr wrap="square" lIns="0" tIns="0" rIns="0" bIns="0" rtlCol="0" anchor="ctr"/>
           <a:lstStyle/>
           <a:p>
-            <a:pPr marL="0" indent="0">
+            <a:pPr indent="0" marL="0">
               <a:buNone/>
             </a:pPr>
             <a:r>
@@ -3222,7 +3510,7 @@
                 <a:ea typeface="Segoe UI" pitchFamily="34" charset="-122"/>
                 <a:cs typeface="Segoe UI" pitchFamily="34" charset="-120"/>
               </a:rPr>
-              <a:t>Corporate Sales Presentation  ·  2026</a:t>
+              <a:t>dynamiq Solutions  ·  Corporate Sales Presentation  ·  2026</a:t>
             </a:r>
             <a:endParaRPr lang="en-US" sz="1200" dirty="0"/>
           </a:p>
@@ -3244,7 +3532,6 @@
         <a:solidFill>
           <a:srgbClr val="FFFFFF"/>
         </a:solidFill>
-        <a:effectLst/>
       </p:bgPr>
     </p:bg>
     <p:spTree>
@@ -3282,11 +3569,11 @@
           <a:bodyPr wrap="square" lIns="0" tIns="0" rIns="0" bIns="0" rtlCol="0" anchor="ctr"/>
           <a:lstStyle/>
           <a:p>
-            <a:pPr marL="0" indent="0">
-              <a:buNone/>
-            </a:pPr>
-            <a:r>
-              <a:rPr lang="en-US" sz="1200" b="1" kern="0" spc="300" dirty="0">
+            <a:pPr indent="0" marL="0">
+              <a:buNone/>
+            </a:pPr>
+            <a:r>
+              <a:rPr lang="en-US" sz="1200" b="1" spc="300" kern="0" dirty="0">
                 <a:solidFill>
                   <a:srgbClr val="1D4ED8"/>
                 </a:solidFill>
@@ -3321,7 +3608,7 @@
           <a:bodyPr wrap="square" lIns="0" tIns="0" rIns="0" bIns="0" rtlCol="0" anchor="ctr"/>
           <a:lstStyle/>
           <a:p>
-            <a:pPr marL="0" indent="0">
+            <a:pPr indent="0" marL="0">
               <a:buNone/>
             </a:pPr>
             <a:r>
@@ -3365,7 +3652,7 @@
             <a:prstDash val="solid"/>
           </a:ln>
           <a:effectLst>
-            <a:outerShdw blurRad="88900" dist="25400" dir="5400000" algn="bl" rotWithShape="0">
+            <a:outerShdw sx="100000" sy="100000" kx="0" ky="0" algn="bl" rotWithShape="0" blurRad="88900" dist="25400" dir="5400000">
               <a:srgbClr val="0A1C33">
                 <a:alpha val="16000"/>
               </a:srgbClr>
@@ -3416,7 +3703,7 @@
           <a:bodyPr wrap="square" lIns="0" tIns="0" rIns="0" bIns="0" rtlCol="0" anchor="ctr"/>
           <a:lstStyle/>
           <a:p>
-            <a:pPr marL="0" indent="0" algn="ctr">
+            <a:pPr algn="ctr" indent="0" marL="0">
               <a:buNone/>
             </a:pPr>
             <a:r>
@@ -3566,7 +3853,7 @@
             <a:prstDash val="solid"/>
           </a:ln>
           <a:effectLst>
-            <a:outerShdw blurRad="88900" dist="25400" dir="5400000" algn="bl" rotWithShape="0">
+            <a:outerShdw sx="100000" sy="100000" kx="0" ky="0" algn="bl" rotWithShape="0" blurRad="88900" dist="25400" dir="5400000">
               <a:srgbClr val="0A1C33">
                 <a:alpha val="16000"/>
               </a:srgbClr>
@@ -3617,7 +3904,7 @@
           <a:bodyPr wrap="square" lIns="0" tIns="0" rIns="0" bIns="0" rtlCol="0" anchor="ctr"/>
           <a:lstStyle/>
           <a:p>
-            <a:pPr marL="0" indent="0" algn="ctr">
+            <a:pPr algn="ctr" indent="0" marL="0">
               <a:buNone/>
             </a:pPr>
             <a:r>
@@ -3767,7 +4054,7 @@
             <a:prstDash val="solid"/>
           </a:ln>
           <a:effectLst>
-            <a:outerShdw blurRad="88900" dist="25400" dir="5400000" algn="bl" rotWithShape="0">
+            <a:outerShdw sx="100000" sy="100000" kx="0" ky="0" algn="bl" rotWithShape="0" blurRad="88900" dist="25400" dir="5400000">
               <a:srgbClr val="0A1C33">
                 <a:alpha val="16000"/>
               </a:srgbClr>
@@ -3818,7 +4105,7 @@
           <a:bodyPr wrap="square" lIns="0" tIns="0" rIns="0" bIns="0" rtlCol="0" anchor="ctr"/>
           <a:lstStyle/>
           <a:p>
-            <a:pPr marL="0" indent="0" algn="ctr">
+            <a:pPr algn="ctr" indent="0" marL="0">
               <a:buNone/>
             </a:pPr>
             <a:r>
@@ -3963,7 +4250,7 @@
           <a:bodyPr wrap="square" lIns="0" tIns="0" rIns="0" bIns="0" rtlCol="0" anchor="ctr"/>
           <a:lstStyle/>
           <a:p>
-            <a:pPr marL="0" indent="0">
+            <a:pPr indent="0" marL="0">
               <a:buNone/>
             </a:pPr>
             <a:r>
@@ -3977,6 +4264,9 @@
               </a:rPr>
               <a:t>GREY honesty: </a:t>
             </a:r>
+            <a:pPr indent="0" marL="0">
+              <a:buNone/>
+            </a:pPr>
             <a:r>
               <a:rPr lang="en-US" sz="1300" dirty="0">
                 <a:solidFill>
@@ -4013,7 +4303,7 @@
           <a:bodyPr wrap="square" lIns="0" tIns="0" rIns="0" bIns="0" rtlCol="0" anchor="ctr"/>
           <a:lstStyle/>
           <a:p>
-            <a:pPr marL="0" indent="0" algn="r">
+            <a:pPr algn="r" indent="0" marL="0">
               <a:buNone/>
             </a:pPr>
             <a:r>
@@ -4047,7 +4337,6 @@
         <a:solidFill>
           <a:srgbClr val="FFFFFF"/>
         </a:solidFill>
-        <a:effectLst/>
       </p:bgPr>
     </p:bg>
     <p:spTree>
@@ -4085,11 +4374,11 @@
           <a:bodyPr wrap="square" lIns="0" tIns="0" rIns="0" bIns="0" rtlCol="0" anchor="ctr"/>
           <a:lstStyle/>
           <a:p>
-            <a:pPr marL="0" indent="0">
-              <a:buNone/>
-            </a:pPr>
-            <a:r>
-              <a:rPr lang="en-US" sz="1200" b="1" kern="0" spc="300" dirty="0">
+            <a:pPr indent="0" marL="0">
+              <a:buNone/>
+            </a:pPr>
+            <a:r>
+              <a:rPr lang="en-US" sz="1200" b="1" spc="300" kern="0" dirty="0">
                 <a:solidFill>
                   <a:srgbClr val="1D4ED8"/>
                 </a:solidFill>
@@ -4124,7 +4413,7 @@
           <a:bodyPr wrap="square" lIns="0" tIns="0" rIns="0" bIns="0" rtlCol="0" anchor="ctr"/>
           <a:lstStyle/>
           <a:p>
-            <a:pPr marL="0" indent="0">
+            <a:pPr indent="0" marL="0">
               <a:buNone/>
             </a:pPr>
             <a:r>
@@ -4168,7 +4457,7 @@
             <a:prstDash val="solid"/>
           </a:ln>
           <a:effectLst>
-            <a:outerShdw blurRad="88900" dist="25400" dir="5400000" algn="bl" rotWithShape="0">
+            <a:outerShdw sx="100000" sy="100000" kx="0" ky="0" algn="bl" rotWithShape="0" blurRad="88900" dist="25400" dir="5400000">
               <a:srgbClr val="0A1C33">
                 <a:alpha val="16000"/>
               </a:srgbClr>
@@ -4197,7 +4486,7 @@
           <a:bodyPr wrap="square" lIns="0" tIns="0" rIns="0" bIns="0" rtlCol="0" anchor="ctr"/>
           <a:lstStyle/>
           <a:p>
-            <a:pPr marL="0" indent="0">
+            <a:pPr indent="0" marL="0">
               <a:buNone/>
             </a:pPr>
             <a:r>
@@ -4217,7 +4506,7 @@
       </p:sp>
       <p:graphicFrame>
         <p:nvGraphicFramePr>
-          <p:cNvPr id="6" name="Chart 0"/>
+          <p:cNvPr id="6" name="Chart 0" descr=""/>
           <p:cNvGraphicFramePr/>
           <p:nvPr/>
         </p:nvGraphicFramePr>
@@ -4225,9 +4514,9 @@
           <a:off x="685800" y="2057400"/>
           <a:ext cx="5669280" cy="3291840"/>
         </p:xfrm>
-        <a:graphic>
+        <a:graphic xmlns:a="http://schemas.openxmlformats.org/drawingml/2006/main">
           <a:graphicData uri="http://schemas.openxmlformats.org/drawingml/2006/chart">
-            <c:chart xmlns:c="http://schemas.openxmlformats.org/drawingml/2006/chart" xmlns:r="http://schemas.openxmlformats.org/officeDocument/2006/relationships" r:id="rId3"/>
+            <c:chart xmlns:c="http://schemas.openxmlformats.org/drawingml/2006/chart" r:id="rId1"/>
           </a:graphicData>
         </a:graphic>
       </p:graphicFrame>
@@ -4257,7 +4546,7 @@
             <a:prstDash val="solid"/>
           </a:ln>
           <a:effectLst>
-            <a:outerShdw blurRad="88900" dist="25400" dir="5400000" algn="bl" rotWithShape="0">
+            <a:outerShdw sx="100000" sy="100000" kx="0" ky="0" algn="bl" rotWithShape="0" blurRad="88900" dist="25400" dir="5400000">
               <a:srgbClr val="0A1C33">
                 <a:alpha val="16000"/>
               </a:srgbClr>
@@ -4286,7 +4575,7 @@
           <a:bodyPr wrap="square" lIns="0" tIns="0" rIns="0" bIns="0" rtlCol="0" anchor="ctr"/>
           <a:lstStyle/>
           <a:p>
-            <a:pPr marL="0" indent="0">
+            <a:pPr indent="0" marL="0">
               <a:buNone/>
             </a:pPr>
             <a:r>
@@ -4325,7 +4614,7 @@
           <a:bodyPr wrap="square" lIns="0" tIns="0" rIns="0" bIns="0" rtlCol="0" anchor="ctr"/>
           <a:lstStyle/>
           <a:p>
-            <a:pPr marL="0" indent="0">
+            <a:pPr indent="0" marL="0">
               <a:buNone/>
             </a:pPr>
             <a:r>
@@ -4369,7 +4658,7 @@
             <a:prstDash val="solid"/>
           </a:ln>
           <a:effectLst>
-            <a:outerShdw blurRad="88900" dist="25400" dir="5400000" algn="bl" rotWithShape="0">
+            <a:outerShdw sx="100000" sy="100000" kx="0" ky="0" algn="bl" rotWithShape="0" blurRad="88900" dist="25400" dir="5400000">
               <a:srgbClr val="0A1C33">
                 <a:alpha val="16000"/>
               </a:srgbClr>
@@ -4398,7 +4687,7 @@
           <a:bodyPr wrap="square" lIns="0" tIns="0" rIns="0" bIns="0" rtlCol="0" anchor="ctr"/>
           <a:lstStyle/>
           <a:p>
-            <a:pPr marL="0" indent="0">
+            <a:pPr indent="0" marL="0">
               <a:buNone/>
             </a:pPr>
             <a:r>
@@ -4437,7 +4726,7 @@
           <a:bodyPr wrap="square" lIns="0" tIns="0" rIns="0" bIns="0" rtlCol="0" anchor="ctr"/>
           <a:lstStyle/>
           <a:p>
-            <a:pPr marL="0" indent="0">
+            <a:pPr indent="0" marL="0">
               <a:buNone/>
             </a:pPr>
             <a:r>
@@ -4481,7 +4770,7 @@
             <a:prstDash val="solid"/>
           </a:ln>
           <a:effectLst>
-            <a:outerShdw blurRad="88900" dist="25400" dir="5400000" algn="bl" rotWithShape="0">
+            <a:outerShdw sx="100000" sy="100000" kx="0" ky="0" algn="bl" rotWithShape="0" blurRad="88900" dist="25400" dir="5400000">
               <a:srgbClr val="0A1C33">
                 <a:alpha val="16000"/>
               </a:srgbClr>
@@ -4510,7 +4799,7 @@
           <a:bodyPr wrap="square" lIns="0" tIns="0" rIns="0" bIns="0" rtlCol="0" anchor="ctr"/>
           <a:lstStyle/>
           <a:p>
-            <a:pPr marL="0" indent="0">
+            <a:pPr indent="0" marL="0">
               <a:buNone/>
             </a:pPr>
             <a:r>
@@ -4549,7 +4838,7 @@
           <a:bodyPr wrap="square" lIns="0" tIns="0" rIns="0" bIns="0" rtlCol="0" anchor="ctr"/>
           <a:lstStyle/>
           <a:p>
-            <a:pPr marL="0" indent="0">
+            <a:pPr indent="0" marL="0">
               <a:buNone/>
             </a:pPr>
             <a:r>
@@ -4593,7 +4882,7 @@
             <a:prstDash val="solid"/>
           </a:ln>
           <a:effectLst>
-            <a:outerShdw blurRad="88900" dist="25400" dir="5400000" algn="bl" rotWithShape="0">
+            <a:outerShdw sx="100000" sy="100000" kx="0" ky="0" algn="bl" rotWithShape="0" blurRad="88900" dist="25400" dir="5400000">
               <a:srgbClr val="0A1C33">
                 <a:alpha val="16000"/>
               </a:srgbClr>
@@ -4622,7 +4911,7 @@
           <a:bodyPr wrap="square" lIns="0" tIns="0" rIns="0" bIns="0" rtlCol="0" anchor="ctr"/>
           <a:lstStyle/>
           <a:p>
-            <a:pPr marL="0" indent="0">
+            <a:pPr indent="0" marL="0">
               <a:buNone/>
             </a:pPr>
             <a:r>
@@ -4661,7 +4950,7 @@
           <a:bodyPr wrap="square" lIns="0" tIns="0" rIns="0" bIns="0" rtlCol="0" anchor="ctr"/>
           <a:lstStyle/>
           <a:p>
-            <a:pPr marL="0" indent="0">
+            <a:pPr indent="0" marL="0">
               <a:buNone/>
             </a:pPr>
             <a:r>
@@ -4705,7 +4994,7 @@
             <a:prstDash val="solid"/>
           </a:ln>
           <a:effectLst>
-            <a:outerShdw blurRad="88900" dist="25400" dir="5400000" algn="bl" rotWithShape="0">
+            <a:outerShdw sx="100000" sy="100000" kx="0" ky="0" algn="bl" rotWithShape="0" blurRad="88900" dist="25400" dir="5400000">
               <a:srgbClr val="0A1C33">
                 <a:alpha val="16000"/>
               </a:srgbClr>
@@ -4734,7 +5023,7 @@
           <a:bodyPr wrap="square" lIns="0" tIns="0" rIns="0" bIns="0" rtlCol="0" anchor="ctr"/>
           <a:lstStyle/>
           <a:p>
-            <a:pPr marL="0" indent="0">
+            <a:pPr indent="0" marL="0">
               <a:buNone/>
             </a:pPr>
             <a:r>
@@ -4773,7 +5062,7 @@
           <a:bodyPr wrap="square" lIns="0" tIns="0" rIns="0" bIns="0" rtlCol="0" anchor="ctr"/>
           <a:lstStyle/>
           <a:p>
-            <a:pPr marL="0" indent="0">
+            <a:pPr indent="0" marL="0">
               <a:buNone/>
             </a:pPr>
             <a:r>
@@ -4812,7 +5101,7 @@
           <a:bodyPr wrap="square" lIns="0" tIns="0" rIns="0" bIns="0" rtlCol="0" anchor="ctr"/>
           <a:lstStyle/>
           <a:p>
-            <a:pPr marL="0" indent="0">
+            <a:pPr indent="0" marL="0">
               <a:buNone/>
             </a:pPr>
             <a:r>
@@ -4851,7 +5140,7 @@
           <a:bodyPr wrap="square" lIns="0" tIns="0" rIns="0" bIns="0" rtlCol="0" anchor="ctr"/>
           <a:lstStyle/>
           <a:p>
-            <a:pPr marL="0" indent="0" algn="r">
+            <a:pPr algn="r" indent="0" marL="0">
               <a:buNone/>
             </a:pPr>
             <a:r>
@@ -4885,7 +5174,6 @@
         <a:solidFill>
           <a:srgbClr val="FFFFFF"/>
         </a:solidFill>
-        <a:effectLst/>
       </p:bgPr>
     </p:bg>
     <p:spTree>
@@ -4923,11 +5211,11 @@
           <a:bodyPr wrap="square" lIns="0" tIns="0" rIns="0" bIns="0" rtlCol="0" anchor="ctr"/>
           <a:lstStyle/>
           <a:p>
-            <a:pPr marL="0" indent="0">
-              <a:buNone/>
-            </a:pPr>
-            <a:r>
-              <a:rPr lang="en-US" sz="1200" b="1" kern="0" spc="300" dirty="0">
+            <a:pPr indent="0" marL="0">
+              <a:buNone/>
+            </a:pPr>
+            <a:r>
+              <a:rPr lang="en-US" sz="1200" b="1" spc="300" kern="0" dirty="0">
                 <a:solidFill>
                   <a:srgbClr val="1D4ED8"/>
                 </a:solidFill>
@@ -4962,7 +5250,7 @@
           <a:bodyPr wrap="square" lIns="0" tIns="0" rIns="0" bIns="0" rtlCol="0" anchor="ctr"/>
           <a:lstStyle/>
           <a:p>
-            <a:pPr marL="0" indent="0">
+            <a:pPr indent="0" marL="0">
               <a:buNone/>
             </a:pPr>
             <a:r>
@@ -5006,7 +5294,7 @@
             <a:prstDash val="solid"/>
           </a:ln>
           <a:effectLst>
-            <a:outerShdw blurRad="88900" dist="25400" dir="5400000" algn="bl" rotWithShape="0">
+            <a:outerShdw sx="100000" sy="100000" kx="0" ky="0" algn="bl" rotWithShape="0" blurRad="88900" dist="25400" dir="5400000">
               <a:srgbClr val="0A1C33">
                 <a:alpha val="16000"/>
               </a:srgbClr>
@@ -5035,7 +5323,7 @@
           <a:bodyPr wrap="square" lIns="0" tIns="0" rIns="0" bIns="0" rtlCol="0" anchor="ctr"/>
           <a:lstStyle/>
           <a:p>
-            <a:pPr marL="0" indent="0" algn="ctr">
+            <a:pPr algn="ctr" indent="0" marL="0">
               <a:buNone/>
             </a:pPr>
             <a:r>
@@ -5074,7 +5362,7 @@
           <a:bodyPr wrap="square" lIns="0" tIns="0" rIns="0" bIns="0" rtlCol="0" anchor="ctr"/>
           <a:lstStyle/>
           <a:p>
-            <a:pPr marL="0" indent="0" algn="ctr">
+            <a:pPr algn="ctr" indent="0" marL="0">
               <a:buNone/>
             </a:pPr>
             <a:r>
@@ -5118,7 +5406,7 @@
             <a:prstDash val="solid"/>
           </a:ln>
           <a:effectLst>
-            <a:outerShdw blurRad="88900" dist="25400" dir="5400000" algn="bl" rotWithShape="0">
+            <a:outerShdw sx="100000" sy="100000" kx="0" ky="0" algn="bl" rotWithShape="0" blurRad="88900" dist="25400" dir="5400000">
               <a:srgbClr val="0A1C33">
                 <a:alpha val="16000"/>
               </a:srgbClr>
@@ -5147,7 +5435,7 @@
           <a:bodyPr wrap="square" lIns="0" tIns="0" rIns="0" bIns="0" rtlCol="0" anchor="ctr"/>
           <a:lstStyle/>
           <a:p>
-            <a:pPr marL="0" indent="0" algn="ctr">
+            <a:pPr algn="ctr" indent="0" marL="0">
               <a:buNone/>
             </a:pPr>
             <a:r>
@@ -5186,7 +5474,7 @@
           <a:bodyPr wrap="square" lIns="0" tIns="0" rIns="0" bIns="0" rtlCol="0" anchor="ctr"/>
           <a:lstStyle/>
           <a:p>
-            <a:pPr marL="0" indent="0" algn="ctr">
+            <a:pPr algn="ctr" indent="0" marL="0">
               <a:buNone/>
             </a:pPr>
             <a:r>
@@ -5230,7 +5518,7 @@
             <a:prstDash val="solid"/>
           </a:ln>
           <a:effectLst>
-            <a:outerShdw blurRad="88900" dist="25400" dir="5400000" algn="bl" rotWithShape="0">
+            <a:outerShdw sx="100000" sy="100000" kx="0" ky="0" algn="bl" rotWithShape="0" blurRad="88900" dist="25400" dir="5400000">
               <a:srgbClr val="0A1C33">
                 <a:alpha val="16000"/>
               </a:srgbClr>
@@ -5259,7 +5547,7 @@
           <a:bodyPr wrap="square" lIns="0" tIns="0" rIns="0" bIns="0" rtlCol="0" anchor="ctr"/>
           <a:lstStyle/>
           <a:p>
-            <a:pPr marL="0" indent="0" algn="ctr">
+            <a:pPr algn="ctr" indent="0" marL="0">
               <a:buNone/>
             </a:pPr>
             <a:r>
@@ -5298,7 +5586,7 @@
           <a:bodyPr wrap="square" lIns="0" tIns="0" rIns="0" bIns="0" rtlCol="0" anchor="ctr"/>
           <a:lstStyle/>
           <a:p>
-            <a:pPr marL="0" indent="0" algn="ctr">
+            <a:pPr algn="ctr" indent="0" marL="0">
               <a:buNone/>
             </a:pPr>
             <a:r>
@@ -5342,7 +5630,7 @@
             <a:prstDash val="solid"/>
           </a:ln>
           <a:effectLst>
-            <a:outerShdw blurRad="88900" dist="25400" dir="5400000" algn="bl" rotWithShape="0">
+            <a:outerShdw sx="100000" sy="100000" kx="0" ky="0" algn="bl" rotWithShape="0" blurRad="88900" dist="25400" dir="5400000">
               <a:srgbClr val="0A1C33">
                 <a:alpha val="16000"/>
               </a:srgbClr>
@@ -5371,7 +5659,7 @@
           <a:bodyPr wrap="square" lIns="0" tIns="0" rIns="0" bIns="0" rtlCol="0" anchor="ctr"/>
           <a:lstStyle/>
           <a:p>
-            <a:pPr marL="0" indent="0">
+            <a:pPr indent="0" marL="0">
               <a:buNone/>
             </a:pPr>
             <a:r>
@@ -5391,7 +5679,7 @@
       </p:sp>
       <p:graphicFrame>
         <p:nvGraphicFramePr>
-          <p:cNvPr id="15" name="Chart 0"/>
+          <p:cNvPr id="15" name="Chart 0" descr=""/>
           <p:cNvGraphicFramePr/>
           <p:nvPr/>
         </p:nvGraphicFramePr>
@@ -5399,9 +5687,9 @@
           <a:off x="685800" y="4389120"/>
           <a:ext cx="5669280" cy="1463040"/>
         </p:xfrm>
-        <a:graphic>
+        <a:graphic xmlns:a="http://schemas.openxmlformats.org/drawingml/2006/main">
           <a:graphicData uri="http://schemas.openxmlformats.org/drawingml/2006/chart">
-            <c:chart xmlns:c="http://schemas.openxmlformats.org/drawingml/2006/chart" xmlns:r="http://schemas.openxmlformats.org/officeDocument/2006/relationships" r:id="rId3"/>
+            <c:chart xmlns:c="http://schemas.openxmlformats.org/drawingml/2006/chart" r:id="rId1"/>
           </a:graphicData>
         </a:graphic>
       </p:graphicFrame>
@@ -5431,7 +5719,7 @@
             <a:prstDash val="solid"/>
           </a:ln>
           <a:effectLst>
-            <a:outerShdw blurRad="88900" dist="25400" dir="5400000" algn="bl" rotWithShape="0">
+            <a:outerShdw sx="100000" sy="100000" kx="0" ky="0" algn="bl" rotWithShape="0" blurRad="88900" dist="25400" dir="5400000">
               <a:srgbClr val="0A1C33">
                 <a:alpha val="16000"/>
               </a:srgbClr>
@@ -5460,7 +5748,7 @@
           <a:bodyPr wrap="square" lIns="0" tIns="0" rIns="0" bIns="0" rtlCol="0" anchor="ctr"/>
           <a:lstStyle/>
           <a:p>
-            <a:pPr marL="0" indent="0">
+            <a:pPr indent="0" marL="0">
               <a:buNone/>
             </a:pPr>
             <a:r>
@@ -5584,7 +5872,7 @@
           <a:bodyPr wrap="square" lIns="0" tIns="0" rIns="0" bIns="0" rtlCol="0" anchor="ctr"/>
           <a:lstStyle/>
           <a:p>
-            <a:pPr marL="0" indent="0">
+            <a:pPr indent="0" marL="0">
               <a:buNone/>
             </a:pPr>
             <a:r>
@@ -5623,7 +5911,7 @@
           <a:bodyPr wrap="square" lIns="0" tIns="0" rIns="0" bIns="0" rtlCol="0" anchor="ctr"/>
           <a:lstStyle/>
           <a:p>
-            <a:pPr marL="0" indent="0" algn="r">
+            <a:pPr algn="r" indent="0" marL="0">
               <a:buNone/>
             </a:pPr>
             <a:r>
@@ -5657,7 +5945,6 @@
         <a:solidFill>
           <a:srgbClr val="FFFFFF"/>
         </a:solidFill>
-        <a:effectLst/>
       </p:bgPr>
     </p:bg>
     <p:spTree>
@@ -5695,11 +5982,11 @@
           <a:bodyPr wrap="square" lIns="0" tIns="0" rIns="0" bIns="0" rtlCol="0" anchor="ctr"/>
           <a:lstStyle/>
           <a:p>
-            <a:pPr marL="0" indent="0">
-              <a:buNone/>
-            </a:pPr>
-            <a:r>
-              <a:rPr lang="en-US" sz="1200" b="1" kern="0" spc="300" dirty="0">
+            <a:pPr indent="0" marL="0">
+              <a:buNone/>
+            </a:pPr>
+            <a:r>
+              <a:rPr lang="en-US" sz="1200" b="1" spc="300" kern="0" dirty="0">
                 <a:solidFill>
                   <a:srgbClr val="1D4ED8"/>
                 </a:solidFill>
@@ -5734,7 +6021,7 @@
           <a:bodyPr wrap="square" lIns="0" tIns="0" rIns="0" bIns="0" rtlCol="0" anchor="ctr"/>
           <a:lstStyle/>
           <a:p>
-            <a:pPr marL="0" indent="0">
+            <a:pPr indent="0" marL="0">
               <a:buNone/>
             </a:pPr>
             <a:r>
@@ -5778,7 +6065,7 @@
             <a:prstDash val="solid"/>
           </a:ln>
           <a:effectLst>
-            <a:outerShdw blurRad="88900" dist="25400" dir="5400000" algn="bl" rotWithShape="0">
+            <a:outerShdw sx="100000" sy="100000" kx="0" ky="0" algn="bl" rotWithShape="0" blurRad="88900" dist="25400" dir="5400000">
               <a:srgbClr val="0A1C33">
                 <a:alpha val="16000"/>
               </a:srgbClr>
@@ -5829,7 +6116,7 @@
           <a:bodyPr wrap="square" lIns="0" tIns="0" rIns="0" bIns="0" rtlCol="0" anchor="ctr"/>
           <a:lstStyle/>
           <a:p>
-            <a:pPr marL="0" indent="0" algn="ctr">
+            <a:pPr algn="ctr" indent="0" marL="0">
               <a:buNone/>
             </a:pPr>
             <a:r>
@@ -5868,7 +6155,7 @@
           <a:bodyPr wrap="square" lIns="0" tIns="0" rIns="0" bIns="0" rtlCol="0" anchor="ctr"/>
           <a:lstStyle/>
           <a:p>
-            <a:pPr marL="0" indent="0">
+            <a:pPr indent="0" marL="0">
               <a:buNone/>
             </a:pPr>
             <a:r>
@@ -5907,7 +6194,7 @@
           <a:bodyPr wrap="square" lIns="0" tIns="0" rIns="0" bIns="0" rtlCol="0" anchor="ctr"/>
           <a:lstStyle/>
           <a:p>
-            <a:pPr marL="0" indent="0">
+            <a:pPr indent="0" marL="0">
               <a:buNone/>
             </a:pPr>
             <a:r>
@@ -5951,7 +6238,7 @@
             <a:prstDash val="solid"/>
           </a:ln>
           <a:effectLst>
-            <a:outerShdw blurRad="88900" dist="25400" dir="5400000" algn="bl" rotWithShape="0">
+            <a:outerShdw sx="100000" sy="100000" kx="0" ky="0" algn="bl" rotWithShape="0" blurRad="88900" dist="25400" dir="5400000">
               <a:srgbClr val="0A1C33">
                 <a:alpha val="16000"/>
               </a:srgbClr>
@@ -6002,7 +6289,7 @@
           <a:bodyPr wrap="square" lIns="0" tIns="0" rIns="0" bIns="0" rtlCol="0" anchor="ctr"/>
           <a:lstStyle/>
           <a:p>
-            <a:pPr marL="0" indent="0" algn="ctr">
+            <a:pPr algn="ctr" indent="0" marL="0">
               <a:buNone/>
             </a:pPr>
             <a:r>
@@ -6041,7 +6328,7 @@
           <a:bodyPr wrap="square" lIns="0" tIns="0" rIns="0" bIns="0" rtlCol="0" anchor="ctr"/>
           <a:lstStyle/>
           <a:p>
-            <a:pPr marL="0" indent="0">
+            <a:pPr indent="0" marL="0">
               <a:buNone/>
             </a:pPr>
             <a:r>
@@ -6080,7 +6367,7 @@
           <a:bodyPr wrap="square" lIns="0" tIns="0" rIns="0" bIns="0" rtlCol="0" anchor="ctr"/>
           <a:lstStyle/>
           <a:p>
-            <a:pPr marL="0" indent="0">
+            <a:pPr indent="0" marL="0">
               <a:buNone/>
             </a:pPr>
             <a:r>
@@ -6124,7 +6411,7 @@
             <a:prstDash val="solid"/>
           </a:ln>
           <a:effectLst>
-            <a:outerShdw blurRad="88900" dist="25400" dir="5400000" algn="bl" rotWithShape="0">
+            <a:outerShdw sx="100000" sy="100000" kx="0" ky="0" algn="bl" rotWithShape="0" blurRad="88900" dist="25400" dir="5400000">
               <a:srgbClr val="0A1C33">
                 <a:alpha val="16000"/>
               </a:srgbClr>
@@ -6175,7 +6462,7 @@
           <a:bodyPr wrap="square" lIns="0" tIns="0" rIns="0" bIns="0" rtlCol="0" anchor="ctr"/>
           <a:lstStyle/>
           <a:p>
-            <a:pPr marL="0" indent="0" algn="ctr">
+            <a:pPr algn="ctr" indent="0" marL="0">
               <a:buNone/>
             </a:pPr>
             <a:r>
@@ -6214,7 +6501,7 @@
           <a:bodyPr wrap="square" lIns="0" tIns="0" rIns="0" bIns="0" rtlCol="0" anchor="ctr"/>
           <a:lstStyle/>
           <a:p>
-            <a:pPr marL="0" indent="0">
+            <a:pPr indent="0" marL="0">
               <a:buNone/>
             </a:pPr>
             <a:r>
@@ -6253,7 +6540,7 @@
           <a:bodyPr wrap="square" lIns="0" tIns="0" rIns="0" bIns="0" rtlCol="0" anchor="ctr"/>
           <a:lstStyle/>
           <a:p>
-            <a:pPr marL="0" indent="0">
+            <a:pPr indent="0" marL="0">
               <a:buNone/>
             </a:pPr>
             <a:r>
@@ -6297,7 +6584,7 @@
             <a:prstDash val="solid"/>
           </a:ln>
           <a:effectLst>
-            <a:outerShdw blurRad="88900" dist="25400" dir="5400000" algn="bl" rotWithShape="0">
+            <a:outerShdw sx="100000" sy="100000" kx="0" ky="0" algn="bl" rotWithShape="0" blurRad="88900" dist="25400" dir="5400000">
               <a:srgbClr val="0A1C33">
                 <a:alpha val="16000"/>
               </a:srgbClr>
@@ -6348,7 +6635,7 @@
           <a:bodyPr wrap="square" lIns="0" tIns="0" rIns="0" bIns="0" rtlCol="0" anchor="ctr"/>
           <a:lstStyle/>
           <a:p>
-            <a:pPr marL="0" indent="0" algn="ctr">
+            <a:pPr algn="ctr" indent="0" marL="0">
               <a:buNone/>
             </a:pPr>
             <a:r>
@@ -6387,7 +6674,7 @@
           <a:bodyPr wrap="square" lIns="0" tIns="0" rIns="0" bIns="0" rtlCol="0" anchor="ctr"/>
           <a:lstStyle/>
           <a:p>
-            <a:pPr marL="0" indent="0">
+            <a:pPr indent="0" marL="0">
               <a:buNone/>
             </a:pPr>
             <a:r>
@@ -6426,7 +6713,7 @@
           <a:bodyPr wrap="square" lIns="0" tIns="0" rIns="0" bIns="0" rtlCol="0" anchor="ctr"/>
           <a:lstStyle/>
           <a:p>
-            <a:pPr marL="0" indent="0">
+            <a:pPr indent="0" marL="0">
               <a:buNone/>
             </a:pPr>
             <a:r>
@@ -6465,7 +6752,7 @@
           <a:bodyPr wrap="square" lIns="0" tIns="0" rIns="0" bIns="0" rtlCol="0" anchor="ctr"/>
           <a:lstStyle/>
           <a:p>
-            <a:pPr marL="0" indent="0" algn="r">
+            <a:pPr algn="r" indent="0" marL="0">
               <a:buNone/>
             </a:pPr>
             <a:r>
@@ -6499,7 +6786,6 @@
         <a:solidFill>
           <a:srgbClr val="0A1C33"/>
         </a:solidFill>
-        <a:effectLst/>
       </p:bgPr>
     </p:bg>
     <p:spTree>
@@ -6625,11 +6911,11 @@
           <a:bodyPr wrap="square" lIns="0" tIns="0" rIns="0" bIns="0" rtlCol="0" anchor="ctr"/>
           <a:lstStyle/>
           <a:p>
-            <a:pPr marL="0" indent="0">
-              <a:buNone/>
-            </a:pPr>
-            <a:r>
-              <a:rPr lang="en-US" sz="1200" b="1" kern="0" spc="300" dirty="0">
+            <a:pPr indent="0" marL="0">
+              <a:buNone/>
+            </a:pPr>
+            <a:r>
+              <a:rPr lang="en-US" sz="1200" b="1" spc="300" kern="0" dirty="0">
                 <a:solidFill>
                   <a:srgbClr val="F59E0B"/>
                 </a:solidFill>
@@ -6664,7 +6950,7 @@
           <a:bodyPr wrap="square" lIns="0" tIns="0" rIns="0" bIns="0" rtlCol="0" anchor="ctr"/>
           <a:lstStyle/>
           <a:p>
-            <a:pPr marL="0" indent="0">
+            <a:pPr indent="0" marL="0">
               <a:lnSpc>
                 <a:spcPct val="102000"/>
               </a:lnSpc>
@@ -6684,7 +6970,7 @@
             <a:endParaRPr lang="en-US" sz="4000" dirty="0"/>
           </a:p>
           <a:p>
-            <a:pPr marL="0" indent="0">
+            <a:pPr indent="0" marL="0">
               <a:lnSpc>
                 <a:spcPct val="102000"/>
               </a:lnSpc>
@@ -6753,7 +7039,7 @@
           <a:bodyPr wrap="square" lIns="0" tIns="0" rIns="0" bIns="0" rtlCol="0" anchor="ctr"/>
           <a:lstStyle/>
           <a:p>
-            <a:pPr marL="0" indent="0">
+            <a:pPr indent="0" marL="0">
               <a:buNone/>
             </a:pPr>
             <a:r>
@@ -6792,7 +7078,7 @@
           <a:bodyPr wrap="square" lIns="0" tIns="0" rIns="0" bIns="0" rtlCol="0" anchor="ctr"/>
           <a:lstStyle/>
           <a:p>
-            <a:pPr marL="0" indent="0">
+            <a:pPr indent="0" marL="0">
               <a:buNone/>
             </a:pPr>
             <a:r>
@@ -6858,7 +7144,7 @@
           <a:bodyPr wrap="square" lIns="0" tIns="0" rIns="0" bIns="0" rtlCol="0" anchor="ctr"/>
           <a:lstStyle/>
           <a:p>
-            <a:pPr marL="0" indent="0">
+            <a:pPr indent="0" marL="0">
               <a:buNone/>
             </a:pPr>
             <a:r>
@@ -6897,7 +7183,7 @@
           <a:bodyPr wrap="square" lIns="0" tIns="0" rIns="0" bIns="0" rtlCol="0" anchor="ctr"/>
           <a:lstStyle/>
           <a:p>
-            <a:pPr marL="0" indent="0">
+            <a:pPr indent="0" marL="0">
               <a:buNone/>
             </a:pPr>
             <a:r>
@@ -6963,7 +7249,7 @@
           <a:bodyPr wrap="square" lIns="0" tIns="0" rIns="0" bIns="0" rtlCol="0" anchor="ctr"/>
           <a:lstStyle/>
           <a:p>
-            <a:pPr marL="0" indent="0">
+            <a:pPr indent="0" marL="0">
               <a:buNone/>
             </a:pPr>
             <a:r>
@@ -7002,7 +7288,7 @@
           <a:bodyPr wrap="square" lIns="0" tIns="0" rIns="0" bIns="0" rtlCol="0" anchor="ctr"/>
           <a:lstStyle/>
           <a:p>
-            <a:pPr marL="0" indent="0">
+            <a:pPr indent="0" marL="0">
               <a:buNone/>
             </a:pPr>
             <a:r>
@@ -7068,7 +7354,7 @@
           <a:bodyPr wrap="square" lIns="0" tIns="0" rIns="0" bIns="0" rtlCol="0" anchor="ctr"/>
           <a:lstStyle/>
           <a:p>
-            <a:pPr marL="0" indent="0">
+            <a:pPr indent="0" marL="0">
               <a:buNone/>
             </a:pPr>
             <a:r>
@@ -7107,7 +7393,7 @@
           <a:bodyPr wrap="square" lIns="0" tIns="0" rIns="0" bIns="0" rtlCol="0" anchor="ctr"/>
           <a:lstStyle/>
           <a:p>
-            <a:pPr marL="0" indent="0">
+            <a:pPr indent="0" marL="0">
               <a:buNone/>
             </a:pPr>
             <a:r>
@@ -7146,7 +7432,7 @@
           <a:bodyPr wrap="square" lIns="0" tIns="0" rIns="0" bIns="0" rtlCol="0" anchor="ctr"/>
           <a:lstStyle/>
           <a:p>
-            <a:pPr marL="0" indent="0" algn="r">
+            <a:pPr algn="r" indent="0" marL="0">
               <a:buNone/>
             </a:pPr>
             <a:r>
@@ -7180,7 +7466,6 @@
         <a:solidFill>
           <a:srgbClr val="FFFFFF"/>
         </a:solidFill>
-        <a:effectLst/>
       </p:bgPr>
     </p:bg>
     <p:spTree>
@@ -7218,11 +7503,11 @@
           <a:bodyPr wrap="square" lIns="0" tIns="0" rIns="0" bIns="0" rtlCol="0" anchor="ctr"/>
           <a:lstStyle/>
           <a:p>
-            <a:pPr marL="0" indent="0">
-              <a:buNone/>
-            </a:pPr>
-            <a:r>
-              <a:rPr lang="en-US" sz="1200" b="1" kern="0" spc="300" dirty="0">
+            <a:pPr indent="0" marL="0">
+              <a:buNone/>
+            </a:pPr>
+            <a:r>
+              <a:rPr lang="en-US" sz="1200" b="1" spc="300" kern="0" dirty="0">
                 <a:solidFill>
                   <a:srgbClr val="1D4ED8"/>
                 </a:solidFill>
@@ -7257,7 +7542,7 @@
           <a:bodyPr wrap="square" lIns="0" tIns="0" rIns="0" bIns="0" rtlCol="0" anchor="ctr"/>
           <a:lstStyle/>
           <a:p>
-            <a:pPr marL="0" indent="0">
+            <a:pPr indent="0" marL="0">
               <a:buNone/>
             </a:pPr>
             <a:r>
@@ -7301,7 +7586,7 @@
             <a:prstDash val="solid"/>
           </a:ln>
           <a:effectLst>
-            <a:outerShdw blurRad="88900" dist="25400" dir="5400000" algn="bl" rotWithShape="0">
+            <a:outerShdw sx="100000" sy="100000" kx="0" ky="0" algn="bl" rotWithShape="0" blurRad="88900" dist="25400" dir="5400000">
               <a:srgbClr val="0A1C33">
                 <a:alpha val="16000"/>
               </a:srgbClr>
@@ -7350,7 +7635,7 @@
           <a:bodyPr wrap="square" lIns="0" tIns="0" rIns="0" bIns="0" rtlCol="0" anchor="ctr"/>
           <a:lstStyle/>
           <a:p>
-            <a:pPr marL="0" indent="0" algn="ctr">
+            <a:pPr algn="ctr" indent="0" marL="0">
               <a:buNone/>
             </a:pPr>
             <a:r>
@@ -7389,7 +7674,7 @@
           <a:bodyPr wrap="square" lIns="0" tIns="0" rIns="0" bIns="0" rtlCol="0" anchor="ctr"/>
           <a:lstStyle/>
           <a:p>
-            <a:pPr marL="0" indent="0">
+            <a:pPr indent="0" marL="0">
               <a:buNone/>
             </a:pPr>
             <a:r>
@@ -7450,7 +7735,7 @@
           <a:bodyPr wrap="square" lIns="0" tIns="0" rIns="0" bIns="0" rtlCol="0" anchor="ctr"/>
           <a:lstStyle/>
           <a:p>
-            <a:pPr marL="0" indent="0" algn="ctr">
+            <a:pPr algn="ctr" indent="0" marL="0">
               <a:buNone/>
             </a:pPr>
             <a:r>
@@ -7489,7 +7774,7 @@
           <a:bodyPr wrap="square" lIns="0" tIns="0" rIns="0" bIns="0" rtlCol="0" anchor="ctr"/>
           <a:lstStyle/>
           <a:p>
-            <a:pPr marL="0" indent="0">
+            <a:pPr indent="0" marL="0">
               <a:buNone/>
             </a:pPr>
             <a:r>
@@ -7553,7 +7838,7 @@
             <a:prstDash val="solid"/>
           </a:ln>
           <a:effectLst>
-            <a:outerShdw blurRad="88900" dist="25400" dir="5400000" algn="bl" rotWithShape="0">
+            <a:outerShdw sx="100000" sy="100000" kx="0" ky="0" algn="bl" rotWithShape="0" blurRad="88900" dist="25400" dir="5400000">
               <a:srgbClr val="0A1C33">
                 <a:alpha val="16000"/>
               </a:srgbClr>
@@ -7602,7 +7887,7 @@
           <a:bodyPr wrap="square" lIns="0" tIns="0" rIns="0" bIns="0" rtlCol="0" anchor="ctr"/>
           <a:lstStyle/>
           <a:p>
-            <a:pPr marL="0" indent="0" algn="ctr">
+            <a:pPr algn="ctr" indent="0" marL="0">
               <a:buNone/>
             </a:pPr>
             <a:r>
@@ -7641,7 +7926,7 @@
           <a:bodyPr wrap="square" lIns="0" tIns="0" rIns="0" bIns="0" rtlCol="0" anchor="ctr"/>
           <a:lstStyle/>
           <a:p>
-            <a:pPr marL="0" indent="0">
+            <a:pPr indent="0" marL="0">
               <a:buNone/>
             </a:pPr>
             <a:r>
@@ -7702,7 +7987,7 @@
           <a:bodyPr wrap="square" lIns="0" tIns="0" rIns="0" bIns="0" rtlCol="0" anchor="ctr"/>
           <a:lstStyle/>
           <a:p>
-            <a:pPr marL="0" indent="0" algn="ctr">
+            <a:pPr algn="ctr" indent="0" marL="0">
               <a:buNone/>
             </a:pPr>
             <a:r>
@@ -7741,7 +8026,7 @@
           <a:bodyPr wrap="square" lIns="0" tIns="0" rIns="0" bIns="0" rtlCol="0" anchor="ctr"/>
           <a:lstStyle/>
           <a:p>
-            <a:pPr marL="0" indent="0">
+            <a:pPr indent="0" marL="0">
               <a:buNone/>
             </a:pPr>
             <a:r>
@@ -7805,7 +8090,7 @@
             <a:prstDash val="solid"/>
           </a:ln>
           <a:effectLst>
-            <a:outerShdw blurRad="88900" dist="25400" dir="5400000" algn="bl" rotWithShape="0">
+            <a:outerShdw sx="100000" sy="100000" kx="0" ky="0" algn="bl" rotWithShape="0" blurRad="88900" dist="25400" dir="5400000">
               <a:srgbClr val="0A1C33">
                 <a:alpha val="16000"/>
               </a:srgbClr>
@@ -7854,7 +8139,7 @@
           <a:bodyPr wrap="square" lIns="0" tIns="0" rIns="0" bIns="0" rtlCol="0" anchor="ctr"/>
           <a:lstStyle/>
           <a:p>
-            <a:pPr marL="0" indent="0" algn="ctr">
+            <a:pPr algn="ctr" indent="0" marL="0">
               <a:buNone/>
             </a:pPr>
             <a:r>
@@ -7893,7 +8178,7 @@
           <a:bodyPr wrap="square" lIns="0" tIns="0" rIns="0" bIns="0" rtlCol="0" anchor="ctr"/>
           <a:lstStyle/>
           <a:p>
-            <a:pPr marL="0" indent="0">
+            <a:pPr indent="0" marL="0">
               <a:buNone/>
             </a:pPr>
             <a:r>
@@ -7954,7 +8239,7 @@
           <a:bodyPr wrap="square" lIns="0" tIns="0" rIns="0" bIns="0" rtlCol="0" anchor="ctr"/>
           <a:lstStyle/>
           <a:p>
-            <a:pPr marL="0" indent="0" algn="ctr">
+            <a:pPr algn="ctr" indent="0" marL="0">
               <a:buNone/>
             </a:pPr>
             <a:r>
@@ -7993,7 +8278,7 @@
           <a:bodyPr wrap="square" lIns="0" tIns="0" rIns="0" bIns="0" rtlCol="0" anchor="ctr"/>
           <a:lstStyle/>
           <a:p>
-            <a:pPr marL="0" indent="0">
+            <a:pPr indent="0" marL="0">
               <a:buNone/>
             </a:pPr>
             <a:r>
@@ -8057,7 +8342,7 @@
             <a:prstDash val="solid"/>
           </a:ln>
           <a:effectLst>
-            <a:outerShdw blurRad="88900" dist="25400" dir="5400000" algn="bl" rotWithShape="0">
+            <a:outerShdw sx="100000" sy="100000" kx="0" ky="0" algn="bl" rotWithShape="0" blurRad="88900" dist="25400" dir="5400000">
               <a:srgbClr val="0A1C33">
                 <a:alpha val="16000"/>
               </a:srgbClr>
@@ -8106,7 +8391,7 @@
           <a:bodyPr wrap="square" lIns="0" tIns="0" rIns="0" bIns="0" rtlCol="0" anchor="ctr"/>
           <a:lstStyle/>
           <a:p>
-            <a:pPr marL="0" indent="0" algn="ctr">
+            <a:pPr algn="ctr" indent="0" marL="0">
               <a:buNone/>
             </a:pPr>
             <a:r>
@@ -8145,7 +8430,7 @@
           <a:bodyPr wrap="square" lIns="0" tIns="0" rIns="0" bIns="0" rtlCol="0" anchor="ctr"/>
           <a:lstStyle/>
           <a:p>
-            <a:pPr marL="0" indent="0">
+            <a:pPr indent="0" marL="0">
               <a:buNone/>
             </a:pPr>
             <a:r>
@@ -8206,7 +8491,7 @@
           <a:bodyPr wrap="square" lIns="0" tIns="0" rIns="0" bIns="0" rtlCol="0" anchor="ctr"/>
           <a:lstStyle/>
           <a:p>
-            <a:pPr marL="0" indent="0" algn="ctr">
+            <a:pPr algn="ctr" indent="0" marL="0">
               <a:buNone/>
             </a:pPr>
             <a:r>
@@ -8245,7 +8530,7 @@
           <a:bodyPr wrap="square" lIns="0" tIns="0" rIns="0" bIns="0" rtlCol="0" anchor="ctr"/>
           <a:lstStyle/>
           <a:p>
-            <a:pPr marL="0" indent="0">
+            <a:pPr indent="0" marL="0">
               <a:buNone/>
             </a:pPr>
             <a:r>
@@ -8289,7 +8574,7 @@
             <a:prstDash val="solid"/>
           </a:ln>
           <a:effectLst>
-            <a:outerShdw blurRad="88900" dist="25400" dir="5400000" algn="bl" rotWithShape="0">
+            <a:outerShdw sx="100000" sy="100000" kx="0" ky="0" algn="bl" rotWithShape="0" blurRad="88900" dist="25400" dir="5400000">
               <a:srgbClr val="0A1C33">
                 <a:alpha val="16000"/>
               </a:srgbClr>
@@ -8318,7 +8603,7 @@
           <a:bodyPr wrap="square" lIns="0" tIns="0" rIns="0" bIns="0" rtlCol="0" anchor="ctr"/>
           <a:lstStyle/>
           <a:p>
-            <a:pPr marL="0" indent="0">
+            <a:pPr indent="0" marL="0">
               <a:buNone/>
             </a:pPr>
             <a:r>
@@ -8332,6 +8617,9 @@
               </a:rPr>
               <a:t>Included from day one:  </a:t>
             </a:r>
+            <a:pPr indent="0" marL="0">
+              <a:buNone/>
+            </a:pPr>
             <a:r>
               <a:rPr lang="en-US" sz="1350" dirty="0">
                 <a:solidFill>
@@ -8368,7 +8656,7 @@
           <a:bodyPr wrap="square" lIns="0" tIns="0" rIns="0" bIns="0" rtlCol="0" anchor="ctr"/>
           <a:lstStyle/>
           <a:p>
-            <a:pPr marL="0" indent="0" algn="r">
+            <a:pPr algn="r" indent="0" marL="0">
               <a:buNone/>
             </a:pPr>
             <a:r>
@@ -8402,7 +8690,6 @@
         <a:solidFill>
           <a:srgbClr val="FFFFFF"/>
         </a:solidFill>
-        <a:effectLst/>
       </p:bgPr>
     </p:bg>
     <p:spTree>
@@ -8440,11 +8727,11 @@
           <a:bodyPr wrap="square" lIns="0" tIns="0" rIns="0" bIns="0" rtlCol="0" anchor="ctr"/>
           <a:lstStyle/>
           <a:p>
-            <a:pPr marL="0" indent="0">
-              <a:buNone/>
-            </a:pPr>
-            <a:r>
-              <a:rPr lang="en-US" sz="1200" b="1" kern="0" spc="300" dirty="0">
+            <a:pPr indent="0" marL="0">
+              <a:buNone/>
+            </a:pPr>
+            <a:r>
+              <a:rPr lang="en-US" sz="1200" b="1" spc="300" kern="0" dirty="0">
                 <a:solidFill>
                   <a:srgbClr val="1D4ED8"/>
                 </a:solidFill>
@@ -8479,7 +8766,7 @@
           <a:bodyPr wrap="square" lIns="0" tIns="0" rIns="0" bIns="0" rtlCol="0" anchor="ctr"/>
           <a:lstStyle/>
           <a:p>
-            <a:pPr marL="0" indent="0">
+            <a:pPr indent="0" marL="0">
               <a:buNone/>
             </a:pPr>
             <a:r>
@@ -8523,7 +8810,7 @@
             <a:prstDash val="solid"/>
           </a:ln>
           <a:effectLst>
-            <a:outerShdw blurRad="88900" dist="25400" dir="5400000" algn="bl" rotWithShape="0">
+            <a:outerShdw sx="100000" sy="100000" kx="0" ky="0" algn="bl" rotWithShape="0" blurRad="88900" dist="25400" dir="5400000">
               <a:srgbClr val="0A1C33">
                 <a:alpha val="16000"/>
               </a:srgbClr>
@@ -8572,7 +8859,7 @@
           <a:bodyPr wrap="square" lIns="0" tIns="0" rIns="0" bIns="0" rtlCol="0" anchor="ctr"/>
           <a:lstStyle/>
           <a:p>
-            <a:pPr marL="0" indent="0">
+            <a:pPr indent="0" marL="0">
               <a:buNone/>
             </a:pPr>
             <a:r>
@@ -8611,7 +8898,7 @@
           <a:bodyPr wrap="square" lIns="0" tIns="0" rIns="0" bIns="0" rtlCol="0" anchor="ctr"/>
           <a:lstStyle/>
           <a:p>
-            <a:pPr marL="0" indent="0">
+            <a:pPr indent="0" marL="0">
               <a:buNone/>
             </a:pPr>
             <a:r>
@@ -8655,7 +8942,7 @@
             <a:prstDash val="solid"/>
           </a:ln>
           <a:effectLst>
-            <a:outerShdw blurRad="88900" dist="25400" dir="5400000" algn="bl" rotWithShape="0">
+            <a:outerShdw sx="100000" sy="100000" kx="0" ky="0" algn="bl" rotWithShape="0" blurRad="88900" dist="25400" dir="5400000">
               <a:srgbClr val="0A1C33">
                 <a:alpha val="16000"/>
               </a:srgbClr>
@@ -8704,7 +8991,7 @@
           <a:bodyPr wrap="square" lIns="0" tIns="0" rIns="0" bIns="0" rtlCol="0" anchor="ctr"/>
           <a:lstStyle/>
           <a:p>
-            <a:pPr marL="0" indent="0">
+            <a:pPr indent="0" marL="0">
               <a:buNone/>
             </a:pPr>
             <a:r>
@@ -8743,7 +9030,7 @@
           <a:bodyPr wrap="square" lIns="0" tIns="0" rIns="0" bIns="0" rtlCol="0" anchor="ctr"/>
           <a:lstStyle/>
           <a:p>
-            <a:pPr marL="0" indent="0">
+            <a:pPr indent="0" marL="0">
               <a:buNone/>
             </a:pPr>
             <a:r>
@@ -8787,7 +9074,7 @@
             <a:prstDash val="solid"/>
           </a:ln>
           <a:effectLst>
-            <a:outerShdw blurRad="88900" dist="25400" dir="5400000" algn="bl" rotWithShape="0">
+            <a:outerShdw sx="100000" sy="100000" kx="0" ky="0" algn="bl" rotWithShape="0" blurRad="88900" dist="25400" dir="5400000">
               <a:srgbClr val="0A1C33">
                 <a:alpha val="16000"/>
               </a:srgbClr>
@@ -8836,7 +9123,7 @@
           <a:bodyPr wrap="square" lIns="0" tIns="0" rIns="0" bIns="0" rtlCol="0" anchor="ctr"/>
           <a:lstStyle/>
           <a:p>
-            <a:pPr marL="0" indent="0">
+            <a:pPr indent="0" marL="0">
               <a:buNone/>
             </a:pPr>
             <a:r>
@@ -8875,7 +9162,7 @@
           <a:bodyPr wrap="square" lIns="0" tIns="0" rIns="0" bIns="0" rtlCol="0" anchor="ctr"/>
           <a:lstStyle/>
           <a:p>
-            <a:pPr marL="0" indent="0">
+            <a:pPr indent="0" marL="0">
               <a:buNone/>
             </a:pPr>
             <a:r>
@@ -8919,7 +9206,7 @@
             <a:prstDash val="solid"/>
           </a:ln>
           <a:effectLst>
-            <a:outerShdw blurRad="88900" dist="25400" dir="5400000" algn="bl" rotWithShape="0">
+            <a:outerShdw sx="100000" sy="100000" kx="0" ky="0" algn="bl" rotWithShape="0" blurRad="88900" dist="25400" dir="5400000">
               <a:srgbClr val="0A1C33">
                 <a:alpha val="16000"/>
               </a:srgbClr>
@@ -8968,7 +9255,7 @@
           <a:bodyPr wrap="square" lIns="0" tIns="0" rIns="0" bIns="0" rtlCol="0" anchor="ctr"/>
           <a:lstStyle/>
           <a:p>
-            <a:pPr marL="0" indent="0">
+            <a:pPr indent="0" marL="0">
               <a:buNone/>
             </a:pPr>
             <a:r>
@@ -9007,7 +9294,7 @@
           <a:bodyPr wrap="square" lIns="0" tIns="0" rIns="0" bIns="0" rtlCol="0" anchor="ctr"/>
           <a:lstStyle/>
           <a:p>
-            <a:pPr marL="0" indent="0">
+            <a:pPr indent="0" marL="0">
               <a:buNone/>
             </a:pPr>
             <a:r>
@@ -9051,7 +9338,7 @@
             <a:prstDash val="solid"/>
           </a:ln>
           <a:effectLst>
-            <a:outerShdw blurRad="88900" dist="25400" dir="5400000" algn="bl" rotWithShape="0">
+            <a:outerShdw sx="100000" sy="100000" kx="0" ky="0" algn="bl" rotWithShape="0" blurRad="88900" dist="25400" dir="5400000">
               <a:srgbClr val="0A1C33">
                 <a:alpha val="16000"/>
               </a:srgbClr>
@@ -9100,7 +9387,7 @@
           <a:bodyPr wrap="square" lIns="0" tIns="0" rIns="0" bIns="0" rtlCol="0" anchor="ctr"/>
           <a:lstStyle/>
           <a:p>
-            <a:pPr marL="0" indent="0">
+            <a:pPr indent="0" marL="0">
               <a:buNone/>
             </a:pPr>
             <a:r>
@@ -9139,7 +9426,7 @@
           <a:bodyPr wrap="square" lIns="0" tIns="0" rIns="0" bIns="0" rtlCol="0" anchor="ctr"/>
           <a:lstStyle/>
           <a:p>
-            <a:pPr marL="0" indent="0">
+            <a:pPr indent="0" marL="0">
               <a:buNone/>
             </a:pPr>
             <a:r>
@@ -9183,7 +9470,7 @@
             <a:prstDash val="solid"/>
           </a:ln>
           <a:effectLst>
-            <a:outerShdw blurRad="88900" dist="25400" dir="5400000" algn="bl" rotWithShape="0">
+            <a:outerShdw sx="100000" sy="100000" kx="0" ky="0" algn="bl" rotWithShape="0" blurRad="88900" dist="25400" dir="5400000">
               <a:srgbClr val="0A1C33">
                 <a:alpha val="16000"/>
               </a:srgbClr>
@@ -9232,7 +9519,7 @@
           <a:bodyPr wrap="square" lIns="0" tIns="0" rIns="0" bIns="0" rtlCol="0" anchor="ctr"/>
           <a:lstStyle/>
           <a:p>
-            <a:pPr marL="0" indent="0">
+            <a:pPr indent="0" marL="0">
               <a:buNone/>
             </a:pPr>
             <a:r>
@@ -9271,7 +9558,7 @@
           <a:bodyPr wrap="square" lIns="0" tIns="0" rIns="0" bIns="0" rtlCol="0" anchor="ctr"/>
           <a:lstStyle/>
           <a:p>
-            <a:pPr marL="0" indent="0">
+            <a:pPr indent="0" marL="0">
               <a:buNone/>
             </a:pPr>
             <a:r>
@@ -9310,7 +9597,7 @@
           <a:bodyPr wrap="square" lIns="0" tIns="0" rIns="0" bIns="0" rtlCol="0" anchor="ctr"/>
           <a:lstStyle/>
           <a:p>
-            <a:pPr marL="0" indent="0">
+            <a:pPr indent="0" marL="0">
               <a:buNone/>
             </a:pPr>
             <a:r>
@@ -9349,7 +9636,7 @@
           <a:bodyPr wrap="square" lIns="0" tIns="0" rIns="0" bIns="0" rtlCol="0" anchor="ctr"/>
           <a:lstStyle/>
           <a:p>
-            <a:pPr marL="0" indent="0" algn="r">
+            <a:pPr algn="r" indent="0" marL="0">
               <a:buNone/>
             </a:pPr>
             <a:r>
@@ -9383,7 +9670,6 @@
         <a:solidFill>
           <a:srgbClr val="FFFFFF"/>
         </a:solidFill>
-        <a:effectLst/>
       </p:bgPr>
     </p:bg>
     <p:spTree>
@@ -9421,11 +9707,11 @@
           <a:bodyPr wrap="square" lIns="0" tIns="0" rIns="0" bIns="0" rtlCol="0" anchor="ctr"/>
           <a:lstStyle/>
           <a:p>
-            <a:pPr marL="0" indent="0">
-              <a:buNone/>
-            </a:pPr>
-            <a:r>
-              <a:rPr lang="en-US" sz="1200" b="1" kern="0" spc="300" dirty="0">
+            <a:pPr indent="0" marL="0">
+              <a:buNone/>
+            </a:pPr>
+            <a:r>
+              <a:rPr lang="en-US" sz="1200" b="1" spc="300" kern="0" dirty="0">
                 <a:solidFill>
                   <a:srgbClr val="1D4ED8"/>
                 </a:solidFill>
@@ -9460,7 +9746,7 @@
           <a:bodyPr wrap="square" lIns="0" tIns="0" rIns="0" bIns="0" rtlCol="0" anchor="ctr"/>
           <a:lstStyle/>
           <a:p>
-            <a:pPr marL="0" indent="0">
+            <a:pPr indent="0" marL="0">
               <a:buNone/>
             </a:pPr>
             <a:r>
@@ -9501,34 +9787,10 @@
             <a:tbl>
               <a:tblPr/>
               <a:tblGrid>
-                <a:gridCol w="2468880">
-                  <a:extLst>
-                    <a:ext uri="{9D8B030D-6E8A-4147-A177-3AD203B41FA5}">
-                      <a16:colId xmlns:a16="http://schemas.microsoft.com/office/drawing/2014/main" val="20000"/>
-                    </a:ext>
-                  </a:extLst>
-                </a:gridCol>
-                <a:gridCol w="3026664">
-                  <a:extLst>
-                    <a:ext uri="{9D8B030D-6E8A-4147-A177-3AD203B41FA5}">
-                      <a16:colId xmlns:a16="http://schemas.microsoft.com/office/drawing/2014/main" val="20001"/>
-                    </a:ext>
-                  </a:extLst>
-                </a:gridCol>
-                <a:gridCol w="2889504">
-                  <a:extLst>
-                    <a:ext uri="{9D8B030D-6E8A-4147-A177-3AD203B41FA5}">
-                      <a16:colId xmlns:a16="http://schemas.microsoft.com/office/drawing/2014/main" val="20002"/>
-                    </a:ext>
-                  </a:extLst>
-                </a:gridCol>
-                <a:gridCol w="2889504">
-                  <a:extLst>
-                    <a:ext uri="{9D8B030D-6E8A-4147-A177-3AD203B41FA5}">
-                      <a16:colId xmlns:a16="http://schemas.microsoft.com/office/drawing/2014/main" val="20003"/>
-                    </a:ext>
-                  </a:extLst>
-                </a:gridCol>
+                <a:gridCol w="2468880"/>
+                <a:gridCol w="3026664"/>
+                <a:gridCol w="2889504"/>
+                <a:gridCol w="2889504"/>
               </a:tblGrid>
               <a:tr h="475488">
                 <a:tc>
@@ -9536,7 +9798,7 @@
                     <a:bodyPr/>
                     <a:lstStyle/>
                     <a:p>
-                      <a:pPr marL="0" indent="0" algn="l">
+                      <a:pPr algn="l" indent="0" marL="0">
                         <a:buNone/>
                       </a:pPr>
                       <a:endParaRPr lang="en-US" sz="1250" dirty="0">
@@ -9593,7 +9855,7 @@
                     <a:bodyPr/>
                     <a:lstStyle/>
                     <a:p>
-                      <a:pPr marL="0" indent="0" algn="ctr">
+                      <a:pPr algn="ctr" indent="0" marL="0">
                         <a:buNone/>
                       </a:pPr>
                       <a:r>
@@ -9661,7 +9923,7 @@
                     <a:bodyPr/>
                     <a:lstStyle/>
                     <a:p>
-                      <a:pPr marL="0" indent="0" algn="ctr">
+                      <a:pPr algn="ctr" indent="0" marL="0">
                         <a:buNone/>
                       </a:pPr>
                       <a:r>
@@ -9729,7 +9991,7 @@
                     <a:bodyPr/>
                     <a:lstStyle/>
                     <a:p>
-                      <a:pPr marL="0" indent="0" algn="ctr">
+                      <a:pPr algn="ctr" indent="0" marL="0">
                         <a:buNone/>
                       </a:pPr>
                       <a:r>
@@ -9792,11 +10054,6 @@
                     </a:solidFill>
                   </a:tcPr>
                 </a:tc>
-                <a:extLst>
-                  <a:ext uri="{0D108BD9-81ED-4DB2-BD59-A6C34878D82A}">
-                    <a16:rowId xmlns:a16="http://schemas.microsoft.com/office/drawing/2014/main" val="10000"/>
-                  </a:ext>
-                </a:extLst>
               </a:tr>
               <a:tr h="475488">
                 <a:tc>
@@ -9804,7 +10061,7 @@
                     <a:bodyPr/>
                     <a:lstStyle/>
                     <a:p>
-                      <a:pPr marL="0" indent="0" algn="l">
+                      <a:pPr algn="l" indent="0" marL="0">
                         <a:buNone/>
                       </a:pPr>
                       <a:r>
@@ -9872,7 +10129,7 @@
                     <a:bodyPr/>
                     <a:lstStyle/>
                     <a:p>
-                      <a:pPr marL="0" indent="0" algn="ctr">
+                      <a:pPr algn="ctr" indent="0" marL="0">
                         <a:buNone/>
                       </a:pPr>
                       <a:r>
@@ -9940,7 +10197,7 @@
                     <a:bodyPr/>
                     <a:lstStyle/>
                     <a:p>
-                      <a:pPr marL="0" indent="0" algn="ctr">
+                      <a:pPr algn="ctr" indent="0" marL="0">
                         <a:buNone/>
                       </a:pPr>
                       <a:r>
@@ -10008,7 +10265,7 @@
                     <a:bodyPr/>
                     <a:lstStyle/>
                     <a:p>
-                      <a:pPr marL="0" indent="0" algn="ctr">
+                      <a:pPr algn="ctr" indent="0" marL="0">
                         <a:buNone/>
                       </a:pPr>
                       <a:r>
@@ -10071,11 +10328,6 @@
                     </a:solidFill>
                   </a:tcPr>
                 </a:tc>
-                <a:extLst>
-                  <a:ext uri="{0D108BD9-81ED-4DB2-BD59-A6C34878D82A}">
-                    <a16:rowId xmlns:a16="http://schemas.microsoft.com/office/drawing/2014/main" val="10001"/>
-                  </a:ext>
-                </a:extLst>
               </a:tr>
               <a:tr h="475488">
                 <a:tc>
@@ -10083,7 +10335,7 @@
                     <a:bodyPr/>
                     <a:lstStyle/>
                     <a:p>
-                      <a:pPr marL="0" indent="0" algn="l">
+                      <a:pPr algn="l" indent="0" marL="0">
                         <a:buNone/>
                       </a:pPr>
                       <a:r>
@@ -10151,7 +10403,7 @@
                     <a:bodyPr/>
                     <a:lstStyle/>
                     <a:p>
-                      <a:pPr marL="0" indent="0" algn="ctr">
+                      <a:pPr algn="ctr" indent="0" marL="0">
                         <a:buNone/>
                       </a:pPr>
                       <a:r>
@@ -10219,7 +10471,7 @@
                     <a:bodyPr/>
                     <a:lstStyle/>
                     <a:p>
-                      <a:pPr marL="0" indent="0" algn="ctr">
+                      <a:pPr algn="ctr" indent="0" marL="0">
                         <a:buNone/>
                       </a:pPr>
                       <a:r>
@@ -10287,7 +10539,7 @@
                     <a:bodyPr/>
                     <a:lstStyle/>
                     <a:p>
-                      <a:pPr marL="0" indent="0" algn="ctr">
+                      <a:pPr algn="ctr" indent="0" marL="0">
                         <a:buNone/>
                       </a:pPr>
                       <a:r>
@@ -10350,11 +10602,6 @@
                     </a:solidFill>
                   </a:tcPr>
                 </a:tc>
-                <a:extLst>
-                  <a:ext uri="{0D108BD9-81ED-4DB2-BD59-A6C34878D82A}">
-                    <a16:rowId xmlns:a16="http://schemas.microsoft.com/office/drawing/2014/main" val="10002"/>
-                  </a:ext>
-                </a:extLst>
               </a:tr>
               <a:tr h="475488">
                 <a:tc>
@@ -10362,7 +10609,7 @@
                     <a:bodyPr/>
                     <a:lstStyle/>
                     <a:p>
-                      <a:pPr marL="0" indent="0" algn="l">
+                      <a:pPr algn="l" indent="0" marL="0">
                         <a:buNone/>
                       </a:pPr>
                       <a:r>
@@ -10430,7 +10677,7 @@
                     <a:bodyPr/>
                     <a:lstStyle/>
                     <a:p>
-                      <a:pPr marL="0" indent="0" algn="ctr">
+                      <a:pPr algn="ctr" indent="0" marL="0">
                         <a:buNone/>
                       </a:pPr>
                       <a:r>
@@ -10498,7 +10745,7 @@
                     <a:bodyPr/>
                     <a:lstStyle/>
                     <a:p>
-                      <a:pPr marL="0" indent="0" algn="ctr">
+                      <a:pPr algn="ctr" indent="0" marL="0">
                         <a:buNone/>
                       </a:pPr>
                       <a:r>
@@ -10566,7 +10813,7 @@
                     <a:bodyPr/>
                     <a:lstStyle/>
                     <a:p>
-                      <a:pPr marL="0" indent="0" algn="ctr">
+                      <a:pPr algn="ctr" indent="0" marL="0">
                         <a:buNone/>
                       </a:pPr>
                       <a:r>
@@ -10629,11 +10876,6 @@
                     </a:solidFill>
                   </a:tcPr>
                 </a:tc>
-                <a:extLst>
-                  <a:ext uri="{0D108BD9-81ED-4DB2-BD59-A6C34878D82A}">
-                    <a16:rowId xmlns:a16="http://schemas.microsoft.com/office/drawing/2014/main" val="10003"/>
-                  </a:ext>
-                </a:extLst>
               </a:tr>
               <a:tr h="475488">
                 <a:tc>
@@ -10641,7 +10883,7 @@
                     <a:bodyPr/>
                     <a:lstStyle/>
                     <a:p>
-                      <a:pPr marL="0" indent="0" algn="l">
+                      <a:pPr algn="l" indent="0" marL="0">
                         <a:buNone/>
                       </a:pPr>
                       <a:r>
@@ -10709,7 +10951,7 @@
                     <a:bodyPr/>
                     <a:lstStyle/>
                     <a:p>
-                      <a:pPr marL="0" indent="0" algn="ctr">
+                      <a:pPr algn="ctr" indent="0" marL="0">
                         <a:buNone/>
                       </a:pPr>
                       <a:r>
@@ -10777,7 +11019,7 @@
                     <a:bodyPr/>
                     <a:lstStyle/>
                     <a:p>
-                      <a:pPr marL="0" indent="0" algn="ctr">
+                      <a:pPr algn="ctr" indent="0" marL="0">
                         <a:buNone/>
                       </a:pPr>
                       <a:r>
@@ -10845,7 +11087,7 @@
                     <a:bodyPr/>
                     <a:lstStyle/>
                     <a:p>
-                      <a:pPr marL="0" indent="0" algn="ctr">
+                      <a:pPr algn="ctr" indent="0" marL="0">
                         <a:buNone/>
                       </a:pPr>
                       <a:r>
@@ -10908,11 +11150,6 @@
                     </a:solidFill>
                   </a:tcPr>
                 </a:tc>
-                <a:extLst>
-                  <a:ext uri="{0D108BD9-81ED-4DB2-BD59-A6C34878D82A}">
-                    <a16:rowId xmlns:a16="http://schemas.microsoft.com/office/drawing/2014/main" val="10004"/>
-                  </a:ext>
-                </a:extLst>
               </a:tr>
               <a:tr h="475488">
                 <a:tc>
@@ -10920,7 +11157,7 @@
                     <a:bodyPr/>
                     <a:lstStyle/>
                     <a:p>
-                      <a:pPr marL="0" indent="0" algn="l">
+                      <a:pPr algn="l" indent="0" marL="0">
                         <a:buNone/>
                       </a:pPr>
                       <a:r>
@@ -10988,7 +11225,7 @@
                     <a:bodyPr/>
                     <a:lstStyle/>
                     <a:p>
-                      <a:pPr marL="0" indent="0" algn="ctr">
+                      <a:pPr algn="ctr" indent="0" marL="0">
                         <a:buNone/>
                       </a:pPr>
                       <a:r>
@@ -11056,7 +11293,7 @@
                     <a:bodyPr/>
                     <a:lstStyle/>
                     <a:p>
-                      <a:pPr marL="0" indent="0" algn="ctr">
+                      <a:pPr algn="ctr" indent="0" marL="0">
                         <a:buNone/>
                       </a:pPr>
                       <a:r>
@@ -11124,7 +11361,7 @@
                     <a:bodyPr/>
                     <a:lstStyle/>
                     <a:p>
-                      <a:pPr marL="0" indent="0" algn="ctr">
+                      <a:pPr algn="ctr" indent="0" marL="0">
                         <a:buNone/>
                       </a:pPr>
                       <a:r>
@@ -11187,11 +11424,6 @@
                     </a:solidFill>
                   </a:tcPr>
                 </a:tc>
-                <a:extLst>
-                  <a:ext uri="{0D108BD9-81ED-4DB2-BD59-A6C34878D82A}">
-                    <a16:rowId xmlns:a16="http://schemas.microsoft.com/office/drawing/2014/main" val="10005"/>
-                  </a:ext>
-                </a:extLst>
               </a:tr>
               <a:tr h="475488">
                 <a:tc>
@@ -11199,7 +11431,7 @@
                     <a:bodyPr/>
                     <a:lstStyle/>
                     <a:p>
-                      <a:pPr marL="0" indent="0" algn="l">
+                      <a:pPr algn="l" indent="0" marL="0">
                         <a:buNone/>
                       </a:pPr>
                       <a:r>
@@ -11267,7 +11499,7 @@
                     <a:bodyPr/>
                     <a:lstStyle/>
                     <a:p>
-                      <a:pPr marL="0" indent="0" algn="ctr">
+                      <a:pPr algn="ctr" indent="0" marL="0">
                         <a:buNone/>
                       </a:pPr>
                       <a:r>
@@ -11335,7 +11567,7 @@
                     <a:bodyPr/>
                     <a:lstStyle/>
                     <a:p>
-                      <a:pPr marL="0" indent="0" algn="ctr">
+                      <a:pPr algn="ctr" indent="0" marL="0">
                         <a:buNone/>
                       </a:pPr>
                       <a:r>
@@ -11403,7 +11635,7 @@
                     <a:bodyPr/>
                     <a:lstStyle/>
                     <a:p>
-                      <a:pPr marL="0" indent="0" algn="ctr">
+                      <a:pPr algn="ctr" indent="0" marL="0">
                         <a:buNone/>
                       </a:pPr>
                       <a:r>
@@ -11466,11 +11698,6 @@
                     </a:solidFill>
                   </a:tcPr>
                 </a:tc>
-                <a:extLst>
-                  <a:ext uri="{0D108BD9-81ED-4DB2-BD59-A6C34878D82A}">
-                    <a16:rowId xmlns:a16="http://schemas.microsoft.com/office/drawing/2014/main" val="10006"/>
-                  </a:ext>
-                </a:extLst>
               </a:tr>
               <a:tr h="475488">
                 <a:tc>
@@ -11478,7 +11705,7 @@
                     <a:bodyPr/>
                     <a:lstStyle/>
                     <a:p>
-                      <a:pPr marL="0" indent="0" algn="l">
+                      <a:pPr algn="l" indent="0" marL="0">
                         <a:buNone/>
                       </a:pPr>
                       <a:r>
@@ -11546,7 +11773,7 @@
                     <a:bodyPr/>
                     <a:lstStyle/>
                     <a:p>
-                      <a:pPr marL="0" indent="0" algn="ctr">
+                      <a:pPr algn="ctr" indent="0" marL="0">
                         <a:buNone/>
                       </a:pPr>
                       <a:r>
@@ -11614,7 +11841,7 @@
                     <a:bodyPr/>
                     <a:lstStyle/>
                     <a:p>
-                      <a:pPr marL="0" indent="0" algn="ctr">
+                      <a:pPr algn="ctr" indent="0" marL="0">
                         <a:buNone/>
                       </a:pPr>
                       <a:r>
@@ -11682,7 +11909,7 @@
                     <a:bodyPr/>
                     <a:lstStyle/>
                     <a:p>
-                      <a:pPr marL="0" indent="0" algn="ctr">
+                      <a:pPr algn="ctr" indent="0" marL="0">
                         <a:buNone/>
                       </a:pPr>
                       <a:r>
@@ -11745,11 +11972,6 @@
                     </a:solidFill>
                   </a:tcPr>
                 </a:tc>
-                <a:extLst>
-                  <a:ext uri="{0D108BD9-81ED-4DB2-BD59-A6C34878D82A}">
-                    <a16:rowId xmlns:a16="http://schemas.microsoft.com/office/drawing/2014/main" val="10007"/>
-                  </a:ext>
-                </a:extLst>
               </a:tr>
             </a:tbl>
           </a:graphicData>
@@ -11776,7 +11998,7 @@
           <a:bodyPr wrap="square" lIns="0" tIns="0" rIns="0" bIns="0" rtlCol="0" anchor="ctr"/>
           <a:lstStyle/>
           <a:p>
-            <a:pPr marL="0" indent="0">
+            <a:pPr indent="0" marL="0">
               <a:buNone/>
             </a:pPr>
             <a:r>
@@ -11790,6 +12012,9 @@
               </a:rPr>
               <a:t>The difference that matters:  </a:t>
             </a:r>
+            <a:pPr indent="0" marL="0">
+              <a:buNone/>
+            </a:pPr>
             <a:r>
               <a:rPr lang="en-US" sz="1300" dirty="0">
                 <a:solidFill>
@@ -11826,7 +12051,7 @@
           <a:bodyPr wrap="square" lIns="0" tIns="0" rIns="0" bIns="0" rtlCol="0" anchor="ctr"/>
           <a:lstStyle/>
           <a:p>
-            <a:pPr marL="0" indent="0" algn="r">
+            <a:pPr algn="r" indent="0" marL="0">
               <a:buNone/>
             </a:pPr>
             <a:r>
@@ -11860,7 +12085,6 @@
         <a:solidFill>
           <a:srgbClr val="0A1C33"/>
         </a:solidFill>
-        <a:effectLst/>
       </p:bgPr>
     </p:bg>
     <p:spTree>
@@ -11986,11 +12210,11 @@
           <a:bodyPr wrap="square" lIns="0" tIns="0" rIns="0" bIns="0" rtlCol="0" anchor="ctr"/>
           <a:lstStyle/>
           <a:p>
-            <a:pPr marL="0" indent="0">
-              <a:buNone/>
-            </a:pPr>
-            <a:r>
-              <a:rPr lang="en-US" sz="1200" b="1" kern="0" spc="300" dirty="0">
+            <a:pPr indent="0" marL="0">
+              <a:buNone/>
+            </a:pPr>
+            <a:r>
+              <a:rPr lang="en-US" sz="1200" b="1" spc="300" kern="0" dirty="0">
                 <a:solidFill>
                   <a:srgbClr val="F59E0B"/>
                 </a:solidFill>
@@ -12025,7 +12249,7 @@
           <a:bodyPr wrap="square" lIns="0" tIns="0" rIns="0" bIns="0" rtlCol="0" anchor="ctr"/>
           <a:lstStyle/>
           <a:p>
-            <a:pPr marL="0" indent="0">
+            <a:pPr indent="0" marL="0">
               <a:buNone/>
             </a:pPr>
             <a:r>
@@ -12064,7 +12288,7 @@
           <a:bodyPr wrap="square" lIns="0" tIns="0" rIns="0" bIns="0" rtlCol="0" anchor="ctr"/>
           <a:lstStyle/>
           <a:p>
-            <a:pPr marL="0" indent="0">
+            <a:pPr indent="0" marL="0">
               <a:buNone/>
             </a:pPr>
             <a:r>
@@ -12150,7 +12374,7 @@
           <a:bodyPr wrap="square" lIns="0" tIns="0" rIns="0" bIns="0" rtlCol="0" anchor="ctr"/>
           <a:lstStyle/>
           <a:p>
-            <a:pPr marL="0" indent="0" algn="ctr">
+            <a:pPr algn="ctr" indent="0" marL="0">
               <a:buNone/>
             </a:pPr>
             <a:r>
@@ -12189,7 +12413,7 @@
           <a:bodyPr wrap="square" lIns="0" tIns="0" rIns="0" bIns="0" rtlCol="0" anchor="ctr"/>
           <a:lstStyle/>
           <a:p>
-            <a:pPr marL="0" indent="0">
+            <a:pPr indent="0" marL="0">
               <a:buNone/>
             </a:pPr>
             <a:r>
@@ -12228,7 +12452,7 @@
           <a:bodyPr wrap="square" lIns="0" tIns="0" rIns="0" bIns="0" rtlCol="0" anchor="ctr"/>
           <a:lstStyle/>
           <a:p>
-            <a:pPr marL="0" indent="0">
+            <a:pPr indent="0" marL="0">
               <a:buNone/>
             </a:pPr>
             <a:r>
@@ -12314,7 +12538,7 @@
           <a:bodyPr wrap="square" lIns="0" tIns="0" rIns="0" bIns="0" rtlCol="0" anchor="ctr"/>
           <a:lstStyle/>
           <a:p>
-            <a:pPr marL="0" indent="0" algn="ctr">
+            <a:pPr algn="ctr" indent="0" marL="0">
               <a:buNone/>
             </a:pPr>
             <a:r>
@@ -12353,7 +12577,7 @@
           <a:bodyPr wrap="square" lIns="0" tIns="0" rIns="0" bIns="0" rtlCol="0" anchor="ctr"/>
           <a:lstStyle/>
           <a:p>
-            <a:pPr marL="0" indent="0">
+            <a:pPr indent="0" marL="0">
               <a:buNone/>
             </a:pPr>
             <a:r>
@@ -12392,7 +12616,7 @@
           <a:bodyPr wrap="square" lIns="0" tIns="0" rIns="0" bIns="0" rtlCol="0" anchor="ctr"/>
           <a:lstStyle/>
           <a:p>
-            <a:pPr marL="0" indent="0">
+            <a:pPr indent="0" marL="0">
               <a:buNone/>
             </a:pPr>
             <a:r>
@@ -12478,7 +12702,7 @@
           <a:bodyPr wrap="square" lIns="0" tIns="0" rIns="0" bIns="0" rtlCol="0" anchor="ctr"/>
           <a:lstStyle/>
           <a:p>
-            <a:pPr marL="0" indent="0" algn="ctr">
+            <a:pPr algn="ctr" indent="0" marL="0">
               <a:buNone/>
             </a:pPr>
             <a:r>
@@ -12517,7 +12741,7 @@
           <a:bodyPr wrap="square" lIns="0" tIns="0" rIns="0" bIns="0" rtlCol="0" anchor="ctr"/>
           <a:lstStyle/>
           <a:p>
-            <a:pPr marL="0" indent="0">
+            <a:pPr indent="0" marL="0">
               <a:buNone/>
             </a:pPr>
             <a:r>
@@ -12556,7 +12780,7 @@
           <a:bodyPr wrap="square" lIns="0" tIns="0" rIns="0" bIns="0" rtlCol="0" anchor="ctr"/>
           <a:lstStyle/>
           <a:p>
-            <a:pPr marL="0" indent="0">
+            <a:pPr indent="0" marL="0">
               <a:buNone/>
             </a:pPr>
             <a:r>
@@ -12618,7 +12842,7 @@
           <a:bodyPr wrap="square" lIns="0" tIns="0" rIns="0" bIns="0" rtlCol="0" anchor="ctr"/>
           <a:lstStyle/>
           <a:p>
-            <a:pPr marL="0" indent="0">
+            <a:pPr indent="0" marL="0">
               <a:spcAft>
                 <a:spcPts val="400"/>
               </a:spcAft>
@@ -12638,7 +12862,7 @@
             <a:endParaRPr lang="en-US" sz="1350" dirty="0"/>
           </a:p>
           <a:p>
-            <a:pPr marL="0" indent="0">
+            <a:pPr indent="0" marL="0">
               <a:spcAft>
                 <a:spcPts val="400"/>
               </a:spcAft>
@@ -12680,11 +12904,11 @@
           <a:bodyPr wrap="square" lIns="0" tIns="0" rIns="0" bIns="0" rtlCol="0" anchor="ctr"/>
           <a:lstStyle/>
           <a:p>
-            <a:pPr marL="0" indent="0" algn="r">
-              <a:buNone/>
-            </a:pPr>
-            <a:r>
-              <a:rPr lang="en-US" sz="1200" b="1" kern="0" spc="200" dirty="0">
+            <a:pPr algn="r" indent="0" marL="0">
+              <a:buNone/>
+            </a:pPr>
+            <a:r>
+              <a:rPr lang="en-US" sz="1200" b="1" spc="200" kern="0" dirty="0">
                 <a:solidFill>
                   <a:srgbClr val="F59E0B"/>
                 </a:solidFill>
@@ -12714,7 +12938,6 @@
         <a:solidFill>
           <a:srgbClr val="FFFFFF"/>
         </a:solidFill>
-        <a:effectLst/>
       </p:bgPr>
     </p:bg>
     <p:spTree>
@@ -12752,11 +12975,11 @@
           <a:bodyPr wrap="square" lIns="0" tIns="0" rIns="0" bIns="0" rtlCol="0" anchor="ctr"/>
           <a:lstStyle/>
           <a:p>
-            <a:pPr marL="0" indent="0">
-              <a:buNone/>
-            </a:pPr>
-            <a:r>
-              <a:rPr lang="en-US" sz="1200" b="1" kern="0" spc="300" dirty="0">
+            <a:pPr indent="0" marL="0">
+              <a:buNone/>
+            </a:pPr>
+            <a:r>
+              <a:rPr lang="en-US" sz="1200" b="1" spc="300" kern="0" dirty="0">
                 <a:solidFill>
                   <a:srgbClr val="1D4ED8"/>
                 </a:solidFill>
@@ -12791,7 +13014,7 @@
           <a:bodyPr wrap="square" lIns="0" tIns="0" rIns="0" bIns="0" rtlCol="0" anchor="ctr"/>
           <a:lstStyle/>
           <a:p>
-            <a:pPr marL="0" indent="0">
+            <a:pPr indent="0" marL="0">
               <a:buNone/>
             </a:pPr>
             <a:r>
@@ -12830,7 +13053,7 @@
           <a:bodyPr wrap="square" lIns="0" tIns="0" rIns="0" bIns="0" rtlCol="0" anchor="ctr"/>
           <a:lstStyle/>
           <a:p>
-            <a:pPr marL="0" indent="0">
+            <a:pPr indent="0" marL="0">
               <a:buNone/>
             </a:pPr>
             <a:r>
@@ -12844,6 +13067,9 @@
               </a:rPr>
               <a:t>Leadership never has to ask a project manager for status. </a:t>
             </a:r>
+            <a:pPr indent="0" marL="0">
+              <a:buNone/>
+            </a:pPr>
             <a:r>
               <a:rPr lang="en-US" sz="1600" dirty="0">
                 <a:solidFill>
@@ -12880,7 +13106,7 @@
           </a:solidFill>
           <a:ln/>
           <a:effectLst>
-            <a:outerShdw blurRad="88900" dist="25400" dir="5400000" algn="bl" rotWithShape="0">
+            <a:outerShdw sx="100000" sy="100000" kx="0" ky="0" algn="bl" rotWithShape="0" blurRad="88900" dist="25400" dir="5400000">
               <a:srgbClr val="0A1C33">
                 <a:alpha val="16000"/>
               </a:srgbClr>
@@ -12909,7 +13135,7 @@
           <a:bodyPr wrap="square" lIns="254" tIns="254" rIns="254" bIns="254" rtlCol="0" anchor="ctr"/>
           <a:lstStyle/>
           <a:p>
-            <a:pPr marL="0" indent="0" algn="ctr">
+            <a:pPr algn="ctr" indent="0" marL="0">
               <a:buNone/>
             </a:pPr>
             <a:r>
@@ -12968,7 +13194,7 @@
           </a:solidFill>
           <a:ln/>
           <a:effectLst>
-            <a:outerShdw blurRad="88900" dist="25400" dir="5400000" algn="bl" rotWithShape="0">
+            <a:outerShdw sx="100000" sy="100000" kx="0" ky="0" algn="bl" rotWithShape="0" blurRad="88900" dist="25400" dir="5400000">
               <a:srgbClr val="0A1C33">
                 <a:alpha val="16000"/>
               </a:srgbClr>
@@ -12997,7 +13223,7 @@
           <a:bodyPr wrap="square" lIns="254" tIns="254" rIns="254" bIns="254" rtlCol="0" anchor="ctr"/>
           <a:lstStyle/>
           <a:p>
-            <a:pPr marL="0" indent="0" algn="ctr">
+            <a:pPr algn="ctr" indent="0" marL="0">
               <a:buNone/>
             </a:pPr>
             <a:r>
@@ -13056,7 +13282,7 @@
           </a:solidFill>
           <a:ln/>
           <a:effectLst>
-            <a:outerShdw blurRad="88900" dist="25400" dir="5400000" algn="bl" rotWithShape="0">
+            <a:outerShdw sx="100000" sy="100000" kx="0" ky="0" algn="bl" rotWithShape="0" blurRad="88900" dist="25400" dir="5400000">
               <a:srgbClr val="0A1C33">
                 <a:alpha val="16000"/>
               </a:srgbClr>
@@ -13085,7 +13311,7 @@
           <a:bodyPr wrap="square" lIns="254" tIns="254" rIns="254" bIns="254" rtlCol="0" anchor="ctr"/>
           <a:lstStyle/>
           <a:p>
-            <a:pPr marL="0" indent="0" algn="ctr">
+            <a:pPr algn="ctr" indent="0" marL="0">
               <a:buNone/>
             </a:pPr>
             <a:r>
@@ -13144,7 +13370,7 @@
           </a:solidFill>
           <a:ln/>
           <a:effectLst>
-            <a:outerShdw blurRad="88900" dist="25400" dir="5400000" algn="bl" rotWithShape="0">
+            <a:outerShdw sx="100000" sy="100000" kx="0" ky="0" algn="bl" rotWithShape="0" blurRad="88900" dist="25400" dir="5400000">
               <a:srgbClr val="0A1C33">
                 <a:alpha val="16000"/>
               </a:srgbClr>
@@ -13173,7 +13399,7 @@
           <a:bodyPr wrap="square" lIns="254" tIns="254" rIns="254" bIns="254" rtlCol="0" anchor="ctr"/>
           <a:lstStyle/>
           <a:p>
-            <a:pPr marL="0" indent="0" algn="ctr">
+            <a:pPr algn="ctr" indent="0" marL="0">
               <a:buNone/>
             </a:pPr>
             <a:r>
@@ -13232,7 +13458,7 @@
           </a:solidFill>
           <a:ln/>
           <a:effectLst>
-            <a:outerShdw blurRad="88900" dist="25400" dir="5400000" algn="bl" rotWithShape="0">
+            <a:outerShdw sx="100000" sy="100000" kx="0" ky="0" algn="bl" rotWithShape="0" blurRad="88900" dist="25400" dir="5400000">
               <a:srgbClr val="0A1C33">
                 <a:alpha val="16000"/>
               </a:srgbClr>
@@ -13261,7 +13487,7 @@
           <a:bodyPr wrap="square" lIns="254" tIns="254" rIns="254" bIns="254" rtlCol="0" anchor="ctr"/>
           <a:lstStyle/>
           <a:p>
-            <a:pPr marL="0" indent="0" algn="ctr">
+            <a:pPr algn="ctr" indent="0" marL="0">
               <a:buNone/>
             </a:pPr>
             <a:r>
@@ -13320,7 +13546,7 @@
           </a:solidFill>
           <a:ln/>
           <a:effectLst>
-            <a:outerShdw blurRad="88900" dist="25400" dir="5400000" algn="bl" rotWithShape="0">
+            <a:outerShdw sx="100000" sy="100000" kx="0" ky="0" algn="bl" rotWithShape="0" blurRad="88900" dist="25400" dir="5400000">
               <a:srgbClr val="0A1C33">
                 <a:alpha val="16000"/>
               </a:srgbClr>
@@ -13349,7 +13575,7 @@
           <a:bodyPr wrap="square" lIns="254" tIns="254" rIns="254" bIns="254" rtlCol="0" anchor="ctr"/>
           <a:lstStyle/>
           <a:p>
-            <a:pPr marL="0" indent="0" algn="ctr">
+            <a:pPr algn="ctr" indent="0" marL="0">
               <a:buNone/>
             </a:pPr>
             <a:r>
@@ -13408,7 +13634,7 @@
           </a:solidFill>
           <a:ln/>
           <a:effectLst>
-            <a:outerShdw blurRad="88900" dist="25400" dir="5400000" algn="bl" rotWithShape="0">
+            <a:outerShdw sx="100000" sy="100000" kx="0" ky="0" algn="bl" rotWithShape="0" blurRad="88900" dist="25400" dir="5400000">
               <a:srgbClr val="0A1C33">
                 <a:alpha val="16000"/>
               </a:srgbClr>
@@ -13437,7 +13663,7 @@
           <a:bodyPr wrap="square" lIns="254" tIns="254" rIns="254" bIns="254" rtlCol="0" anchor="ctr"/>
           <a:lstStyle/>
           <a:p>
-            <a:pPr marL="0" indent="0" algn="ctr">
+            <a:pPr algn="ctr" indent="0" marL="0">
               <a:buNone/>
             </a:pPr>
             <a:r>
@@ -13496,7 +13722,7 @@
           </a:solidFill>
           <a:ln/>
           <a:effectLst>
-            <a:outerShdw blurRad="88900" dist="25400" dir="5400000" algn="bl" rotWithShape="0">
+            <a:outerShdw sx="100000" sy="100000" kx="0" ky="0" algn="bl" rotWithShape="0" blurRad="88900" dist="25400" dir="5400000">
               <a:srgbClr val="0A1C33">
                 <a:alpha val="16000"/>
               </a:srgbClr>
@@ -13525,7 +13751,7 @@
           <a:bodyPr wrap="square" lIns="254" tIns="254" rIns="254" bIns="254" rtlCol="0" anchor="ctr"/>
           <a:lstStyle/>
           <a:p>
-            <a:pPr marL="0" indent="0" algn="ctr">
+            <a:pPr algn="ctr" indent="0" marL="0">
               <a:buNone/>
             </a:pPr>
             <a:r>
@@ -13564,7 +13790,7 @@
           <a:bodyPr wrap="square" lIns="0" tIns="0" rIns="0" bIns="0" rtlCol="0" anchor="ctr"/>
           <a:lstStyle/>
           <a:p>
-            <a:pPr marL="0" indent="0">
+            <a:pPr indent="0" marL="0">
               <a:buNone/>
             </a:pPr>
             <a:r>
@@ -13608,7 +13834,7 @@
             <a:prstDash val="solid"/>
           </a:ln>
           <a:effectLst>
-            <a:outerShdw blurRad="88900" dist="25400" dir="5400000" algn="bl" rotWithShape="0">
+            <a:outerShdw sx="100000" sy="100000" kx="0" ky="0" algn="bl" rotWithShape="0" blurRad="88900" dist="25400" dir="5400000">
               <a:srgbClr val="0A1C33">
                 <a:alpha val="16000"/>
               </a:srgbClr>
@@ -13637,7 +13863,7 @@
           <a:bodyPr wrap="square" lIns="0" tIns="0" rIns="0" bIns="0" rtlCol="0" anchor="ctr"/>
           <a:lstStyle/>
           <a:p>
-            <a:pPr marL="0" indent="0" algn="ctr">
+            <a:pPr algn="ctr" indent="0" marL="0">
               <a:buNone/>
             </a:pPr>
             <a:r>
@@ -13676,7 +13902,7 @@
           <a:bodyPr wrap="square" lIns="0" tIns="0" rIns="0" bIns="0" rtlCol="0" anchor="ctr"/>
           <a:lstStyle/>
           <a:p>
-            <a:pPr marL="0" indent="0" algn="ctr">
+            <a:pPr algn="ctr" indent="0" marL="0">
               <a:buNone/>
             </a:pPr>
             <a:r>
@@ -13720,7 +13946,7 @@
             <a:prstDash val="solid"/>
           </a:ln>
           <a:effectLst>
-            <a:outerShdw blurRad="88900" dist="25400" dir="5400000" algn="bl" rotWithShape="0">
+            <a:outerShdw sx="100000" sy="100000" kx="0" ky="0" algn="bl" rotWithShape="0" blurRad="88900" dist="25400" dir="5400000">
               <a:srgbClr val="0A1C33">
                 <a:alpha val="16000"/>
               </a:srgbClr>
@@ -13749,7 +13975,7 @@
           <a:bodyPr wrap="square" lIns="0" tIns="0" rIns="0" bIns="0" rtlCol="0" anchor="ctr"/>
           <a:lstStyle/>
           <a:p>
-            <a:pPr marL="0" indent="0" algn="ctr">
+            <a:pPr algn="ctr" indent="0" marL="0">
               <a:buNone/>
             </a:pPr>
             <a:r>
@@ -13788,7 +14014,7 @@
           <a:bodyPr wrap="square" lIns="0" tIns="0" rIns="0" bIns="0" rtlCol="0" anchor="ctr"/>
           <a:lstStyle/>
           <a:p>
-            <a:pPr marL="0" indent="0" algn="ctr">
+            <a:pPr algn="ctr" indent="0" marL="0">
               <a:buNone/>
             </a:pPr>
             <a:r>
@@ -13832,7 +14058,7 @@
             <a:prstDash val="solid"/>
           </a:ln>
           <a:effectLst>
-            <a:outerShdw blurRad="88900" dist="25400" dir="5400000" algn="bl" rotWithShape="0">
+            <a:outerShdw sx="100000" sy="100000" kx="0" ky="0" algn="bl" rotWithShape="0" blurRad="88900" dist="25400" dir="5400000">
               <a:srgbClr val="0A1C33">
                 <a:alpha val="16000"/>
               </a:srgbClr>
@@ -13861,7 +14087,7 @@
           <a:bodyPr wrap="square" lIns="0" tIns="0" rIns="0" bIns="0" rtlCol="0" anchor="ctr"/>
           <a:lstStyle/>
           <a:p>
-            <a:pPr marL="0" indent="0" algn="ctr">
+            <a:pPr algn="ctr" indent="0" marL="0">
               <a:buNone/>
             </a:pPr>
             <a:r>
@@ -13900,7 +14126,7 @@
           <a:bodyPr wrap="square" lIns="0" tIns="0" rIns="0" bIns="0" rtlCol="0" anchor="ctr"/>
           <a:lstStyle/>
           <a:p>
-            <a:pPr marL="0" indent="0" algn="ctr">
+            <a:pPr algn="ctr" indent="0" marL="0">
               <a:buNone/>
             </a:pPr>
             <a:r>
@@ -13944,7 +14170,7 @@
             <a:prstDash val="solid"/>
           </a:ln>
           <a:effectLst>
-            <a:outerShdw blurRad="88900" dist="25400" dir="5400000" algn="bl" rotWithShape="0">
+            <a:outerShdw sx="100000" sy="100000" kx="0" ky="0" algn="bl" rotWithShape="0" blurRad="88900" dist="25400" dir="5400000">
               <a:srgbClr val="0A1C33">
                 <a:alpha val="16000"/>
               </a:srgbClr>
@@ -13973,7 +14199,7 @@
           <a:bodyPr wrap="square" lIns="0" tIns="0" rIns="0" bIns="0" rtlCol="0" anchor="ctr"/>
           <a:lstStyle/>
           <a:p>
-            <a:pPr marL="0" indent="0" algn="ctr">
+            <a:pPr algn="ctr" indent="0" marL="0">
               <a:buNone/>
             </a:pPr>
             <a:r>
@@ -14012,7 +14238,7 @@
           <a:bodyPr wrap="square" lIns="0" tIns="0" rIns="0" bIns="0" rtlCol="0" anchor="ctr"/>
           <a:lstStyle/>
           <a:p>
-            <a:pPr marL="0" indent="0" algn="ctr">
+            <a:pPr algn="ctr" indent="0" marL="0">
               <a:buNone/>
             </a:pPr>
             <a:r>
@@ -14056,7 +14282,7 @@
             <a:prstDash val="solid"/>
           </a:ln>
           <a:effectLst>
-            <a:outerShdw blurRad="88900" dist="25400" dir="5400000" algn="bl" rotWithShape="0">
+            <a:outerShdw sx="100000" sy="100000" kx="0" ky="0" algn="bl" rotWithShape="0" blurRad="88900" dist="25400" dir="5400000">
               <a:srgbClr val="0A1C33">
                 <a:alpha val="16000"/>
               </a:srgbClr>
@@ -14085,7 +14311,7 @@
           <a:bodyPr wrap="square" lIns="0" tIns="0" rIns="0" bIns="0" rtlCol="0" anchor="ctr"/>
           <a:lstStyle/>
           <a:p>
-            <a:pPr marL="0" indent="0" algn="ctr">
+            <a:pPr algn="ctr" indent="0" marL="0">
               <a:buNone/>
             </a:pPr>
             <a:r>
@@ -14124,7 +14350,7 @@
           <a:bodyPr wrap="square" lIns="0" tIns="0" rIns="0" bIns="0" rtlCol="0" anchor="ctr"/>
           <a:lstStyle/>
           <a:p>
-            <a:pPr marL="0" indent="0" algn="ctr">
+            <a:pPr algn="ctr" indent="0" marL="0">
               <a:buNone/>
             </a:pPr>
             <a:r>
@@ -14163,7 +14389,7 @@
           <a:bodyPr wrap="square" lIns="0" tIns="0" rIns="0" bIns="0" rtlCol="0" anchor="ctr"/>
           <a:lstStyle/>
           <a:p>
-            <a:pPr marL="0" indent="0">
+            <a:pPr indent="0" marL="0">
               <a:buNone/>
             </a:pPr>
             <a:r>
@@ -14202,7 +14428,7 @@
           <a:bodyPr wrap="square" lIns="0" tIns="0" rIns="0" bIns="0" rtlCol="0" anchor="ctr"/>
           <a:lstStyle/>
           <a:p>
-            <a:pPr marL="0" indent="0" algn="r">
+            <a:pPr algn="r" indent="0" marL="0">
               <a:buNone/>
             </a:pPr>
             <a:r>
@@ -14236,7 +14462,6 @@
         <a:solidFill>
           <a:srgbClr val="FFFFFF"/>
         </a:solidFill>
-        <a:effectLst/>
       </p:bgPr>
     </p:bg>
     <p:spTree>
@@ -14274,11 +14499,11 @@
           <a:bodyPr wrap="square" lIns="0" tIns="0" rIns="0" bIns="0" rtlCol="0" anchor="ctr"/>
           <a:lstStyle/>
           <a:p>
-            <a:pPr marL="0" indent="0">
-              <a:buNone/>
-            </a:pPr>
-            <a:r>
-              <a:rPr lang="en-US" sz="1200" b="1" kern="0" spc="300" dirty="0">
+            <a:pPr indent="0" marL="0">
+              <a:buNone/>
+            </a:pPr>
+            <a:r>
+              <a:rPr lang="en-US" sz="1200" b="1" spc="300" kern="0" dirty="0">
                 <a:solidFill>
                   <a:srgbClr val="1D4ED8"/>
                 </a:solidFill>
@@ -14313,7 +14538,7 @@
           <a:bodyPr wrap="square" lIns="0" tIns="0" rIns="0" bIns="0" rtlCol="0" anchor="ctr"/>
           <a:lstStyle/>
           <a:p>
-            <a:pPr marL="0" indent="0">
+            <a:pPr indent="0" marL="0">
               <a:buNone/>
             </a:pPr>
             <a:r>
@@ -14357,7 +14582,7 @@
             <a:prstDash val="solid"/>
           </a:ln>
           <a:effectLst>
-            <a:outerShdw blurRad="88900" dist="25400" dir="5400000" algn="bl" rotWithShape="0">
+            <a:outerShdw sx="100000" sy="100000" kx="0" ky="0" algn="bl" rotWithShape="0" blurRad="88900" dist="25400" dir="5400000">
               <a:srgbClr val="0A1C33">
                 <a:alpha val="16000"/>
               </a:srgbClr>
@@ -14406,7 +14631,7 @@
           <a:bodyPr wrap="square" lIns="0" tIns="0" rIns="0" bIns="0" rtlCol="0" anchor="ctr"/>
           <a:lstStyle/>
           <a:p>
-            <a:pPr marL="0" indent="0">
+            <a:pPr indent="0" marL="0">
               <a:buNone/>
             </a:pPr>
             <a:r>
@@ -14445,7 +14670,7 @@
           <a:bodyPr wrap="square" lIns="0" tIns="0" rIns="0" bIns="0" rtlCol="0" anchor="ctr"/>
           <a:lstStyle/>
           <a:p>
-            <a:pPr marL="0" indent="0">
+            <a:pPr indent="0" marL="0">
               <a:buNone/>
             </a:pPr>
             <a:r>
@@ -14489,7 +14714,7 @@
             <a:prstDash val="solid"/>
           </a:ln>
           <a:effectLst>
-            <a:outerShdw blurRad="88900" dist="25400" dir="5400000" algn="bl" rotWithShape="0">
+            <a:outerShdw sx="100000" sy="100000" kx="0" ky="0" algn="bl" rotWithShape="0" blurRad="88900" dist="25400" dir="5400000">
               <a:srgbClr val="0A1C33">
                 <a:alpha val="16000"/>
               </a:srgbClr>
@@ -14538,7 +14763,7 @@
           <a:bodyPr wrap="square" lIns="0" tIns="0" rIns="0" bIns="0" rtlCol="0" anchor="ctr"/>
           <a:lstStyle/>
           <a:p>
-            <a:pPr marL="0" indent="0">
+            <a:pPr indent="0" marL="0">
               <a:buNone/>
             </a:pPr>
             <a:r>
@@ -14577,7 +14802,7 @@
           <a:bodyPr wrap="square" lIns="0" tIns="0" rIns="0" bIns="0" rtlCol="0" anchor="ctr"/>
           <a:lstStyle/>
           <a:p>
-            <a:pPr marL="0" indent="0">
+            <a:pPr indent="0" marL="0">
               <a:buNone/>
             </a:pPr>
             <a:r>
@@ -14621,7 +14846,7 @@
             <a:prstDash val="solid"/>
           </a:ln>
           <a:effectLst>
-            <a:outerShdw blurRad="88900" dist="25400" dir="5400000" algn="bl" rotWithShape="0">
+            <a:outerShdw sx="100000" sy="100000" kx="0" ky="0" algn="bl" rotWithShape="0" blurRad="88900" dist="25400" dir="5400000">
               <a:srgbClr val="0A1C33">
                 <a:alpha val="16000"/>
               </a:srgbClr>
@@ -14670,7 +14895,7 @@
           <a:bodyPr wrap="square" lIns="0" tIns="0" rIns="0" bIns="0" rtlCol="0" anchor="ctr"/>
           <a:lstStyle/>
           <a:p>
-            <a:pPr marL="0" indent="0">
+            <a:pPr indent="0" marL="0">
               <a:buNone/>
             </a:pPr>
             <a:r>
@@ -14709,7 +14934,7 @@
           <a:bodyPr wrap="square" lIns="0" tIns="0" rIns="0" bIns="0" rtlCol="0" anchor="ctr"/>
           <a:lstStyle/>
           <a:p>
-            <a:pPr marL="0" indent="0">
+            <a:pPr indent="0" marL="0">
               <a:buNone/>
             </a:pPr>
             <a:r>
@@ -14753,7 +14978,7 @@
             <a:prstDash val="solid"/>
           </a:ln>
           <a:effectLst>
-            <a:outerShdw blurRad="88900" dist="25400" dir="5400000" algn="bl" rotWithShape="0">
+            <a:outerShdw sx="100000" sy="100000" kx="0" ky="0" algn="bl" rotWithShape="0" blurRad="88900" dist="25400" dir="5400000">
               <a:srgbClr val="0A1C33">
                 <a:alpha val="16000"/>
               </a:srgbClr>
@@ -14802,7 +15027,7 @@
           <a:bodyPr wrap="square" lIns="0" tIns="0" rIns="0" bIns="0" rtlCol="0" anchor="ctr"/>
           <a:lstStyle/>
           <a:p>
-            <a:pPr marL="0" indent="0">
+            <a:pPr indent="0" marL="0">
               <a:buNone/>
             </a:pPr>
             <a:r>
@@ -14841,7 +15066,7 @@
           <a:bodyPr wrap="square" lIns="0" tIns="0" rIns="0" bIns="0" rtlCol="0" anchor="ctr"/>
           <a:lstStyle/>
           <a:p>
-            <a:pPr marL="0" indent="0">
+            <a:pPr indent="0" marL="0">
               <a:buNone/>
             </a:pPr>
             <a:r>
@@ -14885,7 +15110,7 @@
             <a:prstDash val="solid"/>
           </a:ln>
           <a:effectLst>
-            <a:outerShdw blurRad="88900" dist="25400" dir="5400000" algn="bl" rotWithShape="0">
+            <a:outerShdw sx="100000" sy="100000" kx="0" ky="0" algn="bl" rotWithShape="0" blurRad="88900" dist="25400" dir="5400000">
               <a:srgbClr val="0A1C33">
                 <a:alpha val="16000"/>
               </a:srgbClr>
@@ -14934,7 +15159,7 @@
           <a:bodyPr wrap="square" lIns="0" tIns="0" rIns="0" bIns="0" rtlCol="0" anchor="ctr"/>
           <a:lstStyle/>
           <a:p>
-            <a:pPr marL="0" indent="0">
+            <a:pPr indent="0" marL="0">
               <a:buNone/>
             </a:pPr>
             <a:r>
@@ -14973,7 +15198,7 @@
           <a:bodyPr wrap="square" lIns="0" tIns="0" rIns="0" bIns="0" rtlCol="0" anchor="ctr"/>
           <a:lstStyle/>
           <a:p>
-            <a:pPr marL="0" indent="0">
+            <a:pPr indent="0" marL="0">
               <a:buNone/>
             </a:pPr>
             <a:r>
@@ -15017,7 +15242,7 @@
             <a:prstDash val="solid"/>
           </a:ln>
           <a:effectLst>
-            <a:outerShdw blurRad="88900" dist="25400" dir="5400000" algn="bl" rotWithShape="0">
+            <a:outerShdw sx="100000" sy="100000" kx="0" ky="0" algn="bl" rotWithShape="0" blurRad="88900" dist="25400" dir="5400000">
               <a:srgbClr val="0A1C33">
                 <a:alpha val="16000"/>
               </a:srgbClr>
@@ -15066,7 +15291,7 @@
           <a:bodyPr wrap="square" lIns="0" tIns="0" rIns="0" bIns="0" rtlCol="0" anchor="ctr"/>
           <a:lstStyle/>
           <a:p>
-            <a:pPr marL="0" indent="0">
+            <a:pPr indent="0" marL="0">
               <a:buNone/>
             </a:pPr>
             <a:r>
@@ -15105,7 +15330,7 @@
           <a:bodyPr wrap="square" lIns="0" tIns="0" rIns="0" bIns="0" rtlCol="0" anchor="ctr"/>
           <a:lstStyle/>
           <a:p>
-            <a:pPr marL="0" indent="0">
+            <a:pPr indent="0" marL="0">
               <a:buNone/>
             </a:pPr>
             <a:r>
@@ -15149,7 +15374,7 @@
             <a:prstDash val="solid"/>
           </a:ln>
           <a:effectLst>
-            <a:outerShdw blurRad="88900" dist="25400" dir="5400000" algn="bl" rotWithShape="0">
+            <a:outerShdw sx="100000" sy="100000" kx="0" ky="0" algn="bl" rotWithShape="0" blurRad="88900" dist="25400" dir="5400000">
               <a:srgbClr val="0A1C33">
                 <a:alpha val="16000"/>
               </a:srgbClr>
@@ -15198,7 +15423,7 @@
           <a:bodyPr wrap="square" lIns="0" tIns="0" rIns="0" bIns="0" rtlCol="0" anchor="ctr"/>
           <a:lstStyle/>
           <a:p>
-            <a:pPr marL="0" indent="0">
+            <a:pPr indent="0" marL="0">
               <a:buNone/>
             </a:pPr>
             <a:r>
@@ -15237,7 +15462,7 @@
           <a:bodyPr wrap="square" lIns="0" tIns="0" rIns="0" bIns="0" rtlCol="0" anchor="ctr"/>
           <a:lstStyle/>
           <a:p>
-            <a:pPr marL="0" indent="0">
+            <a:pPr indent="0" marL="0">
               <a:buNone/>
             </a:pPr>
             <a:r>
@@ -15281,7 +15506,7 @@
             <a:prstDash val="solid"/>
           </a:ln>
           <a:effectLst>
-            <a:outerShdw blurRad="88900" dist="25400" dir="5400000" algn="bl" rotWithShape="0">
+            <a:outerShdw sx="100000" sy="100000" kx="0" ky="0" algn="bl" rotWithShape="0" blurRad="88900" dist="25400" dir="5400000">
               <a:srgbClr val="0A1C33">
                 <a:alpha val="16000"/>
               </a:srgbClr>
@@ -15330,7 +15555,7 @@
           <a:bodyPr wrap="square" lIns="0" tIns="0" rIns="0" bIns="0" rtlCol="0" anchor="ctr"/>
           <a:lstStyle/>
           <a:p>
-            <a:pPr marL="0" indent="0">
+            <a:pPr indent="0" marL="0">
               <a:buNone/>
             </a:pPr>
             <a:r>
@@ -15369,7 +15594,7 @@
           <a:bodyPr wrap="square" lIns="0" tIns="0" rIns="0" bIns="0" rtlCol="0" anchor="ctr"/>
           <a:lstStyle/>
           <a:p>
-            <a:pPr marL="0" indent="0">
+            <a:pPr indent="0" marL="0">
               <a:buNone/>
             </a:pPr>
             <a:r>
@@ -15408,7 +15633,7 @@
           <a:bodyPr wrap="square" lIns="0" tIns="0" rIns="0" bIns="0" rtlCol="0" anchor="ctr"/>
           <a:lstStyle/>
           <a:p>
-            <a:pPr marL="0" indent="0">
+            <a:pPr indent="0" marL="0">
               <a:buNone/>
             </a:pPr>
             <a:r>
@@ -15422,6 +15647,9 @@
               </a:rPr>
               <a:t>The moat is not any single feature — </a:t>
             </a:r>
+            <a:pPr indent="0" marL="0">
+              <a:buNone/>
+            </a:pPr>
             <a:r>
               <a:rPr lang="en-US" sz="1300" b="1" dirty="0">
                 <a:solidFill>
@@ -15458,7 +15686,7 @@
           <a:bodyPr wrap="square" lIns="0" tIns="0" rIns="0" bIns="0" rtlCol="0" anchor="ctr"/>
           <a:lstStyle/>
           <a:p>
-            <a:pPr marL="0" indent="0" algn="r">
+            <a:pPr algn="r" indent="0" marL="0">
               <a:buNone/>
             </a:pPr>
             <a:r>
@@ -15492,7 +15720,6 @@
         <a:solidFill>
           <a:srgbClr val="FFFFFF"/>
         </a:solidFill>
-        <a:effectLst/>
       </p:bgPr>
     </p:bg>
     <p:spTree>
@@ -15530,11 +15757,11 @@
           <a:bodyPr wrap="square" lIns="0" tIns="0" rIns="0" bIns="0" rtlCol="0" anchor="ctr"/>
           <a:lstStyle/>
           <a:p>
-            <a:pPr marL="0" indent="0">
-              <a:buNone/>
-            </a:pPr>
-            <a:r>
-              <a:rPr lang="en-US" sz="1200" b="1" kern="0" spc="300" dirty="0">
+            <a:pPr indent="0" marL="0">
+              <a:buNone/>
+            </a:pPr>
+            <a:r>
+              <a:rPr lang="en-US" sz="1200" b="1" spc="300" kern="0" dirty="0">
                 <a:solidFill>
                   <a:srgbClr val="1D4ED8"/>
                 </a:solidFill>
@@ -15569,7 +15796,7 @@
           <a:bodyPr wrap="square" lIns="0" tIns="0" rIns="0" bIns="0" rtlCol="0" anchor="ctr"/>
           <a:lstStyle/>
           <a:p>
-            <a:pPr marL="0" indent="0">
+            <a:pPr indent="0" marL="0">
               <a:buNone/>
             </a:pPr>
             <a:r>
@@ -15613,7 +15840,7 @@
             <a:prstDash val="solid"/>
           </a:ln>
           <a:effectLst>
-            <a:outerShdw blurRad="88900" dist="25400" dir="5400000" algn="bl" rotWithShape="0">
+            <a:outerShdw sx="100000" sy="100000" kx="0" ky="0" algn="bl" rotWithShape="0" blurRad="88900" dist="25400" dir="5400000">
               <a:srgbClr val="0A1C33">
                 <a:alpha val="16000"/>
               </a:srgbClr>
@@ -15642,7 +15869,7 @@
           <a:bodyPr wrap="square" lIns="0" tIns="0" rIns="0" bIns="0" rtlCol="0" anchor="ctr"/>
           <a:lstStyle/>
           <a:p>
-            <a:pPr marL="0" indent="0" algn="ctr">
+            <a:pPr algn="ctr" indent="0" marL="0">
               <a:buNone/>
             </a:pPr>
             <a:r>
@@ -15681,7 +15908,7 @@
           <a:bodyPr wrap="square" lIns="0" tIns="0" rIns="0" bIns="0" rtlCol="0" anchor="ctr"/>
           <a:lstStyle/>
           <a:p>
-            <a:pPr marL="0" indent="0" algn="ctr">
+            <a:pPr algn="ctr" indent="0" marL="0">
               <a:buNone/>
             </a:pPr>
             <a:r>
@@ -15725,7 +15952,7 @@
             <a:prstDash val="solid"/>
           </a:ln>
           <a:effectLst>
-            <a:outerShdw blurRad="88900" dist="25400" dir="5400000" algn="bl" rotWithShape="0">
+            <a:outerShdw sx="100000" sy="100000" kx="0" ky="0" algn="bl" rotWithShape="0" blurRad="88900" dist="25400" dir="5400000">
               <a:srgbClr val="0A1C33">
                 <a:alpha val="16000"/>
               </a:srgbClr>
@@ -15754,7 +15981,7 @@
           <a:bodyPr wrap="square" lIns="0" tIns="0" rIns="0" bIns="0" rtlCol="0" anchor="ctr"/>
           <a:lstStyle/>
           <a:p>
-            <a:pPr marL="0" indent="0" algn="ctr">
+            <a:pPr algn="ctr" indent="0" marL="0">
               <a:buNone/>
             </a:pPr>
             <a:r>
@@ -15793,7 +16020,7 @@
           <a:bodyPr wrap="square" lIns="0" tIns="0" rIns="0" bIns="0" rtlCol="0" anchor="ctr"/>
           <a:lstStyle/>
           <a:p>
-            <a:pPr marL="0" indent="0" algn="ctr">
+            <a:pPr algn="ctr" indent="0" marL="0">
               <a:buNone/>
             </a:pPr>
             <a:r>
@@ -15837,7 +16064,7 @@
             <a:prstDash val="solid"/>
           </a:ln>
           <a:effectLst>
-            <a:outerShdw blurRad="88900" dist="25400" dir="5400000" algn="bl" rotWithShape="0">
+            <a:outerShdw sx="100000" sy="100000" kx="0" ky="0" algn="bl" rotWithShape="0" blurRad="88900" dist="25400" dir="5400000">
               <a:srgbClr val="0A1C33">
                 <a:alpha val="16000"/>
               </a:srgbClr>
@@ -15866,7 +16093,7 @@
           <a:bodyPr wrap="square" lIns="0" tIns="0" rIns="0" bIns="0" rtlCol="0" anchor="ctr"/>
           <a:lstStyle/>
           <a:p>
-            <a:pPr marL="0" indent="0" algn="ctr">
+            <a:pPr algn="ctr" indent="0" marL="0">
               <a:buNone/>
             </a:pPr>
             <a:r>
@@ -15905,7 +16132,7 @@
           <a:bodyPr wrap="square" lIns="0" tIns="0" rIns="0" bIns="0" rtlCol="0" anchor="ctr"/>
           <a:lstStyle/>
           <a:p>
-            <a:pPr marL="0" indent="0" algn="ctr">
+            <a:pPr algn="ctr" indent="0" marL="0">
               <a:buNone/>
             </a:pPr>
             <a:r>
@@ -15949,7 +16176,7 @@
             <a:prstDash val="solid"/>
           </a:ln>
           <a:effectLst>
-            <a:outerShdw blurRad="88900" dist="25400" dir="5400000" algn="bl" rotWithShape="0">
+            <a:outerShdw sx="100000" sy="100000" kx="0" ky="0" algn="bl" rotWithShape="0" blurRad="88900" dist="25400" dir="5400000">
               <a:srgbClr val="0A1C33">
                 <a:alpha val="16000"/>
               </a:srgbClr>
@@ -15978,7 +16205,7 @@
           <a:bodyPr wrap="square" lIns="0" tIns="0" rIns="0" bIns="0" rtlCol="0" anchor="ctr"/>
           <a:lstStyle/>
           <a:p>
-            <a:pPr marL="0" indent="0">
+            <a:pPr indent="0" marL="0">
               <a:buNone/>
             </a:pPr>
             <a:r>
@@ -16102,7 +16329,7 @@
           <a:bodyPr wrap="square" lIns="0" tIns="0" rIns="0" bIns="0" rtlCol="0" anchor="ctr"/>
           <a:lstStyle/>
           <a:p>
-            <a:pPr marL="0" indent="0">
+            <a:pPr indent="0" marL="0">
               <a:buNone/>
             </a:pPr>
             <a:r>
@@ -16141,7 +16368,7 @@
           <a:bodyPr wrap="square" lIns="0" tIns="0" rIns="0" bIns="0" rtlCol="0" anchor="ctr"/>
           <a:lstStyle/>
           <a:p>
-            <a:pPr marL="0" indent="0" algn="r">
+            <a:pPr algn="r" indent="0" marL="0">
               <a:buNone/>
             </a:pPr>
             <a:r>
@@ -16175,7 +16402,6 @@
         <a:solidFill>
           <a:srgbClr val="FFFFFF"/>
         </a:solidFill>
-        <a:effectLst/>
       </p:bgPr>
     </p:bg>
     <p:spTree>
@@ -16213,11 +16439,11 @@
           <a:bodyPr wrap="square" lIns="0" tIns="0" rIns="0" bIns="0" rtlCol="0" anchor="ctr"/>
           <a:lstStyle/>
           <a:p>
-            <a:pPr marL="0" indent="0">
-              <a:buNone/>
-            </a:pPr>
-            <a:r>
-              <a:rPr lang="en-US" sz="1200" b="1" kern="0" spc="300" dirty="0">
+            <a:pPr indent="0" marL="0">
+              <a:buNone/>
+            </a:pPr>
+            <a:r>
+              <a:rPr lang="en-US" sz="1200" b="1" spc="300" kern="0" dirty="0">
                 <a:solidFill>
                   <a:srgbClr val="1D4ED8"/>
                 </a:solidFill>
@@ -16252,7 +16478,7 @@
           <a:bodyPr wrap="square" lIns="0" tIns="0" rIns="0" bIns="0" rtlCol="0" anchor="ctr"/>
           <a:lstStyle/>
           <a:p>
-            <a:pPr marL="0" indent="0">
+            <a:pPr indent="0" marL="0">
               <a:buNone/>
             </a:pPr>
             <a:r>
@@ -16313,7 +16539,7 @@
           <a:bodyPr wrap="square" lIns="0" tIns="0" rIns="0" bIns="0" rtlCol="0" anchor="ctr"/>
           <a:lstStyle/>
           <a:p>
-            <a:pPr marL="0" indent="0">
+            <a:pPr indent="0" marL="0">
               <a:buNone/>
             </a:pPr>
             <a:r>
@@ -16394,7 +16620,7 @@
           <a:bodyPr wrap="square" lIns="0" tIns="0" rIns="0" bIns="0" rtlCol="0" anchor="ctr"/>
           <a:lstStyle/>
           <a:p>
-            <a:pPr marL="0" indent="0">
+            <a:pPr indent="0" marL="0">
               <a:buNone/>
             </a:pPr>
             <a:r>
@@ -16455,7 +16681,7 @@
           <a:bodyPr wrap="square" lIns="0" tIns="0" rIns="0" bIns="0" rtlCol="0" anchor="ctr"/>
           <a:lstStyle/>
           <a:p>
-            <a:pPr marL="0" indent="0">
+            <a:pPr indent="0" marL="0">
               <a:buNone/>
             </a:pPr>
             <a:r>
@@ -16536,7 +16762,7 @@
           <a:bodyPr wrap="square" lIns="0" tIns="0" rIns="0" bIns="0" rtlCol="0" anchor="ctr"/>
           <a:lstStyle/>
           <a:p>
-            <a:pPr marL="0" indent="0">
+            <a:pPr indent="0" marL="0">
               <a:buNone/>
             </a:pPr>
             <a:r>
@@ -16597,7 +16823,7 @@
           <a:bodyPr wrap="square" lIns="0" tIns="0" rIns="0" bIns="0" rtlCol="0" anchor="ctr"/>
           <a:lstStyle/>
           <a:p>
-            <a:pPr marL="0" indent="0">
+            <a:pPr indent="0" marL="0">
               <a:buNone/>
             </a:pPr>
             <a:r>
@@ -16678,7 +16904,7 @@
           <a:bodyPr wrap="square" lIns="0" tIns="0" rIns="0" bIns="0" rtlCol="0" anchor="ctr"/>
           <a:lstStyle/>
           <a:p>
-            <a:pPr marL="0" indent="0">
+            <a:pPr indent="0" marL="0">
               <a:buNone/>
             </a:pPr>
             <a:r>
@@ -16739,7 +16965,7 @@
           <a:bodyPr wrap="square" lIns="0" tIns="0" rIns="0" bIns="0" rtlCol="0" anchor="ctr"/>
           <a:lstStyle/>
           <a:p>
-            <a:pPr marL="0" indent="0">
+            <a:pPr indent="0" marL="0">
               <a:buNone/>
             </a:pPr>
             <a:r>
@@ -16820,7 +17046,7 @@
           <a:bodyPr wrap="square" lIns="0" tIns="0" rIns="0" bIns="0" rtlCol="0" anchor="ctr"/>
           <a:lstStyle/>
           <a:p>
-            <a:pPr marL="0" indent="0">
+            <a:pPr indent="0" marL="0">
               <a:buNone/>
             </a:pPr>
             <a:r>
@@ -16881,7 +17107,7 @@
           <a:bodyPr wrap="square" lIns="0" tIns="0" rIns="0" bIns="0" rtlCol="0" anchor="ctr"/>
           <a:lstStyle/>
           <a:p>
-            <a:pPr marL="0" indent="0">
+            <a:pPr indent="0" marL="0">
               <a:buNone/>
             </a:pPr>
             <a:r>
@@ -16962,7 +17188,7 @@
           <a:bodyPr wrap="square" lIns="0" tIns="0" rIns="0" bIns="0" rtlCol="0" anchor="ctr"/>
           <a:lstStyle/>
           <a:p>
-            <a:pPr marL="0" indent="0">
+            <a:pPr indent="0" marL="0">
               <a:buNone/>
             </a:pPr>
             <a:r>
@@ -17001,7 +17227,7 @@
           <a:bodyPr wrap="square" lIns="0" tIns="0" rIns="0" bIns="0" rtlCol="0" anchor="ctr"/>
           <a:lstStyle/>
           <a:p>
-            <a:pPr marL="0" indent="0" algn="r">
+            <a:pPr algn="r" indent="0" marL="0">
               <a:buNone/>
             </a:pPr>
             <a:r>
@@ -17035,7 +17261,6 @@
         <a:solidFill>
           <a:srgbClr val="FFFFFF"/>
         </a:solidFill>
-        <a:effectLst/>
       </p:bgPr>
     </p:bg>
     <p:spTree>
@@ -17073,11 +17298,11 @@
           <a:bodyPr wrap="square" lIns="0" tIns="0" rIns="0" bIns="0" rtlCol="0" anchor="ctr"/>
           <a:lstStyle/>
           <a:p>
-            <a:pPr marL="0" indent="0">
-              <a:buNone/>
-            </a:pPr>
-            <a:r>
-              <a:rPr lang="en-US" sz="1200" b="1" kern="0" spc="300" dirty="0">
+            <a:pPr indent="0" marL="0">
+              <a:buNone/>
+            </a:pPr>
+            <a:r>
+              <a:rPr lang="en-US" sz="1200" b="1" spc="300" kern="0" dirty="0">
                 <a:solidFill>
                   <a:srgbClr val="1D4ED8"/>
                 </a:solidFill>
@@ -17112,7 +17337,7 @@
           <a:bodyPr wrap="square" lIns="0" tIns="0" rIns="0" bIns="0" rtlCol="0" anchor="ctr"/>
           <a:lstStyle/>
           <a:p>
-            <a:pPr marL="0" indent="0">
+            <a:pPr indent="0" marL="0">
               <a:buNone/>
             </a:pPr>
             <a:r>
@@ -17156,7 +17381,7 @@
             <a:prstDash val="solid"/>
           </a:ln>
           <a:effectLst>
-            <a:outerShdw blurRad="88900" dist="25400" dir="5400000" algn="bl" rotWithShape="0">
+            <a:outerShdw sx="100000" sy="100000" kx="0" ky="0" algn="bl" rotWithShape="0" blurRad="88900" dist="25400" dir="5400000">
               <a:srgbClr val="0A1C33">
                 <a:alpha val="16000"/>
               </a:srgbClr>
@@ -17207,7 +17432,7 @@
           <a:bodyPr wrap="square" lIns="0" tIns="0" rIns="0" bIns="0" rtlCol="0" anchor="ctr"/>
           <a:lstStyle/>
           <a:p>
-            <a:pPr marL="0" indent="0" algn="ctr">
+            <a:pPr algn="ctr" indent="0" marL="0">
               <a:buNone/>
             </a:pPr>
             <a:endParaRPr lang="en-US" sz="1200" dirty="0"/>
@@ -17255,7 +17480,7 @@
           <a:bodyPr wrap="square" lIns="0" tIns="0" rIns="0" bIns="0" rtlCol="0" anchor="ctr"/>
           <a:lstStyle/>
           <a:p>
-            <a:pPr marL="0" indent="0">
+            <a:pPr indent="0" marL="0">
               <a:buNone/>
             </a:pPr>
             <a:r>
@@ -17294,7 +17519,7 @@
           <a:bodyPr wrap="square" lIns="0" tIns="0" rIns="0" bIns="0" rtlCol="0" anchor="ctr"/>
           <a:lstStyle/>
           <a:p>
-            <a:pPr marL="0" indent="0">
+            <a:pPr indent="0" marL="0">
               <a:buNone/>
             </a:pPr>
             <a:r>
@@ -17338,7 +17563,7 @@
             <a:prstDash val="solid"/>
           </a:ln>
           <a:effectLst>
-            <a:outerShdw blurRad="88900" dist="25400" dir="5400000" algn="bl" rotWithShape="0">
+            <a:outerShdw sx="100000" sy="100000" kx="0" ky="0" algn="bl" rotWithShape="0" blurRad="88900" dist="25400" dir="5400000">
               <a:srgbClr val="0A1C33">
                 <a:alpha val="16000"/>
               </a:srgbClr>
@@ -17389,7 +17614,7 @@
           <a:bodyPr wrap="square" lIns="0" tIns="0" rIns="0" bIns="0" rtlCol="0" anchor="ctr"/>
           <a:lstStyle/>
           <a:p>
-            <a:pPr marL="0" indent="0" algn="ctr">
+            <a:pPr algn="ctr" indent="0" marL="0">
               <a:buNone/>
             </a:pPr>
             <a:endParaRPr lang="en-US" sz="1200" dirty="0"/>
@@ -17437,7 +17662,7 @@
           <a:bodyPr wrap="square" lIns="0" tIns="0" rIns="0" bIns="0" rtlCol="0" anchor="ctr"/>
           <a:lstStyle/>
           <a:p>
-            <a:pPr marL="0" indent="0">
+            <a:pPr indent="0" marL="0">
               <a:buNone/>
             </a:pPr>
             <a:r>
@@ -17476,7 +17701,7 @@
           <a:bodyPr wrap="square" lIns="0" tIns="0" rIns="0" bIns="0" rtlCol="0" anchor="ctr"/>
           <a:lstStyle/>
           <a:p>
-            <a:pPr marL="0" indent="0">
+            <a:pPr indent="0" marL="0">
               <a:buNone/>
             </a:pPr>
             <a:r>
@@ -17520,7 +17745,7 @@
             <a:prstDash val="solid"/>
           </a:ln>
           <a:effectLst>
-            <a:outerShdw blurRad="88900" dist="25400" dir="5400000" algn="bl" rotWithShape="0">
+            <a:outerShdw sx="100000" sy="100000" kx="0" ky="0" algn="bl" rotWithShape="0" blurRad="88900" dist="25400" dir="5400000">
               <a:srgbClr val="0A1C33">
                 <a:alpha val="16000"/>
               </a:srgbClr>
@@ -17571,7 +17796,7 @@
           <a:bodyPr wrap="square" lIns="0" tIns="0" rIns="0" bIns="0" rtlCol="0" anchor="ctr"/>
           <a:lstStyle/>
           <a:p>
-            <a:pPr marL="0" indent="0" algn="ctr">
+            <a:pPr algn="ctr" indent="0" marL="0">
               <a:buNone/>
             </a:pPr>
             <a:endParaRPr lang="en-US" sz="1200" dirty="0"/>
@@ -17619,7 +17844,7 @@
           <a:bodyPr wrap="square" lIns="0" tIns="0" rIns="0" bIns="0" rtlCol="0" anchor="ctr"/>
           <a:lstStyle/>
           <a:p>
-            <a:pPr marL="0" indent="0">
+            <a:pPr indent="0" marL="0">
               <a:buNone/>
             </a:pPr>
             <a:r>
@@ -17658,7 +17883,7 @@
           <a:bodyPr wrap="square" lIns="0" tIns="0" rIns="0" bIns="0" rtlCol="0" anchor="ctr"/>
           <a:lstStyle/>
           <a:p>
-            <a:pPr marL="0" indent="0">
+            <a:pPr indent="0" marL="0">
               <a:buNone/>
             </a:pPr>
             <a:r>
@@ -17702,7 +17927,7 @@
             <a:prstDash val="solid"/>
           </a:ln>
           <a:effectLst>
-            <a:outerShdw blurRad="88900" dist="25400" dir="5400000" algn="bl" rotWithShape="0">
+            <a:outerShdw sx="100000" sy="100000" kx="0" ky="0" algn="bl" rotWithShape="0" blurRad="88900" dist="25400" dir="5400000">
               <a:srgbClr val="0A1C33">
                 <a:alpha val="16000"/>
               </a:srgbClr>
@@ -17753,7 +17978,7 @@
           <a:bodyPr wrap="square" lIns="0" tIns="0" rIns="0" bIns="0" rtlCol="0" anchor="ctr"/>
           <a:lstStyle/>
           <a:p>
-            <a:pPr marL="0" indent="0" algn="ctr">
+            <a:pPr algn="ctr" indent="0" marL="0">
               <a:buNone/>
             </a:pPr>
             <a:endParaRPr lang="en-US" sz="1200" dirty="0"/>
@@ -17801,7 +18026,7 @@
           <a:bodyPr wrap="square" lIns="0" tIns="0" rIns="0" bIns="0" rtlCol="0" anchor="ctr"/>
           <a:lstStyle/>
           <a:p>
-            <a:pPr marL="0" indent="0">
+            <a:pPr indent="0" marL="0">
               <a:buNone/>
             </a:pPr>
             <a:r>
@@ -17840,7 +18065,7 @@
           <a:bodyPr wrap="square" lIns="0" tIns="0" rIns="0" bIns="0" rtlCol="0" anchor="ctr"/>
           <a:lstStyle/>
           <a:p>
-            <a:pPr marL="0" indent="0">
+            <a:pPr indent="0" marL="0">
               <a:buNone/>
             </a:pPr>
             <a:r>
@@ -17884,7 +18109,7 @@
             <a:prstDash val="solid"/>
           </a:ln>
           <a:effectLst>
-            <a:outerShdw blurRad="88900" dist="25400" dir="5400000" algn="bl" rotWithShape="0">
+            <a:outerShdw sx="100000" sy="100000" kx="0" ky="0" algn="bl" rotWithShape="0" blurRad="88900" dist="25400" dir="5400000">
               <a:srgbClr val="0A1C33">
                 <a:alpha val="16000"/>
               </a:srgbClr>
@@ -17935,7 +18160,7 @@
           <a:bodyPr wrap="square" lIns="0" tIns="0" rIns="0" bIns="0" rtlCol="0" anchor="ctr"/>
           <a:lstStyle/>
           <a:p>
-            <a:pPr marL="0" indent="0" algn="ctr">
+            <a:pPr algn="ctr" indent="0" marL="0">
               <a:buNone/>
             </a:pPr>
             <a:endParaRPr lang="en-US" sz="1200" dirty="0"/>
@@ -17983,7 +18208,7 @@
           <a:bodyPr wrap="square" lIns="0" tIns="0" rIns="0" bIns="0" rtlCol="0" anchor="ctr"/>
           <a:lstStyle/>
           <a:p>
-            <a:pPr marL="0" indent="0">
+            <a:pPr indent="0" marL="0">
               <a:buNone/>
             </a:pPr>
             <a:r>
@@ -18022,7 +18247,7 @@
           <a:bodyPr wrap="square" lIns="0" tIns="0" rIns="0" bIns="0" rtlCol="0" anchor="ctr"/>
           <a:lstStyle/>
           <a:p>
-            <a:pPr marL="0" indent="0">
+            <a:pPr indent="0" marL="0">
               <a:buNone/>
             </a:pPr>
             <a:r>
@@ -18066,7 +18291,7 @@
             <a:prstDash val="solid"/>
           </a:ln>
           <a:effectLst>
-            <a:outerShdw blurRad="88900" dist="25400" dir="5400000" algn="bl" rotWithShape="0">
+            <a:outerShdw sx="100000" sy="100000" kx="0" ky="0" algn="bl" rotWithShape="0" blurRad="88900" dist="25400" dir="5400000">
               <a:srgbClr val="0A1C33">
                 <a:alpha val="16000"/>
               </a:srgbClr>
@@ -18117,7 +18342,7 @@
           <a:bodyPr wrap="square" lIns="0" tIns="0" rIns="0" bIns="0" rtlCol="0" anchor="ctr"/>
           <a:lstStyle/>
           <a:p>
-            <a:pPr marL="0" indent="0" algn="ctr">
+            <a:pPr algn="ctr" indent="0" marL="0">
               <a:buNone/>
             </a:pPr>
             <a:endParaRPr lang="en-US" sz="1200" dirty="0"/>
@@ -18165,7 +18390,7 @@
           <a:bodyPr wrap="square" lIns="0" tIns="0" rIns="0" bIns="0" rtlCol="0" anchor="ctr"/>
           <a:lstStyle/>
           <a:p>
-            <a:pPr marL="0" indent="0">
+            <a:pPr indent="0" marL="0">
               <a:buNone/>
             </a:pPr>
             <a:r>
@@ -18204,7 +18429,7 @@
           <a:bodyPr wrap="square" lIns="0" tIns="0" rIns="0" bIns="0" rtlCol="0" anchor="ctr"/>
           <a:lstStyle/>
           <a:p>
-            <a:pPr marL="0" indent="0">
+            <a:pPr indent="0" marL="0">
               <a:buNone/>
             </a:pPr>
             <a:r>
@@ -18248,7 +18473,7 @@
             <a:prstDash val="solid"/>
           </a:ln>
           <a:effectLst>
-            <a:outerShdw blurRad="88900" dist="25400" dir="5400000" algn="bl" rotWithShape="0">
+            <a:outerShdw sx="100000" sy="100000" kx="0" ky="0" algn="bl" rotWithShape="0" blurRad="88900" dist="25400" dir="5400000">
               <a:srgbClr val="0A1C33">
                 <a:alpha val="16000"/>
               </a:srgbClr>
@@ -18299,7 +18524,7 @@
           <a:bodyPr wrap="square" lIns="0" tIns="0" rIns="0" bIns="0" rtlCol="0" anchor="ctr"/>
           <a:lstStyle/>
           <a:p>
-            <a:pPr marL="0" indent="0" algn="ctr">
+            <a:pPr algn="ctr" indent="0" marL="0">
               <a:buNone/>
             </a:pPr>
             <a:endParaRPr lang="en-US" sz="1200" dirty="0"/>
@@ -18347,7 +18572,7 @@
           <a:bodyPr wrap="square" lIns="0" tIns="0" rIns="0" bIns="0" rtlCol="0" anchor="ctr"/>
           <a:lstStyle/>
           <a:p>
-            <a:pPr marL="0" indent="0">
+            <a:pPr indent="0" marL="0">
               <a:buNone/>
             </a:pPr>
             <a:r>
@@ -18386,7 +18611,7 @@
           <a:bodyPr wrap="square" lIns="0" tIns="0" rIns="0" bIns="0" rtlCol="0" anchor="ctr"/>
           <a:lstStyle/>
           <a:p>
-            <a:pPr marL="0" indent="0">
+            <a:pPr indent="0" marL="0">
               <a:buNone/>
             </a:pPr>
             <a:r>
@@ -18430,7 +18655,7 @@
             <a:prstDash val="solid"/>
           </a:ln>
           <a:effectLst>
-            <a:outerShdw blurRad="88900" dist="25400" dir="5400000" algn="bl" rotWithShape="0">
+            <a:outerShdw sx="100000" sy="100000" kx="0" ky="0" algn="bl" rotWithShape="0" blurRad="88900" dist="25400" dir="5400000">
               <a:srgbClr val="0A1C33">
                 <a:alpha val="16000"/>
               </a:srgbClr>
@@ -18481,7 +18706,7 @@
           <a:bodyPr wrap="square" lIns="0" tIns="0" rIns="0" bIns="0" rtlCol="0" anchor="ctr"/>
           <a:lstStyle/>
           <a:p>
-            <a:pPr marL="0" indent="0" algn="ctr">
+            <a:pPr algn="ctr" indent="0" marL="0">
               <a:buNone/>
             </a:pPr>
             <a:endParaRPr lang="en-US" sz="1200" dirty="0"/>
@@ -18529,7 +18754,7 @@
           <a:bodyPr wrap="square" lIns="0" tIns="0" rIns="0" bIns="0" rtlCol="0" anchor="ctr"/>
           <a:lstStyle/>
           <a:p>
-            <a:pPr marL="0" indent="0">
+            <a:pPr indent="0" marL="0">
               <a:buNone/>
             </a:pPr>
             <a:r>
@@ -18568,7 +18793,7 @@
           <a:bodyPr wrap="square" lIns="0" tIns="0" rIns="0" bIns="0" rtlCol="0" anchor="ctr"/>
           <a:lstStyle/>
           <a:p>
-            <a:pPr marL="0" indent="0">
+            <a:pPr indent="0" marL="0">
               <a:buNone/>
             </a:pPr>
             <a:r>
@@ -18607,7 +18832,7 @@
           <a:bodyPr wrap="square" lIns="0" tIns="0" rIns="0" bIns="0" rtlCol="0" anchor="ctr"/>
           <a:lstStyle/>
           <a:p>
-            <a:pPr marL="0" indent="0" algn="r">
+            <a:pPr algn="r" indent="0" marL="0">
               <a:buNone/>
             </a:pPr>
             <a:r>
@@ -18641,7 +18866,6 @@
         <a:solidFill>
           <a:srgbClr val="FFFFFF"/>
         </a:solidFill>
-        <a:effectLst/>
       </p:bgPr>
     </p:bg>
     <p:spTree>
@@ -18679,11 +18903,11 @@
           <a:bodyPr wrap="square" lIns="0" tIns="0" rIns="0" bIns="0" rtlCol="0" anchor="ctr"/>
           <a:lstStyle/>
           <a:p>
-            <a:pPr marL="0" indent="0">
-              <a:buNone/>
-            </a:pPr>
-            <a:r>
-              <a:rPr lang="en-US" sz="1200" b="1" kern="0" spc="300" dirty="0">
+            <a:pPr indent="0" marL="0">
+              <a:buNone/>
+            </a:pPr>
+            <a:r>
+              <a:rPr lang="en-US" sz="1200" b="1" spc="300" kern="0" dirty="0">
                 <a:solidFill>
                   <a:srgbClr val="1D4ED8"/>
                 </a:solidFill>
@@ -18718,7 +18942,7 @@
           <a:bodyPr wrap="square" lIns="0" tIns="0" rIns="0" bIns="0" rtlCol="0" anchor="ctr"/>
           <a:lstStyle/>
           <a:p>
-            <a:pPr marL="0" indent="0">
+            <a:pPr indent="0" marL="0">
               <a:buNone/>
             </a:pPr>
             <a:r>
@@ -18762,7 +18986,7 @@
             <a:prstDash val="solid"/>
           </a:ln>
           <a:effectLst>
-            <a:outerShdw blurRad="88900" dist="25400" dir="5400000" algn="bl" rotWithShape="0">
+            <a:outerShdw sx="100000" sy="100000" kx="0" ky="0" algn="bl" rotWithShape="0" blurRad="88900" dist="25400" dir="5400000">
               <a:srgbClr val="0A1C33">
                 <a:alpha val="16000"/>
               </a:srgbClr>
@@ -18813,11 +19037,11 @@
           <a:bodyPr wrap="square" lIns="0" tIns="0" rIns="0" bIns="0" rtlCol="0" anchor="ctr"/>
           <a:lstStyle/>
           <a:p>
-            <a:pPr marL="0" indent="0">
-              <a:buNone/>
-            </a:pPr>
-            <a:r>
-              <a:rPr lang="en-US" sz="1400" b="1" kern="0" spc="100" dirty="0">
+            <a:pPr indent="0" marL="0">
+              <a:buNone/>
+            </a:pPr>
+            <a:r>
+              <a:rPr lang="en-US" sz="1400" b="1" spc="100" kern="0" dirty="0">
                 <a:solidFill>
                   <a:srgbClr val="0E2240"/>
                 </a:solidFill>
@@ -18852,7 +19076,7 @@
           <a:bodyPr wrap="square" lIns="0" tIns="0" rIns="0" bIns="0" rtlCol="0" anchor="ctr"/>
           <a:lstStyle/>
           <a:p>
-            <a:pPr marL="0" indent="0">
+            <a:pPr indent="0" marL="0">
               <a:buNone/>
             </a:pPr>
             <a:r>
@@ -18896,7 +19120,7 @@
             <a:prstDash val="solid"/>
           </a:ln>
           <a:effectLst>
-            <a:outerShdw blurRad="88900" dist="25400" dir="5400000" algn="bl" rotWithShape="0">
+            <a:outerShdw sx="100000" sy="100000" kx="0" ky="0" algn="bl" rotWithShape="0" blurRad="88900" dist="25400" dir="5400000">
               <a:srgbClr val="0A1C33">
                 <a:alpha val="16000"/>
               </a:srgbClr>
@@ -18947,11 +19171,11 @@
           <a:bodyPr wrap="square" lIns="0" tIns="0" rIns="0" bIns="0" rtlCol="0" anchor="ctr"/>
           <a:lstStyle/>
           <a:p>
-            <a:pPr marL="0" indent="0">
-              <a:buNone/>
-            </a:pPr>
-            <a:r>
-              <a:rPr lang="en-US" sz="1400" b="1" kern="0" spc="100" dirty="0">
+            <a:pPr indent="0" marL="0">
+              <a:buNone/>
+            </a:pPr>
+            <a:r>
+              <a:rPr lang="en-US" sz="1400" b="1" spc="100" kern="0" dirty="0">
                 <a:solidFill>
                   <a:srgbClr val="0E2240"/>
                 </a:solidFill>
@@ -18986,7 +19210,7 @@
           <a:bodyPr wrap="square" lIns="0" tIns="0" rIns="0" bIns="0" rtlCol="0" anchor="ctr"/>
           <a:lstStyle/>
           <a:p>
-            <a:pPr marL="0" indent="0">
+            <a:pPr indent="0" marL="0">
               <a:buNone/>
             </a:pPr>
             <a:r>
@@ -19030,7 +19254,7 @@
             <a:prstDash val="solid"/>
           </a:ln>
           <a:effectLst>
-            <a:outerShdw blurRad="88900" dist="25400" dir="5400000" algn="bl" rotWithShape="0">
+            <a:outerShdw sx="100000" sy="100000" kx="0" ky="0" algn="bl" rotWithShape="0" blurRad="88900" dist="25400" dir="5400000">
               <a:srgbClr val="0A1C33">
                 <a:alpha val="16000"/>
               </a:srgbClr>
@@ -19081,11 +19305,11 @@
           <a:bodyPr wrap="square" lIns="0" tIns="0" rIns="0" bIns="0" rtlCol="0" anchor="ctr"/>
           <a:lstStyle/>
           <a:p>
-            <a:pPr marL="0" indent="0">
-              <a:buNone/>
-            </a:pPr>
-            <a:r>
-              <a:rPr lang="en-US" sz="1400" b="1" kern="0" spc="100" dirty="0">
+            <a:pPr indent="0" marL="0">
+              <a:buNone/>
+            </a:pPr>
+            <a:r>
+              <a:rPr lang="en-US" sz="1400" b="1" spc="100" kern="0" dirty="0">
                 <a:solidFill>
                   <a:srgbClr val="0E2240"/>
                 </a:solidFill>
@@ -19120,7 +19344,7 @@
           <a:bodyPr wrap="square" lIns="0" tIns="0" rIns="0" bIns="0" rtlCol="0" anchor="ctr"/>
           <a:lstStyle/>
           <a:p>
-            <a:pPr marL="0" indent="0">
+            <a:pPr indent="0" marL="0">
               <a:buNone/>
             </a:pPr>
             <a:r>
@@ -19164,7 +19388,7 @@
             <a:prstDash val="solid"/>
           </a:ln>
           <a:effectLst>
-            <a:outerShdw blurRad="88900" dist="25400" dir="5400000" algn="bl" rotWithShape="0">
+            <a:outerShdw sx="100000" sy="100000" kx="0" ky="0" algn="bl" rotWithShape="0" blurRad="88900" dist="25400" dir="5400000">
               <a:srgbClr val="0A1C33">
                 <a:alpha val="16000"/>
               </a:srgbClr>
@@ -19215,11 +19439,11 @@
           <a:bodyPr wrap="square" lIns="0" tIns="0" rIns="0" bIns="0" rtlCol="0" anchor="ctr"/>
           <a:lstStyle/>
           <a:p>
-            <a:pPr marL="0" indent="0">
-              <a:buNone/>
-            </a:pPr>
-            <a:r>
-              <a:rPr lang="en-US" sz="1400" b="1" kern="0" spc="100" dirty="0">
+            <a:pPr indent="0" marL="0">
+              <a:buNone/>
+            </a:pPr>
+            <a:r>
+              <a:rPr lang="en-US" sz="1400" b="1" spc="100" kern="0" dirty="0">
                 <a:solidFill>
                   <a:srgbClr val="0E2240"/>
                 </a:solidFill>
@@ -19254,7 +19478,7 @@
           <a:bodyPr wrap="square" lIns="0" tIns="0" rIns="0" bIns="0" rtlCol="0" anchor="ctr"/>
           <a:lstStyle/>
           <a:p>
-            <a:pPr marL="0" indent="0">
+            <a:pPr indent="0" marL="0">
               <a:buNone/>
             </a:pPr>
             <a:r>
@@ -19298,7 +19522,7 @@
             <a:prstDash val="solid"/>
           </a:ln>
           <a:effectLst>
-            <a:outerShdw blurRad="88900" dist="25400" dir="5400000" algn="bl" rotWithShape="0">
+            <a:outerShdw sx="100000" sy="100000" kx="0" ky="0" algn="bl" rotWithShape="0" blurRad="88900" dist="25400" dir="5400000">
               <a:srgbClr val="0A1C33">
                 <a:alpha val="16000"/>
               </a:srgbClr>
@@ -19349,11 +19573,11 @@
           <a:bodyPr wrap="square" lIns="0" tIns="0" rIns="0" bIns="0" rtlCol="0" anchor="ctr"/>
           <a:lstStyle/>
           <a:p>
-            <a:pPr marL="0" indent="0">
-              <a:buNone/>
-            </a:pPr>
-            <a:r>
-              <a:rPr lang="en-US" sz="1400" b="1" kern="0" spc="100" dirty="0">
+            <a:pPr indent="0" marL="0">
+              <a:buNone/>
+            </a:pPr>
+            <a:r>
+              <a:rPr lang="en-US" sz="1400" b="1" spc="100" kern="0" dirty="0">
                 <a:solidFill>
                   <a:srgbClr val="0E2240"/>
                 </a:solidFill>
@@ -19388,7 +19612,7 @@
           <a:bodyPr wrap="square" lIns="0" tIns="0" rIns="0" bIns="0" rtlCol="0" anchor="ctr"/>
           <a:lstStyle/>
           <a:p>
-            <a:pPr marL="0" indent="0">
+            <a:pPr indent="0" marL="0">
               <a:buNone/>
             </a:pPr>
             <a:r>
@@ -19432,7 +19656,7 @@
             <a:prstDash val="solid"/>
           </a:ln>
           <a:effectLst>
-            <a:outerShdw blurRad="88900" dist="25400" dir="5400000" algn="bl" rotWithShape="0">
+            <a:outerShdw sx="100000" sy="100000" kx="0" ky="0" algn="bl" rotWithShape="0" blurRad="88900" dist="25400" dir="5400000">
               <a:srgbClr val="0A1C33">
                 <a:alpha val="16000"/>
               </a:srgbClr>
@@ -19483,11 +19707,11 @@
           <a:bodyPr wrap="square" lIns="0" tIns="0" rIns="0" bIns="0" rtlCol="0" anchor="ctr"/>
           <a:lstStyle/>
           <a:p>
-            <a:pPr marL="0" indent="0">
-              <a:buNone/>
-            </a:pPr>
-            <a:r>
-              <a:rPr lang="en-US" sz="1400" b="1" kern="0" spc="100" dirty="0">
+            <a:pPr indent="0" marL="0">
+              <a:buNone/>
+            </a:pPr>
+            <a:r>
+              <a:rPr lang="en-US" sz="1400" b="1" spc="100" kern="0" dirty="0">
                 <a:solidFill>
                   <a:srgbClr val="0E2240"/>
                 </a:solidFill>
@@ -19522,7 +19746,7 @@
           <a:bodyPr wrap="square" lIns="0" tIns="0" rIns="0" bIns="0" rtlCol="0" anchor="ctr"/>
           <a:lstStyle/>
           <a:p>
-            <a:pPr marL="0" indent="0">
+            <a:pPr indent="0" marL="0">
               <a:buNone/>
             </a:pPr>
             <a:r>
@@ -19566,7 +19790,7 @@
             <a:prstDash val="solid"/>
           </a:ln>
           <a:effectLst>
-            <a:outerShdw blurRad="88900" dist="25400" dir="5400000" algn="bl" rotWithShape="0">
+            <a:outerShdw sx="100000" sy="100000" kx="0" ky="0" algn="bl" rotWithShape="0" blurRad="88900" dist="25400" dir="5400000">
               <a:srgbClr val="0A1C33">
                 <a:alpha val="16000"/>
               </a:srgbClr>
@@ -19617,11 +19841,11 @@
           <a:bodyPr wrap="square" lIns="0" tIns="0" rIns="0" bIns="0" rtlCol="0" anchor="ctr"/>
           <a:lstStyle/>
           <a:p>
-            <a:pPr marL="0" indent="0">
-              <a:buNone/>
-            </a:pPr>
-            <a:r>
-              <a:rPr lang="en-US" sz="1400" b="1" kern="0" spc="100" dirty="0">
+            <a:pPr indent="0" marL="0">
+              <a:buNone/>
+            </a:pPr>
+            <a:r>
+              <a:rPr lang="en-US" sz="1400" b="1" spc="100" kern="0" dirty="0">
                 <a:solidFill>
                   <a:srgbClr val="0E2240"/>
                 </a:solidFill>
@@ -19656,7 +19880,7 @@
           <a:bodyPr wrap="square" lIns="0" tIns="0" rIns="0" bIns="0" rtlCol="0" anchor="ctr"/>
           <a:lstStyle/>
           <a:p>
-            <a:pPr marL="0" indent="0">
+            <a:pPr indent="0" marL="0">
               <a:buNone/>
             </a:pPr>
             <a:r>
@@ -19695,7 +19919,7 @@
           <a:bodyPr wrap="square" lIns="0" tIns="0" rIns="0" bIns="0" rtlCol="0" anchor="ctr"/>
           <a:lstStyle/>
           <a:p>
-            <a:pPr marL="0" indent="0">
+            <a:pPr indent="0" marL="0">
               <a:buNone/>
             </a:pPr>
             <a:r>
@@ -19709,6 +19933,9 @@
               </a:rPr>
               <a:t>62 view modules</a:t>
             </a:r>
+            <a:pPr indent="0" marL="0">
+              <a:buNone/>
+            </a:pPr>
             <a:r>
               <a:rPr lang="en-US" sz="1300" dirty="0">
                 <a:solidFill>
@@ -19745,7 +19972,7 @@
           <a:bodyPr wrap="square" lIns="0" tIns="0" rIns="0" bIns="0" rtlCol="0" anchor="ctr"/>
           <a:lstStyle/>
           <a:p>
-            <a:pPr marL="0" indent="0" algn="r">
+            <a:pPr algn="r" indent="0" marL="0">
               <a:buNone/>
             </a:pPr>
             <a:r>
@@ -19779,7 +20006,6 @@
         <a:solidFill>
           <a:srgbClr val="FFFFFF"/>
         </a:solidFill>
-        <a:effectLst/>
       </p:bgPr>
     </p:bg>
     <p:spTree>
@@ -19817,11 +20043,11 @@
           <a:bodyPr wrap="square" lIns="0" tIns="0" rIns="0" bIns="0" rtlCol="0" anchor="ctr"/>
           <a:lstStyle/>
           <a:p>
-            <a:pPr marL="0" indent="0">
-              <a:buNone/>
-            </a:pPr>
-            <a:r>
-              <a:rPr lang="en-US" sz="1200" b="1" kern="0" spc="300" dirty="0">
+            <a:pPr indent="0" marL="0">
+              <a:buNone/>
+            </a:pPr>
+            <a:r>
+              <a:rPr lang="en-US" sz="1200" b="1" spc="300" kern="0" dirty="0">
                 <a:solidFill>
                   <a:srgbClr val="1D4ED8"/>
                 </a:solidFill>
@@ -19856,7 +20082,7 @@
           <a:bodyPr wrap="square" lIns="0" tIns="0" rIns="0" bIns="0" rtlCol="0" anchor="ctr"/>
           <a:lstStyle/>
           <a:p>
-            <a:pPr marL="0" indent="0">
+            <a:pPr indent="0" marL="0">
               <a:buNone/>
             </a:pPr>
             <a:r>
@@ -19900,7 +20126,7 @@
             <a:prstDash val="solid"/>
           </a:ln>
           <a:effectLst>
-            <a:outerShdw blurRad="88900" dist="25400" dir="5400000" algn="bl" rotWithShape="0">
+            <a:outerShdw sx="100000" sy="100000" kx="0" ky="0" algn="bl" rotWithShape="0" blurRad="88900" dist="25400" dir="5400000">
               <a:srgbClr val="0A1C33">
                 <a:alpha val="16000"/>
               </a:srgbClr>
@@ -19951,7 +20177,7 @@
           <a:bodyPr wrap="square" lIns="0" tIns="0" rIns="0" bIns="0" rtlCol="0" anchor="ctr"/>
           <a:lstStyle/>
           <a:p>
-            <a:pPr marL="0" indent="0" algn="ctr">
+            <a:pPr algn="ctr" indent="0" marL="0">
               <a:buNone/>
             </a:pPr>
             <a:r>
@@ -19990,7 +20216,7 @@
           <a:bodyPr wrap="square" lIns="0" tIns="0" rIns="0" bIns="0" rtlCol="0" anchor="ctr"/>
           <a:lstStyle/>
           <a:p>
-            <a:pPr marL="0" indent="0">
+            <a:pPr indent="0" marL="0">
               <a:buNone/>
             </a:pPr>
             <a:r>
@@ -20034,7 +20260,7 @@
             <a:prstDash val="solid"/>
           </a:ln>
           <a:effectLst>
-            <a:outerShdw blurRad="88900" dist="25400" dir="5400000" algn="bl" rotWithShape="0">
+            <a:outerShdw sx="100000" sy="100000" kx="0" ky="0" algn="bl" rotWithShape="0" blurRad="88900" dist="25400" dir="5400000">
               <a:srgbClr val="0A1C33">
                 <a:alpha val="16000"/>
               </a:srgbClr>
@@ -20085,7 +20311,7 @@
           <a:bodyPr wrap="square" lIns="0" tIns="0" rIns="0" bIns="0" rtlCol="0" anchor="ctr"/>
           <a:lstStyle/>
           <a:p>
-            <a:pPr marL="0" indent="0" algn="ctr">
+            <a:pPr algn="ctr" indent="0" marL="0">
               <a:buNone/>
             </a:pPr>
             <a:r>
@@ -20124,7 +20350,7 @@
           <a:bodyPr wrap="square" lIns="0" tIns="0" rIns="0" bIns="0" rtlCol="0" anchor="ctr"/>
           <a:lstStyle/>
           <a:p>
-            <a:pPr marL="0" indent="0">
+            <a:pPr indent="0" marL="0">
               <a:buNone/>
             </a:pPr>
             <a:r>
@@ -20168,7 +20394,7 @@
             <a:prstDash val="solid"/>
           </a:ln>
           <a:effectLst>
-            <a:outerShdw blurRad="88900" dist="25400" dir="5400000" algn="bl" rotWithShape="0">
+            <a:outerShdw sx="100000" sy="100000" kx="0" ky="0" algn="bl" rotWithShape="0" blurRad="88900" dist="25400" dir="5400000">
               <a:srgbClr val="0A1C33">
                 <a:alpha val="16000"/>
               </a:srgbClr>
@@ -20219,7 +20445,7 @@
           <a:bodyPr wrap="square" lIns="0" tIns="0" rIns="0" bIns="0" rtlCol="0" anchor="ctr"/>
           <a:lstStyle/>
           <a:p>
-            <a:pPr marL="0" indent="0" algn="ctr">
+            <a:pPr algn="ctr" indent="0" marL="0">
               <a:buNone/>
             </a:pPr>
             <a:r>
@@ -20258,7 +20484,7 @@
           <a:bodyPr wrap="square" lIns="0" tIns="0" rIns="0" bIns="0" rtlCol="0" anchor="ctr"/>
           <a:lstStyle/>
           <a:p>
-            <a:pPr marL="0" indent="0">
+            <a:pPr indent="0" marL="0">
               <a:buNone/>
             </a:pPr>
             <a:r>
@@ -20302,7 +20528,7 @@
             <a:prstDash val="solid"/>
           </a:ln>
           <a:effectLst>
-            <a:outerShdw blurRad="88900" dist="25400" dir="5400000" algn="bl" rotWithShape="0">
+            <a:outerShdw sx="100000" sy="100000" kx="0" ky="0" algn="bl" rotWithShape="0" blurRad="88900" dist="25400" dir="5400000">
               <a:srgbClr val="0A1C33">
                 <a:alpha val="16000"/>
               </a:srgbClr>
@@ -20353,7 +20579,7 @@
           <a:bodyPr wrap="square" lIns="0" tIns="0" rIns="0" bIns="0" rtlCol="0" anchor="ctr"/>
           <a:lstStyle/>
           <a:p>
-            <a:pPr marL="0" indent="0" algn="ctr">
+            <a:pPr algn="ctr" indent="0" marL="0">
               <a:buNone/>
             </a:pPr>
             <a:r>
@@ -20392,7 +20618,7 @@
           <a:bodyPr wrap="square" lIns="0" tIns="0" rIns="0" bIns="0" rtlCol="0" anchor="ctr"/>
           <a:lstStyle/>
           <a:p>
-            <a:pPr marL="0" indent="0">
+            <a:pPr indent="0" marL="0">
               <a:buNone/>
             </a:pPr>
             <a:r>
@@ -20431,7 +20657,7 @@
           <a:bodyPr wrap="square" lIns="0" tIns="0" rIns="0" bIns="0" rtlCol="0" anchor="ctr"/>
           <a:lstStyle/>
           <a:p>
-            <a:pPr marL="0" indent="0" algn="r">
+            <a:pPr algn="r" indent="0" marL="0">
               <a:buNone/>
             </a:pPr>
             <a:r>
@@ -20465,7 +20691,6 @@
         <a:solidFill>
           <a:srgbClr val="FFFFFF"/>
         </a:solidFill>
-        <a:effectLst/>
       </p:bgPr>
     </p:bg>
     <p:spTree>
@@ -20503,11 +20728,11 @@
           <a:bodyPr wrap="square" lIns="0" tIns="0" rIns="0" bIns="0" rtlCol="0" anchor="ctr"/>
           <a:lstStyle/>
           <a:p>
-            <a:pPr marL="0" indent="0">
-              <a:buNone/>
-            </a:pPr>
-            <a:r>
-              <a:rPr lang="en-US" sz="1200" b="1" kern="0" spc="300" dirty="0">
+            <a:pPr indent="0" marL="0">
+              <a:buNone/>
+            </a:pPr>
+            <a:r>
+              <a:rPr lang="en-US" sz="1200" b="1" spc="300" kern="0" dirty="0">
                 <a:solidFill>
                   <a:srgbClr val="1D4ED8"/>
                 </a:solidFill>
@@ -20542,7 +20767,7 @@
           <a:bodyPr wrap="square" lIns="0" tIns="0" rIns="0" bIns="0" rtlCol="0" anchor="ctr"/>
           <a:lstStyle/>
           <a:p>
-            <a:pPr marL="0" indent="0">
+            <a:pPr indent="0" marL="0">
               <a:buNone/>
             </a:pPr>
             <a:r>
@@ -20581,7 +20806,7 @@
           </a:solidFill>
           <a:ln/>
           <a:effectLst>
-            <a:outerShdw blurRad="88900" dist="25400" dir="5400000" algn="bl" rotWithShape="0">
+            <a:outerShdw sx="100000" sy="100000" kx="0" ky="0" algn="bl" rotWithShape="0" blurRad="88900" dist="25400" dir="5400000">
               <a:srgbClr val="0A1C33">
                 <a:alpha val="16000"/>
               </a:srgbClr>
@@ -20610,7 +20835,7 @@
           <a:bodyPr wrap="square" lIns="0" tIns="0" rIns="0" bIns="0" rtlCol="0" anchor="ctr"/>
           <a:lstStyle/>
           <a:p>
-            <a:pPr marL="0" indent="0">
+            <a:pPr indent="0" marL="0">
               <a:buNone/>
             </a:pPr>
             <a:r>
@@ -20649,7 +20874,7 @@
           <a:bodyPr wrap="square" lIns="0" tIns="0" rIns="0" bIns="0" rtlCol="0" anchor="ctr"/>
           <a:lstStyle/>
           <a:p>
-            <a:pPr marL="0" indent="0">
+            <a:pPr indent="0" marL="0">
               <a:lnSpc>
                 <a:spcPct val="102000"/>
               </a:lnSpc>
@@ -20669,7 +20894,7 @@
             <a:endParaRPr lang="en-US" sz="1300" dirty="0"/>
           </a:p>
           <a:p>
-            <a:pPr marL="0" indent="0">
+            <a:pPr indent="0" marL="0">
               <a:lnSpc>
                 <a:spcPct val="102000"/>
               </a:lnSpc>
@@ -20731,7 +20956,7 @@
           </a:solidFill>
           <a:ln/>
           <a:effectLst>
-            <a:outerShdw blurRad="88900" dist="25400" dir="5400000" algn="bl" rotWithShape="0">
+            <a:outerShdw sx="100000" sy="100000" kx="0" ky="0" algn="bl" rotWithShape="0" blurRad="88900" dist="25400" dir="5400000">
               <a:srgbClr val="0A1C33">
                 <a:alpha val="16000"/>
               </a:srgbClr>
@@ -20760,7 +20985,7 @@
           <a:bodyPr wrap="square" lIns="0" tIns="0" rIns="0" bIns="0" rtlCol="0" anchor="ctr"/>
           <a:lstStyle/>
           <a:p>
-            <a:pPr marL="0" indent="0">
+            <a:pPr indent="0" marL="0">
               <a:buNone/>
             </a:pPr>
             <a:r>
@@ -20799,7 +21024,7 @@
           <a:bodyPr wrap="square" lIns="0" tIns="0" rIns="0" bIns="0" rtlCol="0" anchor="ctr"/>
           <a:lstStyle/>
           <a:p>
-            <a:pPr marL="0" indent="0">
+            <a:pPr indent="0" marL="0">
               <a:lnSpc>
                 <a:spcPct val="102000"/>
               </a:lnSpc>
@@ -20819,7 +21044,7 @@
             <a:endParaRPr lang="en-US" sz="1300" dirty="0"/>
           </a:p>
           <a:p>
-            <a:pPr marL="0" indent="0">
+            <a:pPr indent="0" marL="0">
               <a:lnSpc>
                 <a:spcPct val="102000"/>
               </a:lnSpc>
@@ -20881,7 +21106,7 @@
           </a:solidFill>
           <a:ln/>
           <a:effectLst>
-            <a:outerShdw blurRad="88900" dist="25400" dir="5400000" algn="bl" rotWithShape="0">
+            <a:outerShdw sx="100000" sy="100000" kx="0" ky="0" algn="bl" rotWithShape="0" blurRad="88900" dist="25400" dir="5400000">
               <a:srgbClr val="0A1C33">
                 <a:alpha val="16000"/>
               </a:srgbClr>
@@ -20910,7 +21135,7 @@
           <a:bodyPr wrap="square" lIns="0" tIns="0" rIns="0" bIns="0" rtlCol="0" anchor="ctr"/>
           <a:lstStyle/>
           <a:p>
-            <a:pPr marL="0" indent="0">
+            <a:pPr indent="0" marL="0">
               <a:buNone/>
             </a:pPr>
             <a:r>
@@ -20949,7 +21174,7 @@
           <a:bodyPr wrap="square" lIns="0" tIns="0" rIns="0" bIns="0" rtlCol="0" anchor="ctr"/>
           <a:lstStyle/>
           <a:p>
-            <a:pPr marL="0" indent="0">
+            <a:pPr indent="0" marL="0">
               <a:lnSpc>
                 <a:spcPct val="102000"/>
               </a:lnSpc>
@@ -20969,7 +21194,7 @@
             <a:endParaRPr lang="en-US" sz="1300" dirty="0"/>
           </a:p>
           <a:p>
-            <a:pPr marL="0" indent="0">
+            <a:pPr indent="0" marL="0">
               <a:lnSpc>
                 <a:spcPct val="102000"/>
               </a:lnSpc>
@@ -21031,7 +21256,7 @@
           </a:solidFill>
           <a:ln/>
           <a:effectLst>
-            <a:outerShdw blurRad="88900" dist="25400" dir="5400000" algn="bl" rotWithShape="0">
+            <a:outerShdw sx="100000" sy="100000" kx="0" ky="0" algn="bl" rotWithShape="0" blurRad="88900" dist="25400" dir="5400000">
               <a:srgbClr val="0A1C33">
                 <a:alpha val="16000"/>
               </a:srgbClr>
@@ -21060,7 +21285,7 @@
           <a:bodyPr wrap="square" lIns="0" tIns="0" rIns="0" bIns="0" rtlCol="0" anchor="ctr"/>
           <a:lstStyle/>
           <a:p>
-            <a:pPr marL="0" indent="0">
+            <a:pPr indent="0" marL="0">
               <a:buNone/>
             </a:pPr>
             <a:r>
@@ -21099,7 +21324,7 @@
           <a:bodyPr wrap="square" lIns="0" tIns="0" rIns="0" bIns="0" rtlCol="0" anchor="ctr"/>
           <a:lstStyle/>
           <a:p>
-            <a:pPr marL="0" indent="0">
+            <a:pPr indent="0" marL="0">
               <a:lnSpc>
                 <a:spcPct val="102000"/>
               </a:lnSpc>
@@ -21119,7 +21344,7 @@
             <a:endParaRPr lang="en-US" sz="1300" dirty="0"/>
           </a:p>
           <a:p>
-            <a:pPr marL="0" indent="0">
+            <a:pPr indent="0" marL="0">
               <a:lnSpc>
                 <a:spcPct val="102000"/>
               </a:lnSpc>
@@ -21181,7 +21406,7 @@
           </a:solidFill>
           <a:ln/>
           <a:effectLst>
-            <a:outerShdw blurRad="88900" dist="25400" dir="5400000" algn="bl" rotWithShape="0">
+            <a:outerShdw sx="100000" sy="100000" kx="0" ky="0" algn="bl" rotWithShape="0" blurRad="88900" dist="25400" dir="5400000">
               <a:srgbClr val="0A1C33">
                 <a:alpha val="16000"/>
               </a:srgbClr>
@@ -21210,7 +21435,7 @@
           <a:bodyPr wrap="square" lIns="0" tIns="0" rIns="0" bIns="0" rtlCol="0" anchor="ctr"/>
           <a:lstStyle/>
           <a:p>
-            <a:pPr marL="0" indent="0">
+            <a:pPr indent="0" marL="0">
               <a:buNone/>
             </a:pPr>
             <a:r>
@@ -21249,7 +21474,7 @@
           <a:bodyPr wrap="square" lIns="0" tIns="0" rIns="0" bIns="0" rtlCol="0" anchor="ctr"/>
           <a:lstStyle/>
           <a:p>
-            <a:pPr marL="0" indent="0">
+            <a:pPr indent="0" marL="0">
               <a:lnSpc>
                 <a:spcPct val="102000"/>
               </a:lnSpc>
@@ -21269,7 +21494,7 @@
             <a:endParaRPr lang="en-US" sz="1300" dirty="0"/>
           </a:p>
           <a:p>
-            <a:pPr marL="0" indent="0">
+            <a:pPr indent="0" marL="0">
               <a:lnSpc>
                 <a:spcPct val="102000"/>
               </a:lnSpc>
@@ -21331,7 +21556,7 @@
           </a:solidFill>
           <a:ln/>
           <a:effectLst>
-            <a:outerShdw blurRad="88900" dist="25400" dir="5400000" algn="bl" rotWithShape="0">
+            <a:outerShdw sx="100000" sy="100000" kx="0" ky="0" algn="bl" rotWithShape="0" blurRad="88900" dist="25400" dir="5400000">
               <a:srgbClr val="0A1C33">
                 <a:alpha val="16000"/>
               </a:srgbClr>
@@ -21360,7 +21585,7 @@
           <a:bodyPr wrap="square" lIns="0" tIns="0" rIns="0" bIns="0" rtlCol="0" anchor="ctr"/>
           <a:lstStyle/>
           <a:p>
-            <a:pPr marL="0" indent="0">
+            <a:pPr indent="0" marL="0">
               <a:buNone/>
             </a:pPr>
             <a:r>
@@ -21399,7 +21624,7 @@
           <a:bodyPr wrap="square" lIns="0" tIns="0" rIns="0" bIns="0" rtlCol="0" anchor="ctr"/>
           <a:lstStyle/>
           <a:p>
-            <a:pPr marL="0" indent="0">
+            <a:pPr indent="0" marL="0">
               <a:lnSpc>
                 <a:spcPct val="102000"/>
               </a:lnSpc>
@@ -21419,7 +21644,7 @@
             <a:endParaRPr lang="en-US" sz="1300" dirty="0"/>
           </a:p>
           <a:p>
-            <a:pPr marL="0" indent="0">
+            <a:pPr indent="0" marL="0">
               <a:lnSpc>
                 <a:spcPct val="102000"/>
               </a:lnSpc>
@@ -21461,7 +21686,7 @@
           <a:bodyPr wrap="square" lIns="0" tIns="0" rIns="0" bIns="0" rtlCol="0" anchor="ctr"/>
           <a:lstStyle/>
           <a:p>
-            <a:pPr marL="0" indent="0">
+            <a:pPr indent="0" marL="0">
               <a:buNone/>
             </a:pPr>
             <a:r>
@@ -21475,6 +21700,9 @@
               </a:rPr>
               <a:t>Step 6 fans out automatically:  </a:t>
             </a:r>
+            <a:pPr indent="0" marL="0">
+              <a:buNone/>
+            </a:pPr>
             <a:r>
               <a:rPr lang="en-US" sz="1400" dirty="0">
                 <a:solidFill>
@@ -21516,7 +21744,7 @@
             <a:prstDash val="solid"/>
           </a:ln>
           <a:effectLst>
-            <a:outerShdw blurRad="88900" dist="25400" dir="5400000" algn="bl" rotWithShape="0">
+            <a:outerShdw sx="100000" sy="100000" kx="0" ky="0" algn="bl" rotWithShape="0" blurRad="88900" dist="25400" dir="5400000">
               <a:srgbClr val="0A1C33">
                 <a:alpha val="16000"/>
               </a:srgbClr>
@@ -21545,7 +21773,7 @@
           <a:bodyPr wrap="square" lIns="0" tIns="0" rIns="0" bIns="0" rtlCol="0" anchor="ctr"/>
           <a:lstStyle/>
           <a:p>
-            <a:pPr marL="0" indent="0">
+            <a:pPr indent="0" marL="0">
               <a:buNone/>
             </a:pPr>
             <a:r>
@@ -21606,7 +21834,7 @@
           <a:bodyPr wrap="square" lIns="0" tIns="0" rIns="0" bIns="0" rtlCol="0" anchor="ctr"/>
           <a:lstStyle/>
           <a:p>
-            <a:pPr marL="0" indent="0" algn="ctr">
+            <a:pPr algn="ctr" indent="0" marL="0">
               <a:buNone/>
             </a:pPr>
             <a:r>
@@ -21645,7 +21873,7 @@
           <a:bodyPr wrap="square" lIns="0" tIns="0" rIns="0" bIns="0" rtlCol="0" anchor="ctr"/>
           <a:lstStyle/>
           <a:p>
-            <a:pPr marL="0" indent="0">
+            <a:pPr indent="0" marL="0">
               <a:buNone/>
             </a:pPr>
             <a:r>
@@ -21706,7 +21934,7 @@
           <a:bodyPr wrap="square" lIns="0" tIns="0" rIns="0" bIns="0" rtlCol="0" anchor="ctr"/>
           <a:lstStyle/>
           <a:p>
-            <a:pPr marL="0" indent="0" algn="ctr">
+            <a:pPr algn="ctr" indent="0" marL="0">
               <a:buNone/>
             </a:pPr>
             <a:r>
@@ -21745,7 +21973,7 @@
           <a:bodyPr wrap="square" lIns="0" tIns="0" rIns="0" bIns="0" rtlCol="0" anchor="ctr"/>
           <a:lstStyle/>
           <a:p>
-            <a:pPr marL="0" indent="0">
+            <a:pPr indent="0" marL="0">
               <a:buNone/>
             </a:pPr>
             <a:r>
@@ -21806,7 +22034,7 @@
           <a:bodyPr wrap="square" lIns="0" tIns="0" rIns="0" bIns="0" rtlCol="0" anchor="ctr"/>
           <a:lstStyle/>
           <a:p>
-            <a:pPr marL="0" indent="0" algn="ctr">
+            <a:pPr algn="ctr" indent="0" marL="0">
               <a:buNone/>
             </a:pPr>
             <a:r>
@@ -21845,7 +22073,7 @@
           <a:bodyPr wrap="square" lIns="0" tIns="0" rIns="0" bIns="0" rtlCol="0" anchor="ctr"/>
           <a:lstStyle/>
           <a:p>
-            <a:pPr marL="0" indent="0">
+            <a:pPr indent="0" marL="0">
               <a:buNone/>
             </a:pPr>
             <a:r>
@@ -21906,7 +22134,7 @@
           <a:bodyPr wrap="square" lIns="0" tIns="0" rIns="0" bIns="0" rtlCol="0" anchor="ctr"/>
           <a:lstStyle/>
           <a:p>
-            <a:pPr marL="0" indent="0" algn="ctr">
+            <a:pPr algn="ctr" indent="0" marL="0">
               <a:buNone/>
             </a:pPr>
             <a:r>
@@ -21945,7 +22173,7 @@
           <a:bodyPr wrap="square" lIns="0" tIns="0" rIns="0" bIns="0" rtlCol="0" anchor="ctr"/>
           <a:lstStyle/>
           <a:p>
-            <a:pPr marL="0" indent="0">
+            <a:pPr indent="0" marL="0">
               <a:buNone/>
             </a:pPr>
             <a:r>
@@ -21984,7 +22212,7 @@
           <a:bodyPr wrap="square" lIns="0" tIns="0" rIns="0" bIns="0" rtlCol="0" anchor="ctr"/>
           <a:lstStyle/>
           <a:p>
-            <a:pPr marL="0" indent="0">
+            <a:pPr indent="0" marL="0">
               <a:buNone/>
             </a:pPr>
             <a:r>
@@ -22023,7 +22251,7 @@
           <a:bodyPr wrap="square" lIns="0" tIns="0" rIns="0" bIns="0" rtlCol="0" anchor="ctr"/>
           <a:lstStyle/>
           <a:p>
-            <a:pPr marL="0" indent="0" algn="r">
+            <a:pPr algn="r" indent="0" marL="0">
               <a:buNone/>
             </a:pPr>
             <a:r>
@@ -22342,319 +22570,4 @@
     </a:ext>
   </a:extLst>
 </a:theme>
-</file>
-
-<file path=ppt/theme/theme2.xml><?xml version="1.0" encoding="utf-8"?>
-<a:theme xmlns:a="http://schemas.openxmlformats.org/drawingml/2006/main" name="Office Theme">
-  <a:themeElements>
-    <a:clrScheme name="Office">
-      <a:dk1>
-        <a:sysClr val="windowText" lastClr="000000"/>
-      </a:dk1>
-      <a:lt1>
-        <a:sysClr val="window" lastClr="FFFFFF"/>
-      </a:lt1>
-      <a:dk2>
-        <a:srgbClr val="0E2841"/>
-      </a:dk2>
-      <a:lt2>
-        <a:srgbClr val="E8E8E8"/>
-      </a:lt2>
-      <a:accent1>
-        <a:srgbClr val="156082"/>
-      </a:accent1>
-      <a:accent2>
-        <a:srgbClr val="E97132"/>
-      </a:accent2>
-      <a:accent3>
-        <a:srgbClr val="196B24"/>
-      </a:accent3>
-      <a:accent4>
-        <a:srgbClr val="0F9ED5"/>
-      </a:accent4>
-      <a:accent5>
-        <a:srgbClr val="A02B93"/>
-      </a:accent5>
-      <a:accent6>
-        <a:srgbClr val="4EA72E"/>
-      </a:accent6>
-      <a:hlink>
-        <a:srgbClr val="467886"/>
-      </a:hlink>
-      <a:folHlink>
-        <a:srgbClr val="96607D"/>
-      </a:folHlink>
-    </a:clrScheme>
-    <a:fontScheme name="Office">
-      <a:majorFont>
-        <a:latin typeface="Aptos Display" panose="02110004020202020204"/>
-        <a:ea typeface=""/>
-        <a:cs typeface=""/>
-        <a:font script="Jpan" typeface="游ゴシック Light"/>
-        <a:font script="Hang" typeface="맑은 고딕"/>
-        <a:font script="Hans" typeface="等线 Light"/>
-        <a:font script="Hant" typeface="新細明體"/>
-        <a:font script="Arab" typeface="Times New Roman"/>
-        <a:font script="Hebr" typeface="Times New Roman"/>
-        <a:font script="Thai" typeface="Angsana New"/>
-        <a:font script="Ethi" typeface="Nyala"/>
-        <a:font script="Beng" typeface="Vrinda"/>
-        <a:font script="Gujr" typeface="Shruti"/>
-        <a:font script="Khmr" typeface="MoolBoran"/>
-        <a:font script="Knda" typeface="Tunga"/>
-        <a:font script="Guru" typeface="Raavi"/>
-        <a:font script="Cans" typeface="Euphemia"/>
-        <a:font script="Cher" typeface="Plantagenet Cherokee"/>
-        <a:font script="Yiii" typeface="Microsoft Yi Baiti"/>
-        <a:font script="Tibt" typeface="Microsoft Himalaya"/>
-        <a:font script="Thaa" typeface="MV Boli"/>
-        <a:font script="Deva" typeface="Mangal"/>
-        <a:font script="Telu" typeface="Gautami"/>
-        <a:font script="Taml" typeface="Latha"/>
-        <a:font script="Syrc" typeface="Estrangelo Edessa"/>
-        <a:font script="Orya" typeface="Kalinga"/>
-        <a:font script="Mlym" typeface="Kartika"/>
-        <a:font script="Laoo" typeface="DokChampa"/>
-        <a:font script="Sinh" typeface="Iskoola Pota"/>
-        <a:font script="Mong" typeface="Mongolian Baiti"/>
-        <a:font script="Viet" typeface="Times New Roman"/>
-        <a:font script="Uigh" typeface="Microsoft Uighur"/>
-        <a:font script="Geor" typeface="Sylfaen"/>
-        <a:font script="Armn" typeface="Arial"/>
-        <a:font script="Bugi" typeface="Leelawadee UI"/>
-        <a:font script="Bopo" typeface="Microsoft JhengHei"/>
-        <a:font script="Java" typeface="Javanese Text"/>
-        <a:font script="Lisu" typeface="Segoe UI"/>
-        <a:font script="Mymr" typeface="Myanmar Text"/>
-        <a:font script="Nkoo" typeface="Ebrima"/>
-        <a:font script="Olck" typeface="Nirmala UI"/>
-        <a:font script="Osma" typeface="Ebrima"/>
-        <a:font script="Phag" typeface="Phagspa"/>
-        <a:font script="Syrn" typeface="Estrangelo Edessa"/>
-        <a:font script="Syrj" typeface="Estrangelo Edessa"/>
-        <a:font script="Syre" typeface="Estrangelo Edessa"/>
-        <a:font script="Sora" typeface="Nirmala UI"/>
-        <a:font script="Tale" typeface="Microsoft Tai Le"/>
-        <a:font script="Talu" typeface="Microsoft New Tai Lue"/>
-        <a:font script="Tfng" typeface="Ebrima"/>
-      </a:majorFont>
-      <a:minorFont>
-        <a:latin typeface="Aptos" panose="02110004020202020204"/>
-        <a:ea typeface=""/>
-        <a:cs typeface=""/>
-        <a:font script="Jpan" typeface="游ゴシック"/>
-        <a:font script="Hang" typeface="맑은 고딕"/>
-        <a:font script="Hans" typeface="等线"/>
-        <a:font script="Hant" typeface="新細明體"/>
-        <a:font script="Arab" typeface="Arial"/>
-        <a:font script="Hebr" typeface="Arial"/>
-        <a:font script="Thai" typeface="Cordia New"/>
-        <a:font script="Ethi" typeface="Nyala"/>
-        <a:font script="Beng" typeface="Vrinda"/>
-        <a:font script="Gujr" typeface="Shruti"/>
-        <a:font script="Khmr" typeface="DaunPenh"/>
-        <a:font script="Knda" typeface="Tunga"/>
-        <a:font script="Guru" typeface="Raavi"/>
-        <a:font script="Cans" typeface="Euphemia"/>
-        <a:font script="Cher" typeface="Plantagenet Cherokee"/>
-        <a:font script="Yiii" typeface="Microsoft Yi Baiti"/>
-        <a:font script="Tibt" typeface="Microsoft Himalaya"/>
-        <a:font script="Thaa" typeface="MV Boli"/>
-        <a:font script="Deva" typeface="Mangal"/>
-        <a:font script="Telu" typeface="Gautami"/>
-        <a:font script="Taml" typeface="Latha"/>
-        <a:font script="Syrc" typeface="Estrangelo Edessa"/>
-        <a:font script="Orya" typeface="Kalinga"/>
-        <a:font script="Mlym" typeface="Kartika"/>
-        <a:font script="Laoo" typeface="DokChampa"/>
-        <a:font script="Sinh" typeface="Iskoola Pota"/>
-        <a:font script="Mong" typeface="Mongolian Baiti"/>
-        <a:font script="Viet" typeface="Arial"/>
-        <a:font script="Uigh" typeface="Microsoft Uighur"/>
-        <a:font script="Geor" typeface="Sylfaen"/>
-        <a:font script="Armn" typeface="Arial"/>
-        <a:font script="Bugi" typeface="Leelawadee UI"/>
-        <a:font script="Bopo" typeface="Microsoft JhengHei"/>
-        <a:font script="Java" typeface="Javanese Text"/>
-        <a:font script="Lisu" typeface="Segoe UI"/>
-        <a:font script="Mymr" typeface="Myanmar Text"/>
-        <a:font script="Nkoo" typeface="Ebrima"/>
-        <a:font script="Olck" typeface="Nirmala UI"/>
-        <a:font script="Osma" typeface="Ebrima"/>
-        <a:font script="Phag" typeface="Phagspa"/>
-        <a:font script="Syrn" typeface="Estrangelo Edessa"/>
-        <a:font script="Syrj" typeface="Estrangelo Edessa"/>
-        <a:font script="Syre" typeface="Estrangelo Edessa"/>
-        <a:font script="Sora" typeface="Nirmala UI"/>
-        <a:font script="Tale" typeface="Microsoft Tai Le"/>
-        <a:font script="Talu" typeface="Microsoft New Tai Lue"/>
-        <a:font script="Tfng" typeface="Ebrima"/>
-      </a:minorFont>
-    </a:fontScheme>
-    <a:fmtScheme name="Office">
-      <a:fillStyleLst>
-        <a:solidFill>
-          <a:schemeClr val="phClr"/>
-        </a:solidFill>
-        <a:gradFill rotWithShape="1">
-          <a:gsLst>
-            <a:gs pos="0">
-              <a:schemeClr val="phClr">
-                <a:lumMod val="110000"/>
-                <a:satMod val="105000"/>
-                <a:tint val="67000"/>
-              </a:schemeClr>
-            </a:gs>
-            <a:gs pos="50000">
-              <a:schemeClr val="phClr">
-                <a:lumMod val="105000"/>
-                <a:satMod val="103000"/>
-                <a:tint val="73000"/>
-              </a:schemeClr>
-            </a:gs>
-            <a:gs pos="100000">
-              <a:schemeClr val="phClr">
-                <a:lumMod val="105000"/>
-                <a:satMod val="109000"/>
-                <a:tint val="81000"/>
-              </a:schemeClr>
-            </a:gs>
-          </a:gsLst>
-          <a:lin ang="5400000" scaled="0"/>
-        </a:gradFill>
-        <a:gradFill rotWithShape="1">
-          <a:gsLst>
-            <a:gs pos="0">
-              <a:schemeClr val="phClr">
-                <a:satMod val="103000"/>
-                <a:lumMod val="102000"/>
-                <a:tint val="94000"/>
-              </a:schemeClr>
-            </a:gs>
-            <a:gs pos="50000">
-              <a:schemeClr val="phClr">
-                <a:satMod val="110000"/>
-                <a:lumMod val="100000"/>
-                <a:shade val="100000"/>
-              </a:schemeClr>
-            </a:gs>
-            <a:gs pos="100000">
-              <a:schemeClr val="phClr">
-                <a:lumMod val="99000"/>
-                <a:satMod val="120000"/>
-                <a:shade val="78000"/>
-              </a:schemeClr>
-            </a:gs>
-          </a:gsLst>
-          <a:lin ang="5400000" scaled="0"/>
-        </a:gradFill>
-      </a:fillStyleLst>
-      <a:lnStyleLst>
-        <a:ln w="12700" cap="flat" cmpd="sng" algn="ctr">
-          <a:solidFill>
-            <a:schemeClr val="phClr"/>
-          </a:solidFill>
-          <a:prstDash val="solid"/>
-          <a:miter lim="800000"/>
-        </a:ln>
-        <a:ln w="19050" cap="flat" cmpd="sng" algn="ctr">
-          <a:solidFill>
-            <a:schemeClr val="phClr"/>
-          </a:solidFill>
-          <a:prstDash val="solid"/>
-          <a:miter lim="800000"/>
-        </a:ln>
-        <a:ln w="25400" cap="flat" cmpd="sng" algn="ctr">
-          <a:solidFill>
-            <a:schemeClr val="phClr"/>
-          </a:solidFill>
-          <a:prstDash val="solid"/>
-          <a:miter lim="800000"/>
-        </a:ln>
-      </a:lnStyleLst>
-      <a:effectStyleLst>
-        <a:effectStyle>
-          <a:effectLst/>
-        </a:effectStyle>
-        <a:effectStyle>
-          <a:effectLst/>
-        </a:effectStyle>
-        <a:effectStyle>
-          <a:effectLst>
-            <a:outerShdw blurRad="57150" dist="19050" dir="5400000" algn="ctr" rotWithShape="0">
-              <a:srgbClr val="000000">
-                <a:alpha val="63000"/>
-              </a:srgbClr>
-            </a:outerShdw>
-          </a:effectLst>
-        </a:effectStyle>
-      </a:effectStyleLst>
-      <a:bgFillStyleLst>
-        <a:solidFill>
-          <a:schemeClr val="phClr"/>
-        </a:solidFill>
-        <a:solidFill>
-          <a:schemeClr val="phClr">
-            <a:tint val="95000"/>
-            <a:satMod val="170000"/>
-          </a:schemeClr>
-        </a:solidFill>
-        <a:gradFill rotWithShape="1">
-          <a:gsLst>
-            <a:gs pos="0">
-              <a:schemeClr val="phClr">
-                <a:tint val="93000"/>
-                <a:satMod val="150000"/>
-                <a:shade val="98000"/>
-                <a:lumMod val="102000"/>
-              </a:schemeClr>
-            </a:gs>
-            <a:gs pos="50000">
-              <a:schemeClr val="phClr">
-                <a:tint val="98000"/>
-                <a:satMod val="130000"/>
-                <a:shade val="90000"/>
-                <a:lumMod val="103000"/>
-              </a:schemeClr>
-            </a:gs>
-            <a:gs pos="100000">
-              <a:schemeClr val="phClr">
-                <a:shade val="63000"/>
-                <a:satMod val="120000"/>
-              </a:schemeClr>
-            </a:gs>
-          </a:gsLst>
-          <a:lin ang="5400000" scaled="0"/>
-        </a:gradFill>
-      </a:bgFillStyleLst>
-    </a:fmtScheme>
-  </a:themeElements>
-  <a:objectDefaults>
-    <a:lnDef>
-      <a:spPr/>
-      <a:bodyPr/>
-      <a:lstStyle/>
-      <a:style>
-        <a:lnRef idx="2">
-          <a:schemeClr val="accent1"/>
-        </a:lnRef>
-        <a:fillRef idx="0">
-          <a:schemeClr val="accent1"/>
-        </a:fillRef>
-        <a:effectRef idx="1">
-          <a:schemeClr val="accent1"/>
-        </a:effectRef>
-        <a:fontRef idx="minor">
-          <a:schemeClr val="tx1"/>
-        </a:fontRef>
-      </a:style>
-    </a:lnDef>
-  </a:objectDefaults>
-  <a:extraClrSchemeLst/>
-  <a:extLst>
-    <a:ext uri="{05A4C25C-085E-4340-85A3-A5531E510DB2}">
-      <thm15:themeFamily xmlns:thm15="http://schemas.microsoft.com/office/thememl/2012/main" name="Office Theme" id="{2E142A2C-CD16-42D6-873A-C26D2A0506FA}" vid="{1BDDFF52-6CD6-40A5-AB3C-68EB2F1E4D0A}"/>
-    </a:ext>
-  </a:extLst>
-</a:theme>
 </file>
--- a/sales-deck/PM-Control-Tower-Sales-Deck.pptx
+++ b/sales-deck/PM-Control-Tower-Sales-Deck.pptx
@@ -4,6 +4,9 @@
   <p:sldMasterIdLst>
     <p:sldMasterId id="2147483648" r:id="rId1"/>
   </p:sldMasterIdLst>
+  <p:notesMasterIdLst>
+    <p:notesMasterId r:id="rId20"/>
+  </p:notesMasterIdLst>
   <p:sldIdLst>
     <p:sldId id="256" r:id="rId2"/>
     <p:sldId id="257" r:id="rId3"/>
@@ -24,9 +27,6 @@
     <p:sldId id="272" r:id="rId18"/>
     <p:sldId id="273" r:id="rId19"/>
   </p:sldIdLst>
-  <p:notesMasterIdLst>
-    <p:notesMasterId r:id="rId20"/>
-  </p:notesMasterIdLst>
   <p:sldSz cx="12192000" cy="6858000"/>
   <p:notesSz cx="6858000" cy="12192000"/>
   <p:defaultTextStyle>
@@ -121,13 +121,20 @@
       </a:defRPr>
     </a:lvl9pPr>
   </p:defaultTextStyle>
+  <p:extLst>
+    <p:ext uri="{EFAFB233-063F-42B5-8137-9DF3F51BA10A}">
+      <p15:sldGuideLst xmlns:p15="http://schemas.microsoft.com/office/powerpoint/2012/main"/>
+    </p:ext>
+  </p:extLst>
 </p:presentation>
 </file>
 
 <file path=ppt/charts/chart1.xml><?xml version="1.0" encoding="utf-8"?>
-<c:chartSpace xmlns:c="http://schemas.openxmlformats.org/drawingml/2006/chart" xmlns:a="http://schemas.openxmlformats.org/drawingml/2006/main" xmlns:r="http://schemas.openxmlformats.org/officeDocument/2006/relationships">
+<c:chartSpace xmlns:c="http://schemas.openxmlformats.org/drawingml/2006/chart" xmlns:a="http://schemas.openxmlformats.org/drawingml/2006/main" xmlns:r="http://schemas.openxmlformats.org/officeDocument/2006/relationships" xmlns:c16r2="http://schemas.microsoft.com/office/drawing/2015/06/chart">
   <c:date1904 val="0"/>
+  <c:lang val="en-US"/>
   <c:roundedCorners val="1"/>
+  <c:style val="2"/>
   <c:chart>
     <c:autoTitleDeleted val="1"/>
     <c:plotArea>
@@ -159,18 +166,26 @@
           <c:invertIfNegative val="0"/>
           <c:dLbls>
             <c:numFmt formatCode="0.00" sourceLinked="0"/>
+            <c:spPr>
+              <a:noFill/>
+              <a:ln>
+                <a:noFill/>
+              </a:ln>
+              <a:effectLst/>
+            </c:spPr>
             <c:txPr>
               <a:bodyPr/>
               <a:lstStyle/>
               <a:p>
                 <a:pPr>
-                  <a:defRPr b="0" i="0" strike="noStrike" sz="1000" u="none">
+                  <a:defRPr sz="1000" b="0" i="0" u="none" strike="noStrike">
                     <a:solidFill>
                       <a:srgbClr val="0E2240"/>
                     </a:solidFill>
                     <a:latin typeface="Arial"/>
                   </a:defRPr>
                 </a:pPr>
+                <a:endParaRPr lang="en-US"/>
               </a:p>
             </c:txPr>
             <c:showLegendKey val="0"/>
@@ -180,28 +195,31 @@
             <c:showPercent val="0"/>
             <c:showBubbleSize val="0"/>
             <c:showLeaderLines val="0"/>
+            <c:extLst>
+              <c:ext xmlns:c15="http://schemas.microsoft.com/office/drawing/2012/chart" uri="{CE6537A1-D6FC-4f65-9D91-7224C49458BB}">
+                <c15:showLeaderLines val="0"/>
+              </c:ext>
+            </c:extLst>
           </c:dLbls>
           <c:cat>
-            <c:multiLvlStrRef>
+            <c:strRef>
               <c:f>Sheet1!$A$2:$A$5</c:f>
-              <c:multiLvlStrCache>
+              <c:strCache>
                 <c:ptCount val="4"/>
-                <c:lvl>
-                  <c:pt idx="0">
-                    <c:v>ERP-001</c:v>
-                  </c:pt>
-                  <c:pt idx="1">
-                    <c:v>DATA-002</c:v>
-                  </c:pt>
-                  <c:pt idx="2">
-                    <c:v>PORT-003</c:v>
-                  </c:pt>
-                  <c:pt idx="3">
-                    <c:v>MOB-004</c:v>
-                  </c:pt>
-                </c:lvl>
-              </c:multiLvlStrCache>
-            </c:multiLvlStrRef>
+                <c:pt idx="0">
+                  <c:v>ERP-001</c:v>
+                </c:pt>
+                <c:pt idx="1">
+                  <c:v>DATA-002</c:v>
+                </c:pt>
+                <c:pt idx="2">
+                  <c:v>PORT-003</c:v>
+                </c:pt>
+                <c:pt idx="3">
+                  <c:v>MOB-004</c:v>
+                </c:pt>
+              </c:strCache>
+            </c:strRef>
           </c:cat>
           <c:val>
             <c:numRef>
@@ -224,6 +242,11 @@
               </c:numCache>
             </c:numRef>
           </c:val>
+          <c:extLst>
+            <c:ext xmlns:c16="http://schemas.microsoft.com/office/drawing/2014/chart" uri="{C3380CC4-5D6E-409C-BE32-E72D297353CC}">
+              <c16:uniqueId val="{00000000-E7F9-4781-A6E6-AC008330034E}"/>
+            </c:ext>
+          </c:extLst>
         </c:ser>
         <c:ser>
           <c:idx val="1"/>
@@ -248,18 +271,26 @@
           <c:invertIfNegative val="0"/>
           <c:dLbls>
             <c:numFmt formatCode="0.00" sourceLinked="0"/>
+            <c:spPr>
+              <a:noFill/>
+              <a:ln>
+                <a:noFill/>
+              </a:ln>
+              <a:effectLst/>
+            </c:spPr>
             <c:txPr>
               <a:bodyPr/>
               <a:lstStyle/>
               <a:p>
                 <a:pPr>
-                  <a:defRPr b="0" i="0" strike="noStrike" sz="1000" u="none">
+                  <a:defRPr sz="1000" b="0" i="0" u="none" strike="noStrike">
                     <a:solidFill>
                       <a:srgbClr val="0E2240"/>
                     </a:solidFill>
                     <a:latin typeface="Arial"/>
                   </a:defRPr>
                 </a:pPr>
+                <a:endParaRPr lang="en-US"/>
               </a:p>
             </c:txPr>
             <c:showLegendKey val="0"/>
@@ -269,28 +300,31 @@
             <c:showPercent val="0"/>
             <c:showBubbleSize val="0"/>
             <c:showLeaderLines val="0"/>
+            <c:extLst>
+              <c:ext xmlns:c15="http://schemas.microsoft.com/office/drawing/2012/chart" uri="{CE6537A1-D6FC-4f65-9D91-7224C49458BB}">
+                <c15:showLeaderLines val="0"/>
+              </c:ext>
+            </c:extLst>
           </c:dLbls>
           <c:cat>
-            <c:multiLvlStrRef>
+            <c:strRef>
               <c:f>Sheet1!$A$2:$A$5</c:f>
-              <c:multiLvlStrCache>
+              <c:strCache>
                 <c:ptCount val="4"/>
-                <c:lvl>
-                  <c:pt idx="0">
-                    <c:v>ERP-001</c:v>
-                  </c:pt>
-                  <c:pt idx="1">
-                    <c:v>DATA-002</c:v>
-                  </c:pt>
-                  <c:pt idx="2">
-                    <c:v>PORT-003</c:v>
-                  </c:pt>
-                  <c:pt idx="3">
-                    <c:v>MOB-004</c:v>
-                  </c:pt>
-                </c:lvl>
-              </c:multiLvlStrCache>
-            </c:multiLvlStrRef>
+                <c:pt idx="0">
+                  <c:v>ERP-001</c:v>
+                </c:pt>
+                <c:pt idx="1">
+                  <c:v>DATA-002</c:v>
+                </c:pt>
+                <c:pt idx="2">
+                  <c:v>PORT-003</c:v>
+                </c:pt>
+                <c:pt idx="3">
+                  <c:v>MOB-004</c:v>
+                </c:pt>
+              </c:strCache>
+            </c:strRef>
           </c:cat>
           <c:val>
             <c:numRef>
@@ -313,36 +347,23 @@
               </c:numCache>
             </c:numRef>
           </c:val>
+          <c:extLst>
+            <c:ext xmlns:c16="http://schemas.microsoft.com/office/drawing/2014/chart" uri="{C3380CC4-5D6E-409C-BE32-E72D297353CC}">
+              <c16:uniqueId val="{00000001-E7F9-4781-A6E6-AC008330034E}"/>
+            </c:ext>
+          </c:extLst>
         </c:ser>
         <c:dLbls>
-          <c:numFmt formatCode="0.00" sourceLinked="0"/>
-          <c:txPr>
-            <a:bodyPr/>
-            <a:lstStyle/>
-            <a:p>
-              <a:pPr>
-                <a:defRPr b="0" i="0" strike="noStrike" sz="1000" u="none">
-                  <a:solidFill>
-                    <a:srgbClr val="0E2240"/>
-                  </a:solidFill>
-                  <a:latin typeface="Arial"/>
-                </a:defRPr>
-              </a:pPr>
-            </a:p>
-          </c:txPr>
           <c:showLegendKey val="0"/>
           <c:showVal val="1"/>
           <c:showCatName val="0"/>
           <c:showSerName val="0"/>
           <c:showPercent val="0"/>
           <c:showBubbleSize val="0"/>
-          <c:showLeaderLines val="0"/>
         </c:dLbls>
         <c:gapWidth val="60"/>
-        <c:overlap val="0"/>
         <c:axId val="2094734554"/>
         <c:axId val="2094734552"/>
-        <c:axId val="2094734556"/>
       </c:barChart>
       <c:catAx>
         <c:axId val="2094734554"/>
@@ -383,6 +404,7 @@
         <c:crosses val="autoZero"/>
         <c:auto val="1"/>
         <c:lblAlgn val="ctr"/>
+        <c:lblOffset val="100"/>
         <c:noMultiLvlLbl val="1"/>
       </c:catAx>
       <c:valAx>
@@ -465,6 +487,7 @@
     </c:legend>
     <c:plotVisOnly val="1"/>
     <c:dispBlanksAs val="span"/>
+    <c:showDLblsOverMax val="1"/>
   </c:chart>
   <c:spPr>
     <a:solidFill>
@@ -482,9 +505,11 @@
 </file>
 
 <file path=ppt/charts/chart2.xml><?xml version="1.0" encoding="utf-8"?>
-<c:chartSpace xmlns:c="http://schemas.openxmlformats.org/drawingml/2006/chart" xmlns:a="http://schemas.openxmlformats.org/drawingml/2006/main" xmlns:r="http://schemas.openxmlformats.org/officeDocument/2006/relationships">
+<c:chartSpace xmlns:c="http://schemas.openxmlformats.org/drawingml/2006/chart" xmlns:a="http://schemas.openxmlformats.org/drawingml/2006/main" xmlns:r="http://schemas.openxmlformats.org/officeDocument/2006/relationships" xmlns:c16r2="http://schemas.microsoft.com/office/drawing/2015/06/chart">
   <c:date1904 val="0"/>
+  <c:lang val="en-US"/>
   <c:roundedCorners val="1"/>
+  <c:style val="2"/>
   <c:chart>
     <c:autoTitleDeleted val="1"/>
     <c:plotArea>
@@ -514,40 +539,15 @@
             <a:effectLst/>
           </c:spPr>
           <c:invertIfNegative val="0"/>
-          <c:dLbls>
-            <c:numFmt formatCode="#,##0" sourceLinked="0"/>
-            <c:txPr>
-              <a:bodyPr/>
-              <a:lstStyle/>
-              <a:p>
-                <a:pPr>
-                  <a:defRPr b="0" i="0" strike="noStrike" sz="1200" u="none">
-                    <a:solidFill>
-                      <a:srgbClr val="0E2240"/>
-                    </a:solidFill>
-                    <a:latin typeface="Arial"/>
-                  </a:defRPr>
-                </a:pPr>
-              </a:p>
-            </c:txPr>
-            <c:showLegendKey val="0"/>
-            <c:showVal val="1"/>
-            <c:showCatName val="0"/>
-            <c:showSerName val="0"/>
-            <c:showPercent val="0"/>
-            <c:showBubbleSize val="0"/>
-            <c:showLeaderLines val="0"/>
-          </c:dLbls>
           <c:dPt>
             <c:idx val="0"/>
             <c:invertIfNegative val="0"/>
             <c:bubble3D val="0"/>
-            <c:spPr>
-              <a:solidFill>
-                <a:srgbClr val="DC2626"/>
-              </a:solidFill>
-              <a:effectLst/>
-            </c:spPr>
+            <c:extLst>
+              <c:ext xmlns:c16="http://schemas.microsoft.com/office/drawing/2014/chart" uri="{C3380CC4-5D6E-409C-BE32-E72D297353CC}">
+                <c16:uniqueId val="{00000001-9206-4604-A334-8B68603B05BF}"/>
+              </c:ext>
+            </c:extLst>
           </c:dPt>
           <c:dPt>
             <c:idx val="1"/>
@@ -559,22 +559,62 @@
               </a:solidFill>
               <a:effectLst/>
             </c:spPr>
+            <c:extLst>
+              <c:ext xmlns:c16="http://schemas.microsoft.com/office/drawing/2014/chart" uri="{C3380CC4-5D6E-409C-BE32-E72D297353CC}">
+                <c16:uniqueId val="{00000003-9206-4604-A334-8B68603B05BF}"/>
+              </c:ext>
+            </c:extLst>
           </c:dPt>
+          <c:dLbls>
+            <c:numFmt formatCode="#,##0" sourceLinked="0"/>
+            <c:spPr>
+              <a:noFill/>
+              <a:ln>
+                <a:noFill/>
+              </a:ln>
+              <a:effectLst/>
+            </c:spPr>
+            <c:txPr>
+              <a:bodyPr/>
+              <a:lstStyle/>
+              <a:p>
+                <a:pPr>
+                  <a:defRPr sz="1200" b="0" i="0" u="none" strike="noStrike">
+                    <a:solidFill>
+                      <a:srgbClr val="0E2240"/>
+                    </a:solidFill>
+                    <a:latin typeface="Arial"/>
+                  </a:defRPr>
+                </a:pPr>
+                <a:endParaRPr lang="en-US"/>
+              </a:p>
+            </c:txPr>
+            <c:showLegendKey val="0"/>
+            <c:showVal val="1"/>
+            <c:showCatName val="0"/>
+            <c:showSerName val="0"/>
+            <c:showPercent val="0"/>
+            <c:showBubbleSize val="0"/>
+            <c:showLeaderLines val="0"/>
+            <c:extLst>
+              <c:ext xmlns:c15="http://schemas.microsoft.com/office/drawing/2012/chart" uri="{CE6537A1-D6FC-4f65-9D91-7224C49458BB}">
+                <c15:showLeaderLines val="0"/>
+              </c:ext>
+            </c:extLst>
+          </c:dLbls>
           <c:cat>
-            <c:multiLvlStrRef>
+            <c:strRef>
               <c:f>Sheet1!$A$2:$A$3</c:f>
-              <c:multiLvlStrCache>
+              <c:strCache>
                 <c:ptCount val="2"/>
-                <c:lvl>
-                  <c:pt idx="0">
-                    <c:v>Spreadsheets &amp; decks</c:v>
-                  </c:pt>
-                  <c:pt idx="1">
-                    <c:v>With PM Control Tower</c:v>
-                  </c:pt>
-                </c:lvl>
-              </c:multiLvlStrCache>
-            </c:multiLvlStrRef>
+                <c:pt idx="0">
+                  <c:v>Spreadsheets &amp; decks</c:v>
+                </c:pt>
+                <c:pt idx="1">
+                  <c:v>With PM Control Tower</c:v>
+                </c:pt>
+              </c:strCache>
+            </c:strRef>
           </c:cat>
           <c:val>
             <c:numRef>
@@ -591,36 +631,23 @@
               </c:numCache>
             </c:numRef>
           </c:val>
+          <c:extLst>
+            <c:ext xmlns:c16="http://schemas.microsoft.com/office/drawing/2014/chart" uri="{C3380CC4-5D6E-409C-BE32-E72D297353CC}">
+              <c16:uniqueId val="{00000004-9206-4604-A334-8B68603B05BF}"/>
+            </c:ext>
+          </c:extLst>
         </c:ser>
         <c:dLbls>
-          <c:numFmt formatCode="#,##0" sourceLinked="0"/>
-          <c:txPr>
-            <a:bodyPr/>
-            <a:lstStyle/>
-            <a:p>
-              <a:pPr>
-                <a:defRPr b="0" i="0" strike="noStrike" sz="1200" u="none">
-                  <a:solidFill>
-                    <a:srgbClr val="0E2240"/>
-                  </a:solidFill>
-                  <a:latin typeface="Arial"/>
-                </a:defRPr>
-              </a:pPr>
-            </a:p>
-          </c:txPr>
           <c:showLegendKey val="0"/>
           <c:showVal val="1"/>
           <c:showCatName val="0"/>
           <c:showSerName val="0"/>
           <c:showPercent val="0"/>
           <c:showBubbleSize val="0"/>
-          <c:showLeaderLines val="0"/>
         </c:dLbls>
         <c:gapWidth val="45"/>
-        <c:overlap val="0"/>
         <c:axId val="2094734554"/>
         <c:axId val="2094734552"/>
-        <c:axId val="2094734556"/>
       </c:barChart>
       <c:catAx>
         <c:axId val="2094734554"/>
@@ -661,6 +688,7 @@
         <c:crosses val="autoZero"/>
         <c:auto val="1"/>
         <c:lblAlgn val="ctr"/>
+        <c:lblOffset val="100"/>
         <c:noMultiLvlLbl val="1"/>
       </c:catAx>
       <c:valAx>
@@ -674,30 +702,6 @@
         <c:majorTickMark val="out"/>
         <c:minorTickMark val="none"/>
         <c:tickLblPos val="low"/>
-        <c:spPr>
-          <a:ln w="12700" cap="flat">
-            <a:solidFill>
-              <a:srgbClr val="888888"/>
-            </a:solidFill>
-            <a:prstDash val="solid"/>
-            <a:round/>
-          </a:ln>
-        </c:spPr>
-        <c:txPr>
-          <a:bodyPr/>
-          <a:lstStyle/>
-          <a:p>
-            <a:pPr>
-              <a:defRPr sz="1000" b="0" i="0" u="none" strike="noStrike">
-                <a:solidFill>
-                  <a:srgbClr val="5D6E85"/>
-                </a:solidFill>
-                <a:latin typeface="Arial"/>
-              </a:defRPr>
-            </a:pPr>
-            <a:endParaRPr lang="en-US"/>
-          </a:p>
-        </c:txPr>
         <c:crossAx val="2094734554"/>
         <c:crosses val="autoZero"/>
         <c:crossBetween val="between"/>
@@ -712,6 +716,7 @@
     </c:plotArea>
     <c:plotVisOnly val="1"/>
     <c:dispBlanksAs val="span"/>
+    <c:showDLblsOverMax val="1"/>
   </c:chart>
   <c:spPr>
     <a:solidFill>
@@ -750,234 +755,10 @@
           <a:chExt cx="0" cy="0"/>
         </a:xfrm>
       </p:grpSpPr>
-      <p:sp>
-        <p:nvSpPr>
-          <p:cNvPr id="2" name="Header Placeholder 1"/>
-          <p:cNvSpPr>
-            <a:spLocks noGrp="1"/>
-          </p:cNvSpPr>
-          <p:nvPr>
-            <p:ph type="hdr" sz="quarter"/>
-          </p:nvPr>
-        </p:nvSpPr>
-        <p:spPr>
-          <a:xfrm>
-            <a:off x="0" y="0"/>
-            <a:ext cx="2971800" cy="458788"/>
-          </a:xfrm>
-          <a:prstGeom prst="rect">
-            <a:avLst/>
-          </a:prstGeom>
-        </p:spPr>
-        <p:txBody>
-          <a:bodyPr vert="horz" lIns="91440" tIns="45720" rIns="91440" bIns="45720" rtlCol="0"/>
-          <a:lstStyle>
-            <a:lvl1pPr algn="l">
-              <a:defRPr sz="1200"/>
-            </a:lvl1pPr>
-          </a:lstStyle>
-          <a:p>
-            <a:endParaRPr lang="en-US"/>
-          </a:p>
-        </p:txBody>
-      </p:sp>
-      <p:sp>
-        <p:nvSpPr>
-          <p:cNvPr id="3" name="Date Placeholder 2"/>
-          <p:cNvSpPr>
-            <a:spLocks noGrp="1"/>
-          </p:cNvSpPr>
-          <p:nvPr>
-            <p:ph type="dt" idx="1"/>
-          </p:nvPr>
-        </p:nvSpPr>
-        <p:spPr>
-          <a:xfrm>
-            <a:off x="3884613" y="0"/>
-            <a:ext cx="2971800" cy="458788"/>
-          </a:xfrm>
-          <a:prstGeom prst="rect">
-            <a:avLst/>
-          </a:prstGeom>
-        </p:spPr>
-        <p:txBody>
-          <a:bodyPr vert="horz" lIns="91440" tIns="45720" rIns="91440" bIns="45720" rtlCol="0"/>
-          <a:lstStyle>
-            <a:lvl1pPr algn="r">
-              <a:defRPr sz="1200"/>
-            </a:lvl1pPr>
-          </a:lstStyle>
-          <a:p>
-            <a:fld id="{5282F153-3F37-0F45-9E97-73ACFA13230C}" type="datetimeFigureOut">
-              <a:rPr lang="en-US"/>
-              <a:t>7/23/19</a:t>
-            </a:fld>
-            <a:endParaRPr lang="en-US"/>
-          </a:p>
-        </p:txBody>
-      </p:sp>
-      <p:sp>
-        <p:nvSpPr>
-          <p:cNvPr id="4" name="Slide Image Placeholder 3"/>
-          <p:cNvSpPr>
-            <a:spLocks noGrp="1" noRot="1" noChangeAspect="1"/>
-          </p:cNvSpPr>
-          <p:nvPr>
-            <p:ph type="sldImg" idx="2"/>
-          </p:nvPr>
-        </p:nvSpPr>
-        <p:spPr>
-          <a:xfrm>
-            <a:off x="685800" y="1143000"/>
-            <a:ext cx="5486400" cy="3086100"/>
-          </a:xfrm>
-          <a:prstGeom prst="rect">
-            <a:avLst/>
-          </a:prstGeom>
-          <a:noFill/>
-          <a:ln w="12700">
-            <a:solidFill>
-              <a:prstClr val="black"/>
-            </a:solidFill>
-          </a:ln>
-        </p:spPr>
-        <p:txBody>
-          <a:bodyPr vert="horz" lIns="91440" tIns="45720" rIns="91440" bIns="45720" rtlCol="0" anchor="ctr"/>
-          <a:lstStyle/>
-          <a:p>
-            <a:endParaRPr lang="en-US"/>
-          </a:p>
-        </p:txBody>
-      </p:sp>
-      <p:sp>
-        <p:nvSpPr>
-          <p:cNvPr id="5" name="Notes Placeholder 4"/>
-          <p:cNvSpPr>
-            <a:spLocks noGrp="1"/>
-          </p:cNvSpPr>
-          <p:nvPr>
-            <p:ph type="body" sz="quarter" idx="3"/>
-          </p:nvPr>
-        </p:nvSpPr>
-        <p:spPr>
-          <a:xfrm>
-            <a:off x="685800" y="4400550"/>
-            <a:ext cx="5486400" cy="3600450"/>
-          </a:xfrm>
-          <a:prstGeom prst="rect">
-            <a:avLst/>
-          </a:prstGeom>
-        </p:spPr>
-        <p:txBody>
-          <a:bodyPr vert="horz" lIns="91440" tIns="45720" rIns="91440" bIns="45720" rtlCol="0"/>
-          <a:lstStyle/>
-          <a:p>
-            <a:pPr lvl="0"/>
-            <a:r>
-              <a:rPr lang="en-US"/>
-              <a:t>Click to edit Master text styles</a:t>
-            </a:r>
-          </a:p>
-          <a:p>
-            <a:pPr lvl="1"/>
-            <a:r>
-              <a:rPr lang="en-US"/>
-              <a:t>Second level</a:t>
-            </a:r>
-          </a:p>
-          <a:p>
-            <a:pPr lvl="2"/>
-            <a:r>
-              <a:rPr lang="en-US"/>
-              <a:t>Third level</a:t>
-            </a:r>
-          </a:p>
-          <a:p>
-            <a:pPr lvl="3"/>
-            <a:r>
-              <a:rPr lang="en-US"/>
-              <a:t>Fourth level</a:t>
-            </a:r>
-          </a:p>
-          <a:p>
-            <a:pPr lvl="4"/>
-            <a:r>
-              <a:rPr lang="en-US"/>
-              <a:t>Fifth level</a:t>
-            </a:r>
-          </a:p>
-        </p:txBody>
-      </p:sp>
-      <p:sp>
-        <p:nvSpPr>
-          <p:cNvPr id="6" name="Footer Placeholder 5"/>
-          <p:cNvSpPr>
-            <a:spLocks noGrp="1"/>
-          </p:cNvSpPr>
-          <p:nvPr>
-            <p:ph type="ftr" sz="quarter" idx="4"/>
-          </p:nvPr>
-        </p:nvSpPr>
-        <p:spPr>
-          <a:xfrm>
-            <a:off x="0" y="8685213"/>
-            <a:ext cx="2971800" cy="458787"/>
-          </a:xfrm>
-          <a:prstGeom prst="rect">
-            <a:avLst/>
-          </a:prstGeom>
-        </p:spPr>
-        <p:txBody>
-          <a:bodyPr vert="horz" lIns="91440" tIns="45720" rIns="91440" bIns="45720" rtlCol="0" anchor="b"/>
-          <a:lstStyle>
-            <a:lvl1pPr algn="l">
-              <a:defRPr sz="1200"/>
-            </a:lvl1pPr>
-          </a:lstStyle>
-          <a:p>
-            <a:endParaRPr lang="en-US"/>
-          </a:p>
-        </p:txBody>
-      </p:sp>
-      <p:sp>
-        <p:nvSpPr>
-          <p:cNvPr id="7" name="Slide Number Placeholder 6"/>
-          <p:cNvSpPr>
-            <a:spLocks noGrp="1"/>
-          </p:cNvSpPr>
-          <p:nvPr>
-            <p:ph type="sldNum" sz="quarter" idx="5"/>
-          </p:nvPr>
-        </p:nvSpPr>
-        <p:spPr>
-          <a:xfrm>
-            <a:off x="3884613" y="8685213"/>
-            <a:ext cx="2971800" cy="458787"/>
-          </a:xfrm>
-          <a:prstGeom prst="rect">
-            <a:avLst/>
-          </a:prstGeom>
-        </p:spPr>
-        <p:txBody>
-          <a:bodyPr vert="horz" lIns="91440" tIns="45720" rIns="91440" bIns="45720" rtlCol="0" anchor="b"/>
-          <a:lstStyle>
-            <a:lvl1pPr algn="r">
-              <a:defRPr sz="1200"/>
-            </a:lvl1pPr>
-          </a:lstStyle>
-          <a:p>
-            <a:fld id="{CE5E9CC1-C706-0F49-92D6-E571CC5EEA8F}" type="slidenum">
-              <a:rPr lang="en-US"/>
-              <a:t>‹#›</a:t>
-            </a:fld>
-            <a:endParaRPr lang="en-US"/>
-          </a:p>
-        </p:txBody>
-      </p:sp>
     </p:spTree>
     <p:extLst>
       <p:ext uri="{BB962C8B-B14F-4D97-AF65-F5344CB8AC3E}">
-        <p14:creationId xmlns:p14="http://schemas.microsoft.com/office/powerpoint/2010/main" val="1024086991"/>
+        <p14:creationId xmlns:p14="http://schemas.microsoft.com/office/powerpoint/2010/main" val="1501215566"/>
       </p:ext>
     </p:extLst>
   </p:cSld>
@@ -1121,10 +902,6 @@
           <a:bodyPr/>
           <a:lstStyle/>
           <a:p>
-            <a:r>
-              <a:rPr lang="en-US" dirty="0"/>
-              <a:t/>
-            </a:r>
             <a:endParaRPr lang="en-US" dirty="0"/>
           </a:p>
         </p:txBody>
@@ -1209,10 +986,6 @@
           <a:bodyPr/>
           <a:lstStyle/>
           <a:p>
-            <a:r>
-              <a:rPr lang="en-US" dirty="0"/>
-              <a:t/>
-            </a:r>
             <a:endParaRPr lang="en-US" dirty="0"/>
           </a:p>
         </p:txBody>
@@ -1297,10 +1070,6 @@
           <a:bodyPr/>
           <a:lstStyle/>
           <a:p>
-            <a:r>
-              <a:rPr lang="en-US" dirty="0"/>
-              <a:t/>
-            </a:r>
             <a:endParaRPr lang="en-US" dirty="0"/>
           </a:p>
         </p:txBody>
@@ -1385,10 +1154,6 @@
           <a:bodyPr/>
           <a:lstStyle/>
           <a:p>
-            <a:r>
-              <a:rPr lang="en-US" dirty="0"/>
-              <a:t/>
-            </a:r>
             <a:endParaRPr lang="en-US" dirty="0"/>
           </a:p>
         </p:txBody>
@@ -1473,10 +1238,6 @@
           <a:bodyPr/>
           <a:lstStyle/>
           <a:p>
-            <a:r>
-              <a:rPr lang="en-US" dirty="0"/>
-              <a:t/>
-            </a:r>
             <a:endParaRPr lang="en-US" dirty="0"/>
           </a:p>
         </p:txBody>
@@ -1561,10 +1322,6 @@
           <a:bodyPr/>
           <a:lstStyle/>
           <a:p>
-            <a:r>
-              <a:rPr lang="en-US" dirty="0"/>
-              <a:t/>
-            </a:r>
             <a:endParaRPr lang="en-US" dirty="0"/>
           </a:p>
         </p:txBody>
@@ -1649,10 +1406,6 @@
           <a:bodyPr/>
           <a:lstStyle/>
           <a:p>
-            <a:r>
-              <a:rPr lang="en-US" dirty="0"/>
-              <a:t/>
-            </a:r>
             <a:endParaRPr lang="en-US" dirty="0"/>
           </a:p>
         </p:txBody>
@@ -1737,10 +1490,6 @@
           <a:bodyPr/>
           <a:lstStyle/>
           <a:p>
-            <a:r>
-              <a:rPr lang="en-US" dirty="0"/>
-              <a:t/>
-            </a:r>
             <a:endParaRPr lang="en-US" dirty="0"/>
           </a:p>
         </p:txBody>
@@ -1825,10 +1574,6 @@
           <a:bodyPr/>
           <a:lstStyle/>
           <a:p>
-            <a:r>
-              <a:rPr lang="en-US" dirty="0"/>
-              <a:t/>
-            </a:r>
             <a:endParaRPr lang="en-US" dirty="0"/>
           </a:p>
         </p:txBody>
@@ -1913,10 +1658,6 @@
           <a:bodyPr/>
           <a:lstStyle/>
           <a:p>
-            <a:r>
-              <a:rPr lang="en-US" dirty="0"/>
-              <a:t/>
-            </a:r>
             <a:endParaRPr lang="en-US" dirty="0"/>
           </a:p>
         </p:txBody>
@@ -2001,10 +1742,6 @@
           <a:bodyPr/>
           <a:lstStyle/>
           <a:p>
-            <a:r>
-              <a:rPr lang="en-US" dirty="0"/>
-              <a:t/>
-            </a:r>
             <a:endParaRPr lang="en-US" dirty="0"/>
           </a:p>
         </p:txBody>
@@ -2089,10 +1826,6 @@
           <a:bodyPr/>
           <a:lstStyle/>
           <a:p>
-            <a:r>
-              <a:rPr lang="en-US" dirty="0"/>
-              <a:t/>
-            </a:r>
             <a:endParaRPr lang="en-US" dirty="0"/>
           </a:p>
         </p:txBody>
@@ -2177,10 +1910,6 @@
           <a:bodyPr/>
           <a:lstStyle/>
           <a:p>
-            <a:r>
-              <a:rPr lang="en-US" dirty="0"/>
-              <a:t/>
-            </a:r>
             <a:endParaRPr lang="en-US" dirty="0"/>
           </a:p>
         </p:txBody>
@@ -2265,10 +1994,6 @@
           <a:bodyPr/>
           <a:lstStyle/>
           <a:p>
-            <a:r>
-              <a:rPr lang="en-US" dirty="0"/>
-              <a:t/>
-            </a:r>
             <a:endParaRPr lang="en-US" dirty="0"/>
           </a:p>
         </p:txBody>
@@ -2353,10 +2078,6 @@
           <a:bodyPr/>
           <a:lstStyle/>
           <a:p>
-            <a:r>
-              <a:rPr lang="en-US" dirty="0"/>
-              <a:t/>
-            </a:r>
             <a:endParaRPr lang="en-US" dirty="0"/>
           </a:p>
         </p:txBody>
@@ -2441,10 +2162,6 @@
           <a:bodyPr/>
           <a:lstStyle/>
           <a:p>
-            <a:r>
-              <a:rPr lang="en-US" dirty="0"/>
-              <a:t/>
-            </a:r>
             <a:endParaRPr lang="en-US" dirty="0"/>
           </a:p>
         </p:txBody>
@@ -2529,10 +2246,6 @@
           <a:bodyPr/>
           <a:lstStyle/>
           <a:p>
-            <a:r>
-              <a:rPr lang="en-US" dirty="0"/>
-              <a:t/>
-            </a:r>
             <a:endParaRPr lang="en-US" dirty="0"/>
           </a:p>
         </p:txBody>
@@ -2617,10 +2330,6 @@
           <a:bodyPr/>
           <a:lstStyle/>
           <a:p>
-            <a:r>
-              <a:rPr lang="en-US" dirty="0"/>
-              <a:t/>
-            </a:r>
             <a:endParaRPr lang="en-US" dirty="0"/>
           </a:p>
         </p:txBody>
@@ -2694,6 +2403,11 @@
 <file path=ppt/slideMasters/slideMaster1.xml><?xml version="1.0" encoding="utf-8"?>
 <p:sldMaster xmlns:a="http://schemas.openxmlformats.org/drawingml/2006/main" xmlns:r="http://schemas.openxmlformats.org/officeDocument/2006/relationships" xmlns:p="http://schemas.openxmlformats.org/presentationml/2006/main">
   <p:cSld>
+    <p:bg>
+      <p:bgRef idx="1001">
+        <a:schemeClr val="bg1"/>
+      </p:bgRef>
+    </p:bg>
     <p:spTree>
       <p:nvGrpSpPr>
         <p:cNvPr id="1" name=""/>
@@ -2976,6 +2690,7 @@
         <a:solidFill>
           <a:srgbClr val="0A1C33"/>
         </a:solidFill>
+        <a:effectLst/>
       </p:bgPr>
     </p:bg>
     <p:spTree>
@@ -3243,7 +2958,7 @@
           <a:bodyPr wrap="square" lIns="0" tIns="0" rIns="0" bIns="0" rtlCol="0" anchor="ctr"/>
           <a:lstStyle/>
           <a:p>
-            <a:pPr algn="ctr" indent="0" marL="0">
+            <a:pPr marL="0" indent="0" algn="ctr">
               <a:buNone/>
             </a:pPr>
             <a:r>
@@ -3282,11 +2997,11 @@
           <a:bodyPr wrap="square" lIns="0" tIns="0" rIns="0" bIns="0" rtlCol="0" anchor="ctr"/>
           <a:lstStyle/>
           <a:p>
-            <a:pPr indent="0" marL="0">
-              <a:buNone/>
-            </a:pPr>
-            <a:r>
-              <a:rPr lang="en-US" sz="1300" b="1" spc="300" kern="0" dirty="0">
+            <a:pPr marL="0" indent="0">
+              <a:buNone/>
+            </a:pPr>
+            <a:r>
+              <a:rPr lang="en-US" sz="1300" b="1" kern="0" spc="300" dirty="0">
                 <a:solidFill>
                   <a:srgbClr val="F59E0B"/>
                 </a:solidFill>
@@ -3321,7 +3036,7 @@
           <a:bodyPr wrap="square" lIns="0" tIns="0" rIns="0" bIns="0" rtlCol="0" anchor="ctr"/>
           <a:lstStyle/>
           <a:p>
-            <a:pPr indent="0" marL="0">
+            <a:pPr marL="0" indent="0">
               <a:lnSpc>
                 <a:spcPct val="98000"/>
               </a:lnSpc>
@@ -3341,7 +3056,7 @@
             <a:endParaRPr lang="en-US" sz="6600" dirty="0"/>
           </a:p>
           <a:p>
-            <a:pPr indent="0" marL="0">
+            <a:pPr marL="0" indent="0">
               <a:lnSpc>
                 <a:spcPct val="98000"/>
               </a:lnSpc>
@@ -3383,7 +3098,7 @@
           <a:bodyPr wrap="square" lIns="0" tIns="0" rIns="0" bIns="0" rtlCol="0" anchor="ctr"/>
           <a:lstStyle/>
           <a:p>
-            <a:pPr indent="0" marL="0">
+            <a:pPr marL="0" indent="0">
               <a:buNone/>
             </a:pPr>
             <a:r>
@@ -3397,9 +3112,6 @@
               </a:rPr>
               <a:t>One platform. Complete project intelligence. </a:t>
             </a:r>
-            <a:pPr indent="0" marL="0">
-              <a:buNone/>
-            </a:pPr>
             <a:r>
               <a:rPr lang="en-US" sz="2400" b="1" dirty="0">
                 <a:solidFill>
@@ -3436,7 +3148,7 @@
           <a:bodyPr wrap="square" lIns="0" tIns="0" rIns="0" bIns="0" rtlCol="0" anchor="ctr"/>
           <a:lstStyle/>
           <a:p>
-            <a:pPr indent="0" marL="0">
+            <a:pPr marL="0" indent="0">
               <a:buNone/>
             </a:pPr>
             <a:r>
@@ -3498,7 +3210,7 @@
           <a:bodyPr wrap="square" lIns="0" tIns="0" rIns="0" bIns="0" rtlCol="0" anchor="ctr"/>
           <a:lstStyle/>
           <a:p>
-            <a:pPr indent="0" marL="0">
+            <a:pPr marL="0" indent="0">
               <a:buNone/>
             </a:pPr>
             <a:r>
@@ -3510,7 +3222,7 @@
                 <a:ea typeface="Segoe UI" pitchFamily="34" charset="-122"/>
                 <a:cs typeface="Segoe UI" pitchFamily="34" charset="-120"/>
               </a:rPr>
-              <a:t>dynamiq Solutions  ·  Corporate Sales Presentation  ·  2026</a:t>
+              <a:t>  ·  Corporate Sales Presentation  ·  2026</a:t>
             </a:r>
             <a:endParaRPr lang="en-US" sz="1200" dirty="0"/>
           </a:p>
@@ -3532,6 +3244,7 @@
         <a:solidFill>
           <a:srgbClr val="FFFFFF"/>
         </a:solidFill>
+        <a:effectLst/>
       </p:bgPr>
     </p:bg>
     <p:spTree>
@@ -3569,11 +3282,11 @@
           <a:bodyPr wrap="square" lIns="0" tIns="0" rIns="0" bIns="0" rtlCol="0" anchor="ctr"/>
           <a:lstStyle/>
           <a:p>
-            <a:pPr indent="0" marL="0">
-              <a:buNone/>
-            </a:pPr>
-            <a:r>
-              <a:rPr lang="en-US" sz="1200" b="1" spc="300" kern="0" dirty="0">
+            <a:pPr marL="0" indent="0">
+              <a:buNone/>
+            </a:pPr>
+            <a:r>
+              <a:rPr lang="en-US" sz="1200" b="1" kern="0" spc="300" dirty="0">
                 <a:solidFill>
                   <a:srgbClr val="1D4ED8"/>
                 </a:solidFill>
@@ -3608,7 +3321,7 @@
           <a:bodyPr wrap="square" lIns="0" tIns="0" rIns="0" bIns="0" rtlCol="0" anchor="ctr"/>
           <a:lstStyle/>
           <a:p>
-            <a:pPr indent="0" marL="0">
+            <a:pPr marL="0" indent="0">
               <a:buNone/>
             </a:pPr>
             <a:r>
@@ -3652,7 +3365,7 @@
             <a:prstDash val="solid"/>
           </a:ln>
           <a:effectLst>
-            <a:outerShdw sx="100000" sy="100000" kx="0" ky="0" algn="bl" rotWithShape="0" blurRad="88900" dist="25400" dir="5400000">
+            <a:outerShdw blurRad="88900" dist="25400" dir="5400000" algn="bl" rotWithShape="0">
               <a:srgbClr val="0A1C33">
                 <a:alpha val="16000"/>
               </a:srgbClr>
@@ -3703,7 +3416,7 @@
           <a:bodyPr wrap="square" lIns="0" tIns="0" rIns="0" bIns="0" rtlCol="0" anchor="ctr"/>
           <a:lstStyle/>
           <a:p>
-            <a:pPr algn="ctr" indent="0" marL="0">
+            <a:pPr marL="0" indent="0" algn="ctr">
               <a:buNone/>
             </a:pPr>
             <a:r>
@@ -3853,7 +3566,7 @@
             <a:prstDash val="solid"/>
           </a:ln>
           <a:effectLst>
-            <a:outerShdw sx="100000" sy="100000" kx="0" ky="0" algn="bl" rotWithShape="0" blurRad="88900" dist="25400" dir="5400000">
+            <a:outerShdw blurRad="88900" dist="25400" dir="5400000" algn="bl" rotWithShape="0">
               <a:srgbClr val="0A1C33">
                 <a:alpha val="16000"/>
               </a:srgbClr>
@@ -3904,7 +3617,7 @@
           <a:bodyPr wrap="square" lIns="0" tIns="0" rIns="0" bIns="0" rtlCol="0" anchor="ctr"/>
           <a:lstStyle/>
           <a:p>
-            <a:pPr algn="ctr" indent="0" marL="0">
+            <a:pPr marL="0" indent="0" algn="ctr">
               <a:buNone/>
             </a:pPr>
             <a:r>
@@ -4054,7 +3767,7 @@
             <a:prstDash val="solid"/>
           </a:ln>
           <a:effectLst>
-            <a:outerShdw sx="100000" sy="100000" kx="0" ky="0" algn="bl" rotWithShape="0" blurRad="88900" dist="25400" dir="5400000">
+            <a:outerShdw blurRad="88900" dist="25400" dir="5400000" algn="bl" rotWithShape="0">
               <a:srgbClr val="0A1C33">
                 <a:alpha val="16000"/>
               </a:srgbClr>
@@ -4105,7 +3818,7 @@
           <a:bodyPr wrap="square" lIns="0" tIns="0" rIns="0" bIns="0" rtlCol="0" anchor="ctr"/>
           <a:lstStyle/>
           <a:p>
-            <a:pPr algn="ctr" indent="0" marL="0">
+            <a:pPr marL="0" indent="0" algn="ctr">
               <a:buNone/>
             </a:pPr>
             <a:r>
@@ -4250,7 +3963,7 @@
           <a:bodyPr wrap="square" lIns="0" tIns="0" rIns="0" bIns="0" rtlCol="0" anchor="ctr"/>
           <a:lstStyle/>
           <a:p>
-            <a:pPr indent="0" marL="0">
+            <a:pPr marL="0" indent="0">
               <a:buNone/>
             </a:pPr>
             <a:r>
@@ -4264,9 +3977,6 @@
               </a:rPr>
               <a:t>GREY honesty: </a:t>
             </a:r>
-            <a:pPr indent="0" marL="0">
-              <a:buNone/>
-            </a:pPr>
             <a:r>
               <a:rPr lang="en-US" sz="1300" dirty="0">
                 <a:solidFill>
@@ -4303,7 +4013,7 @@
           <a:bodyPr wrap="square" lIns="0" tIns="0" rIns="0" bIns="0" rtlCol="0" anchor="ctr"/>
           <a:lstStyle/>
           <a:p>
-            <a:pPr algn="r" indent="0" marL="0">
+            <a:pPr marL="0" indent="0" algn="r">
               <a:buNone/>
             </a:pPr>
             <a:r>
@@ -4337,6 +4047,7 @@
         <a:solidFill>
           <a:srgbClr val="FFFFFF"/>
         </a:solidFill>
+        <a:effectLst/>
       </p:bgPr>
     </p:bg>
     <p:spTree>
@@ -4374,11 +4085,11 @@
           <a:bodyPr wrap="square" lIns="0" tIns="0" rIns="0" bIns="0" rtlCol="0" anchor="ctr"/>
           <a:lstStyle/>
           <a:p>
-            <a:pPr indent="0" marL="0">
-              <a:buNone/>
-            </a:pPr>
-            <a:r>
-              <a:rPr lang="en-US" sz="1200" b="1" spc="300" kern="0" dirty="0">
+            <a:pPr marL="0" indent="0">
+              <a:buNone/>
+            </a:pPr>
+            <a:r>
+              <a:rPr lang="en-US" sz="1200" b="1" kern="0" spc="300" dirty="0">
                 <a:solidFill>
                   <a:srgbClr val="1D4ED8"/>
                 </a:solidFill>
@@ -4413,7 +4124,7 @@
           <a:bodyPr wrap="square" lIns="0" tIns="0" rIns="0" bIns="0" rtlCol="0" anchor="ctr"/>
           <a:lstStyle/>
           <a:p>
-            <a:pPr indent="0" marL="0">
+            <a:pPr marL="0" indent="0">
               <a:buNone/>
             </a:pPr>
             <a:r>
@@ -4457,7 +4168,7 @@
             <a:prstDash val="solid"/>
           </a:ln>
           <a:effectLst>
-            <a:outerShdw sx="100000" sy="100000" kx="0" ky="0" algn="bl" rotWithShape="0" blurRad="88900" dist="25400" dir="5400000">
+            <a:outerShdw blurRad="88900" dist="25400" dir="5400000" algn="bl" rotWithShape="0">
               <a:srgbClr val="0A1C33">
                 <a:alpha val="16000"/>
               </a:srgbClr>
@@ -4486,7 +4197,7 @@
           <a:bodyPr wrap="square" lIns="0" tIns="0" rIns="0" bIns="0" rtlCol="0" anchor="ctr"/>
           <a:lstStyle/>
           <a:p>
-            <a:pPr indent="0" marL="0">
+            <a:pPr marL="0" indent="0">
               <a:buNone/>
             </a:pPr>
             <a:r>
@@ -4506,7 +4217,7 @@
       </p:sp>
       <p:graphicFrame>
         <p:nvGraphicFramePr>
-          <p:cNvPr id="6" name="Chart 0" descr=""/>
+          <p:cNvPr id="6" name="Chart 0"/>
           <p:cNvGraphicFramePr/>
           <p:nvPr/>
         </p:nvGraphicFramePr>
@@ -4514,9 +4225,9 @@
           <a:off x="685800" y="2057400"/>
           <a:ext cx="5669280" cy="3291840"/>
         </p:xfrm>
-        <a:graphic xmlns:a="http://schemas.openxmlformats.org/drawingml/2006/main">
+        <a:graphic>
           <a:graphicData uri="http://schemas.openxmlformats.org/drawingml/2006/chart">
-            <c:chart xmlns:c="http://schemas.openxmlformats.org/drawingml/2006/chart" r:id="rId1"/>
+            <c:chart xmlns:c="http://schemas.openxmlformats.org/drawingml/2006/chart" xmlns:r="http://schemas.openxmlformats.org/officeDocument/2006/relationships" r:id="rId3"/>
           </a:graphicData>
         </a:graphic>
       </p:graphicFrame>
@@ -4546,7 +4257,7 @@
             <a:prstDash val="solid"/>
           </a:ln>
           <a:effectLst>
-            <a:outerShdw sx="100000" sy="100000" kx="0" ky="0" algn="bl" rotWithShape="0" blurRad="88900" dist="25400" dir="5400000">
+            <a:outerShdw blurRad="88900" dist="25400" dir="5400000" algn="bl" rotWithShape="0">
               <a:srgbClr val="0A1C33">
                 <a:alpha val="16000"/>
               </a:srgbClr>
@@ -4575,7 +4286,7 @@
           <a:bodyPr wrap="square" lIns="0" tIns="0" rIns="0" bIns="0" rtlCol="0" anchor="ctr"/>
           <a:lstStyle/>
           <a:p>
-            <a:pPr indent="0" marL="0">
+            <a:pPr marL="0" indent="0">
               <a:buNone/>
             </a:pPr>
             <a:r>
@@ -4614,7 +4325,7 @@
           <a:bodyPr wrap="square" lIns="0" tIns="0" rIns="0" bIns="0" rtlCol="0" anchor="ctr"/>
           <a:lstStyle/>
           <a:p>
-            <a:pPr indent="0" marL="0">
+            <a:pPr marL="0" indent="0">
               <a:buNone/>
             </a:pPr>
             <a:r>
@@ -4658,7 +4369,7 @@
             <a:prstDash val="solid"/>
           </a:ln>
           <a:effectLst>
-            <a:outerShdw sx="100000" sy="100000" kx="0" ky="0" algn="bl" rotWithShape="0" blurRad="88900" dist="25400" dir="5400000">
+            <a:outerShdw blurRad="88900" dist="25400" dir="5400000" algn="bl" rotWithShape="0">
               <a:srgbClr val="0A1C33">
                 <a:alpha val="16000"/>
               </a:srgbClr>
@@ -4687,7 +4398,7 @@
           <a:bodyPr wrap="square" lIns="0" tIns="0" rIns="0" bIns="0" rtlCol="0" anchor="ctr"/>
           <a:lstStyle/>
           <a:p>
-            <a:pPr indent="0" marL="0">
+            <a:pPr marL="0" indent="0">
               <a:buNone/>
             </a:pPr>
             <a:r>
@@ -4726,7 +4437,7 @@
           <a:bodyPr wrap="square" lIns="0" tIns="0" rIns="0" bIns="0" rtlCol="0" anchor="ctr"/>
           <a:lstStyle/>
           <a:p>
-            <a:pPr indent="0" marL="0">
+            <a:pPr marL="0" indent="0">
               <a:buNone/>
             </a:pPr>
             <a:r>
@@ -4770,7 +4481,7 @@
             <a:prstDash val="solid"/>
           </a:ln>
           <a:effectLst>
-            <a:outerShdw sx="100000" sy="100000" kx="0" ky="0" algn="bl" rotWithShape="0" blurRad="88900" dist="25400" dir="5400000">
+            <a:outerShdw blurRad="88900" dist="25400" dir="5400000" algn="bl" rotWithShape="0">
               <a:srgbClr val="0A1C33">
                 <a:alpha val="16000"/>
               </a:srgbClr>
@@ -4799,7 +4510,7 @@
           <a:bodyPr wrap="square" lIns="0" tIns="0" rIns="0" bIns="0" rtlCol="0" anchor="ctr"/>
           <a:lstStyle/>
           <a:p>
-            <a:pPr indent="0" marL="0">
+            <a:pPr marL="0" indent="0">
               <a:buNone/>
             </a:pPr>
             <a:r>
@@ -4838,7 +4549,7 @@
           <a:bodyPr wrap="square" lIns="0" tIns="0" rIns="0" bIns="0" rtlCol="0" anchor="ctr"/>
           <a:lstStyle/>
           <a:p>
-            <a:pPr indent="0" marL="0">
+            <a:pPr marL="0" indent="0">
               <a:buNone/>
             </a:pPr>
             <a:r>
@@ -4882,7 +4593,7 @@
             <a:prstDash val="solid"/>
           </a:ln>
           <a:effectLst>
-            <a:outerShdw sx="100000" sy="100000" kx="0" ky="0" algn="bl" rotWithShape="0" blurRad="88900" dist="25400" dir="5400000">
+            <a:outerShdw blurRad="88900" dist="25400" dir="5400000" algn="bl" rotWithShape="0">
               <a:srgbClr val="0A1C33">
                 <a:alpha val="16000"/>
               </a:srgbClr>
@@ -4911,7 +4622,7 @@
           <a:bodyPr wrap="square" lIns="0" tIns="0" rIns="0" bIns="0" rtlCol="0" anchor="ctr"/>
           <a:lstStyle/>
           <a:p>
-            <a:pPr indent="0" marL="0">
+            <a:pPr marL="0" indent="0">
               <a:buNone/>
             </a:pPr>
             <a:r>
@@ -4950,7 +4661,7 @@
           <a:bodyPr wrap="square" lIns="0" tIns="0" rIns="0" bIns="0" rtlCol="0" anchor="ctr"/>
           <a:lstStyle/>
           <a:p>
-            <a:pPr indent="0" marL="0">
+            <a:pPr marL="0" indent="0">
               <a:buNone/>
             </a:pPr>
             <a:r>
@@ -4994,7 +4705,7 @@
             <a:prstDash val="solid"/>
           </a:ln>
           <a:effectLst>
-            <a:outerShdw sx="100000" sy="100000" kx="0" ky="0" algn="bl" rotWithShape="0" blurRad="88900" dist="25400" dir="5400000">
+            <a:outerShdw blurRad="88900" dist="25400" dir="5400000" algn="bl" rotWithShape="0">
               <a:srgbClr val="0A1C33">
                 <a:alpha val="16000"/>
               </a:srgbClr>
@@ -5023,7 +4734,7 @@
           <a:bodyPr wrap="square" lIns="0" tIns="0" rIns="0" bIns="0" rtlCol="0" anchor="ctr"/>
           <a:lstStyle/>
           <a:p>
-            <a:pPr indent="0" marL="0">
+            <a:pPr marL="0" indent="0">
               <a:buNone/>
             </a:pPr>
             <a:r>
@@ -5062,7 +4773,7 @@
           <a:bodyPr wrap="square" lIns="0" tIns="0" rIns="0" bIns="0" rtlCol="0" anchor="ctr"/>
           <a:lstStyle/>
           <a:p>
-            <a:pPr indent="0" marL="0">
+            <a:pPr marL="0" indent="0">
               <a:buNone/>
             </a:pPr>
             <a:r>
@@ -5101,7 +4812,7 @@
           <a:bodyPr wrap="square" lIns="0" tIns="0" rIns="0" bIns="0" rtlCol="0" anchor="ctr"/>
           <a:lstStyle/>
           <a:p>
-            <a:pPr indent="0" marL="0">
+            <a:pPr marL="0" indent="0">
               <a:buNone/>
             </a:pPr>
             <a:r>
@@ -5140,7 +4851,7 @@
           <a:bodyPr wrap="square" lIns="0" tIns="0" rIns="0" bIns="0" rtlCol="0" anchor="ctr"/>
           <a:lstStyle/>
           <a:p>
-            <a:pPr algn="r" indent="0" marL="0">
+            <a:pPr marL="0" indent="0" algn="r">
               <a:buNone/>
             </a:pPr>
             <a:r>
@@ -5174,6 +4885,7 @@
         <a:solidFill>
           <a:srgbClr val="FFFFFF"/>
         </a:solidFill>
+        <a:effectLst/>
       </p:bgPr>
     </p:bg>
     <p:spTree>
@@ -5211,11 +4923,11 @@
           <a:bodyPr wrap="square" lIns="0" tIns="0" rIns="0" bIns="0" rtlCol="0" anchor="ctr"/>
           <a:lstStyle/>
           <a:p>
-            <a:pPr indent="0" marL="0">
-              <a:buNone/>
-            </a:pPr>
-            <a:r>
-              <a:rPr lang="en-US" sz="1200" b="1" spc="300" kern="0" dirty="0">
+            <a:pPr marL="0" indent="0">
+              <a:buNone/>
+            </a:pPr>
+            <a:r>
+              <a:rPr lang="en-US" sz="1200" b="1" kern="0" spc="300" dirty="0">
                 <a:solidFill>
                   <a:srgbClr val="1D4ED8"/>
                 </a:solidFill>
@@ -5250,7 +4962,7 @@
           <a:bodyPr wrap="square" lIns="0" tIns="0" rIns="0" bIns="0" rtlCol="0" anchor="ctr"/>
           <a:lstStyle/>
           <a:p>
-            <a:pPr indent="0" marL="0">
+            <a:pPr marL="0" indent="0">
               <a:buNone/>
             </a:pPr>
             <a:r>
@@ -5294,7 +5006,7 @@
             <a:prstDash val="solid"/>
           </a:ln>
           <a:effectLst>
-            <a:outerShdw sx="100000" sy="100000" kx="0" ky="0" algn="bl" rotWithShape="0" blurRad="88900" dist="25400" dir="5400000">
+            <a:outerShdw blurRad="88900" dist="25400" dir="5400000" algn="bl" rotWithShape="0">
               <a:srgbClr val="0A1C33">
                 <a:alpha val="16000"/>
               </a:srgbClr>
@@ -5323,7 +5035,7 @@
           <a:bodyPr wrap="square" lIns="0" tIns="0" rIns="0" bIns="0" rtlCol="0" anchor="ctr"/>
           <a:lstStyle/>
           <a:p>
-            <a:pPr algn="ctr" indent="0" marL="0">
+            <a:pPr marL="0" indent="0" algn="ctr">
               <a:buNone/>
             </a:pPr>
             <a:r>
@@ -5362,7 +5074,7 @@
           <a:bodyPr wrap="square" lIns="0" tIns="0" rIns="0" bIns="0" rtlCol="0" anchor="ctr"/>
           <a:lstStyle/>
           <a:p>
-            <a:pPr algn="ctr" indent="0" marL="0">
+            <a:pPr marL="0" indent="0" algn="ctr">
               <a:buNone/>
             </a:pPr>
             <a:r>
@@ -5406,7 +5118,7 @@
             <a:prstDash val="solid"/>
           </a:ln>
           <a:effectLst>
-            <a:outerShdw sx="100000" sy="100000" kx="0" ky="0" algn="bl" rotWithShape="0" blurRad="88900" dist="25400" dir="5400000">
+            <a:outerShdw blurRad="88900" dist="25400" dir="5400000" algn="bl" rotWithShape="0">
               <a:srgbClr val="0A1C33">
                 <a:alpha val="16000"/>
               </a:srgbClr>
@@ -5435,7 +5147,7 @@
           <a:bodyPr wrap="square" lIns="0" tIns="0" rIns="0" bIns="0" rtlCol="0" anchor="ctr"/>
           <a:lstStyle/>
           <a:p>
-            <a:pPr algn="ctr" indent="0" marL="0">
+            <a:pPr marL="0" indent="0" algn="ctr">
               <a:buNone/>
             </a:pPr>
             <a:r>
@@ -5474,7 +5186,7 @@
           <a:bodyPr wrap="square" lIns="0" tIns="0" rIns="0" bIns="0" rtlCol="0" anchor="ctr"/>
           <a:lstStyle/>
           <a:p>
-            <a:pPr algn="ctr" indent="0" marL="0">
+            <a:pPr marL="0" indent="0" algn="ctr">
               <a:buNone/>
             </a:pPr>
             <a:r>
@@ -5518,7 +5230,7 @@
             <a:prstDash val="solid"/>
           </a:ln>
           <a:effectLst>
-            <a:outerShdw sx="100000" sy="100000" kx="0" ky="0" algn="bl" rotWithShape="0" blurRad="88900" dist="25400" dir="5400000">
+            <a:outerShdw blurRad="88900" dist="25400" dir="5400000" algn="bl" rotWithShape="0">
               <a:srgbClr val="0A1C33">
                 <a:alpha val="16000"/>
               </a:srgbClr>
@@ -5547,7 +5259,7 @@
           <a:bodyPr wrap="square" lIns="0" tIns="0" rIns="0" bIns="0" rtlCol="0" anchor="ctr"/>
           <a:lstStyle/>
           <a:p>
-            <a:pPr algn="ctr" indent="0" marL="0">
+            <a:pPr marL="0" indent="0" algn="ctr">
               <a:buNone/>
             </a:pPr>
             <a:r>
@@ -5586,7 +5298,7 @@
           <a:bodyPr wrap="square" lIns="0" tIns="0" rIns="0" bIns="0" rtlCol="0" anchor="ctr"/>
           <a:lstStyle/>
           <a:p>
-            <a:pPr algn="ctr" indent="0" marL="0">
+            <a:pPr marL="0" indent="0" algn="ctr">
               <a:buNone/>
             </a:pPr>
             <a:r>
@@ -5630,7 +5342,7 @@
             <a:prstDash val="solid"/>
           </a:ln>
           <a:effectLst>
-            <a:outerShdw sx="100000" sy="100000" kx="0" ky="0" algn="bl" rotWithShape="0" blurRad="88900" dist="25400" dir="5400000">
+            <a:outerShdw blurRad="88900" dist="25400" dir="5400000" algn="bl" rotWithShape="0">
               <a:srgbClr val="0A1C33">
                 <a:alpha val="16000"/>
               </a:srgbClr>
@@ -5659,7 +5371,7 @@
           <a:bodyPr wrap="square" lIns="0" tIns="0" rIns="0" bIns="0" rtlCol="0" anchor="ctr"/>
           <a:lstStyle/>
           <a:p>
-            <a:pPr indent="0" marL="0">
+            <a:pPr marL="0" indent="0">
               <a:buNone/>
             </a:pPr>
             <a:r>
@@ -5679,7 +5391,7 @@
       </p:sp>
       <p:graphicFrame>
         <p:nvGraphicFramePr>
-          <p:cNvPr id="15" name="Chart 0" descr=""/>
+          <p:cNvPr id="15" name="Chart 0"/>
           <p:cNvGraphicFramePr/>
           <p:nvPr/>
         </p:nvGraphicFramePr>
@@ -5687,9 +5399,9 @@
           <a:off x="685800" y="4389120"/>
           <a:ext cx="5669280" cy="1463040"/>
         </p:xfrm>
-        <a:graphic xmlns:a="http://schemas.openxmlformats.org/drawingml/2006/main">
+        <a:graphic>
           <a:graphicData uri="http://schemas.openxmlformats.org/drawingml/2006/chart">
-            <c:chart xmlns:c="http://schemas.openxmlformats.org/drawingml/2006/chart" r:id="rId1"/>
+            <c:chart xmlns:c="http://schemas.openxmlformats.org/drawingml/2006/chart" xmlns:r="http://schemas.openxmlformats.org/officeDocument/2006/relationships" r:id="rId3"/>
           </a:graphicData>
         </a:graphic>
       </p:graphicFrame>
@@ -5719,7 +5431,7 @@
             <a:prstDash val="solid"/>
           </a:ln>
           <a:effectLst>
-            <a:outerShdw sx="100000" sy="100000" kx="0" ky="0" algn="bl" rotWithShape="0" blurRad="88900" dist="25400" dir="5400000">
+            <a:outerShdw blurRad="88900" dist="25400" dir="5400000" algn="bl" rotWithShape="0">
               <a:srgbClr val="0A1C33">
                 <a:alpha val="16000"/>
               </a:srgbClr>
@@ -5748,7 +5460,7 @@
           <a:bodyPr wrap="square" lIns="0" tIns="0" rIns="0" bIns="0" rtlCol="0" anchor="ctr"/>
           <a:lstStyle/>
           <a:p>
-            <a:pPr indent="0" marL="0">
+            <a:pPr marL="0" indent="0">
               <a:buNone/>
             </a:pPr>
             <a:r>
@@ -5872,7 +5584,7 @@
           <a:bodyPr wrap="square" lIns="0" tIns="0" rIns="0" bIns="0" rtlCol="0" anchor="ctr"/>
           <a:lstStyle/>
           <a:p>
-            <a:pPr indent="0" marL="0">
+            <a:pPr marL="0" indent="0">
               <a:buNone/>
             </a:pPr>
             <a:r>
@@ -5911,7 +5623,7 @@
           <a:bodyPr wrap="square" lIns="0" tIns="0" rIns="0" bIns="0" rtlCol="0" anchor="ctr"/>
           <a:lstStyle/>
           <a:p>
-            <a:pPr algn="r" indent="0" marL="0">
+            <a:pPr marL="0" indent="0" algn="r">
               <a:buNone/>
             </a:pPr>
             <a:r>
@@ -5945,6 +5657,7 @@
         <a:solidFill>
           <a:srgbClr val="FFFFFF"/>
         </a:solidFill>
+        <a:effectLst/>
       </p:bgPr>
     </p:bg>
     <p:spTree>
@@ -5982,11 +5695,11 @@
           <a:bodyPr wrap="square" lIns="0" tIns="0" rIns="0" bIns="0" rtlCol="0" anchor="ctr"/>
           <a:lstStyle/>
           <a:p>
-            <a:pPr indent="0" marL="0">
-              <a:buNone/>
-            </a:pPr>
-            <a:r>
-              <a:rPr lang="en-US" sz="1200" b="1" spc="300" kern="0" dirty="0">
+            <a:pPr marL="0" indent="0">
+              <a:buNone/>
+            </a:pPr>
+            <a:r>
+              <a:rPr lang="en-US" sz="1200" b="1" kern="0" spc="300" dirty="0">
                 <a:solidFill>
                   <a:srgbClr val="1D4ED8"/>
                 </a:solidFill>
@@ -6021,7 +5734,7 @@
           <a:bodyPr wrap="square" lIns="0" tIns="0" rIns="0" bIns="0" rtlCol="0" anchor="ctr"/>
           <a:lstStyle/>
           <a:p>
-            <a:pPr indent="0" marL="0">
+            <a:pPr marL="0" indent="0">
               <a:buNone/>
             </a:pPr>
             <a:r>
@@ -6065,7 +5778,7 @@
             <a:prstDash val="solid"/>
           </a:ln>
           <a:effectLst>
-            <a:outerShdw sx="100000" sy="100000" kx="0" ky="0" algn="bl" rotWithShape="0" blurRad="88900" dist="25400" dir="5400000">
+            <a:outerShdw blurRad="88900" dist="25400" dir="5400000" algn="bl" rotWithShape="0">
               <a:srgbClr val="0A1C33">
                 <a:alpha val="16000"/>
               </a:srgbClr>
@@ -6116,7 +5829,7 @@
           <a:bodyPr wrap="square" lIns="0" tIns="0" rIns="0" bIns="0" rtlCol="0" anchor="ctr"/>
           <a:lstStyle/>
           <a:p>
-            <a:pPr algn="ctr" indent="0" marL="0">
+            <a:pPr marL="0" indent="0" algn="ctr">
               <a:buNone/>
             </a:pPr>
             <a:r>
@@ -6155,7 +5868,7 @@
           <a:bodyPr wrap="square" lIns="0" tIns="0" rIns="0" bIns="0" rtlCol="0" anchor="ctr"/>
           <a:lstStyle/>
           <a:p>
-            <a:pPr indent="0" marL="0">
+            <a:pPr marL="0" indent="0">
               <a:buNone/>
             </a:pPr>
             <a:r>
@@ -6194,7 +5907,7 @@
           <a:bodyPr wrap="square" lIns="0" tIns="0" rIns="0" bIns="0" rtlCol="0" anchor="ctr"/>
           <a:lstStyle/>
           <a:p>
-            <a:pPr indent="0" marL="0">
+            <a:pPr marL="0" indent="0">
               <a:buNone/>
             </a:pPr>
             <a:r>
@@ -6238,7 +5951,7 @@
             <a:prstDash val="solid"/>
           </a:ln>
           <a:effectLst>
-            <a:outerShdw sx="100000" sy="100000" kx="0" ky="0" algn="bl" rotWithShape="0" blurRad="88900" dist="25400" dir="5400000">
+            <a:outerShdw blurRad="88900" dist="25400" dir="5400000" algn="bl" rotWithShape="0">
               <a:srgbClr val="0A1C33">
                 <a:alpha val="16000"/>
               </a:srgbClr>
@@ -6289,7 +6002,7 @@
           <a:bodyPr wrap="square" lIns="0" tIns="0" rIns="0" bIns="0" rtlCol="0" anchor="ctr"/>
           <a:lstStyle/>
           <a:p>
-            <a:pPr algn="ctr" indent="0" marL="0">
+            <a:pPr marL="0" indent="0" algn="ctr">
               <a:buNone/>
             </a:pPr>
             <a:r>
@@ -6328,7 +6041,7 @@
           <a:bodyPr wrap="square" lIns="0" tIns="0" rIns="0" bIns="0" rtlCol="0" anchor="ctr"/>
           <a:lstStyle/>
           <a:p>
-            <a:pPr indent="0" marL="0">
+            <a:pPr marL="0" indent="0">
               <a:buNone/>
             </a:pPr>
             <a:r>
@@ -6367,7 +6080,7 @@
           <a:bodyPr wrap="square" lIns="0" tIns="0" rIns="0" bIns="0" rtlCol="0" anchor="ctr"/>
           <a:lstStyle/>
           <a:p>
-            <a:pPr indent="0" marL="0">
+            <a:pPr marL="0" indent="0">
               <a:buNone/>
             </a:pPr>
             <a:r>
@@ -6411,7 +6124,7 @@
             <a:prstDash val="solid"/>
           </a:ln>
           <a:effectLst>
-            <a:outerShdw sx="100000" sy="100000" kx="0" ky="0" algn="bl" rotWithShape="0" blurRad="88900" dist="25400" dir="5400000">
+            <a:outerShdw blurRad="88900" dist="25400" dir="5400000" algn="bl" rotWithShape="0">
               <a:srgbClr val="0A1C33">
                 <a:alpha val="16000"/>
               </a:srgbClr>
@@ -6462,7 +6175,7 @@
           <a:bodyPr wrap="square" lIns="0" tIns="0" rIns="0" bIns="0" rtlCol="0" anchor="ctr"/>
           <a:lstStyle/>
           <a:p>
-            <a:pPr algn="ctr" indent="0" marL="0">
+            <a:pPr marL="0" indent="0" algn="ctr">
               <a:buNone/>
             </a:pPr>
             <a:r>
@@ -6501,7 +6214,7 @@
           <a:bodyPr wrap="square" lIns="0" tIns="0" rIns="0" bIns="0" rtlCol="0" anchor="ctr"/>
           <a:lstStyle/>
           <a:p>
-            <a:pPr indent="0" marL="0">
+            <a:pPr marL="0" indent="0">
               <a:buNone/>
             </a:pPr>
             <a:r>
@@ -6540,7 +6253,7 @@
           <a:bodyPr wrap="square" lIns="0" tIns="0" rIns="0" bIns="0" rtlCol="0" anchor="ctr"/>
           <a:lstStyle/>
           <a:p>
-            <a:pPr indent="0" marL="0">
+            <a:pPr marL="0" indent="0">
               <a:buNone/>
             </a:pPr>
             <a:r>
@@ -6584,7 +6297,7 @@
             <a:prstDash val="solid"/>
           </a:ln>
           <a:effectLst>
-            <a:outerShdw sx="100000" sy="100000" kx="0" ky="0" algn="bl" rotWithShape="0" blurRad="88900" dist="25400" dir="5400000">
+            <a:outerShdw blurRad="88900" dist="25400" dir="5400000" algn="bl" rotWithShape="0">
               <a:srgbClr val="0A1C33">
                 <a:alpha val="16000"/>
               </a:srgbClr>
@@ -6635,7 +6348,7 @@
           <a:bodyPr wrap="square" lIns="0" tIns="0" rIns="0" bIns="0" rtlCol="0" anchor="ctr"/>
           <a:lstStyle/>
           <a:p>
-            <a:pPr algn="ctr" indent="0" marL="0">
+            <a:pPr marL="0" indent="0" algn="ctr">
               <a:buNone/>
             </a:pPr>
             <a:r>
@@ -6674,7 +6387,7 @@
           <a:bodyPr wrap="square" lIns="0" tIns="0" rIns="0" bIns="0" rtlCol="0" anchor="ctr"/>
           <a:lstStyle/>
           <a:p>
-            <a:pPr indent="0" marL="0">
+            <a:pPr marL="0" indent="0">
               <a:buNone/>
             </a:pPr>
             <a:r>
@@ -6713,7 +6426,7 @@
           <a:bodyPr wrap="square" lIns="0" tIns="0" rIns="0" bIns="0" rtlCol="0" anchor="ctr"/>
           <a:lstStyle/>
           <a:p>
-            <a:pPr indent="0" marL="0">
+            <a:pPr marL="0" indent="0">
               <a:buNone/>
             </a:pPr>
             <a:r>
@@ -6752,7 +6465,7 @@
           <a:bodyPr wrap="square" lIns="0" tIns="0" rIns="0" bIns="0" rtlCol="0" anchor="ctr"/>
           <a:lstStyle/>
           <a:p>
-            <a:pPr algn="r" indent="0" marL="0">
+            <a:pPr marL="0" indent="0" algn="r">
               <a:buNone/>
             </a:pPr>
             <a:r>
@@ -6786,6 +6499,7 @@
         <a:solidFill>
           <a:srgbClr val="0A1C33"/>
         </a:solidFill>
+        <a:effectLst/>
       </p:bgPr>
     </p:bg>
     <p:spTree>
@@ -6911,11 +6625,11 @@
           <a:bodyPr wrap="square" lIns="0" tIns="0" rIns="0" bIns="0" rtlCol="0" anchor="ctr"/>
           <a:lstStyle/>
           <a:p>
-            <a:pPr indent="0" marL="0">
-              <a:buNone/>
-            </a:pPr>
-            <a:r>
-              <a:rPr lang="en-US" sz="1200" b="1" spc="300" kern="0" dirty="0">
+            <a:pPr marL="0" indent="0">
+              <a:buNone/>
+            </a:pPr>
+            <a:r>
+              <a:rPr lang="en-US" sz="1200" b="1" kern="0" spc="300" dirty="0">
                 <a:solidFill>
                   <a:srgbClr val="F59E0B"/>
                 </a:solidFill>
@@ -6950,7 +6664,7 @@
           <a:bodyPr wrap="square" lIns="0" tIns="0" rIns="0" bIns="0" rtlCol="0" anchor="ctr"/>
           <a:lstStyle/>
           <a:p>
-            <a:pPr indent="0" marL="0">
+            <a:pPr marL="0" indent="0">
               <a:lnSpc>
                 <a:spcPct val="102000"/>
               </a:lnSpc>
@@ -6970,7 +6684,7 @@
             <a:endParaRPr lang="en-US" sz="4000" dirty="0"/>
           </a:p>
           <a:p>
-            <a:pPr indent="0" marL="0">
+            <a:pPr marL="0" indent="0">
               <a:lnSpc>
                 <a:spcPct val="102000"/>
               </a:lnSpc>
@@ -7039,7 +6753,7 @@
           <a:bodyPr wrap="square" lIns="0" tIns="0" rIns="0" bIns="0" rtlCol="0" anchor="ctr"/>
           <a:lstStyle/>
           <a:p>
-            <a:pPr indent="0" marL="0">
+            <a:pPr marL="0" indent="0">
               <a:buNone/>
             </a:pPr>
             <a:r>
@@ -7078,7 +6792,7 @@
           <a:bodyPr wrap="square" lIns="0" tIns="0" rIns="0" bIns="0" rtlCol="0" anchor="ctr"/>
           <a:lstStyle/>
           <a:p>
-            <a:pPr indent="0" marL="0">
+            <a:pPr marL="0" indent="0">
               <a:buNone/>
             </a:pPr>
             <a:r>
@@ -7144,7 +6858,7 @@
           <a:bodyPr wrap="square" lIns="0" tIns="0" rIns="0" bIns="0" rtlCol="0" anchor="ctr"/>
           <a:lstStyle/>
           <a:p>
-            <a:pPr indent="0" marL="0">
+            <a:pPr marL="0" indent="0">
               <a:buNone/>
             </a:pPr>
             <a:r>
@@ -7183,7 +6897,7 @@
           <a:bodyPr wrap="square" lIns="0" tIns="0" rIns="0" bIns="0" rtlCol="0" anchor="ctr"/>
           <a:lstStyle/>
           <a:p>
-            <a:pPr indent="0" marL="0">
+            <a:pPr marL="0" indent="0">
               <a:buNone/>
             </a:pPr>
             <a:r>
@@ -7249,7 +6963,7 @@
           <a:bodyPr wrap="square" lIns="0" tIns="0" rIns="0" bIns="0" rtlCol="0" anchor="ctr"/>
           <a:lstStyle/>
           <a:p>
-            <a:pPr indent="0" marL="0">
+            <a:pPr marL="0" indent="0">
               <a:buNone/>
             </a:pPr>
             <a:r>
@@ -7288,7 +7002,7 @@
           <a:bodyPr wrap="square" lIns="0" tIns="0" rIns="0" bIns="0" rtlCol="0" anchor="ctr"/>
           <a:lstStyle/>
           <a:p>
-            <a:pPr indent="0" marL="0">
+            <a:pPr marL="0" indent="0">
               <a:buNone/>
             </a:pPr>
             <a:r>
@@ -7354,7 +7068,7 @@
           <a:bodyPr wrap="square" lIns="0" tIns="0" rIns="0" bIns="0" rtlCol="0" anchor="ctr"/>
           <a:lstStyle/>
           <a:p>
-            <a:pPr indent="0" marL="0">
+            <a:pPr marL="0" indent="0">
               <a:buNone/>
             </a:pPr>
             <a:r>
@@ -7393,7 +7107,7 @@
           <a:bodyPr wrap="square" lIns="0" tIns="0" rIns="0" bIns="0" rtlCol="0" anchor="ctr"/>
           <a:lstStyle/>
           <a:p>
-            <a:pPr indent="0" marL="0">
+            <a:pPr marL="0" indent="0">
               <a:buNone/>
             </a:pPr>
             <a:r>
@@ -7432,7 +7146,7 @@
           <a:bodyPr wrap="square" lIns="0" tIns="0" rIns="0" bIns="0" rtlCol="0" anchor="ctr"/>
           <a:lstStyle/>
           <a:p>
-            <a:pPr algn="r" indent="0" marL="0">
+            <a:pPr marL="0" indent="0" algn="r">
               <a:buNone/>
             </a:pPr>
             <a:r>
@@ -7466,6 +7180,7 @@
         <a:solidFill>
           <a:srgbClr val="FFFFFF"/>
         </a:solidFill>
+        <a:effectLst/>
       </p:bgPr>
     </p:bg>
     <p:spTree>
@@ -7503,11 +7218,11 @@
           <a:bodyPr wrap="square" lIns="0" tIns="0" rIns="0" bIns="0" rtlCol="0" anchor="ctr"/>
           <a:lstStyle/>
           <a:p>
-            <a:pPr indent="0" marL="0">
-              <a:buNone/>
-            </a:pPr>
-            <a:r>
-              <a:rPr lang="en-US" sz="1200" b="1" spc="300" kern="0" dirty="0">
+            <a:pPr marL="0" indent="0">
+              <a:buNone/>
+            </a:pPr>
+            <a:r>
+              <a:rPr lang="en-US" sz="1200" b="1" kern="0" spc="300" dirty="0">
                 <a:solidFill>
                   <a:srgbClr val="1D4ED8"/>
                 </a:solidFill>
@@ -7542,7 +7257,7 @@
           <a:bodyPr wrap="square" lIns="0" tIns="0" rIns="0" bIns="0" rtlCol="0" anchor="ctr"/>
           <a:lstStyle/>
           <a:p>
-            <a:pPr indent="0" marL="0">
+            <a:pPr marL="0" indent="0">
               <a:buNone/>
             </a:pPr>
             <a:r>
@@ -7586,7 +7301,7 @@
             <a:prstDash val="solid"/>
           </a:ln>
           <a:effectLst>
-            <a:outerShdw sx="100000" sy="100000" kx="0" ky="0" algn="bl" rotWithShape="0" blurRad="88900" dist="25400" dir="5400000">
+            <a:outerShdw blurRad="88900" dist="25400" dir="5400000" algn="bl" rotWithShape="0">
               <a:srgbClr val="0A1C33">
                 <a:alpha val="16000"/>
               </a:srgbClr>
@@ -7635,7 +7350,7 @@
           <a:bodyPr wrap="square" lIns="0" tIns="0" rIns="0" bIns="0" rtlCol="0" anchor="ctr"/>
           <a:lstStyle/>
           <a:p>
-            <a:pPr algn="ctr" indent="0" marL="0">
+            <a:pPr marL="0" indent="0" algn="ctr">
               <a:buNone/>
             </a:pPr>
             <a:r>
@@ -7674,7 +7389,7 @@
           <a:bodyPr wrap="square" lIns="0" tIns="0" rIns="0" bIns="0" rtlCol="0" anchor="ctr"/>
           <a:lstStyle/>
           <a:p>
-            <a:pPr indent="0" marL="0">
+            <a:pPr marL="0" indent="0">
               <a:buNone/>
             </a:pPr>
             <a:r>
@@ -7735,7 +7450,7 @@
           <a:bodyPr wrap="square" lIns="0" tIns="0" rIns="0" bIns="0" rtlCol="0" anchor="ctr"/>
           <a:lstStyle/>
           <a:p>
-            <a:pPr algn="ctr" indent="0" marL="0">
+            <a:pPr marL="0" indent="0" algn="ctr">
               <a:buNone/>
             </a:pPr>
             <a:r>
@@ -7774,7 +7489,7 @@
           <a:bodyPr wrap="square" lIns="0" tIns="0" rIns="0" bIns="0" rtlCol="0" anchor="ctr"/>
           <a:lstStyle/>
           <a:p>
-            <a:pPr indent="0" marL="0">
+            <a:pPr marL="0" indent="0">
               <a:buNone/>
             </a:pPr>
             <a:r>
@@ -7838,7 +7553,7 @@
             <a:prstDash val="solid"/>
           </a:ln>
           <a:effectLst>
-            <a:outerShdw sx="100000" sy="100000" kx="0" ky="0" algn="bl" rotWithShape="0" blurRad="88900" dist="25400" dir="5400000">
+            <a:outerShdw blurRad="88900" dist="25400" dir="5400000" algn="bl" rotWithShape="0">
               <a:srgbClr val="0A1C33">
                 <a:alpha val="16000"/>
               </a:srgbClr>
@@ -7887,7 +7602,7 @@
           <a:bodyPr wrap="square" lIns="0" tIns="0" rIns="0" bIns="0" rtlCol="0" anchor="ctr"/>
           <a:lstStyle/>
           <a:p>
-            <a:pPr algn="ctr" indent="0" marL="0">
+            <a:pPr marL="0" indent="0" algn="ctr">
               <a:buNone/>
             </a:pPr>
             <a:r>
@@ -7926,7 +7641,7 @@
           <a:bodyPr wrap="square" lIns="0" tIns="0" rIns="0" bIns="0" rtlCol="0" anchor="ctr"/>
           <a:lstStyle/>
           <a:p>
-            <a:pPr indent="0" marL="0">
+            <a:pPr marL="0" indent="0">
               <a:buNone/>
             </a:pPr>
             <a:r>
@@ -7987,7 +7702,7 @@
           <a:bodyPr wrap="square" lIns="0" tIns="0" rIns="0" bIns="0" rtlCol="0" anchor="ctr"/>
           <a:lstStyle/>
           <a:p>
-            <a:pPr algn="ctr" indent="0" marL="0">
+            <a:pPr marL="0" indent="0" algn="ctr">
               <a:buNone/>
             </a:pPr>
             <a:r>
@@ -8026,7 +7741,7 @@
           <a:bodyPr wrap="square" lIns="0" tIns="0" rIns="0" bIns="0" rtlCol="0" anchor="ctr"/>
           <a:lstStyle/>
           <a:p>
-            <a:pPr indent="0" marL="0">
+            <a:pPr marL="0" indent="0">
               <a:buNone/>
             </a:pPr>
             <a:r>
@@ -8090,7 +7805,7 @@
             <a:prstDash val="solid"/>
           </a:ln>
           <a:effectLst>
-            <a:outerShdw sx="100000" sy="100000" kx="0" ky="0" algn="bl" rotWithShape="0" blurRad="88900" dist="25400" dir="5400000">
+            <a:outerShdw blurRad="88900" dist="25400" dir="5400000" algn="bl" rotWithShape="0">
               <a:srgbClr val="0A1C33">
                 <a:alpha val="16000"/>
               </a:srgbClr>
@@ -8139,7 +7854,7 @@
           <a:bodyPr wrap="square" lIns="0" tIns="0" rIns="0" bIns="0" rtlCol="0" anchor="ctr"/>
           <a:lstStyle/>
           <a:p>
-            <a:pPr algn="ctr" indent="0" marL="0">
+            <a:pPr marL="0" indent="0" algn="ctr">
               <a:buNone/>
             </a:pPr>
             <a:r>
@@ -8178,7 +7893,7 @@
           <a:bodyPr wrap="square" lIns="0" tIns="0" rIns="0" bIns="0" rtlCol="0" anchor="ctr"/>
           <a:lstStyle/>
           <a:p>
-            <a:pPr indent="0" marL="0">
+            <a:pPr marL="0" indent="0">
               <a:buNone/>
             </a:pPr>
             <a:r>
@@ -8239,7 +7954,7 @@
           <a:bodyPr wrap="square" lIns="0" tIns="0" rIns="0" bIns="0" rtlCol="0" anchor="ctr"/>
           <a:lstStyle/>
           <a:p>
-            <a:pPr algn="ctr" indent="0" marL="0">
+            <a:pPr marL="0" indent="0" algn="ctr">
               <a:buNone/>
             </a:pPr>
             <a:r>
@@ -8278,7 +7993,7 @@
           <a:bodyPr wrap="square" lIns="0" tIns="0" rIns="0" bIns="0" rtlCol="0" anchor="ctr"/>
           <a:lstStyle/>
           <a:p>
-            <a:pPr indent="0" marL="0">
+            <a:pPr marL="0" indent="0">
               <a:buNone/>
             </a:pPr>
             <a:r>
@@ -8342,7 +8057,7 @@
             <a:prstDash val="solid"/>
           </a:ln>
           <a:effectLst>
-            <a:outerShdw sx="100000" sy="100000" kx="0" ky="0" algn="bl" rotWithShape="0" blurRad="88900" dist="25400" dir="5400000">
+            <a:outerShdw blurRad="88900" dist="25400" dir="5400000" algn="bl" rotWithShape="0">
               <a:srgbClr val="0A1C33">
                 <a:alpha val="16000"/>
               </a:srgbClr>
@@ -8391,7 +8106,7 @@
           <a:bodyPr wrap="square" lIns="0" tIns="0" rIns="0" bIns="0" rtlCol="0" anchor="ctr"/>
           <a:lstStyle/>
           <a:p>
-            <a:pPr algn="ctr" indent="0" marL="0">
+            <a:pPr marL="0" indent="0" algn="ctr">
               <a:buNone/>
             </a:pPr>
             <a:r>
@@ -8430,7 +8145,7 @@
           <a:bodyPr wrap="square" lIns="0" tIns="0" rIns="0" bIns="0" rtlCol="0" anchor="ctr"/>
           <a:lstStyle/>
           <a:p>
-            <a:pPr indent="0" marL="0">
+            <a:pPr marL="0" indent="0">
               <a:buNone/>
             </a:pPr>
             <a:r>
@@ -8491,7 +8206,7 @@
           <a:bodyPr wrap="square" lIns="0" tIns="0" rIns="0" bIns="0" rtlCol="0" anchor="ctr"/>
           <a:lstStyle/>
           <a:p>
-            <a:pPr algn="ctr" indent="0" marL="0">
+            <a:pPr marL="0" indent="0" algn="ctr">
               <a:buNone/>
             </a:pPr>
             <a:r>
@@ -8530,7 +8245,7 @@
           <a:bodyPr wrap="square" lIns="0" tIns="0" rIns="0" bIns="0" rtlCol="0" anchor="ctr"/>
           <a:lstStyle/>
           <a:p>
-            <a:pPr indent="0" marL="0">
+            <a:pPr marL="0" indent="0">
               <a:buNone/>
             </a:pPr>
             <a:r>
@@ -8574,7 +8289,7 @@
             <a:prstDash val="solid"/>
           </a:ln>
           <a:effectLst>
-            <a:outerShdw sx="100000" sy="100000" kx="0" ky="0" algn="bl" rotWithShape="0" blurRad="88900" dist="25400" dir="5400000">
+            <a:outerShdw blurRad="88900" dist="25400" dir="5400000" algn="bl" rotWithShape="0">
               <a:srgbClr val="0A1C33">
                 <a:alpha val="16000"/>
               </a:srgbClr>
@@ -8603,7 +8318,7 @@
           <a:bodyPr wrap="square" lIns="0" tIns="0" rIns="0" bIns="0" rtlCol="0" anchor="ctr"/>
           <a:lstStyle/>
           <a:p>
-            <a:pPr indent="0" marL="0">
+            <a:pPr marL="0" indent="0">
               <a:buNone/>
             </a:pPr>
             <a:r>
@@ -8617,9 +8332,6 @@
               </a:rPr>
               <a:t>Included from day one:  </a:t>
             </a:r>
-            <a:pPr indent="0" marL="0">
-              <a:buNone/>
-            </a:pPr>
             <a:r>
               <a:rPr lang="en-US" sz="1350" dirty="0">
                 <a:solidFill>
@@ -8656,7 +8368,7 @@
           <a:bodyPr wrap="square" lIns="0" tIns="0" rIns="0" bIns="0" rtlCol="0" anchor="ctr"/>
           <a:lstStyle/>
           <a:p>
-            <a:pPr algn="r" indent="0" marL="0">
+            <a:pPr marL="0" indent="0" algn="r">
               <a:buNone/>
             </a:pPr>
             <a:r>
@@ -8690,6 +8402,7 @@
         <a:solidFill>
           <a:srgbClr val="FFFFFF"/>
         </a:solidFill>
+        <a:effectLst/>
       </p:bgPr>
     </p:bg>
     <p:spTree>
@@ -8727,11 +8440,11 @@
           <a:bodyPr wrap="square" lIns="0" tIns="0" rIns="0" bIns="0" rtlCol="0" anchor="ctr"/>
           <a:lstStyle/>
           <a:p>
-            <a:pPr indent="0" marL="0">
-              <a:buNone/>
-            </a:pPr>
-            <a:r>
-              <a:rPr lang="en-US" sz="1200" b="1" spc="300" kern="0" dirty="0">
+            <a:pPr marL="0" indent="0">
+              <a:buNone/>
+            </a:pPr>
+            <a:r>
+              <a:rPr lang="en-US" sz="1200" b="1" kern="0" spc="300" dirty="0">
                 <a:solidFill>
                   <a:srgbClr val="1D4ED8"/>
                 </a:solidFill>
@@ -8766,7 +8479,7 @@
           <a:bodyPr wrap="square" lIns="0" tIns="0" rIns="0" bIns="0" rtlCol="0" anchor="ctr"/>
           <a:lstStyle/>
           <a:p>
-            <a:pPr indent="0" marL="0">
+            <a:pPr marL="0" indent="0">
               <a:buNone/>
             </a:pPr>
             <a:r>
@@ -8810,7 +8523,7 @@
             <a:prstDash val="solid"/>
           </a:ln>
           <a:effectLst>
-            <a:outerShdw sx="100000" sy="100000" kx="0" ky="0" algn="bl" rotWithShape="0" blurRad="88900" dist="25400" dir="5400000">
+            <a:outerShdw blurRad="88900" dist="25400" dir="5400000" algn="bl" rotWithShape="0">
               <a:srgbClr val="0A1C33">
                 <a:alpha val="16000"/>
               </a:srgbClr>
@@ -8859,7 +8572,7 @@
           <a:bodyPr wrap="square" lIns="0" tIns="0" rIns="0" bIns="0" rtlCol="0" anchor="ctr"/>
           <a:lstStyle/>
           <a:p>
-            <a:pPr indent="0" marL="0">
+            <a:pPr marL="0" indent="0">
               <a:buNone/>
             </a:pPr>
             <a:r>
@@ -8898,7 +8611,7 @@
           <a:bodyPr wrap="square" lIns="0" tIns="0" rIns="0" bIns="0" rtlCol="0" anchor="ctr"/>
           <a:lstStyle/>
           <a:p>
-            <a:pPr indent="0" marL="0">
+            <a:pPr marL="0" indent="0">
               <a:buNone/>
             </a:pPr>
             <a:r>
@@ -8942,7 +8655,7 @@
             <a:prstDash val="solid"/>
           </a:ln>
           <a:effectLst>
-            <a:outerShdw sx="100000" sy="100000" kx="0" ky="0" algn="bl" rotWithShape="0" blurRad="88900" dist="25400" dir="5400000">
+            <a:outerShdw blurRad="88900" dist="25400" dir="5400000" algn="bl" rotWithShape="0">
               <a:srgbClr val="0A1C33">
                 <a:alpha val="16000"/>
               </a:srgbClr>
@@ -8991,7 +8704,7 @@
           <a:bodyPr wrap="square" lIns="0" tIns="0" rIns="0" bIns="0" rtlCol="0" anchor="ctr"/>
           <a:lstStyle/>
           <a:p>
-            <a:pPr indent="0" marL="0">
+            <a:pPr marL="0" indent="0">
               <a:buNone/>
             </a:pPr>
             <a:r>
@@ -9030,7 +8743,7 @@
           <a:bodyPr wrap="square" lIns="0" tIns="0" rIns="0" bIns="0" rtlCol="0" anchor="ctr"/>
           <a:lstStyle/>
           <a:p>
-            <a:pPr indent="0" marL="0">
+            <a:pPr marL="0" indent="0">
               <a:buNone/>
             </a:pPr>
             <a:r>
@@ -9074,7 +8787,7 @@
             <a:prstDash val="solid"/>
           </a:ln>
           <a:effectLst>
-            <a:outerShdw sx="100000" sy="100000" kx="0" ky="0" algn="bl" rotWithShape="0" blurRad="88900" dist="25400" dir="5400000">
+            <a:outerShdw blurRad="88900" dist="25400" dir="5400000" algn="bl" rotWithShape="0">
               <a:srgbClr val="0A1C33">
                 <a:alpha val="16000"/>
               </a:srgbClr>
@@ -9123,7 +8836,7 @@
           <a:bodyPr wrap="square" lIns="0" tIns="0" rIns="0" bIns="0" rtlCol="0" anchor="ctr"/>
           <a:lstStyle/>
           <a:p>
-            <a:pPr indent="0" marL="0">
+            <a:pPr marL="0" indent="0">
               <a:buNone/>
             </a:pPr>
             <a:r>
@@ -9162,7 +8875,7 @@
           <a:bodyPr wrap="square" lIns="0" tIns="0" rIns="0" bIns="0" rtlCol="0" anchor="ctr"/>
           <a:lstStyle/>
           <a:p>
-            <a:pPr indent="0" marL="0">
+            <a:pPr marL="0" indent="0">
               <a:buNone/>
             </a:pPr>
             <a:r>
@@ -9206,7 +8919,7 @@
             <a:prstDash val="solid"/>
           </a:ln>
           <a:effectLst>
-            <a:outerShdw sx="100000" sy="100000" kx="0" ky="0" algn="bl" rotWithShape="0" blurRad="88900" dist="25400" dir="5400000">
+            <a:outerShdw blurRad="88900" dist="25400" dir="5400000" algn="bl" rotWithShape="0">
               <a:srgbClr val="0A1C33">
                 <a:alpha val="16000"/>
               </a:srgbClr>
@@ -9255,7 +8968,7 @@
           <a:bodyPr wrap="square" lIns="0" tIns="0" rIns="0" bIns="0" rtlCol="0" anchor="ctr"/>
           <a:lstStyle/>
           <a:p>
-            <a:pPr indent="0" marL="0">
+            <a:pPr marL="0" indent="0">
               <a:buNone/>
             </a:pPr>
             <a:r>
@@ -9294,7 +9007,7 @@
           <a:bodyPr wrap="square" lIns="0" tIns="0" rIns="0" bIns="0" rtlCol="0" anchor="ctr"/>
           <a:lstStyle/>
           <a:p>
-            <a:pPr indent="0" marL="0">
+            <a:pPr marL="0" indent="0">
               <a:buNone/>
             </a:pPr>
             <a:r>
@@ -9338,7 +9051,7 @@
             <a:prstDash val="solid"/>
           </a:ln>
           <a:effectLst>
-            <a:outerShdw sx="100000" sy="100000" kx="0" ky="0" algn="bl" rotWithShape="0" blurRad="88900" dist="25400" dir="5400000">
+            <a:outerShdw blurRad="88900" dist="25400" dir="5400000" algn="bl" rotWithShape="0">
               <a:srgbClr val="0A1C33">
                 <a:alpha val="16000"/>
               </a:srgbClr>
@@ -9387,7 +9100,7 @@
           <a:bodyPr wrap="square" lIns="0" tIns="0" rIns="0" bIns="0" rtlCol="0" anchor="ctr"/>
           <a:lstStyle/>
           <a:p>
-            <a:pPr indent="0" marL="0">
+            <a:pPr marL="0" indent="0">
               <a:buNone/>
             </a:pPr>
             <a:r>
@@ -9426,7 +9139,7 @@
           <a:bodyPr wrap="square" lIns="0" tIns="0" rIns="0" bIns="0" rtlCol="0" anchor="ctr"/>
           <a:lstStyle/>
           <a:p>
-            <a:pPr indent="0" marL="0">
+            <a:pPr marL="0" indent="0">
               <a:buNone/>
             </a:pPr>
             <a:r>
@@ -9470,7 +9183,7 @@
             <a:prstDash val="solid"/>
           </a:ln>
           <a:effectLst>
-            <a:outerShdw sx="100000" sy="100000" kx="0" ky="0" algn="bl" rotWithShape="0" blurRad="88900" dist="25400" dir="5400000">
+            <a:outerShdw blurRad="88900" dist="25400" dir="5400000" algn="bl" rotWithShape="0">
               <a:srgbClr val="0A1C33">
                 <a:alpha val="16000"/>
               </a:srgbClr>
@@ -9519,7 +9232,7 @@
           <a:bodyPr wrap="square" lIns="0" tIns="0" rIns="0" bIns="0" rtlCol="0" anchor="ctr"/>
           <a:lstStyle/>
           <a:p>
-            <a:pPr indent="0" marL="0">
+            <a:pPr marL="0" indent="0">
               <a:buNone/>
             </a:pPr>
             <a:r>
@@ -9558,7 +9271,7 @@
           <a:bodyPr wrap="square" lIns="0" tIns="0" rIns="0" bIns="0" rtlCol="0" anchor="ctr"/>
           <a:lstStyle/>
           <a:p>
-            <a:pPr indent="0" marL="0">
+            <a:pPr marL="0" indent="0">
               <a:buNone/>
             </a:pPr>
             <a:r>
@@ -9597,7 +9310,7 @@
           <a:bodyPr wrap="square" lIns="0" tIns="0" rIns="0" bIns="0" rtlCol="0" anchor="ctr"/>
           <a:lstStyle/>
           <a:p>
-            <a:pPr indent="0" marL="0">
+            <a:pPr marL="0" indent="0">
               <a:buNone/>
             </a:pPr>
             <a:r>
@@ -9636,7 +9349,7 @@
           <a:bodyPr wrap="square" lIns="0" tIns="0" rIns="0" bIns="0" rtlCol="0" anchor="ctr"/>
           <a:lstStyle/>
           <a:p>
-            <a:pPr algn="r" indent="0" marL="0">
+            <a:pPr marL="0" indent="0" algn="r">
               <a:buNone/>
             </a:pPr>
             <a:r>
@@ -9670,6 +9383,7 @@
         <a:solidFill>
           <a:srgbClr val="FFFFFF"/>
         </a:solidFill>
+        <a:effectLst/>
       </p:bgPr>
     </p:bg>
     <p:spTree>
@@ -9707,11 +9421,11 @@
           <a:bodyPr wrap="square" lIns="0" tIns="0" rIns="0" bIns="0" rtlCol="0" anchor="ctr"/>
           <a:lstStyle/>
           <a:p>
-            <a:pPr indent="0" marL="0">
-              <a:buNone/>
-            </a:pPr>
-            <a:r>
-              <a:rPr lang="en-US" sz="1200" b="1" spc="300" kern="0" dirty="0">
+            <a:pPr marL="0" indent="0">
+              <a:buNone/>
+            </a:pPr>
+            <a:r>
+              <a:rPr lang="en-US" sz="1200" b="1" kern="0" spc="300" dirty="0">
                 <a:solidFill>
                   <a:srgbClr val="1D4ED8"/>
                 </a:solidFill>
@@ -9746,7 +9460,7 @@
           <a:bodyPr wrap="square" lIns="0" tIns="0" rIns="0" bIns="0" rtlCol="0" anchor="ctr"/>
           <a:lstStyle/>
           <a:p>
-            <a:pPr indent="0" marL="0">
+            <a:pPr marL="0" indent="0">
               <a:buNone/>
             </a:pPr>
             <a:r>
@@ -9780,17 +9494,41 @@
         </p:nvGraphicFramePr>
         <p:xfrm>
           <a:off x="457200" y="1481328"/>
-          <a:ext cx="11274552" cy="914400"/>
+          <a:ext cx="11274552" cy="3803904"/>
         </p:xfrm>
         <a:graphic>
           <a:graphicData uri="http://schemas.openxmlformats.org/drawingml/2006/table">
             <a:tbl>
               <a:tblPr/>
               <a:tblGrid>
-                <a:gridCol w="2468880"/>
-                <a:gridCol w="3026664"/>
-                <a:gridCol w="2889504"/>
-                <a:gridCol w="2889504"/>
+                <a:gridCol w="2468880">
+                  <a:extLst>
+                    <a:ext uri="{9D8B030D-6E8A-4147-A177-3AD203B41FA5}">
+                      <a16:colId xmlns:a16="http://schemas.microsoft.com/office/drawing/2014/main" val="20000"/>
+                    </a:ext>
+                  </a:extLst>
+                </a:gridCol>
+                <a:gridCol w="3026664">
+                  <a:extLst>
+                    <a:ext uri="{9D8B030D-6E8A-4147-A177-3AD203B41FA5}">
+                      <a16:colId xmlns:a16="http://schemas.microsoft.com/office/drawing/2014/main" val="20001"/>
+                    </a:ext>
+                  </a:extLst>
+                </a:gridCol>
+                <a:gridCol w="2889504">
+                  <a:extLst>
+                    <a:ext uri="{9D8B030D-6E8A-4147-A177-3AD203B41FA5}">
+                      <a16:colId xmlns:a16="http://schemas.microsoft.com/office/drawing/2014/main" val="20002"/>
+                    </a:ext>
+                  </a:extLst>
+                </a:gridCol>
+                <a:gridCol w="2889504">
+                  <a:extLst>
+                    <a:ext uri="{9D8B030D-6E8A-4147-A177-3AD203B41FA5}">
+                      <a16:colId xmlns:a16="http://schemas.microsoft.com/office/drawing/2014/main" val="20003"/>
+                    </a:ext>
+                  </a:extLst>
+                </a:gridCol>
               </a:tblGrid>
               <a:tr h="475488">
                 <a:tc>
@@ -9798,7 +9536,7 @@
                     <a:bodyPr/>
                     <a:lstStyle/>
                     <a:p>
-                      <a:pPr algn="l" indent="0" marL="0">
+                      <a:pPr marL="0" indent="0" algn="l">
                         <a:buNone/>
                       </a:pPr>
                       <a:endParaRPr lang="en-US" sz="1250" dirty="0">
@@ -9855,7 +9593,7 @@
                     <a:bodyPr/>
                     <a:lstStyle/>
                     <a:p>
-                      <a:pPr algn="ctr" indent="0" marL="0">
+                      <a:pPr marL="0" indent="0" algn="ctr">
                         <a:buNone/>
                       </a:pPr>
                       <a:r>
@@ -9923,7 +9661,7 @@
                     <a:bodyPr/>
                     <a:lstStyle/>
                     <a:p>
-                      <a:pPr algn="ctr" indent="0" marL="0">
+                      <a:pPr marL="0" indent="0" algn="ctr">
                         <a:buNone/>
                       </a:pPr>
                       <a:r>
@@ -9991,7 +9729,7 @@
                     <a:bodyPr/>
                     <a:lstStyle/>
                     <a:p>
-                      <a:pPr algn="ctr" indent="0" marL="0">
+                      <a:pPr marL="0" indent="0" algn="ctr">
                         <a:buNone/>
                       </a:pPr>
                       <a:r>
@@ -10054,6 +9792,11 @@
                     </a:solidFill>
                   </a:tcPr>
                 </a:tc>
+                <a:extLst>
+                  <a:ext uri="{0D108BD9-81ED-4DB2-BD59-A6C34878D82A}">
+                    <a16:rowId xmlns:a16="http://schemas.microsoft.com/office/drawing/2014/main" val="10000"/>
+                  </a:ext>
+                </a:extLst>
               </a:tr>
               <a:tr h="475488">
                 <a:tc>
@@ -10061,7 +9804,7 @@
                     <a:bodyPr/>
                     <a:lstStyle/>
                     <a:p>
-                      <a:pPr algn="l" indent="0" marL="0">
+                      <a:pPr marL="0" indent="0" algn="l">
                         <a:buNone/>
                       </a:pPr>
                       <a:r>
@@ -10129,7 +9872,7 @@
                     <a:bodyPr/>
                     <a:lstStyle/>
                     <a:p>
-                      <a:pPr algn="ctr" indent="0" marL="0">
+                      <a:pPr marL="0" indent="0" algn="ctr">
                         <a:buNone/>
                       </a:pPr>
                       <a:r>
@@ -10197,7 +9940,7 @@
                     <a:bodyPr/>
                     <a:lstStyle/>
                     <a:p>
-                      <a:pPr algn="ctr" indent="0" marL="0">
+                      <a:pPr marL="0" indent="0" algn="ctr">
                         <a:buNone/>
                       </a:pPr>
                       <a:r>
@@ -10265,7 +10008,7 @@
                     <a:bodyPr/>
                     <a:lstStyle/>
                     <a:p>
-                      <a:pPr algn="ctr" indent="0" marL="0">
+                      <a:pPr marL="0" indent="0" algn="ctr">
                         <a:buNone/>
                       </a:pPr>
                       <a:r>
@@ -10328,6 +10071,11 @@
                     </a:solidFill>
                   </a:tcPr>
                 </a:tc>
+                <a:extLst>
+                  <a:ext uri="{0D108BD9-81ED-4DB2-BD59-A6C34878D82A}">
+                    <a16:rowId xmlns:a16="http://schemas.microsoft.com/office/drawing/2014/main" val="10001"/>
+                  </a:ext>
+                </a:extLst>
               </a:tr>
               <a:tr h="475488">
                 <a:tc>
@@ -10335,7 +10083,7 @@
                     <a:bodyPr/>
                     <a:lstStyle/>
                     <a:p>
-                      <a:pPr algn="l" indent="0" marL="0">
+                      <a:pPr marL="0" indent="0" algn="l">
                         <a:buNone/>
                       </a:pPr>
                       <a:r>
@@ -10403,7 +10151,7 @@
                     <a:bodyPr/>
                     <a:lstStyle/>
                     <a:p>
-                      <a:pPr algn="ctr" indent="0" marL="0">
+                      <a:pPr marL="0" indent="0" algn="ctr">
                         <a:buNone/>
                       </a:pPr>
                       <a:r>
@@ -10471,7 +10219,7 @@
                     <a:bodyPr/>
                     <a:lstStyle/>
                     <a:p>
-                      <a:pPr algn="ctr" indent="0" marL="0">
+                      <a:pPr marL="0" indent="0" algn="ctr">
                         <a:buNone/>
                       </a:pPr>
                       <a:r>
@@ -10539,7 +10287,7 @@
                     <a:bodyPr/>
                     <a:lstStyle/>
                     <a:p>
-                      <a:pPr algn="ctr" indent="0" marL="0">
+                      <a:pPr marL="0" indent="0" algn="ctr">
                         <a:buNone/>
                       </a:pPr>
                       <a:r>
@@ -10602,6 +10350,11 @@
                     </a:solidFill>
                   </a:tcPr>
                 </a:tc>
+                <a:extLst>
+                  <a:ext uri="{0D108BD9-81ED-4DB2-BD59-A6C34878D82A}">
+                    <a16:rowId xmlns:a16="http://schemas.microsoft.com/office/drawing/2014/main" val="10002"/>
+                  </a:ext>
+                </a:extLst>
               </a:tr>
               <a:tr h="475488">
                 <a:tc>
@@ -10609,7 +10362,7 @@
                     <a:bodyPr/>
                     <a:lstStyle/>
                     <a:p>
-                      <a:pPr algn="l" indent="0" marL="0">
+                      <a:pPr marL="0" indent="0" algn="l">
                         <a:buNone/>
                       </a:pPr>
                       <a:r>
@@ -10677,7 +10430,7 @@
                     <a:bodyPr/>
                     <a:lstStyle/>
                     <a:p>
-                      <a:pPr algn="ctr" indent="0" marL="0">
+                      <a:pPr marL="0" indent="0" algn="ctr">
                         <a:buNone/>
                       </a:pPr>
                       <a:r>
@@ -10745,7 +10498,7 @@
                     <a:bodyPr/>
                     <a:lstStyle/>
                     <a:p>
-                      <a:pPr algn="ctr" indent="0" marL="0">
+                      <a:pPr marL="0" indent="0" algn="ctr">
                         <a:buNone/>
                       </a:pPr>
                       <a:r>
@@ -10813,7 +10566,7 @@
                     <a:bodyPr/>
                     <a:lstStyle/>
                     <a:p>
-                      <a:pPr algn="ctr" indent="0" marL="0">
+                      <a:pPr marL="0" indent="0" algn="ctr">
                         <a:buNone/>
                       </a:pPr>
                       <a:r>
@@ -10876,6 +10629,11 @@
                     </a:solidFill>
                   </a:tcPr>
                 </a:tc>
+                <a:extLst>
+                  <a:ext uri="{0D108BD9-81ED-4DB2-BD59-A6C34878D82A}">
+                    <a16:rowId xmlns:a16="http://schemas.microsoft.com/office/drawing/2014/main" val="10003"/>
+                  </a:ext>
+                </a:extLst>
               </a:tr>
               <a:tr h="475488">
                 <a:tc>
@@ -10883,7 +10641,7 @@
                     <a:bodyPr/>
                     <a:lstStyle/>
                     <a:p>
-                      <a:pPr algn="l" indent="0" marL="0">
+                      <a:pPr marL="0" indent="0" algn="l">
                         <a:buNone/>
                       </a:pPr>
                       <a:r>
@@ -10951,7 +10709,7 @@
                     <a:bodyPr/>
                     <a:lstStyle/>
                     <a:p>
-                      <a:pPr algn="ctr" indent="0" marL="0">
+                      <a:pPr marL="0" indent="0" algn="ctr">
                         <a:buNone/>
                       </a:pPr>
                       <a:r>
@@ -11019,7 +10777,7 @@
                     <a:bodyPr/>
                     <a:lstStyle/>
                     <a:p>
-                      <a:pPr algn="ctr" indent="0" marL="0">
+                      <a:pPr marL="0" indent="0" algn="ctr">
                         <a:buNone/>
                       </a:pPr>
                       <a:r>
@@ -11087,7 +10845,7 @@
                     <a:bodyPr/>
                     <a:lstStyle/>
                     <a:p>
-                      <a:pPr algn="ctr" indent="0" marL="0">
+                      <a:pPr marL="0" indent="0" algn="ctr">
                         <a:buNone/>
                       </a:pPr>
                       <a:r>
@@ -11150,6 +10908,11 @@
                     </a:solidFill>
                   </a:tcPr>
                 </a:tc>
+                <a:extLst>
+                  <a:ext uri="{0D108BD9-81ED-4DB2-BD59-A6C34878D82A}">
+                    <a16:rowId xmlns:a16="http://schemas.microsoft.com/office/drawing/2014/main" val="10004"/>
+                  </a:ext>
+                </a:extLst>
               </a:tr>
               <a:tr h="475488">
                 <a:tc>
@@ -11157,7 +10920,7 @@
                     <a:bodyPr/>
                     <a:lstStyle/>
                     <a:p>
-                      <a:pPr algn="l" indent="0" marL="0">
+                      <a:pPr marL="0" indent="0" algn="l">
                         <a:buNone/>
                       </a:pPr>
                       <a:r>
@@ -11225,7 +10988,7 @@
                     <a:bodyPr/>
                     <a:lstStyle/>
                     <a:p>
-                      <a:pPr algn="ctr" indent="0" marL="0">
+                      <a:pPr marL="0" indent="0" algn="ctr">
                         <a:buNone/>
                       </a:pPr>
                       <a:r>
@@ -11293,7 +11056,7 @@
                     <a:bodyPr/>
                     <a:lstStyle/>
                     <a:p>
-                      <a:pPr algn="ctr" indent="0" marL="0">
+                      <a:pPr marL="0" indent="0" algn="ctr">
                         <a:buNone/>
                       </a:pPr>
                       <a:r>
@@ -11361,7 +11124,7 @@
                     <a:bodyPr/>
                     <a:lstStyle/>
                     <a:p>
-                      <a:pPr algn="ctr" indent="0" marL="0">
+                      <a:pPr marL="0" indent="0" algn="ctr">
                         <a:buNone/>
                       </a:pPr>
                       <a:r>
@@ -11424,6 +11187,11 @@
                     </a:solidFill>
                   </a:tcPr>
                 </a:tc>
+                <a:extLst>
+                  <a:ext uri="{0D108BD9-81ED-4DB2-BD59-A6C34878D82A}">
+                    <a16:rowId xmlns:a16="http://schemas.microsoft.com/office/drawing/2014/main" val="10005"/>
+                  </a:ext>
+                </a:extLst>
               </a:tr>
               <a:tr h="475488">
                 <a:tc>
@@ -11431,7 +11199,7 @@
                     <a:bodyPr/>
                     <a:lstStyle/>
                     <a:p>
-                      <a:pPr algn="l" indent="0" marL="0">
+                      <a:pPr marL="0" indent="0" algn="l">
                         <a:buNone/>
                       </a:pPr>
                       <a:r>
@@ -11499,7 +11267,7 @@
                     <a:bodyPr/>
                     <a:lstStyle/>
                     <a:p>
-                      <a:pPr algn="ctr" indent="0" marL="0">
+                      <a:pPr marL="0" indent="0" algn="ctr">
                         <a:buNone/>
                       </a:pPr>
                       <a:r>
@@ -11567,7 +11335,7 @@
                     <a:bodyPr/>
                     <a:lstStyle/>
                     <a:p>
-                      <a:pPr algn="ctr" indent="0" marL="0">
+                      <a:pPr marL="0" indent="0" algn="ctr">
                         <a:buNone/>
                       </a:pPr>
                       <a:r>
@@ -11635,7 +11403,7 @@
                     <a:bodyPr/>
                     <a:lstStyle/>
                     <a:p>
-                      <a:pPr algn="ctr" indent="0" marL="0">
+                      <a:pPr marL="0" indent="0" algn="ctr">
                         <a:buNone/>
                       </a:pPr>
                       <a:r>
@@ -11698,6 +11466,11 @@
                     </a:solidFill>
                   </a:tcPr>
                 </a:tc>
+                <a:extLst>
+                  <a:ext uri="{0D108BD9-81ED-4DB2-BD59-A6C34878D82A}">
+                    <a16:rowId xmlns:a16="http://schemas.microsoft.com/office/drawing/2014/main" val="10006"/>
+                  </a:ext>
+                </a:extLst>
               </a:tr>
               <a:tr h="475488">
                 <a:tc>
@@ -11705,7 +11478,7 @@
                     <a:bodyPr/>
                     <a:lstStyle/>
                     <a:p>
-                      <a:pPr algn="l" indent="0" marL="0">
+                      <a:pPr marL="0" indent="0" algn="l">
                         <a:buNone/>
                       </a:pPr>
                       <a:r>
@@ -11773,7 +11546,7 @@
                     <a:bodyPr/>
                     <a:lstStyle/>
                     <a:p>
-                      <a:pPr algn="ctr" indent="0" marL="0">
+                      <a:pPr marL="0" indent="0" algn="ctr">
                         <a:buNone/>
                       </a:pPr>
                       <a:r>
@@ -11841,7 +11614,7 @@
                     <a:bodyPr/>
                     <a:lstStyle/>
                     <a:p>
-                      <a:pPr algn="ctr" indent="0" marL="0">
+                      <a:pPr marL="0" indent="0" algn="ctr">
                         <a:buNone/>
                       </a:pPr>
                       <a:r>
@@ -11909,7 +11682,7 @@
                     <a:bodyPr/>
                     <a:lstStyle/>
                     <a:p>
-                      <a:pPr algn="ctr" indent="0" marL="0">
+                      <a:pPr marL="0" indent="0" algn="ctr">
                         <a:buNone/>
                       </a:pPr>
                       <a:r>
@@ -11972,6 +11745,11 @@
                     </a:solidFill>
                   </a:tcPr>
                 </a:tc>
+                <a:extLst>
+                  <a:ext uri="{0D108BD9-81ED-4DB2-BD59-A6C34878D82A}">
+                    <a16:rowId xmlns:a16="http://schemas.microsoft.com/office/drawing/2014/main" val="10007"/>
+                  </a:ext>
+                </a:extLst>
               </a:tr>
             </a:tbl>
           </a:graphicData>
@@ -11998,7 +11776,7 @@
           <a:bodyPr wrap="square" lIns="0" tIns="0" rIns="0" bIns="0" rtlCol="0" anchor="ctr"/>
           <a:lstStyle/>
           <a:p>
-            <a:pPr indent="0" marL="0">
+            <a:pPr marL="0" indent="0">
               <a:buNone/>
             </a:pPr>
             <a:r>
@@ -12012,9 +11790,6 @@
               </a:rPr>
               <a:t>The difference that matters:  </a:t>
             </a:r>
-            <a:pPr indent="0" marL="0">
-              <a:buNone/>
-            </a:pPr>
             <a:r>
               <a:rPr lang="en-US" sz="1300" dirty="0">
                 <a:solidFill>
@@ -12051,7 +11826,7 @@
           <a:bodyPr wrap="square" lIns="0" tIns="0" rIns="0" bIns="0" rtlCol="0" anchor="ctr"/>
           <a:lstStyle/>
           <a:p>
-            <a:pPr algn="r" indent="0" marL="0">
+            <a:pPr marL="0" indent="0" algn="r">
               <a:buNone/>
             </a:pPr>
             <a:r>
@@ -12085,6 +11860,7 @@
         <a:solidFill>
           <a:srgbClr val="0A1C33"/>
         </a:solidFill>
+        <a:effectLst/>
       </p:bgPr>
     </p:bg>
     <p:spTree>
@@ -12210,11 +11986,11 @@
           <a:bodyPr wrap="square" lIns="0" tIns="0" rIns="0" bIns="0" rtlCol="0" anchor="ctr"/>
           <a:lstStyle/>
           <a:p>
-            <a:pPr indent="0" marL="0">
-              <a:buNone/>
-            </a:pPr>
-            <a:r>
-              <a:rPr lang="en-US" sz="1200" b="1" spc="300" kern="0" dirty="0">
+            <a:pPr marL="0" indent="0">
+              <a:buNone/>
+            </a:pPr>
+            <a:r>
+              <a:rPr lang="en-US" sz="1200" b="1" kern="0" spc="300" dirty="0">
                 <a:solidFill>
                   <a:srgbClr val="F59E0B"/>
                 </a:solidFill>
@@ -12249,7 +12025,7 @@
           <a:bodyPr wrap="square" lIns="0" tIns="0" rIns="0" bIns="0" rtlCol="0" anchor="ctr"/>
           <a:lstStyle/>
           <a:p>
-            <a:pPr indent="0" marL="0">
+            <a:pPr marL="0" indent="0">
               <a:buNone/>
             </a:pPr>
             <a:r>
@@ -12288,7 +12064,7 @@
           <a:bodyPr wrap="square" lIns="0" tIns="0" rIns="0" bIns="0" rtlCol="0" anchor="ctr"/>
           <a:lstStyle/>
           <a:p>
-            <a:pPr indent="0" marL="0">
+            <a:pPr marL="0" indent="0">
               <a:buNone/>
             </a:pPr>
             <a:r>
@@ -12374,7 +12150,7 @@
           <a:bodyPr wrap="square" lIns="0" tIns="0" rIns="0" bIns="0" rtlCol="0" anchor="ctr"/>
           <a:lstStyle/>
           <a:p>
-            <a:pPr algn="ctr" indent="0" marL="0">
+            <a:pPr marL="0" indent="0" algn="ctr">
               <a:buNone/>
             </a:pPr>
             <a:r>
@@ -12413,7 +12189,7 @@
           <a:bodyPr wrap="square" lIns="0" tIns="0" rIns="0" bIns="0" rtlCol="0" anchor="ctr"/>
           <a:lstStyle/>
           <a:p>
-            <a:pPr indent="0" marL="0">
+            <a:pPr marL="0" indent="0">
               <a:buNone/>
             </a:pPr>
             <a:r>
@@ -12452,7 +12228,7 @@
           <a:bodyPr wrap="square" lIns="0" tIns="0" rIns="0" bIns="0" rtlCol="0" anchor="ctr"/>
           <a:lstStyle/>
           <a:p>
-            <a:pPr indent="0" marL="0">
+            <a:pPr marL="0" indent="0">
               <a:buNone/>
             </a:pPr>
             <a:r>
@@ -12538,7 +12314,7 @@
           <a:bodyPr wrap="square" lIns="0" tIns="0" rIns="0" bIns="0" rtlCol="0" anchor="ctr"/>
           <a:lstStyle/>
           <a:p>
-            <a:pPr algn="ctr" indent="0" marL="0">
+            <a:pPr marL="0" indent="0" algn="ctr">
               <a:buNone/>
             </a:pPr>
             <a:r>
@@ -12577,7 +12353,7 @@
           <a:bodyPr wrap="square" lIns="0" tIns="0" rIns="0" bIns="0" rtlCol="0" anchor="ctr"/>
           <a:lstStyle/>
           <a:p>
-            <a:pPr indent="0" marL="0">
+            <a:pPr marL="0" indent="0">
               <a:buNone/>
             </a:pPr>
             <a:r>
@@ -12616,7 +12392,7 @@
           <a:bodyPr wrap="square" lIns="0" tIns="0" rIns="0" bIns="0" rtlCol="0" anchor="ctr"/>
           <a:lstStyle/>
           <a:p>
-            <a:pPr indent="0" marL="0">
+            <a:pPr marL="0" indent="0">
               <a:buNone/>
             </a:pPr>
             <a:r>
@@ -12702,7 +12478,7 @@
           <a:bodyPr wrap="square" lIns="0" tIns="0" rIns="0" bIns="0" rtlCol="0" anchor="ctr"/>
           <a:lstStyle/>
           <a:p>
-            <a:pPr algn="ctr" indent="0" marL="0">
+            <a:pPr marL="0" indent="0" algn="ctr">
               <a:buNone/>
             </a:pPr>
             <a:r>
@@ -12741,7 +12517,7 @@
           <a:bodyPr wrap="square" lIns="0" tIns="0" rIns="0" bIns="0" rtlCol="0" anchor="ctr"/>
           <a:lstStyle/>
           <a:p>
-            <a:pPr indent="0" marL="0">
+            <a:pPr marL="0" indent="0">
               <a:buNone/>
             </a:pPr>
             <a:r>
@@ -12780,7 +12556,7 @@
           <a:bodyPr wrap="square" lIns="0" tIns="0" rIns="0" bIns="0" rtlCol="0" anchor="ctr"/>
           <a:lstStyle/>
           <a:p>
-            <a:pPr indent="0" marL="0">
+            <a:pPr marL="0" indent="0">
               <a:buNone/>
             </a:pPr>
             <a:r>
@@ -12842,7 +12618,7 @@
           <a:bodyPr wrap="square" lIns="0" tIns="0" rIns="0" bIns="0" rtlCol="0" anchor="ctr"/>
           <a:lstStyle/>
           <a:p>
-            <a:pPr indent="0" marL="0">
+            <a:pPr marL="0" indent="0">
               <a:spcAft>
                 <a:spcPts val="400"/>
               </a:spcAft>
@@ -12857,27 +12633,18 @@
                 <a:ea typeface="Segoe UI" pitchFamily="34" charset="-122"/>
                 <a:cs typeface="Segoe UI" pitchFamily="34" charset="-120"/>
               </a:rPr>
-              <a:t>dynamiq Solutions — PM Control Tower team</a:t>
-            </a:r>
-            <a:endParaRPr lang="en-US" sz="1350" dirty="0"/>
-          </a:p>
-          <a:p>
-            <a:pPr indent="0" marL="0">
-              <a:spcAft>
-                <a:spcPts val="400"/>
-              </a:spcAft>
-              <a:buNone/>
-            </a:pPr>
-            <a:r>
-              <a:rPr lang="en-US" sz="1350" dirty="0">
-                <a:solidFill>
-                  <a:srgbClr val="9FB3CE"/>
-                </a:solidFill>
-                <a:latin typeface="Segoe UI" pitchFamily="34" charset="0"/>
-                <a:ea typeface="Segoe UI" pitchFamily="34" charset="-122"/>
-                <a:cs typeface="Segoe UI" pitchFamily="34" charset="-120"/>
-              </a:rPr>
-              <a:t>sales@dynamiq.solutions   ·   dynamiq.solutions/pmct</a:t>
+              <a:t> — PM Control </a:t>
+            </a:r>
+            <a:r>
+              <a:rPr lang="en-US" sz="1350" b="1">
+                <a:solidFill>
+                  <a:srgbClr val="FFFFFF"/>
+                </a:solidFill>
+                <a:latin typeface="Segoe UI" pitchFamily="34" charset="0"/>
+                <a:ea typeface="Segoe UI" pitchFamily="34" charset="-122"/>
+                <a:cs typeface="Segoe UI" pitchFamily="34" charset="-120"/>
+              </a:rPr>
+              <a:t>Tower team</a:t>
             </a:r>
             <a:endParaRPr lang="en-US" sz="1350" dirty="0"/>
           </a:p>
@@ -12904,11 +12671,11 @@
           <a:bodyPr wrap="square" lIns="0" tIns="0" rIns="0" bIns="0" rtlCol="0" anchor="ctr"/>
           <a:lstStyle/>
           <a:p>
-            <a:pPr algn="r" indent="0" marL="0">
-              <a:buNone/>
-            </a:pPr>
-            <a:r>
-              <a:rPr lang="en-US" sz="1200" b="1" spc="200" kern="0" dirty="0">
+            <a:pPr marL="0" indent="0" algn="r">
+              <a:buNone/>
+            </a:pPr>
+            <a:r>
+              <a:rPr lang="en-US" sz="1200" b="1" kern="0" spc="200" dirty="0">
                 <a:solidFill>
                   <a:srgbClr val="F59E0B"/>
                 </a:solidFill>
@@ -12938,6 +12705,7 @@
         <a:solidFill>
           <a:srgbClr val="FFFFFF"/>
         </a:solidFill>
+        <a:effectLst/>
       </p:bgPr>
     </p:bg>
     <p:spTree>
@@ -12975,11 +12743,11 @@
           <a:bodyPr wrap="square" lIns="0" tIns="0" rIns="0" bIns="0" rtlCol="0" anchor="ctr"/>
           <a:lstStyle/>
           <a:p>
-            <a:pPr indent="0" marL="0">
-              <a:buNone/>
-            </a:pPr>
-            <a:r>
-              <a:rPr lang="en-US" sz="1200" b="1" spc="300" kern="0" dirty="0">
+            <a:pPr marL="0" indent="0">
+              <a:buNone/>
+            </a:pPr>
+            <a:r>
+              <a:rPr lang="en-US" sz="1200" b="1" kern="0" spc="300" dirty="0">
                 <a:solidFill>
                   <a:srgbClr val="1D4ED8"/>
                 </a:solidFill>
@@ -13014,7 +12782,7 @@
           <a:bodyPr wrap="square" lIns="0" tIns="0" rIns="0" bIns="0" rtlCol="0" anchor="ctr"/>
           <a:lstStyle/>
           <a:p>
-            <a:pPr indent="0" marL="0">
+            <a:pPr marL="0" indent="0">
               <a:buNone/>
             </a:pPr>
             <a:r>
@@ -13053,7 +12821,7 @@
           <a:bodyPr wrap="square" lIns="0" tIns="0" rIns="0" bIns="0" rtlCol="0" anchor="ctr"/>
           <a:lstStyle/>
           <a:p>
-            <a:pPr indent="0" marL="0">
+            <a:pPr marL="0" indent="0">
               <a:buNone/>
             </a:pPr>
             <a:r>
@@ -13067,9 +12835,6 @@
               </a:rPr>
               <a:t>Leadership never has to ask a project manager for status. </a:t>
             </a:r>
-            <a:pPr indent="0" marL="0">
-              <a:buNone/>
-            </a:pPr>
             <a:r>
               <a:rPr lang="en-US" sz="1600" dirty="0">
                 <a:solidFill>
@@ -13106,7 +12871,7 @@
           </a:solidFill>
           <a:ln/>
           <a:effectLst>
-            <a:outerShdw sx="100000" sy="100000" kx="0" ky="0" algn="bl" rotWithShape="0" blurRad="88900" dist="25400" dir="5400000">
+            <a:outerShdw blurRad="88900" dist="25400" dir="5400000" algn="bl" rotWithShape="0">
               <a:srgbClr val="0A1C33">
                 <a:alpha val="16000"/>
               </a:srgbClr>
@@ -13135,7 +12900,7 @@
           <a:bodyPr wrap="square" lIns="254" tIns="254" rIns="254" bIns="254" rtlCol="0" anchor="ctr"/>
           <a:lstStyle/>
           <a:p>
-            <a:pPr algn="ctr" indent="0" marL="0">
+            <a:pPr marL="0" indent="0" algn="ctr">
               <a:buNone/>
             </a:pPr>
             <a:r>
@@ -13194,7 +12959,7 @@
           </a:solidFill>
           <a:ln/>
           <a:effectLst>
-            <a:outerShdw sx="100000" sy="100000" kx="0" ky="0" algn="bl" rotWithShape="0" blurRad="88900" dist="25400" dir="5400000">
+            <a:outerShdw blurRad="88900" dist="25400" dir="5400000" algn="bl" rotWithShape="0">
               <a:srgbClr val="0A1C33">
                 <a:alpha val="16000"/>
               </a:srgbClr>
@@ -13223,7 +12988,7 @@
           <a:bodyPr wrap="square" lIns="254" tIns="254" rIns="254" bIns="254" rtlCol="0" anchor="ctr"/>
           <a:lstStyle/>
           <a:p>
-            <a:pPr algn="ctr" indent="0" marL="0">
+            <a:pPr marL="0" indent="0" algn="ctr">
               <a:buNone/>
             </a:pPr>
             <a:r>
@@ -13282,7 +13047,7 @@
           </a:solidFill>
           <a:ln/>
           <a:effectLst>
-            <a:outerShdw sx="100000" sy="100000" kx="0" ky="0" algn="bl" rotWithShape="0" blurRad="88900" dist="25400" dir="5400000">
+            <a:outerShdw blurRad="88900" dist="25400" dir="5400000" algn="bl" rotWithShape="0">
               <a:srgbClr val="0A1C33">
                 <a:alpha val="16000"/>
               </a:srgbClr>
@@ -13311,7 +13076,7 @@
           <a:bodyPr wrap="square" lIns="254" tIns="254" rIns="254" bIns="254" rtlCol="0" anchor="ctr"/>
           <a:lstStyle/>
           <a:p>
-            <a:pPr algn="ctr" indent="0" marL="0">
+            <a:pPr marL="0" indent="0" algn="ctr">
               <a:buNone/>
             </a:pPr>
             <a:r>
@@ -13370,7 +13135,7 @@
           </a:solidFill>
           <a:ln/>
           <a:effectLst>
-            <a:outerShdw sx="100000" sy="100000" kx="0" ky="0" algn="bl" rotWithShape="0" blurRad="88900" dist="25400" dir="5400000">
+            <a:outerShdw blurRad="88900" dist="25400" dir="5400000" algn="bl" rotWithShape="0">
               <a:srgbClr val="0A1C33">
                 <a:alpha val="16000"/>
               </a:srgbClr>
@@ -13399,7 +13164,7 @@
           <a:bodyPr wrap="square" lIns="254" tIns="254" rIns="254" bIns="254" rtlCol="0" anchor="ctr"/>
           <a:lstStyle/>
           <a:p>
-            <a:pPr algn="ctr" indent="0" marL="0">
+            <a:pPr marL="0" indent="0" algn="ctr">
               <a:buNone/>
             </a:pPr>
             <a:r>
@@ -13458,7 +13223,7 @@
           </a:solidFill>
           <a:ln/>
           <a:effectLst>
-            <a:outerShdw sx="100000" sy="100000" kx="0" ky="0" algn="bl" rotWithShape="0" blurRad="88900" dist="25400" dir="5400000">
+            <a:outerShdw blurRad="88900" dist="25400" dir="5400000" algn="bl" rotWithShape="0">
               <a:srgbClr val="0A1C33">
                 <a:alpha val="16000"/>
               </a:srgbClr>
@@ -13487,7 +13252,7 @@
           <a:bodyPr wrap="square" lIns="254" tIns="254" rIns="254" bIns="254" rtlCol="0" anchor="ctr"/>
           <a:lstStyle/>
           <a:p>
-            <a:pPr algn="ctr" indent="0" marL="0">
+            <a:pPr marL="0" indent="0" algn="ctr">
               <a:buNone/>
             </a:pPr>
             <a:r>
@@ -13546,7 +13311,7 @@
           </a:solidFill>
           <a:ln/>
           <a:effectLst>
-            <a:outerShdw sx="100000" sy="100000" kx="0" ky="0" algn="bl" rotWithShape="0" blurRad="88900" dist="25400" dir="5400000">
+            <a:outerShdw blurRad="88900" dist="25400" dir="5400000" algn="bl" rotWithShape="0">
               <a:srgbClr val="0A1C33">
                 <a:alpha val="16000"/>
               </a:srgbClr>
@@ -13575,7 +13340,7 @@
           <a:bodyPr wrap="square" lIns="254" tIns="254" rIns="254" bIns="254" rtlCol="0" anchor="ctr"/>
           <a:lstStyle/>
           <a:p>
-            <a:pPr algn="ctr" indent="0" marL="0">
+            <a:pPr marL="0" indent="0" algn="ctr">
               <a:buNone/>
             </a:pPr>
             <a:r>
@@ -13634,7 +13399,7 @@
           </a:solidFill>
           <a:ln/>
           <a:effectLst>
-            <a:outerShdw sx="100000" sy="100000" kx="0" ky="0" algn="bl" rotWithShape="0" blurRad="88900" dist="25400" dir="5400000">
+            <a:outerShdw blurRad="88900" dist="25400" dir="5400000" algn="bl" rotWithShape="0">
               <a:srgbClr val="0A1C33">
                 <a:alpha val="16000"/>
               </a:srgbClr>
@@ -13663,7 +13428,7 @@
           <a:bodyPr wrap="square" lIns="254" tIns="254" rIns="254" bIns="254" rtlCol="0" anchor="ctr"/>
           <a:lstStyle/>
           <a:p>
-            <a:pPr algn="ctr" indent="0" marL="0">
+            <a:pPr marL="0" indent="0" algn="ctr">
               <a:buNone/>
             </a:pPr>
             <a:r>
@@ -13722,7 +13487,7 @@
           </a:solidFill>
           <a:ln/>
           <a:effectLst>
-            <a:outerShdw sx="100000" sy="100000" kx="0" ky="0" algn="bl" rotWithShape="0" blurRad="88900" dist="25400" dir="5400000">
+            <a:outerShdw blurRad="88900" dist="25400" dir="5400000" algn="bl" rotWithShape="0">
               <a:srgbClr val="0A1C33">
                 <a:alpha val="16000"/>
               </a:srgbClr>
@@ -13751,7 +13516,7 @@
           <a:bodyPr wrap="square" lIns="254" tIns="254" rIns="254" bIns="254" rtlCol="0" anchor="ctr"/>
           <a:lstStyle/>
           <a:p>
-            <a:pPr algn="ctr" indent="0" marL="0">
+            <a:pPr marL="0" indent="0" algn="ctr">
               <a:buNone/>
             </a:pPr>
             <a:r>
@@ -13790,7 +13555,7 @@
           <a:bodyPr wrap="square" lIns="0" tIns="0" rIns="0" bIns="0" rtlCol="0" anchor="ctr"/>
           <a:lstStyle/>
           <a:p>
-            <a:pPr indent="0" marL="0">
+            <a:pPr marL="0" indent="0">
               <a:buNone/>
             </a:pPr>
             <a:r>
@@ -13834,7 +13599,7 @@
             <a:prstDash val="solid"/>
           </a:ln>
           <a:effectLst>
-            <a:outerShdw sx="100000" sy="100000" kx="0" ky="0" algn="bl" rotWithShape="0" blurRad="88900" dist="25400" dir="5400000">
+            <a:outerShdw blurRad="88900" dist="25400" dir="5400000" algn="bl" rotWithShape="0">
               <a:srgbClr val="0A1C33">
                 <a:alpha val="16000"/>
               </a:srgbClr>
@@ -13863,7 +13628,7 @@
           <a:bodyPr wrap="square" lIns="0" tIns="0" rIns="0" bIns="0" rtlCol="0" anchor="ctr"/>
           <a:lstStyle/>
           <a:p>
-            <a:pPr algn="ctr" indent="0" marL="0">
+            <a:pPr marL="0" indent="0" algn="ctr">
               <a:buNone/>
             </a:pPr>
             <a:r>
@@ -13902,7 +13667,7 @@
           <a:bodyPr wrap="square" lIns="0" tIns="0" rIns="0" bIns="0" rtlCol="0" anchor="ctr"/>
           <a:lstStyle/>
           <a:p>
-            <a:pPr algn="ctr" indent="0" marL="0">
+            <a:pPr marL="0" indent="0" algn="ctr">
               <a:buNone/>
             </a:pPr>
             <a:r>
@@ -13946,7 +13711,7 @@
             <a:prstDash val="solid"/>
           </a:ln>
           <a:effectLst>
-            <a:outerShdw sx="100000" sy="100000" kx="0" ky="0" algn="bl" rotWithShape="0" blurRad="88900" dist="25400" dir="5400000">
+            <a:outerShdw blurRad="88900" dist="25400" dir="5400000" algn="bl" rotWithShape="0">
               <a:srgbClr val="0A1C33">
                 <a:alpha val="16000"/>
               </a:srgbClr>
@@ -13975,7 +13740,7 @@
           <a:bodyPr wrap="square" lIns="0" tIns="0" rIns="0" bIns="0" rtlCol="0" anchor="ctr"/>
           <a:lstStyle/>
           <a:p>
-            <a:pPr algn="ctr" indent="0" marL="0">
+            <a:pPr marL="0" indent="0" algn="ctr">
               <a:buNone/>
             </a:pPr>
             <a:r>
@@ -14014,7 +13779,7 @@
           <a:bodyPr wrap="square" lIns="0" tIns="0" rIns="0" bIns="0" rtlCol="0" anchor="ctr"/>
           <a:lstStyle/>
           <a:p>
-            <a:pPr algn="ctr" indent="0" marL="0">
+            <a:pPr marL="0" indent="0" algn="ctr">
               <a:buNone/>
             </a:pPr>
             <a:r>
@@ -14058,7 +13823,7 @@
             <a:prstDash val="solid"/>
           </a:ln>
           <a:effectLst>
-            <a:outerShdw sx="100000" sy="100000" kx="0" ky="0" algn="bl" rotWithShape="0" blurRad="88900" dist="25400" dir="5400000">
+            <a:outerShdw blurRad="88900" dist="25400" dir="5400000" algn="bl" rotWithShape="0">
               <a:srgbClr val="0A1C33">
                 <a:alpha val="16000"/>
               </a:srgbClr>
@@ -14087,7 +13852,7 @@
           <a:bodyPr wrap="square" lIns="0" tIns="0" rIns="0" bIns="0" rtlCol="0" anchor="ctr"/>
           <a:lstStyle/>
           <a:p>
-            <a:pPr algn="ctr" indent="0" marL="0">
+            <a:pPr marL="0" indent="0" algn="ctr">
               <a:buNone/>
             </a:pPr>
             <a:r>
@@ -14126,7 +13891,7 @@
           <a:bodyPr wrap="square" lIns="0" tIns="0" rIns="0" bIns="0" rtlCol="0" anchor="ctr"/>
           <a:lstStyle/>
           <a:p>
-            <a:pPr algn="ctr" indent="0" marL="0">
+            <a:pPr marL="0" indent="0" algn="ctr">
               <a:buNone/>
             </a:pPr>
             <a:r>
@@ -14170,7 +13935,7 @@
             <a:prstDash val="solid"/>
           </a:ln>
           <a:effectLst>
-            <a:outerShdw sx="100000" sy="100000" kx="0" ky="0" algn="bl" rotWithShape="0" blurRad="88900" dist="25400" dir="5400000">
+            <a:outerShdw blurRad="88900" dist="25400" dir="5400000" algn="bl" rotWithShape="0">
               <a:srgbClr val="0A1C33">
                 <a:alpha val="16000"/>
               </a:srgbClr>
@@ -14199,7 +13964,7 @@
           <a:bodyPr wrap="square" lIns="0" tIns="0" rIns="0" bIns="0" rtlCol="0" anchor="ctr"/>
           <a:lstStyle/>
           <a:p>
-            <a:pPr algn="ctr" indent="0" marL="0">
+            <a:pPr marL="0" indent="0" algn="ctr">
               <a:buNone/>
             </a:pPr>
             <a:r>
@@ -14238,7 +14003,7 @@
           <a:bodyPr wrap="square" lIns="0" tIns="0" rIns="0" bIns="0" rtlCol="0" anchor="ctr"/>
           <a:lstStyle/>
           <a:p>
-            <a:pPr algn="ctr" indent="0" marL="0">
+            <a:pPr marL="0" indent="0" algn="ctr">
               <a:buNone/>
             </a:pPr>
             <a:r>
@@ -14282,7 +14047,7 @@
             <a:prstDash val="solid"/>
           </a:ln>
           <a:effectLst>
-            <a:outerShdw sx="100000" sy="100000" kx="0" ky="0" algn="bl" rotWithShape="0" blurRad="88900" dist="25400" dir="5400000">
+            <a:outerShdw blurRad="88900" dist="25400" dir="5400000" algn="bl" rotWithShape="0">
               <a:srgbClr val="0A1C33">
                 <a:alpha val="16000"/>
               </a:srgbClr>
@@ -14311,7 +14076,7 @@
           <a:bodyPr wrap="square" lIns="0" tIns="0" rIns="0" bIns="0" rtlCol="0" anchor="ctr"/>
           <a:lstStyle/>
           <a:p>
-            <a:pPr algn="ctr" indent="0" marL="0">
+            <a:pPr marL="0" indent="0" algn="ctr">
               <a:buNone/>
             </a:pPr>
             <a:r>
@@ -14350,7 +14115,7 @@
           <a:bodyPr wrap="square" lIns="0" tIns="0" rIns="0" bIns="0" rtlCol="0" anchor="ctr"/>
           <a:lstStyle/>
           <a:p>
-            <a:pPr algn="ctr" indent="0" marL="0">
+            <a:pPr marL="0" indent="0" algn="ctr">
               <a:buNone/>
             </a:pPr>
             <a:r>
@@ -14389,7 +14154,7 @@
           <a:bodyPr wrap="square" lIns="0" tIns="0" rIns="0" bIns="0" rtlCol="0" anchor="ctr"/>
           <a:lstStyle/>
           <a:p>
-            <a:pPr indent="0" marL="0">
+            <a:pPr marL="0" indent="0">
               <a:buNone/>
             </a:pPr>
             <a:r>
@@ -14428,7 +14193,7 @@
           <a:bodyPr wrap="square" lIns="0" tIns="0" rIns="0" bIns="0" rtlCol="0" anchor="ctr"/>
           <a:lstStyle/>
           <a:p>
-            <a:pPr algn="r" indent="0" marL="0">
+            <a:pPr marL="0" indent="0" algn="r">
               <a:buNone/>
             </a:pPr>
             <a:r>
@@ -14462,6 +14227,7 @@
         <a:solidFill>
           <a:srgbClr val="FFFFFF"/>
         </a:solidFill>
+        <a:effectLst/>
       </p:bgPr>
     </p:bg>
     <p:spTree>
@@ -14499,11 +14265,11 @@
           <a:bodyPr wrap="square" lIns="0" tIns="0" rIns="0" bIns="0" rtlCol="0" anchor="ctr"/>
           <a:lstStyle/>
           <a:p>
-            <a:pPr indent="0" marL="0">
-              <a:buNone/>
-            </a:pPr>
-            <a:r>
-              <a:rPr lang="en-US" sz="1200" b="1" spc="300" kern="0" dirty="0">
+            <a:pPr marL="0" indent="0">
+              <a:buNone/>
+            </a:pPr>
+            <a:r>
+              <a:rPr lang="en-US" sz="1200" b="1" kern="0" spc="300" dirty="0">
                 <a:solidFill>
                   <a:srgbClr val="1D4ED8"/>
                 </a:solidFill>
@@ -14538,7 +14304,7 @@
           <a:bodyPr wrap="square" lIns="0" tIns="0" rIns="0" bIns="0" rtlCol="0" anchor="ctr"/>
           <a:lstStyle/>
           <a:p>
-            <a:pPr indent="0" marL="0">
+            <a:pPr marL="0" indent="0">
               <a:buNone/>
             </a:pPr>
             <a:r>
@@ -14582,7 +14348,7 @@
             <a:prstDash val="solid"/>
           </a:ln>
           <a:effectLst>
-            <a:outerShdw sx="100000" sy="100000" kx="0" ky="0" algn="bl" rotWithShape="0" blurRad="88900" dist="25400" dir="5400000">
+            <a:outerShdw blurRad="88900" dist="25400" dir="5400000" algn="bl" rotWithShape="0">
               <a:srgbClr val="0A1C33">
                 <a:alpha val="16000"/>
               </a:srgbClr>
@@ -14631,7 +14397,7 @@
           <a:bodyPr wrap="square" lIns="0" tIns="0" rIns="0" bIns="0" rtlCol="0" anchor="ctr"/>
           <a:lstStyle/>
           <a:p>
-            <a:pPr indent="0" marL="0">
+            <a:pPr marL="0" indent="0">
               <a:buNone/>
             </a:pPr>
             <a:r>
@@ -14670,7 +14436,7 @@
           <a:bodyPr wrap="square" lIns="0" tIns="0" rIns="0" bIns="0" rtlCol="0" anchor="ctr"/>
           <a:lstStyle/>
           <a:p>
-            <a:pPr indent="0" marL="0">
+            <a:pPr marL="0" indent="0">
               <a:buNone/>
             </a:pPr>
             <a:r>
@@ -14714,7 +14480,7 @@
             <a:prstDash val="solid"/>
           </a:ln>
           <a:effectLst>
-            <a:outerShdw sx="100000" sy="100000" kx="0" ky="0" algn="bl" rotWithShape="0" blurRad="88900" dist="25400" dir="5400000">
+            <a:outerShdw blurRad="88900" dist="25400" dir="5400000" algn="bl" rotWithShape="0">
               <a:srgbClr val="0A1C33">
                 <a:alpha val="16000"/>
               </a:srgbClr>
@@ -14763,7 +14529,7 @@
           <a:bodyPr wrap="square" lIns="0" tIns="0" rIns="0" bIns="0" rtlCol="0" anchor="ctr"/>
           <a:lstStyle/>
           <a:p>
-            <a:pPr indent="0" marL="0">
+            <a:pPr marL="0" indent="0">
               <a:buNone/>
             </a:pPr>
             <a:r>
@@ -14802,7 +14568,7 @@
           <a:bodyPr wrap="square" lIns="0" tIns="0" rIns="0" bIns="0" rtlCol="0" anchor="ctr"/>
           <a:lstStyle/>
           <a:p>
-            <a:pPr indent="0" marL="0">
+            <a:pPr marL="0" indent="0">
               <a:buNone/>
             </a:pPr>
             <a:r>
@@ -14846,7 +14612,7 @@
             <a:prstDash val="solid"/>
           </a:ln>
           <a:effectLst>
-            <a:outerShdw sx="100000" sy="100000" kx="0" ky="0" algn="bl" rotWithShape="0" blurRad="88900" dist="25400" dir="5400000">
+            <a:outerShdw blurRad="88900" dist="25400" dir="5400000" algn="bl" rotWithShape="0">
               <a:srgbClr val="0A1C33">
                 <a:alpha val="16000"/>
               </a:srgbClr>
@@ -14895,7 +14661,7 @@
           <a:bodyPr wrap="square" lIns="0" tIns="0" rIns="0" bIns="0" rtlCol="0" anchor="ctr"/>
           <a:lstStyle/>
           <a:p>
-            <a:pPr indent="0" marL="0">
+            <a:pPr marL="0" indent="0">
               <a:buNone/>
             </a:pPr>
             <a:r>
@@ -14934,7 +14700,7 @@
           <a:bodyPr wrap="square" lIns="0" tIns="0" rIns="0" bIns="0" rtlCol="0" anchor="ctr"/>
           <a:lstStyle/>
           <a:p>
-            <a:pPr indent="0" marL="0">
+            <a:pPr marL="0" indent="0">
               <a:buNone/>
             </a:pPr>
             <a:r>
@@ -14978,7 +14744,7 @@
             <a:prstDash val="solid"/>
           </a:ln>
           <a:effectLst>
-            <a:outerShdw sx="100000" sy="100000" kx="0" ky="0" algn="bl" rotWithShape="0" blurRad="88900" dist="25400" dir="5400000">
+            <a:outerShdw blurRad="88900" dist="25400" dir="5400000" algn="bl" rotWithShape="0">
               <a:srgbClr val="0A1C33">
                 <a:alpha val="16000"/>
               </a:srgbClr>
@@ -15027,7 +14793,7 @@
           <a:bodyPr wrap="square" lIns="0" tIns="0" rIns="0" bIns="0" rtlCol="0" anchor="ctr"/>
           <a:lstStyle/>
           <a:p>
-            <a:pPr indent="0" marL="0">
+            <a:pPr marL="0" indent="0">
               <a:buNone/>
             </a:pPr>
             <a:r>
@@ -15066,7 +14832,7 @@
           <a:bodyPr wrap="square" lIns="0" tIns="0" rIns="0" bIns="0" rtlCol="0" anchor="ctr"/>
           <a:lstStyle/>
           <a:p>
-            <a:pPr indent="0" marL="0">
+            <a:pPr marL="0" indent="0">
               <a:buNone/>
             </a:pPr>
             <a:r>
@@ -15110,7 +14876,7 @@
             <a:prstDash val="solid"/>
           </a:ln>
           <a:effectLst>
-            <a:outerShdw sx="100000" sy="100000" kx="0" ky="0" algn="bl" rotWithShape="0" blurRad="88900" dist="25400" dir="5400000">
+            <a:outerShdw blurRad="88900" dist="25400" dir="5400000" algn="bl" rotWithShape="0">
               <a:srgbClr val="0A1C33">
                 <a:alpha val="16000"/>
               </a:srgbClr>
@@ -15159,7 +14925,7 @@
           <a:bodyPr wrap="square" lIns="0" tIns="0" rIns="0" bIns="0" rtlCol="0" anchor="ctr"/>
           <a:lstStyle/>
           <a:p>
-            <a:pPr indent="0" marL="0">
+            <a:pPr marL="0" indent="0">
               <a:buNone/>
             </a:pPr>
             <a:r>
@@ -15198,7 +14964,7 @@
           <a:bodyPr wrap="square" lIns="0" tIns="0" rIns="0" bIns="0" rtlCol="0" anchor="ctr"/>
           <a:lstStyle/>
           <a:p>
-            <a:pPr indent="0" marL="0">
+            <a:pPr marL="0" indent="0">
               <a:buNone/>
             </a:pPr>
             <a:r>
@@ -15242,7 +15008,7 @@
             <a:prstDash val="solid"/>
           </a:ln>
           <a:effectLst>
-            <a:outerShdw sx="100000" sy="100000" kx="0" ky="0" algn="bl" rotWithShape="0" blurRad="88900" dist="25400" dir="5400000">
+            <a:outerShdw blurRad="88900" dist="25400" dir="5400000" algn="bl" rotWithShape="0">
               <a:srgbClr val="0A1C33">
                 <a:alpha val="16000"/>
               </a:srgbClr>
@@ -15291,7 +15057,7 @@
           <a:bodyPr wrap="square" lIns="0" tIns="0" rIns="0" bIns="0" rtlCol="0" anchor="ctr"/>
           <a:lstStyle/>
           <a:p>
-            <a:pPr indent="0" marL="0">
+            <a:pPr marL="0" indent="0">
               <a:buNone/>
             </a:pPr>
             <a:r>
@@ -15330,7 +15096,7 @@
           <a:bodyPr wrap="square" lIns="0" tIns="0" rIns="0" bIns="0" rtlCol="0" anchor="ctr"/>
           <a:lstStyle/>
           <a:p>
-            <a:pPr indent="0" marL="0">
+            <a:pPr marL="0" indent="0">
               <a:buNone/>
             </a:pPr>
             <a:r>
@@ -15374,7 +15140,7 @@
             <a:prstDash val="solid"/>
           </a:ln>
           <a:effectLst>
-            <a:outerShdw sx="100000" sy="100000" kx="0" ky="0" algn="bl" rotWithShape="0" blurRad="88900" dist="25400" dir="5400000">
+            <a:outerShdw blurRad="88900" dist="25400" dir="5400000" algn="bl" rotWithShape="0">
               <a:srgbClr val="0A1C33">
                 <a:alpha val="16000"/>
               </a:srgbClr>
@@ -15423,7 +15189,7 @@
           <a:bodyPr wrap="square" lIns="0" tIns="0" rIns="0" bIns="0" rtlCol="0" anchor="ctr"/>
           <a:lstStyle/>
           <a:p>
-            <a:pPr indent="0" marL="0">
+            <a:pPr marL="0" indent="0">
               <a:buNone/>
             </a:pPr>
             <a:r>
@@ -15462,7 +15228,7 @@
           <a:bodyPr wrap="square" lIns="0" tIns="0" rIns="0" bIns="0" rtlCol="0" anchor="ctr"/>
           <a:lstStyle/>
           <a:p>
-            <a:pPr indent="0" marL="0">
+            <a:pPr marL="0" indent="0">
               <a:buNone/>
             </a:pPr>
             <a:r>
@@ -15506,7 +15272,7 @@
             <a:prstDash val="solid"/>
           </a:ln>
           <a:effectLst>
-            <a:outerShdw sx="100000" sy="100000" kx="0" ky="0" algn="bl" rotWithShape="0" blurRad="88900" dist="25400" dir="5400000">
+            <a:outerShdw blurRad="88900" dist="25400" dir="5400000" algn="bl" rotWithShape="0">
               <a:srgbClr val="0A1C33">
                 <a:alpha val="16000"/>
               </a:srgbClr>
@@ -15555,7 +15321,7 @@
           <a:bodyPr wrap="square" lIns="0" tIns="0" rIns="0" bIns="0" rtlCol="0" anchor="ctr"/>
           <a:lstStyle/>
           <a:p>
-            <a:pPr indent="0" marL="0">
+            <a:pPr marL="0" indent="0">
               <a:buNone/>
             </a:pPr>
             <a:r>
@@ -15594,7 +15360,7 @@
           <a:bodyPr wrap="square" lIns="0" tIns="0" rIns="0" bIns="0" rtlCol="0" anchor="ctr"/>
           <a:lstStyle/>
           <a:p>
-            <a:pPr indent="0" marL="0">
+            <a:pPr marL="0" indent="0">
               <a:buNone/>
             </a:pPr>
             <a:r>
@@ -15633,7 +15399,7 @@
           <a:bodyPr wrap="square" lIns="0" tIns="0" rIns="0" bIns="0" rtlCol="0" anchor="ctr"/>
           <a:lstStyle/>
           <a:p>
-            <a:pPr indent="0" marL="0">
+            <a:pPr marL="0" indent="0">
               <a:buNone/>
             </a:pPr>
             <a:r>
@@ -15647,9 +15413,6 @@
               </a:rPr>
               <a:t>The moat is not any single feature — </a:t>
             </a:r>
-            <a:pPr indent="0" marL="0">
-              <a:buNone/>
-            </a:pPr>
             <a:r>
               <a:rPr lang="en-US" sz="1300" b="1" dirty="0">
                 <a:solidFill>
@@ -15686,7 +15449,7 @@
           <a:bodyPr wrap="square" lIns="0" tIns="0" rIns="0" bIns="0" rtlCol="0" anchor="ctr"/>
           <a:lstStyle/>
           <a:p>
-            <a:pPr algn="r" indent="0" marL="0">
+            <a:pPr marL="0" indent="0" algn="r">
               <a:buNone/>
             </a:pPr>
             <a:r>
@@ -15720,6 +15483,7 @@
         <a:solidFill>
           <a:srgbClr val="FFFFFF"/>
         </a:solidFill>
+        <a:effectLst/>
       </p:bgPr>
     </p:bg>
     <p:spTree>
@@ -15757,11 +15521,11 @@
           <a:bodyPr wrap="square" lIns="0" tIns="0" rIns="0" bIns="0" rtlCol="0" anchor="ctr"/>
           <a:lstStyle/>
           <a:p>
-            <a:pPr indent="0" marL="0">
-              <a:buNone/>
-            </a:pPr>
-            <a:r>
-              <a:rPr lang="en-US" sz="1200" b="1" spc="300" kern="0" dirty="0">
+            <a:pPr marL="0" indent="0">
+              <a:buNone/>
+            </a:pPr>
+            <a:r>
+              <a:rPr lang="en-US" sz="1200" b="1" kern="0" spc="300" dirty="0">
                 <a:solidFill>
                   <a:srgbClr val="1D4ED8"/>
                 </a:solidFill>
@@ -15796,7 +15560,7 @@
           <a:bodyPr wrap="square" lIns="0" tIns="0" rIns="0" bIns="0" rtlCol="0" anchor="ctr"/>
           <a:lstStyle/>
           <a:p>
-            <a:pPr indent="0" marL="0">
+            <a:pPr marL="0" indent="0">
               <a:buNone/>
             </a:pPr>
             <a:r>
@@ -15840,7 +15604,7 @@
             <a:prstDash val="solid"/>
           </a:ln>
           <a:effectLst>
-            <a:outerShdw sx="100000" sy="100000" kx="0" ky="0" algn="bl" rotWithShape="0" blurRad="88900" dist="25400" dir="5400000">
+            <a:outerShdw blurRad="88900" dist="25400" dir="5400000" algn="bl" rotWithShape="0">
               <a:srgbClr val="0A1C33">
                 <a:alpha val="16000"/>
               </a:srgbClr>
@@ -15869,7 +15633,7 @@
           <a:bodyPr wrap="square" lIns="0" tIns="0" rIns="0" bIns="0" rtlCol="0" anchor="ctr"/>
           <a:lstStyle/>
           <a:p>
-            <a:pPr algn="ctr" indent="0" marL="0">
+            <a:pPr marL="0" indent="0" algn="ctr">
               <a:buNone/>
             </a:pPr>
             <a:r>
@@ -15908,7 +15672,7 @@
           <a:bodyPr wrap="square" lIns="0" tIns="0" rIns="0" bIns="0" rtlCol="0" anchor="ctr"/>
           <a:lstStyle/>
           <a:p>
-            <a:pPr algn="ctr" indent="0" marL="0">
+            <a:pPr marL="0" indent="0" algn="ctr">
               <a:buNone/>
             </a:pPr>
             <a:r>
@@ -15952,7 +15716,7 @@
             <a:prstDash val="solid"/>
           </a:ln>
           <a:effectLst>
-            <a:outerShdw sx="100000" sy="100000" kx="0" ky="0" algn="bl" rotWithShape="0" blurRad="88900" dist="25400" dir="5400000">
+            <a:outerShdw blurRad="88900" dist="25400" dir="5400000" algn="bl" rotWithShape="0">
               <a:srgbClr val="0A1C33">
                 <a:alpha val="16000"/>
               </a:srgbClr>
@@ -15981,7 +15745,7 @@
           <a:bodyPr wrap="square" lIns="0" tIns="0" rIns="0" bIns="0" rtlCol="0" anchor="ctr"/>
           <a:lstStyle/>
           <a:p>
-            <a:pPr algn="ctr" indent="0" marL="0">
+            <a:pPr marL="0" indent="0" algn="ctr">
               <a:buNone/>
             </a:pPr>
             <a:r>
@@ -16020,7 +15784,7 @@
           <a:bodyPr wrap="square" lIns="0" tIns="0" rIns="0" bIns="0" rtlCol="0" anchor="ctr"/>
           <a:lstStyle/>
           <a:p>
-            <a:pPr algn="ctr" indent="0" marL="0">
+            <a:pPr marL="0" indent="0" algn="ctr">
               <a:buNone/>
             </a:pPr>
             <a:r>
@@ -16064,7 +15828,7 @@
             <a:prstDash val="solid"/>
           </a:ln>
           <a:effectLst>
-            <a:outerShdw sx="100000" sy="100000" kx="0" ky="0" algn="bl" rotWithShape="0" blurRad="88900" dist="25400" dir="5400000">
+            <a:outerShdw blurRad="88900" dist="25400" dir="5400000" algn="bl" rotWithShape="0">
               <a:srgbClr val="0A1C33">
                 <a:alpha val="16000"/>
               </a:srgbClr>
@@ -16093,7 +15857,7 @@
           <a:bodyPr wrap="square" lIns="0" tIns="0" rIns="0" bIns="0" rtlCol="0" anchor="ctr"/>
           <a:lstStyle/>
           <a:p>
-            <a:pPr algn="ctr" indent="0" marL="0">
+            <a:pPr marL="0" indent="0" algn="ctr">
               <a:buNone/>
             </a:pPr>
             <a:r>
@@ -16132,7 +15896,7 @@
           <a:bodyPr wrap="square" lIns="0" tIns="0" rIns="0" bIns="0" rtlCol="0" anchor="ctr"/>
           <a:lstStyle/>
           <a:p>
-            <a:pPr algn="ctr" indent="0" marL="0">
+            <a:pPr marL="0" indent="0" algn="ctr">
               <a:buNone/>
             </a:pPr>
             <a:r>
@@ -16176,7 +15940,7 @@
             <a:prstDash val="solid"/>
           </a:ln>
           <a:effectLst>
-            <a:outerShdw sx="100000" sy="100000" kx="0" ky="0" algn="bl" rotWithShape="0" blurRad="88900" dist="25400" dir="5400000">
+            <a:outerShdw blurRad="88900" dist="25400" dir="5400000" algn="bl" rotWithShape="0">
               <a:srgbClr val="0A1C33">
                 <a:alpha val="16000"/>
               </a:srgbClr>
@@ -16205,7 +15969,7 @@
           <a:bodyPr wrap="square" lIns="0" tIns="0" rIns="0" bIns="0" rtlCol="0" anchor="ctr"/>
           <a:lstStyle/>
           <a:p>
-            <a:pPr indent="0" marL="0">
+            <a:pPr marL="0" indent="0">
               <a:buNone/>
             </a:pPr>
             <a:r>
@@ -16329,7 +16093,7 @@
           <a:bodyPr wrap="square" lIns="0" tIns="0" rIns="0" bIns="0" rtlCol="0" anchor="ctr"/>
           <a:lstStyle/>
           <a:p>
-            <a:pPr indent="0" marL="0">
+            <a:pPr marL="0" indent="0">
               <a:buNone/>
             </a:pPr>
             <a:r>
@@ -16368,7 +16132,7 @@
           <a:bodyPr wrap="square" lIns="0" tIns="0" rIns="0" bIns="0" rtlCol="0" anchor="ctr"/>
           <a:lstStyle/>
           <a:p>
-            <a:pPr algn="r" indent="0" marL="0">
+            <a:pPr marL="0" indent="0" algn="r">
               <a:buNone/>
             </a:pPr>
             <a:r>
@@ -16402,6 +16166,7 @@
         <a:solidFill>
           <a:srgbClr val="FFFFFF"/>
         </a:solidFill>
+        <a:effectLst/>
       </p:bgPr>
     </p:bg>
     <p:spTree>
@@ -16439,11 +16204,11 @@
           <a:bodyPr wrap="square" lIns="0" tIns="0" rIns="0" bIns="0" rtlCol="0" anchor="ctr"/>
           <a:lstStyle/>
           <a:p>
-            <a:pPr indent="0" marL="0">
-              <a:buNone/>
-            </a:pPr>
-            <a:r>
-              <a:rPr lang="en-US" sz="1200" b="1" spc="300" kern="0" dirty="0">
+            <a:pPr marL="0" indent="0">
+              <a:buNone/>
+            </a:pPr>
+            <a:r>
+              <a:rPr lang="en-US" sz="1200" b="1" kern="0" spc="300" dirty="0">
                 <a:solidFill>
                   <a:srgbClr val="1D4ED8"/>
                 </a:solidFill>
@@ -16478,7 +16243,7 @@
           <a:bodyPr wrap="square" lIns="0" tIns="0" rIns="0" bIns="0" rtlCol="0" anchor="ctr"/>
           <a:lstStyle/>
           <a:p>
-            <a:pPr indent="0" marL="0">
+            <a:pPr marL="0" indent="0">
               <a:buNone/>
             </a:pPr>
             <a:r>
@@ -16539,7 +16304,7 @@
           <a:bodyPr wrap="square" lIns="0" tIns="0" rIns="0" bIns="0" rtlCol="0" anchor="ctr"/>
           <a:lstStyle/>
           <a:p>
-            <a:pPr indent="0" marL="0">
+            <a:pPr marL="0" indent="0">
               <a:buNone/>
             </a:pPr>
             <a:r>
@@ -16620,7 +16385,7 @@
           <a:bodyPr wrap="square" lIns="0" tIns="0" rIns="0" bIns="0" rtlCol="0" anchor="ctr"/>
           <a:lstStyle/>
           <a:p>
-            <a:pPr indent="0" marL="0">
+            <a:pPr marL="0" indent="0">
               <a:buNone/>
             </a:pPr>
             <a:r>
@@ -16681,7 +16446,7 @@
           <a:bodyPr wrap="square" lIns="0" tIns="0" rIns="0" bIns="0" rtlCol="0" anchor="ctr"/>
           <a:lstStyle/>
           <a:p>
-            <a:pPr indent="0" marL="0">
+            <a:pPr marL="0" indent="0">
               <a:buNone/>
             </a:pPr>
             <a:r>
@@ -16762,7 +16527,7 @@
           <a:bodyPr wrap="square" lIns="0" tIns="0" rIns="0" bIns="0" rtlCol="0" anchor="ctr"/>
           <a:lstStyle/>
           <a:p>
-            <a:pPr indent="0" marL="0">
+            <a:pPr marL="0" indent="0">
               <a:buNone/>
             </a:pPr>
             <a:r>
@@ -16823,7 +16588,7 @@
           <a:bodyPr wrap="square" lIns="0" tIns="0" rIns="0" bIns="0" rtlCol="0" anchor="ctr"/>
           <a:lstStyle/>
           <a:p>
-            <a:pPr indent="0" marL="0">
+            <a:pPr marL="0" indent="0">
               <a:buNone/>
             </a:pPr>
             <a:r>
@@ -16904,7 +16669,7 @@
           <a:bodyPr wrap="square" lIns="0" tIns="0" rIns="0" bIns="0" rtlCol="0" anchor="ctr"/>
           <a:lstStyle/>
           <a:p>
-            <a:pPr indent="0" marL="0">
+            <a:pPr marL="0" indent="0">
               <a:buNone/>
             </a:pPr>
             <a:r>
@@ -16965,7 +16730,7 @@
           <a:bodyPr wrap="square" lIns="0" tIns="0" rIns="0" bIns="0" rtlCol="0" anchor="ctr"/>
           <a:lstStyle/>
           <a:p>
-            <a:pPr indent="0" marL="0">
+            <a:pPr marL="0" indent="0">
               <a:buNone/>
             </a:pPr>
             <a:r>
@@ -17046,7 +16811,7 @@
           <a:bodyPr wrap="square" lIns="0" tIns="0" rIns="0" bIns="0" rtlCol="0" anchor="ctr"/>
           <a:lstStyle/>
           <a:p>
-            <a:pPr indent="0" marL="0">
+            <a:pPr marL="0" indent="0">
               <a:buNone/>
             </a:pPr>
             <a:r>
@@ -17107,7 +16872,7 @@
           <a:bodyPr wrap="square" lIns="0" tIns="0" rIns="0" bIns="0" rtlCol="0" anchor="ctr"/>
           <a:lstStyle/>
           <a:p>
-            <a:pPr indent="0" marL="0">
+            <a:pPr marL="0" indent="0">
               <a:buNone/>
             </a:pPr>
             <a:r>
@@ -17188,7 +16953,7 @@
           <a:bodyPr wrap="square" lIns="0" tIns="0" rIns="0" bIns="0" rtlCol="0" anchor="ctr"/>
           <a:lstStyle/>
           <a:p>
-            <a:pPr indent="0" marL="0">
+            <a:pPr marL="0" indent="0">
               <a:buNone/>
             </a:pPr>
             <a:r>
@@ -17227,7 +16992,7 @@
           <a:bodyPr wrap="square" lIns="0" tIns="0" rIns="0" bIns="0" rtlCol="0" anchor="ctr"/>
           <a:lstStyle/>
           <a:p>
-            <a:pPr algn="r" indent="0" marL="0">
+            <a:pPr marL="0" indent="0" algn="r">
               <a:buNone/>
             </a:pPr>
             <a:r>
@@ -17261,6 +17026,7 @@
         <a:solidFill>
           <a:srgbClr val="FFFFFF"/>
         </a:solidFill>
+        <a:effectLst/>
       </p:bgPr>
     </p:bg>
     <p:spTree>
@@ -17298,11 +17064,11 @@
           <a:bodyPr wrap="square" lIns="0" tIns="0" rIns="0" bIns="0" rtlCol="0" anchor="ctr"/>
           <a:lstStyle/>
           <a:p>
-            <a:pPr indent="0" marL="0">
-              <a:buNone/>
-            </a:pPr>
-            <a:r>
-              <a:rPr lang="en-US" sz="1200" b="1" spc="300" kern="0" dirty="0">
+            <a:pPr marL="0" indent="0">
+              <a:buNone/>
+            </a:pPr>
+            <a:r>
+              <a:rPr lang="en-US" sz="1200" b="1" kern="0" spc="300" dirty="0">
                 <a:solidFill>
                   <a:srgbClr val="1D4ED8"/>
                 </a:solidFill>
@@ -17337,7 +17103,7 @@
           <a:bodyPr wrap="square" lIns="0" tIns="0" rIns="0" bIns="0" rtlCol="0" anchor="ctr"/>
           <a:lstStyle/>
           <a:p>
-            <a:pPr indent="0" marL="0">
+            <a:pPr marL="0" indent="0">
               <a:buNone/>
             </a:pPr>
             <a:r>
@@ -17381,7 +17147,7 @@
             <a:prstDash val="solid"/>
           </a:ln>
           <a:effectLst>
-            <a:outerShdw sx="100000" sy="100000" kx="0" ky="0" algn="bl" rotWithShape="0" blurRad="88900" dist="25400" dir="5400000">
+            <a:outerShdw blurRad="88900" dist="25400" dir="5400000" algn="bl" rotWithShape="0">
               <a:srgbClr val="0A1C33">
                 <a:alpha val="16000"/>
               </a:srgbClr>
@@ -17432,7 +17198,7 @@
           <a:bodyPr wrap="square" lIns="0" tIns="0" rIns="0" bIns="0" rtlCol="0" anchor="ctr"/>
           <a:lstStyle/>
           <a:p>
-            <a:pPr algn="ctr" indent="0" marL="0">
+            <a:pPr marL="0" indent="0" algn="ctr">
               <a:buNone/>
             </a:pPr>
             <a:endParaRPr lang="en-US" sz="1200" dirty="0"/>
@@ -17480,7 +17246,7 @@
           <a:bodyPr wrap="square" lIns="0" tIns="0" rIns="0" bIns="0" rtlCol="0" anchor="ctr"/>
           <a:lstStyle/>
           <a:p>
-            <a:pPr indent="0" marL="0">
+            <a:pPr marL="0" indent="0">
               <a:buNone/>
             </a:pPr>
             <a:r>
@@ -17519,7 +17285,7 @@
           <a:bodyPr wrap="square" lIns="0" tIns="0" rIns="0" bIns="0" rtlCol="0" anchor="ctr"/>
           <a:lstStyle/>
           <a:p>
-            <a:pPr indent="0" marL="0">
+            <a:pPr marL="0" indent="0">
               <a:buNone/>
             </a:pPr>
             <a:r>
@@ -17563,7 +17329,7 @@
             <a:prstDash val="solid"/>
           </a:ln>
           <a:effectLst>
-            <a:outerShdw sx="100000" sy="100000" kx="0" ky="0" algn="bl" rotWithShape="0" blurRad="88900" dist="25400" dir="5400000">
+            <a:outerShdw blurRad="88900" dist="25400" dir="5400000" algn="bl" rotWithShape="0">
               <a:srgbClr val="0A1C33">
                 <a:alpha val="16000"/>
               </a:srgbClr>
@@ -17614,7 +17380,7 @@
           <a:bodyPr wrap="square" lIns="0" tIns="0" rIns="0" bIns="0" rtlCol="0" anchor="ctr"/>
           <a:lstStyle/>
           <a:p>
-            <a:pPr algn="ctr" indent="0" marL="0">
+            <a:pPr marL="0" indent="0" algn="ctr">
               <a:buNone/>
             </a:pPr>
             <a:endParaRPr lang="en-US" sz="1200" dirty="0"/>
@@ -17662,7 +17428,7 @@
           <a:bodyPr wrap="square" lIns="0" tIns="0" rIns="0" bIns="0" rtlCol="0" anchor="ctr"/>
           <a:lstStyle/>
           <a:p>
-            <a:pPr indent="0" marL="0">
+            <a:pPr marL="0" indent="0">
               <a:buNone/>
             </a:pPr>
             <a:r>
@@ -17701,7 +17467,7 @@
           <a:bodyPr wrap="square" lIns="0" tIns="0" rIns="0" bIns="0" rtlCol="0" anchor="ctr"/>
           <a:lstStyle/>
           <a:p>
-            <a:pPr indent="0" marL="0">
+            <a:pPr marL="0" indent="0">
               <a:buNone/>
             </a:pPr>
             <a:r>
@@ -17745,7 +17511,7 @@
             <a:prstDash val="solid"/>
           </a:ln>
           <a:effectLst>
-            <a:outerShdw sx="100000" sy="100000" kx="0" ky="0" algn="bl" rotWithShape="0" blurRad="88900" dist="25400" dir="5400000">
+            <a:outerShdw blurRad="88900" dist="25400" dir="5400000" algn="bl" rotWithShape="0">
               <a:srgbClr val="0A1C33">
                 <a:alpha val="16000"/>
               </a:srgbClr>
@@ -17796,7 +17562,7 @@
           <a:bodyPr wrap="square" lIns="0" tIns="0" rIns="0" bIns="0" rtlCol="0" anchor="ctr"/>
           <a:lstStyle/>
           <a:p>
-            <a:pPr algn="ctr" indent="0" marL="0">
+            <a:pPr marL="0" indent="0" algn="ctr">
               <a:buNone/>
             </a:pPr>
             <a:endParaRPr lang="en-US" sz="1200" dirty="0"/>
@@ -17844,7 +17610,7 @@
           <a:bodyPr wrap="square" lIns="0" tIns="0" rIns="0" bIns="0" rtlCol="0" anchor="ctr"/>
           <a:lstStyle/>
           <a:p>
-            <a:pPr indent="0" marL="0">
+            <a:pPr marL="0" indent="0">
               <a:buNone/>
             </a:pPr>
             <a:r>
@@ -17883,7 +17649,7 @@
           <a:bodyPr wrap="square" lIns="0" tIns="0" rIns="0" bIns="0" rtlCol="0" anchor="ctr"/>
           <a:lstStyle/>
           <a:p>
-            <a:pPr indent="0" marL="0">
+            <a:pPr marL="0" indent="0">
               <a:buNone/>
             </a:pPr>
             <a:r>
@@ -17927,7 +17693,7 @@
             <a:prstDash val="solid"/>
           </a:ln>
           <a:effectLst>
-            <a:outerShdw sx="100000" sy="100000" kx="0" ky="0" algn="bl" rotWithShape="0" blurRad="88900" dist="25400" dir="5400000">
+            <a:outerShdw blurRad="88900" dist="25400" dir="5400000" algn="bl" rotWithShape="0">
               <a:srgbClr val="0A1C33">
                 <a:alpha val="16000"/>
               </a:srgbClr>
@@ -17978,7 +17744,7 @@
           <a:bodyPr wrap="square" lIns="0" tIns="0" rIns="0" bIns="0" rtlCol="0" anchor="ctr"/>
           <a:lstStyle/>
           <a:p>
-            <a:pPr algn="ctr" indent="0" marL="0">
+            <a:pPr marL="0" indent="0" algn="ctr">
               <a:buNone/>
             </a:pPr>
             <a:endParaRPr lang="en-US" sz="1200" dirty="0"/>
@@ -18026,7 +17792,7 @@
           <a:bodyPr wrap="square" lIns="0" tIns="0" rIns="0" bIns="0" rtlCol="0" anchor="ctr"/>
           <a:lstStyle/>
           <a:p>
-            <a:pPr indent="0" marL="0">
+            <a:pPr marL="0" indent="0">
               <a:buNone/>
             </a:pPr>
             <a:r>
@@ -18065,7 +17831,7 @@
           <a:bodyPr wrap="square" lIns="0" tIns="0" rIns="0" bIns="0" rtlCol="0" anchor="ctr"/>
           <a:lstStyle/>
           <a:p>
-            <a:pPr indent="0" marL="0">
+            <a:pPr marL="0" indent="0">
               <a:buNone/>
             </a:pPr>
             <a:r>
@@ -18109,7 +17875,7 @@
             <a:prstDash val="solid"/>
           </a:ln>
           <a:effectLst>
-            <a:outerShdw sx="100000" sy="100000" kx="0" ky="0" algn="bl" rotWithShape="0" blurRad="88900" dist="25400" dir="5400000">
+            <a:outerShdw blurRad="88900" dist="25400" dir="5400000" algn="bl" rotWithShape="0">
               <a:srgbClr val="0A1C33">
                 <a:alpha val="16000"/>
               </a:srgbClr>
@@ -18160,7 +17926,7 @@
           <a:bodyPr wrap="square" lIns="0" tIns="0" rIns="0" bIns="0" rtlCol="0" anchor="ctr"/>
           <a:lstStyle/>
           <a:p>
-            <a:pPr algn="ctr" indent="0" marL="0">
+            <a:pPr marL="0" indent="0" algn="ctr">
               <a:buNone/>
             </a:pPr>
             <a:endParaRPr lang="en-US" sz="1200" dirty="0"/>
@@ -18208,7 +17974,7 @@
           <a:bodyPr wrap="square" lIns="0" tIns="0" rIns="0" bIns="0" rtlCol="0" anchor="ctr"/>
           <a:lstStyle/>
           <a:p>
-            <a:pPr indent="0" marL="0">
+            <a:pPr marL="0" indent="0">
               <a:buNone/>
             </a:pPr>
             <a:r>
@@ -18247,7 +18013,7 @@
           <a:bodyPr wrap="square" lIns="0" tIns="0" rIns="0" bIns="0" rtlCol="0" anchor="ctr"/>
           <a:lstStyle/>
           <a:p>
-            <a:pPr indent="0" marL="0">
+            <a:pPr marL="0" indent="0">
               <a:buNone/>
             </a:pPr>
             <a:r>
@@ -18291,7 +18057,7 @@
             <a:prstDash val="solid"/>
           </a:ln>
           <a:effectLst>
-            <a:outerShdw sx="100000" sy="100000" kx="0" ky="0" algn="bl" rotWithShape="0" blurRad="88900" dist="25400" dir="5400000">
+            <a:outerShdw blurRad="88900" dist="25400" dir="5400000" algn="bl" rotWithShape="0">
               <a:srgbClr val="0A1C33">
                 <a:alpha val="16000"/>
               </a:srgbClr>
@@ -18342,7 +18108,7 @@
           <a:bodyPr wrap="square" lIns="0" tIns="0" rIns="0" bIns="0" rtlCol="0" anchor="ctr"/>
           <a:lstStyle/>
           <a:p>
-            <a:pPr algn="ctr" indent="0" marL="0">
+            <a:pPr marL="0" indent="0" algn="ctr">
               <a:buNone/>
             </a:pPr>
             <a:endParaRPr lang="en-US" sz="1200" dirty="0"/>
@@ -18390,7 +18156,7 @@
           <a:bodyPr wrap="square" lIns="0" tIns="0" rIns="0" bIns="0" rtlCol="0" anchor="ctr"/>
           <a:lstStyle/>
           <a:p>
-            <a:pPr indent="0" marL="0">
+            <a:pPr marL="0" indent="0">
               <a:buNone/>
             </a:pPr>
             <a:r>
@@ -18429,7 +18195,7 @@
           <a:bodyPr wrap="square" lIns="0" tIns="0" rIns="0" bIns="0" rtlCol="0" anchor="ctr"/>
           <a:lstStyle/>
           <a:p>
-            <a:pPr indent="0" marL="0">
+            <a:pPr marL="0" indent="0">
               <a:buNone/>
             </a:pPr>
             <a:r>
@@ -18473,7 +18239,7 @@
             <a:prstDash val="solid"/>
           </a:ln>
           <a:effectLst>
-            <a:outerShdw sx="100000" sy="100000" kx="0" ky="0" algn="bl" rotWithShape="0" blurRad="88900" dist="25400" dir="5400000">
+            <a:outerShdw blurRad="88900" dist="25400" dir="5400000" algn="bl" rotWithShape="0">
               <a:srgbClr val="0A1C33">
                 <a:alpha val="16000"/>
               </a:srgbClr>
@@ -18524,7 +18290,7 @@
           <a:bodyPr wrap="square" lIns="0" tIns="0" rIns="0" bIns="0" rtlCol="0" anchor="ctr"/>
           <a:lstStyle/>
           <a:p>
-            <a:pPr algn="ctr" indent="0" marL="0">
+            <a:pPr marL="0" indent="0" algn="ctr">
               <a:buNone/>
             </a:pPr>
             <a:endParaRPr lang="en-US" sz="1200" dirty="0"/>
@@ -18572,7 +18338,7 @@
           <a:bodyPr wrap="square" lIns="0" tIns="0" rIns="0" bIns="0" rtlCol="0" anchor="ctr"/>
           <a:lstStyle/>
           <a:p>
-            <a:pPr indent="0" marL="0">
+            <a:pPr marL="0" indent="0">
               <a:buNone/>
             </a:pPr>
             <a:r>
@@ -18611,7 +18377,7 @@
           <a:bodyPr wrap="square" lIns="0" tIns="0" rIns="0" bIns="0" rtlCol="0" anchor="ctr"/>
           <a:lstStyle/>
           <a:p>
-            <a:pPr indent="0" marL="0">
+            <a:pPr marL="0" indent="0">
               <a:buNone/>
             </a:pPr>
             <a:r>
@@ -18655,7 +18421,7 @@
             <a:prstDash val="solid"/>
           </a:ln>
           <a:effectLst>
-            <a:outerShdw sx="100000" sy="100000" kx="0" ky="0" algn="bl" rotWithShape="0" blurRad="88900" dist="25400" dir="5400000">
+            <a:outerShdw blurRad="88900" dist="25400" dir="5400000" algn="bl" rotWithShape="0">
               <a:srgbClr val="0A1C33">
                 <a:alpha val="16000"/>
               </a:srgbClr>
@@ -18706,7 +18472,7 @@
           <a:bodyPr wrap="square" lIns="0" tIns="0" rIns="0" bIns="0" rtlCol="0" anchor="ctr"/>
           <a:lstStyle/>
           <a:p>
-            <a:pPr algn="ctr" indent="0" marL="0">
+            <a:pPr marL="0" indent="0" algn="ctr">
               <a:buNone/>
             </a:pPr>
             <a:endParaRPr lang="en-US" sz="1200" dirty="0"/>
@@ -18754,7 +18520,7 @@
           <a:bodyPr wrap="square" lIns="0" tIns="0" rIns="0" bIns="0" rtlCol="0" anchor="ctr"/>
           <a:lstStyle/>
           <a:p>
-            <a:pPr indent="0" marL="0">
+            <a:pPr marL="0" indent="0">
               <a:buNone/>
             </a:pPr>
             <a:r>
@@ -18793,7 +18559,7 @@
           <a:bodyPr wrap="square" lIns="0" tIns="0" rIns="0" bIns="0" rtlCol="0" anchor="ctr"/>
           <a:lstStyle/>
           <a:p>
-            <a:pPr indent="0" marL="0">
+            <a:pPr marL="0" indent="0">
               <a:buNone/>
             </a:pPr>
             <a:r>
@@ -18832,7 +18598,7 @@
           <a:bodyPr wrap="square" lIns="0" tIns="0" rIns="0" bIns="0" rtlCol="0" anchor="ctr"/>
           <a:lstStyle/>
           <a:p>
-            <a:pPr algn="r" indent="0" marL="0">
+            <a:pPr marL="0" indent="0" algn="r">
               <a:buNone/>
             </a:pPr>
             <a:r>
@@ -18866,6 +18632,7 @@
         <a:solidFill>
           <a:srgbClr val="FFFFFF"/>
         </a:solidFill>
+        <a:effectLst/>
       </p:bgPr>
     </p:bg>
     <p:spTree>
@@ -18903,11 +18670,11 @@
           <a:bodyPr wrap="square" lIns="0" tIns="0" rIns="0" bIns="0" rtlCol="0" anchor="ctr"/>
           <a:lstStyle/>
           <a:p>
-            <a:pPr indent="0" marL="0">
-              <a:buNone/>
-            </a:pPr>
-            <a:r>
-              <a:rPr lang="en-US" sz="1200" b="1" spc="300" kern="0" dirty="0">
+            <a:pPr marL="0" indent="0">
+              <a:buNone/>
+            </a:pPr>
+            <a:r>
+              <a:rPr lang="en-US" sz="1200" b="1" kern="0" spc="300" dirty="0">
                 <a:solidFill>
                   <a:srgbClr val="1D4ED8"/>
                 </a:solidFill>
@@ -18942,7 +18709,7 @@
           <a:bodyPr wrap="square" lIns="0" tIns="0" rIns="0" bIns="0" rtlCol="0" anchor="ctr"/>
           <a:lstStyle/>
           <a:p>
-            <a:pPr indent="0" marL="0">
+            <a:pPr marL="0" indent="0">
               <a:buNone/>
             </a:pPr>
             <a:r>
@@ -18986,7 +18753,7 @@
             <a:prstDash val="solid"/>
           </a:ln>
           <a:effectLst>
-            <a:outerShdw sx="100000" sy="100000" kx="0" ky="0" algn="bl" rotWithShape="0" blurRad="88900" dist="25400" dir="5400000">
+            <a:outerShdw blurRad="88900" dist="25400" dir="5400000" algn="bl" rotWithShape="0">
               <a:srgbClr val="0A1C33">
                 <a:alpha val="16000"/>
               </a:srgbClr>
@@ -19037,11 +18804,11 @@
           <a:bodyPr wrap="square" lIns="0" tIns="0" rIns="0" bIns="0" rtlCol="0" anchor="ctr"/>
           <a:lstStyle/>
           <a:p>
-            <a:pPr indent="0" marL="0">
-              <a:buNone/>
-            </a:pPr>
-            <a:r>
-              <a:rPr lang="en-US" sz="1400" b="1" spc="100" kern="0" dirty="0">
+            <a:pPr marL="0" indent="0">
+              <a:buNone/>
+            </a:pPr>
+            <a:r>
+              <a:rPr lang="en-US" sz="1400" b="1" kern="0" spc="100" dirty="0">
                 <a:solidFill>
                   <a:srgbClr val="0E2240"/>
                 </a:solidFill>
@@ -19076,7 +18843,7 @@
           <a:bodyPr wrap="square" lIns="0" tIns="0" rIns="0" bIns="0" rtlCol="0" anchor="ctr"/>
           <a:lstStyle/>
           <a:p>
-            <a:pPr indent="0" marL="0">
+            <a:pPr marL="0" indent="0">
               <a:buNone/>
             </a:pPr>
             <a:r>
@@ -19120,7 +18887,7 @@
             <a:prstDash val="solid"/>
           </a:ln>
           <a:effectLst>
-            <a:outerShdw sx="100000" sy="100000" kx="0" ky="0" algn="bl" rotWithShape="0" blurRad="88900" dist="25400" dir="5400000">
+            <a:outerShdw blurRad="88900" dist="25400" dir="5400000" algn="bl" rotWithShape="0">
               <a:srgbClr val="0A1C33">
                 <a:alpha val="16000"/>
               </a:srgbClr>
@@ -19171,11 +18938,11 @@
           <a:bodyPr wrap="square" lIns="0" tIns="0" rIns="0" bIns="0" rtlCol="0" anchor="ctr"/>
           <a:lstStyle/>
           <a:p>
-            <a:pPr indent="0" marL="0">
-              <a:buNone/>
-            </a:pPr>
-            <a:r>
-              <a:rPr lang="en-US" sz="1400" b="1" spc="100" kern="0" dirty="0">
+            <a:pPr marL="0" indent="0">
+              <a:buNone/>
+            </a:pPr>
+            <a:r>
+              <a:rPr lang="en-US" sz="1400" b="1" kern="0" spc="100" dirty="0">
                 <a:solidFill>
                   <a:srgbClr val="0E2240"/>
                 </a:solidFill>
@@ -19210,7 +18977,7 @@
           <a:bodyPr wrap="square" lIns="0" tIns="0" rIns="0" bIns="0" rtlCol="0" anchor="ctr"/>
           <a:lstStyle/>
           <a:p>
-            <a:pPr indent="0" marL="0">
+            <a:pPr marL="0" indent="0">
               <a:buNone/>
             </a:pPr>
             <a:r>
@@ -19254,7 +19021,7 @@
             <a:prstDash val="solid"/>
           </a:ln>
           <a:effectLst>
-            <a:outerShdw sx="100000" sy="100000" kx="0" ky="0" algn="bl" rotWithShape="0" blurRad="88900" dist="25400" dir="5400000">
+            <a:outerShdw blurRad="88900" dist="25400" dir="5400000" algn="bl" rotWithShape="0">
               <a:srgbClr val="0A1C33">
                 <a:alpha val="16000"/>
               </a:srgbClr>
@@ -19305,11 +19072,11 @@
           <a:bodyPr wrap="square" lIns="0" tIns="0" rIns="0" bIns="0" rtlCol="0" anchor="ctr"/>
           <a:lstStyle/>
           <a:p>
-            <a:pPr indent="0" marL="0">
-              <a:buNone/>
-            </a:pPr>
-            <a:r>
-              <a:rPr lang="en-US" sz="1400" b="1" spc="100" kern="0" dirty="0">
+            <a:pPr marL="0" indent="0">
+              <a:buNone/>
+            </a:pPr>
+            <a:r>
+              <a:rPr lang="en-US" sz="1400" b="1" kern="0" spc="100" dirty="0">
                 <a:solidFill>
                   <a:srgbClr val="0E2240"/>
                 </a:solidFill>
@@ -19344,7 +19111,7 @@
           <a:bodyPr wrap="square" lIns="0" tIns="0" rIns="0" bIns="0" rtlCol="0" anchor="ctr"/>
           <a:lstStyle/>
           <a:p>
-            <a:pPr indent="0" marL="0">
+            <a:pPr marL="0" indent="0">
               <a:buNone/>
             </a:pPr>
             <a:r>
@@ -19388,7 +19155,7 @@
             <a:prstDash val="solid"/>
           </a:ln>
           <a:effectLst>
-            <a:outerShdw sx="100000" sy="100000" kx="0" ky="0" algn="bl" rotWithShape="0" blurRad="88900" dist="25400" dir="5400000">
+            <a:outerShdw blurRad="88900" dist="25400" dir="5400000" algn="bl" rotWithShape="0">
               <a:srgbClr val="0A1C33">
                 <a:alpha val="16000"/>
               </a:srgbClr>
@@ -19439,11 +19206,11 @@
           <a:bodyPr wrap="square" lIns="0" tIns="0" rIns="0" bIns="0" rtlCol="0" anchor="ctr"/>
           <a:lstStyle/>
           <a:p>
-            <a:pPr indent="0" marL="0">
-              <a:buNone/>
-            </a:pPr>
-            <a:r>
-              <a:rPr lang="en-US" sz="1400" b="1" spc="100" kern="0" dirty="0">
+            <a:pPr marL="0" indent="0">
+              <a:buNone/>
+            </a:pPr>
+            <a:r>
+              <a:rPr lang="en-US" sz="1400" b="1" kern="0" spc="100" dirty="0">
                 <a:solidFill>
                   <a:srgbClr val="0E2240"/>
                 </a:solidFill>
@@ -19478,7 +19245,7 @@
           <a:bodyPr wrap="square" lIns="0" tIns="0" rIns="0" bIns="0" rtlCol="0" anchor="ctr"/>
           <a:lstStyle/>
           <a:p>
-            <a:pPr indent="0" marL="0">
+            <a:pPr marL="0" indent="0">
               <a:buNone/>
             </a:pPr>
             <a:r>
@@ -19522,7 +19289,7 @@
             <a:prstDash val="solid"/>
           </a:ln>
           <a:effectLst>
-            <a:outerShdw sx="100000" sy="100000" kx="0" ky="0" algn="bl" rotWithShape="0" blurRad="88900" dist="25400" dir="5400000">
+            <a:outerShdw blurRad="88900" dist="25400" dir="5400000" algn="bl" rotWithShape="0">
               <a:srgbClr val="0A1C33">
                 <a:alpha val="16000"/>
               </a:srgbClr>
@@ -19573,11 +19340,11 @@
           <a:bodyPr wrap="square" lIns="0" tIns="0" rIns="0" bIns="0" rtlCol="0" anchor="ctr"/>
           <a:lstStyle/>
           <a:p>
-            <a:pPr indent="0" marL="0">
-              <a:buNone/>
-            </a:pPr>
-            <a:r>
-              <a:rPr lang="en-US" sz="1400" b="1" spc="100" kern="0" dirty="0">
+            <a:pPr marL="0" indent="0">
+              <a:buNone/>
+            </a:pPr>
+            <a:r>
+              <a:rPr lang="en-US" sz="1400" b="1" kern="0" spc="100" dirty="0">
                 <a:solidFill>
                   <a:srgbClr val="0E2240"/>
                 </a:solidFill>
@@ -19612,7 +19379,7 @@
           <a:bodyPr wrap="square" lIns="0" tIns="0" rIns="0" bIns="0" rtlCol="0" anchor="ctr"/>
           <a:lstStyle/>
           <a:p>
-            <a:pPr indent="0" marL="0">
+            <a:pPr marL="0" indent="0">
               <a:buNone/>
             </a:pPr>
             <a:r>
@@ -19656,7 +19423,7 @@
             <a:prstDash val="solid"/>
           </a:ln>
           <a:effectLst>
-            <a:outerShdw sx="100000" sy="100000" kx="0" ky="0" algn="bl" rotWithShape="0" blurRad="88900" dist="25400" dir="5400000">
+            <a:outerShdw blurRad="88900" dist="25400" dir="5400000" algn="bl" rotWithShape="0">
               <a:srgbClr val="0A1C33">
                 <a:alpha val="16000"/>
               </a:srgbClr>
@@ -19707,11 +19474,11 @@
           <a:bodyPr wrap="square" lIns="0" tIns="0" rIns="0" bIns="0" rtlCol="0" anchor="ctr"/>
           <a:lstStyle/>
           <a:p>
-            <a:pPr indent="0" marL="0">
-              <a:buNone/>
-            </a:pPr>
-            <a:r>
-              <a:rPr lang="en-US" sz="1400" b="1" spc="100" kern="0" dirty="0">
+            <a:pPr marL="0" indent="0">
+              <a:buNone/>
+            </a:pPr>
+            <a:r>
+              <a:rPr lang="en-US" sz="1400" b="1" kern="0" spc="100" dirty="0">
                 <a:solidFill>
                   <a:srgbClr val="0E2240"/>
                 </a:solidFill>
@@ -19746,7 +19513,7 @@
           <a:bodyPr wrap="square" lIns="0" tIns="0" rIns="0" bIns="0" rtlCol="0" anchor="ctr"/>
           <a:lstStyle/>
           <a:p>
-            <a:pPr indent="0" marL="0">
+            <a:pPr marL="0" indent="0">
               <a:buNone/>
             </a:pPr>
             <a:r>
@@ -19790,7 +19557,7 @@
             <a:prstDash val="solid"/>
           </a:ln>
           <a:effectLst>
-            <a:outerShdw sx="100000" sy="100000" kx="0" ky="0" algn="bl" rotWithShape="0" blurRad="88900" dist="25400" dir="5400000">
+            <a:outerShdw blurRad="88900" dist="25400" dir="5400000" algn="bl" rotWithShape="0">
               <a:srgbClr val="0A1C33">
                 <a:alpha val="16000"/>
               </a:srgbClr>
@@ -19841,11 +19608,11 @@
           <a:bodyPr wrap="square" lIns="0" tIns="0" rIns="0" bIns="0" rtlCol="0" anchor="ctr"/>
           <a:lstStyle/>
           <a:p>
-            <a:pPr indent="0" marL="0">
-              <a:buNone/>
-            </a:pPr>
-            <a:r>
-              <a:rPr lang="en-US" sz="1400" b="1" spc="100" kern="0" dirty="0">
+            <a:pPr marL="0" indent="0">
+              <a:buNone/>
+            </a:pPr>
+            <a:r>
+              <a:rPr lang="en-US" sz="1400" b="1" kern="0" spc="100" dirty="0">
                 <a:solidFill>
                   <a:srgbClr val="0E2240"/>
                 </a:solidFill>
@@ -19880,7 +19647,7 @@
           <a:bodyPr wrap="square" lIns="0" tIns="0" rIns="0" bIns="0" rtlCol="0" anchor="ctr"/>
           <a:lstStyle/>
           <a:p>
-            <a:pPr indent="0" marL="0">
+            <a:pPr marL="0" indent="0">
               <a:buNone/>
             </a:pPr>
             <a:r>
@@ -19919,7 +19686,7 @@
           <a:bodyPr wrap="square" lIns="0" tIns="0" rIns="0" bIns="0" rtlCol="0" anchor="ctr"/>
           <a:lstStyle/>
           <a:p>
-            <a:pPr indent="0" marL="0">
+            <a:pPr marL="0" indent="0">
               <a:buNone/>
             </a:pPr>
             <a:r>
@@ -19933,9 +19700,6 @@
               </a:rPr>
               <a:t>62 view modules</a:t>
             </a:r>
-            <a:pPr indent="0" marL="0">
-              <a:buNone/>
-            </a:pPr>
             <a:r>
               <a:rPr lang="en-US" sz="1300" dirty="0">
                 <a:solidFill>
@@ -19972,7 +19736,7 @@
           <a:bodyPr wrap="square" lIns="0" tIns="0" rIns="0" bIns="0" rtlCol="0" anchor="ctr"/>
           <a:lstStyle/>
           <a:p>
-            <a:pPr algn="r" indent="0" marL="0">
+            <a:pPr marL="0" indent="0" algn="r">
               <a:buNone/>
             </a:pPr>
             <a:r>
@@ -20006,6 +19770,7 @@
         <a:solidFill>
           <a:srgbClr val="FFFFFF"/>
         </a:solidFill>
+        <a:effectLst/>
       </p:bgPr>
     </p:bg>
     <p:spTree>
@@ -20043,11 +19808,11 @@
           <a:bodyPr wrap="square" lIns="0" tIns="0" rIns="0" bIns="0" rtlCol="0" anchor="ctr"/>
           <a:lstStyle/>
           <a:p>
-            <a:pPr indent="0" marL="0">
-              <a:buNone/>
-            </a:pPr>
-            <a:r>
-              <a:rPr lang="en-US" sz="1200" b="1" spc="300" kern="0" dirty="0">
+            <a:pPr marL="0" indent="0">
+              <a:buNone/>
+            </a:pPr>
+            <a:r>
+              <a:rPr lang="en-US" sz="1200" b="1" kern="0" spc="300" dirty="0">
                 <a:solidFill>
                   <a:srgbClr val="1D4ED8"/>
                 </a:solidFill>
@@ -20082,7 +19847,7 @@
           <a:bodyPr wrap="square" lIns="0" tIns="0" rIns="0" bIns="0" rtlCol="0" anchor="ctr"/>
           <a:lstStyle/>
           <a:p>
-            <a:pPr indent="0" marL="0">
+            <a:pPr marL="0" indent="0">
               <a:buNone/>
             </a:pPr>
             <a:r>
@@ -20126,7 +19891,7 @@
             <a:prstDash val="solid"/>
           </a:ln>
           <a:effectLst>
-            <a:outerShdw sx="100000" sy="100000" kx="0" ky="0" algn="bl" rotWithShape="0" blurRad="88900" dist="25400" dir="5400000">
+            <a:outerShdw blurRad="88900" dist="25400" dir="5400000" algn="bl" rotWithShape="0">
               <a:srgbClr val="0A1C33">
                 <a:alpha val="16000"/>
               </a:srgbClr>
@@ -20177,7 +19942,7 @@
           <a:bodyPr wrap="square" lIns="0" tIns="0" rIns="0" bIns="0" rtlCol="0" anchor="ctr"/>
           <a:lstStyle/>
           <a:p>
-            <a:pPr algn="ctr" indent="0" marL="0">
+            <a:pPr marL="0" indent="0" algn="ctr">
               <a:buNone/>
             </a:pPr>
             <a:r>
@@ -20216,7 +19981,7 @@
           <a:bodyPr wrap="square" lIns="0" tIns="0" rIns="0" bIns="0" rtlCol="0" anchor="ctr"/>
           <a:lstStyle/>
           <a:p>
-            <a:pPr indent="0" marL="0">
+            <a:pPr marL="0" indent="0">
               <a:buNone/>
             </a:pPr>
             <a:r>
@@ -20260,7 +20025,7 @@
             <a:prstDash val="solid"/>
           </a:ln>
           <a:effectLst>
-            <a:outerShdw sx="100000" sy="100000" kx="0" ky="0" algn="bl" rotWithShape="0" blurRad="88900" dist="25400" dir="5400000">
+            <a:outerShdw blurRad="88900" dist="25400" dir="5400000" algn="bl" rotWithShape="0">
               <a:srgbClr val="0A1C33">
                 <a:alpha val="16000"/>
               </a:srgbClr>
@@ -20311,7 +20076,7 @@
           <a:bodyPr wrap="square" lIns="0" tIns="0" rIns="0" bIns="0" rtlCol="0" anchor="ctr"/>
           <a:lstStyle/>
           <a:p>
-            <a:pPr algn="ctr" indent="0" marL="0">
+            <a:pPr marL="0" indent="0" algn="ctr">
               <a:buNone/>
             </a:pPr>
             <a:r>
@@ -20350,7 +20115,7 @@
           <a:bodyPr wrap="square" lIns="0" tIns="0" rIns="0" bIns="0" rtlCol="0" anchor="ctr"/>
           <a:lstStyle/>
           <a:p>
-            <a:pPr indent="0" marL="0">
+            <a:pPr marL="0" indent="0">
               <a:buNone/>
             </a:pPr>
             <a:r>
@@ -20394,7 +20159,7 @@
             <a:prstDash val="solid"/>
           </a:ln>
           <a:effectLst>
-            <a:outerShdw sx="100000" sy="100000" kx="0" ky="0" algn="bl" rotWithShape="0" blurRad="88900" dist="25400" dir="5400000">
+            <a:outerShdw blurRad="88900" dist="25400" dir="5400000" algn="bl" rotWithShape="0">
               <a:srgbClr val="0A1C33">
                 <a:alpha val="16000"/>
               </a:srgbClr>
@@ -20445,7 +20210,7 @@
           <a:bodyPr wrap="square" lIns="0" tIns="0" rIns="0" bIns="0" rtlCol="0" anchor="ctr"/>
           <a:lstStyle/>
           <a:p>
-            <a:pPr algn="ctr" indent="0" marL="0">
+            <a:pPr marL="0" indent="0" algn="ctr">
               <a:buNone/>
             </a:pPr>
             <a:r>
@@ -20484,7 +20249,7 @@
           <a:bodyPr wrap="square" lIns="0" tIns="0" rIns="0" bIns="0" rtlCol="0" anchor="ctr"/>
           <a:lstStyle/>
           <a:p>
-            <a:pPr indent="0" marL="0">
+            <a:pPr marL="0" indent="0">
               <a:buNone/>
             </a:pPr>
             <a:r>
@@ -20528,7 +20293,7 @@
             <a:prstDash val="solid"/>
           </a:ln>
           <a:effectLst>
-            <a:outerShdw sx="100000" sy="100000" kx="0" ky="0" algn="bl" rotWithShape="0" blurRad="88900" dist="25400" dir="5400000">
+            <a:outerShdw blurRad="88900" dist="25400" dir="5400000" algn="bl" rotWithShape="0">
               <a:srgbClr val="0A1C33">
                 <a:alpha val="16000"/>
               </a:srgbClr>
@@ -20579,7 +20344,7 @@
           <a:bodyPr wrap="square" lIns="0" tIns="0" rIns="0" bIns="0" rtlCol="0" anchor="ctr"/>
           <a:lstStyle/>
           <a:p>
-            <a:pPr algn="ctr" indent="0" marL="0">
+            <a:pPr marL="0" indent="0" algn="ctr">
               <a:buNone/>
             </a:pPr>
             <a:r>
@@ -20618,7 +20383,7 @@
           <a:bodyPr wrap="square" lIns="0" tIns="0" rIns="0" bIns="0" rtlCol="0" anchor="ctr"/>
           <a:lstStyle/>
           <a:p>
-            <a:pPr indent="0" marL="0">
+            <a:pPr marL="0" indent="0">
               <a:buNone/>
             </a:pPr>
             <a:r>
@@ -20657,7 +20422,7 @@
           <a:bodyPr wrap="square" lIns="0" tIns="0" rIns="0" bIns="0" rtlCol="0" anchor="ctr"/>
           <a:lstStyle/>
           <a:p>
-            <a:pPr algn="r" indent="0" marL="0">
+            <a:pPr marL="0" indent="0" algn="r">
               <a:buNone/>
             </a:pPr>
             <a:r>
@@ -20691,6 +20456,7 @@
         <a:solidFill>
           <a:srgbClr val="FFFFFF"/>
         </a:solidFill>
+        <a:effectLst/>
       </p:bgPr>
     </p:bg>
     <p:spTree>
@@ -20728,11 +20494,11 @@
           <a:bodyPr wrap="square" lIns="0" tIns="0" rIns="0" bIns="0" rtlCol="0" anchor="ctr"/>
           <a:lstStyle/>
           <a:p>
-            <a:pPr indent="0" marL="0">
-              <a:buNone/>
-            </a:pPr>
-            <a:r>
-              <a:rPr lang="en-US" sz="1200" b="1" spc="300" kern="0" dirty="0">
+            <a:pPr marL="0" indent="0">
+              <a:buNone/>
+            </a:pPr>
+            <a:r>
+              <a:rPr lang="en-US" sz="1200" b="1" kern="0" spc="300" dirty="0">
                 <a:solidFill>
                   <a:srgbClr val="1D4ED8"/>
                 </a:solidFill>
@@ -20767,7 +20533,7 @@
           <a:bodyPr wrap="square" lIns="0" tIns="0" rIns="0" bIns="0" rtlCol="0" anchor="ctr"/>
           <a:lstStyle/>
           <a:p>
-            <a:pPr indent="0" marL="0">
+            <a:pPr marL="0" indent="0">
               <a:buNone/>
             </a:pPr>
             <a:r>
@@ -20806,7 +20572,7 @@
           </a:solidFill>
           <a:ln/>
           <a:effectLst>
-            <a:outerShdw sx="100000" sy="100000" kx="0" ky="0" algn="bl" rotWithShape="0" blurRad="88900" dist="25400" dir="5400000">
+            <a:outerShdw blurRad="88900" dist="25400" dir="5400000" algn="bl" rotWithShape="0">
               <a:srgbClr val="0A1C33">
                 <a:alpha val="16000"/>
               </a:srgbClr>
@@ -20835,7 +20601,7 @@
           <a:bodyPr wrap="square" lIns="0" tIns="0" rIns="0" bIns="0" rtlCol="0" anchor="ctr"/>
           <a:lstStyle/>
           <a:p>
-            <a:pPr indent="0" marL="0">
+            <a:pPr marL="0" indent="0">
               <a:buNone/>
             </a:pPr>
             <a:r>
@@ -20874,7 +20640,7 @@
           <a:bodyPr wrap="square" lIns="0" tIns="0" rIns="0" bIns="0" rtlCol="0" anchor="ctr"/>
           <a:lstStyle/>
           <a:p>
-            <a:pPr indent="0" marL="0">
+            <a:pPr marL="0" indent="0">
               <a:lnSpc>
                 <a:spcPct val="102000"/>
               </a:lnSpc>
@@ -20894,7 +20660,7 @@
             <a:endParaRPr lang="en-US" sz="1300" dirty="0"/>
           </a:p>
           <a:p>
-            <a:pPr indent="0" marL="0">
+            <a:pPr marL="0" indent="0">
               <a:lnSpc>
                 <a:spcPct val="102000"/>
               </a:lnSpc>
@@ -20956,7 +20722,7 @@
           </a:solidFill>
           <a:ln/>
           <a:effectLst>
-            <a:outerShdw sx="100000" sy="100000" kx="0" ky="0" algn="bl" rotWithShape="0" blurRad="88900" dist="25400" dir="5400000">
+            <a:outerShdw blurRad="88900" dist="25400" dir="5400000" algn="bl" rotWithShape="0">
               <a:srgbClr val="0A1C33">
                 <a:alpha val="16000"/>
               </a:srgbClr>
@@ -20985,7 +20751,7 @@
           <a:bodyPr wrap="square" lIns="0" tIns="0" rIns="0" bIns="0" rtlCol="0" anchor="ctr"/>
           <a:lstStyle/>
           <a:p>
-            <a:pPr indent="0" marL="0">
+            <a:pPr marL="0" indent="0">
               <a:buNone/>
             </a:pPr>
             <a:r>
@@ -21024,7 +20790,7 @@
           <a:bodyPr wrap="square" lIns="0" tIns="0" rIns="0" bIns="0" rtlCol="0" anchor="ctr"/>
           <a:lstStyle/>
           <a:p>
-            <a:pPr indent="0" marL="0">
+            <a:pPr marL="0" indent="0">
               <a:lnSpc>
                 <a:spcPct val="102000"/>
               </a:lnSpc>
@@ -21044,7 +20810,7 @@
             <a:endParaRPr lang="en-US" sz="1300" dirty="0"/>
           </a:p>
           <a:p>
-            <a:pPr indent="0" marL="0">
+            <a:pPr marL="0" indent="0">
               <a:lnSpc>
                 <a:spcPct val="102000"/>
               </a:lnSpc>
@@ -21106,7 +20872,7 @@
           </a:solidFill>
           <a:ln/>
           <a:effectLst>
-            <a:outerShdw sx="100000" sy="100000" kx="0" ky="0" algn="bl" rotWithShape="0" blurRad="88900" dist="25400" dir="5400000">
+            <a:outerShdw blurRad="88900" dist="25400" dir="5400000" algn="bl" rotWithShape="0">
               <a:srgbClr val="0A1C33">
                 <a:alpha val="16000"/>
               </a:srgbClr>
@@ -21135,7 +20901,7 @@
           <a:bodyPr wrap="square" lIns="0" tIns="0" rIns="0" bIns="0" rtlCol="0" anchor="ctr"/>
           <a:lstStyle/>
           <a:p>
-            <a:pPr indent="0" marL="0">
+            <a:pPr marL="0" indent="0">
               <a:buNone/>
             </a:pPr>
             <a:r>
@@ -21174,7 +20940,7 @@
           <a:bodyPr wrap="square" lIns="0" tIns="0" rIns="0" bIns="0" rtlCol="0" anchor="ctr"/>
           <a:lstStyle/>
           <a:p>
-            <a:pPr indent="0" marL="0">
+            <a:pPr marL="0" indent="0">
               <a:lnSpc>
                 <a:spcPct val="102000"/>
               </a:lnSpc>
@@ -21194,7 +20960,7 @@
             <a:endParaRPr lang="en-US" sz="1300" dirty="0"/>
           </a:p>
           <a:p>
-            <a:pPr indent="0" marL="0">
+            <a:pPr marL="0" indent="0">
               <a:lnSpc>
                 <a:spcPct val="102000"/>
               </a:lnSpc>
@@ -21256,7 +21022,7 @@
           </a:solidFill>
           <a:ln/>
           <a:effectLst>
-            <a:outerShdw sx="100000" sy="100000" kx="0" ky="0" algn="bl" rotWithShape="0" blurRad="88900" dist="25400" dir="5400000">
+            <a:outerShdw blurRad="88900" dist="25400" dir="5400000" algn="bl" rotWithShape="0">
               <a:srgbClr val="0A1C33">
                 <a:alpha val="16000"/>
               </a:srgbClr>
@@ -21285,7 +21051,7 @@
           <a:bodyPr wrap="square" lIns="0" tIns="0" rIns="0" bIns="0" rtlCol="0" anchor="ctr"/>
           <a:lstStyle/>
           <a:p>
-            <a:pPr indent="0" marL="0">
+            <a:pPr marL="0" indent="0">
               <a:buNone/>
             </a:pPr>
             <a:r>
@@ -21324,7 +21090,7 @@
           <a:bodyPr wrap="square" lIns="0" tIns="0" rIns="0" bIns="0" rtlCol="0" anchor="ctr"/>
           <a:lstStyle/>
           <a:p>
-            <a:pPr indent="0" marL="0">
+            <a:pPr marL="0" indent="0">
               <a:lnSpc>
                 <a:spcPct val="102000"/>
               </a:lnSpc>
@@ -21344,7 +21110,7 @@
             <a:endParaRPr lang="en-US" sz="1300" dirty="0"/>
           </a:p>
           <a:p>
-            <a:pPr indent="0" marL="0">
+            <a:pPr marL="0" indent="0">
               <a:lnSpc>
                 <a:spcPct val="102000"/>
               </a:lnSpc>
@@ -21406,7 +21172,7 @@
           </a:solidFill>
           <a:ln/>
           <a:effectLst>
-            <a:outerShdw sx="100000" sy="100000" kx="0" ky="0" algn="bl" rotWithShape="0" blurRad="88900" dist="25400" dir="5400000">
+            <a:outerShdw blurRad="88900" dist="25400" dir="5400000" algn="bl" rotWithShape="0">
               <a:srgbClr val="0A1C33">
                 <a:alpha val="16000"/>
               </a:srgbClr>
@@ -21435,7 +21201,7 @@
           <a:bodyPr wrap="square" lIns="0" tIns="0" rIns="0" bIns="0" rtlCol="0" anchor="ctr"/>
           <a:lstStyle/>
           <a:p>
-            <a:pPr indent="0" marL="0">
+            <a:pPr marL="0" indent="0">
               <a:buNone/>
             </a:pPr>
             <a:r>
@@ -21474,7 +21240,7 @@
           <a:bodyPr wrap="square" lIns="0" tIns="0" rIns="0" bIns="0" rtlCol="0" anchor="ctr"/>
           <a:lstStyle/>
           <a:p>
-            <a:pPr indent="0" marL="0">
+            <a:pPr marL="0" indent="0">
               <a:lnSpc>
                 <a:spcPct val="102000"/>
               </a:lnSpc>
@@ -21494,7 +21260,7 @@
             <a:endParaRPr lang="en-US" sz="1300" dirty="0"/>
           </a:p>
           <a:p>
-            <a:pPr indent="0" marL="0">
+            <a:pPr marL="0" indent="0">
               <a:lnSpc>
                 <a:spcPct val="102000"/>
               </a:lnSpc>
@@ -21556,7 +21322,7 @@
           </a:solidFill>
           <a:ln/>
           <a:effectLst>
-            <a:outerShdw sx="100000" sy="100000" kx="0" ky="0" algn="bl" rotWithShape="0" blurRad="88900" dist="25400" dir="5400000">
+            <a:outerShdw blurRad="88900" dist="25400" dir="5400000" algn="bl" rotWithShape="0">
               <a:srgbClr val="0A1C33">
                 <a:alpha val="16000"/>
               </a:srgbClr>
@@ -21585,7 +21351,7 @@
           <a:bodyPr wrap="square" lIns="0" tIns="0" rIns="0" bIns="0" rtlCol="0" anchor="ctr"/>
           <a:lstStyle/>
           <a:p>
-            <a:pPr indent="0" marL="0">
+            <a:pPr marL="0" indent="0">
               <a:buNone/>
             </a:pPr>
             <a:r>
@@ -21624,7 +21390,7 @@
           <a:bodyPr wrap="square" lIns="0" tIns="0" rIns="0" bIns="0" rtlCol="0" anchor="ctr"/>
           <a:lstStyle/>
           <a:p>
-            <a:pPr indent="0" marL="0">
+            <a:pPr marL="0" indent="0">
               <a:lnSpc>
                 <a:spcPct val="102000"/>
               </a:lnSpc>
@@ -21644,7 +21410,7 @@
             <a:endParaRPr lang="en-US" sz="1300" dirty="0"/>
           </a:p>
           <a:p>
-            <a:pPr indent="0" marL="0">
+            <a:pPr marL="0" indent="0">
               <a:lnSpc>
                 <a:spcPct val="102000"/>
               </a:lnSpc>
@@ -21686,7 +21452,7 @@
           <a:bodyPr wrap="square" lIns="0" tIns="0" rIns="0" bIns="0" rtlCol="0" anchor="ctr"/>
           <a:lstStyle/>
           <a:p>
-            <a:pPr indent="0" marL="0">
+            <a:pPr marL="0" indent="0">
               <a:buNone/>
             </a:pPr>
             <a:r>
@@ -21700,9 +21466,6 @@
               </a:rPr>
               <a:t>Step 6 fans out automatically:  </a:t>
             </a:r>
-            <a:pPr indent="0" marL="0">
-              <a:buNone/>
-            </a:pPr>
             <a:r>
               <a:rPr lang="en-US" sz="1400" dirty="0">
                 <a:solidFill>
@@ -21744,7 +21507,7 @@
             <a:prstDash val="solid"/>
           </a:ln>
           <a:effectLst>
-            <a:outerShdw sx="100000" sy="100000" kx="0" ky="0" algn="bl" rotWithShape="0" blurRad="88900" dist="25400" dir="5400000">
+            <a:outerShdw blurRad="88900" dist="25400" dir="5400000" algn="bl" rotWithShape="0">
               <a:srgbClr val="0A1C33">
                 <a:alpha val="16000"/>
               </a:srgbClr>
@@ -21773,7 +21536,7 @@
           <a:bodyPr wrap="square" lIns="0" tIns="0" rIns="0" bIns="0" rtlCol="0" anchor="ctr"/>
           <a:lstStyle/>
           <a:p>
-            <a:pPr indent="0" marL="0">
+            <a:pPr marL="0" indent="0">
               <a:buNone/>
             </a:pPr>
             <a:r>
@@ -21834,7 +21597,7 @@
           <a:bodyPr wrap="square" lIns="0" tIns="0" rIns="0" bIns="0" rtlCol="0" anchor="ctr"/>
           <a:lstStyle/>
           <a:p>
-            <a:pPr algn="ctr" indent="0" marL="0">
+            <a:pPr marL="0" indent="0" algn="ctr">
               <a:buNone/>
             </a:pPr>
             <a:r>
@@ -21873,7 +21636,7 @@
           <a:bodyPr wrap="square" lIns="0" tIns="0" rIns="0" bIns="0" rtlCol="0" anchor="ctr"/>
           <a:lstStyle/>
           <a:p>
-            <a:pPr indent="0" marL="0">
+            <a:pPr marL="0" indent="0">
               <a:buNone/>
             </a:pPr>
             <a:r>
@@ -21934,7 +21697,7 @@
           <a:bodyPr wrap="square" lIns="0" tIns="0" rIns="0" bIns="0" rtlCol="0" anchor="ctr"/>
           <a:lstStyle/>
           <a:p>
-            <a:pPr algn="ctr" indent="0" marL="0">
+            <a:pPr marL="0" indent="0" algn="ctr">
               <a:buNone/>
             </a:pPr>
             <a:r>
@@ -21973,7 +21736,7 @@
           <a:bodyPr wrap="square" lIns="0" tIns="0" rIns="0" bIns="0" rtlCol="0" anchor="ctr"/>
           <a:lstStyle/>
           <a:p>
-            <a:pPr indent="0" marL="0">
+            <a:pPr marL="0" indent="0">
               <a:buNone/>
             </a:pPr>
             <a:r>
@@ -22034,7 +21797,7 @@
           <a:bodyPr wrap="square" lIns="0" tIns="0" rIns="0" bIns="0" rtlCol="0" anchor="ctr"/>
           <a:lstStyle/>
           <a:p>
-            <a:pPr algn="ctr" indent="0" marL="0">
+            <a:pPr marL="0" indent="0" algn="ctr">
               <a:buNone/>
             </a:pPr>
             <a:r>
@@ -22073,7 +21836,7 @@
           <a:bodyPr wrap="square" lIns="0" tIns="0" rIns="0" bIns="0" rtlCol="0" anchor="ctr"/>
           <a:lstStyle/>
           <a:p>
-            <a:pPr indent="0" marL="0">
+            <a:pPr marL="0" indent="0">
               <a:buNone/>
             </a:pPr>
             <a:r>
@@ -22134,7 +21897,7 @@
           <a:bodyPr wrap="square" lIns="0" tIns="0" rIns="0" bIns="0" rtlCol="0" anchor="ctr"/>
           <a:lstStyle/>
           <a:p>
-            <a:pPr algn="ctr" indent="0" marL="0">
+            <a:pPr marL="0" indent="0" algn="ctr">
               <a:buNone/>
             </a:pPr>
             <a:r>
@@ -22173,7 +21936,7 @@
           <a:bodyPr wrap="square" lIns="0" tIns="0" rIns="0" bIns="0" rtlCol="0" anchor="ctr"/>
           <a:lstStyle/>
           <a:p>
-            <a:pPr indent="0" marL="0">
+            <a:pPr marL="0" indent="0">
               <a:buNone/>
             </a:pPr>
             <a:r>
@@ -22212,7 +21975,7 @@
           <a:bodyPr wrap="square" lIns="0" tIns="0" rIns="0" bIns="0" rtlCol="0" anchor="ctr"/>
           <a:lstStyle/>
           <a:p>
-            <a:pPr indent="0" marL="0">
+            <a:pPr marL="0" indent="0">
               <a:buNone/>
             </a:pPr>
             <a:r>
@@ -22251,7 +22014,7 @@
           <a:bodyPr wrap="square" lIns="0" tIns="0" rIns="0" bIns="0" rtlCol="0" anchor="ctr"/>
           <a:lstStyle/>
           <a:p>
-            <a:pPr algn="r" indent="0" marL="0">
+            <a:pPr marL="0" indent="0" algn="r">
               <a:buNone/>
             </a:pPr>
             <a:r>
@@ -22570,4 +22333,319 @@
     </a:ext>
   </a:extLst>
 </a:theme>
+</file>
+
+<file path=ppt/theme/theme2.xml><?xml version="1.0" encoding="utf-8"?>
+<a:theme xmlns:a="http://schemas.openxmlformats.org/drawingml/2006/main" name="Office Theme">
+  <a:themeElements>
+    <a:clrScheme name="Office">
+      <a:dk1>
+        <a:sysClr val="windowText" lastClr="000000"/>
+      </a:dk1>
+      <a:lt1>
+        <a:sysClr val="window" lastClr="FFFFFF"/>
+      </a:lt1>
+      <a:dk2>
+        <a:srgbClr val="0E2841"/>
+      </a:dk2>
+      <a:lt2>
+        <a:srgbClr val="E8E8E8"/>
+      </a:lt2>
+      <a:accent1>
+        <a:srgbClr val="156082"/>
+      </a:accent1>
+      <a:accent2>
+        <a:srgbClr val="E97132"/>
+      </a:accent2>
+      <a:accent3>
+        <a:srgbClr val="196B24"/>
+      </a:accent3>
+      <a:accent4>
+        <a:srgbClr val="0F9ED5"/>
+      </a:accent4>
+      <a:accent5>
+        <a:srgbClr val="A02B93"/>
+      </a:accent5>
+      <a:accent6>
+        <a:srgbClr val="4EA72E"/>
+      </a:accent6>
+      <a:hlink>
+        <a:srgbClr val="467886"/>
+      </a:hlink>
+      <a:folHlink>
+        <a:srgbClr val="96607D"/>
+      </a:folHlink>
+    </a:clrScheme>
+    <a:fontScheme name="Office">
+      <a:majorFont>
+        <a:latin typeface="Aptos Display" panose="02110004020202020204"/>
+        <a:ea typeface=""/>
+        <a:cs typeface=""/>
+        <a:font script="Jpan" typeface="游ゴシック Light"/>
+        <a:font script="Hang" typeface="맑은 고딕"/>
+        <a:font script="Hans" typeface="等线 Light"/>
+        <a:font script="Hant" typeface="新細明體"/>
+        <a:font script="Arab" typeface="Times New Roman"/>
+        <a:font script="Hebr" typeface="Times New Roman"/>
+        <a:font script="Thai" typeface="Angsana New"/>
+        <a:font script="Ethi" typeface="Nyala"/>
+        <a:font script="Beng" typeface="Vrinda"/>
+        <a:font script="Gujr" typeface="Shruti"/>
+        <a:font script="Khmr" typeface="MoolBoran"/>
+        <a:font script="Knda" typeface="Tunga"/>
+        <a:font script="Guru" typeface="Raavi"/>
+        <a:font script="Cans" typeface="Euphemia"/>
+        <a:font script="Cher" typeface="Plantagenet Cherokee"/>
+        <a:font script="Yiii" typeface="Microsoft Yi Baiti"/>
+        <a:font script="Tibt" typeface="Microsoft Himalaya"/>
+        <a:font script="Thaa" typeface="MV Boli"/>
+        <a:font script="Deva" typeface="Mangal"/>
+        <a:font script="Telu" typeface="Gautami"/>
+        <a:font script="Taml" typeface="Latha"/>
+        <a:font script="Syrc" typeface="Estrangelo Edessa"/>
+        <a:font script="Orya" typeface="Kalinga"/>
+        <a:font script="Mlym" typeface="Kartika"/>
+        <a:font script="Laoo" typeface="DokChampa"/>
+        <a:font script="Sinh" typeface="Iskoola Pota"/>
+        <a:font script="Mong" typeface="Mongolian Baiti"/>
+        <a:font script="Viet" typeface="Times New Roman"/>
+        <a:font script="Uigh" typeface="Microsoft Uighur"/>
+        <a:font script="Geor" typeface="Sylfaen"/>
+        <a:font script="Armn" typeface="Arial"/>
+        <a:font script="Bugi" typeface="Leelawadee UI"/>
+        <a:font script="Bopo" typeface="Microsoft JhengHei"/>
+        <a:font script="Java" typeface="Javanese Text"/>
+        <a:font script="Lisu" typeface="Segoe UI"/>
+        <a:font script="Mymr" typeface="Myanmar Text"/>
+        <a:font script="Nkoo" typeface="Ebrima"/>
+        <a:font script="Olck" typeface="Nirmala UI"/>
+        <a:font script="Osma" typeface="Ebrima"/>
+        <a:font script="Phag" typeface="Phagspa"/>
+        <a:font script="Syrn" typeface="Estrangelo Edessa"/>
+        <a:font script="Syrj" typeface="Estrangelo Edessa"/>
+        <a:font script="Syre" typeface="Estrangelo Edessa"/>
+        <a:font script="Sora" typeface="Nirmala UI"/>
+        <a:font script="Tale" typeface="Microsoft Tai Le"/>
+        <a:font script="Talu" typeface="Microsoft New Tai Lue"/>
+        <a:font script="Tfng" typeface="Ebrima"/>
+      </a:majorFont>
+      <a:minorFont>
+        <a:latin typeface="Aptos" panose="02110004020202020204"/>
+        <a:ea typeface=""/>
+        <a:cs typeface=""/>
+        <a:font script="Jpan" typeface="游ゴシック"/>
+        <a:font script="Hang" typeface="맑은 고딕"/>
+        <a:font script="Hans" typeface="等线"/>
+        <a:font script="Hant" typeface="新細明體"/>
+        <a:font script="Arab" typeface="Arial"/>
+        <a:font script="Hebr" typeface="Arial"/>
+        <a:font script="Thai" typeface="Cordia New"/>
+        <a:font script="Ethi" typeface="Nyala"/>
+        <a:font script="Beng" typeface="Vrinda"/>
+        <a:font script="Gujr" typeface="Shruti"/>
+        <a:font script="Khmr" typeface="DaunPenh"/>
+        <a:font script="Knda" typeface="Tunga"/>
+        <a:font script="Guru" typeface="Raavi"/>
+        <a:font script="Cans" typeface="Euphemia"/>
+        <a:font script="Cher" typeface="Plantagenet Cherokee"/>
+        <a:font script="Yiii" typeface="Microsoft Yi Baiti"/>
+        <a:font script="Tibt" typeface="Microsoft Himalaya"/>
+        <a:font script="Thaa" typeface="MV Boli"/>
+        <a:font script="Deva" typeface="Mangal"/>
+        <a:font script="Telu" typeface="Gautami"/>
+        <a:font script="Taml" typeface="Latha"/>
+        <a:font script="Syrc" typeface="Estrangelo Edessa"/>
+        <a:font script="Orya" typeface="Kalinga"/>
+        <a:font script="Mlym" typeface="Kartika"/>
+        <a:font script="Laoo" typeface="DokChampa"/>
+        <a:font script="Sinh" typeface="Iskoola Pota"/>
+        <a:font script="Mong" typeface="Mongolian Baiti"/>
+        <a:font script="Viet" typeface="Arial"/>
+        <a:font script="Uigh" typeface="Microsoft Uighur"/>
+        <a:font script="Geor" typeface="Sylfaen"/>
+        <a:font script="Armn" typeface="Arial"/>
+        <a:font script="Bugi" typeface="Leelawadee UI"/>
+        <a:font script="Bopo" typeface="Microsoft JhengHei"/>
+        <a:font script="Java" typeface="Javanese Text"/>
+        <a:font script="Lisu" typeface="Segoe UI"/>
+        <a:font script="Mymr" typeface="Myanmar Text"/>
+        <a:font script="Nkoo" typeface="Ebrima"/>
+        <a:font script="Olck" typeface="Nirmala UI"/>
+        <a:font script="Osma" typeface="Ebrima"/>
+        <a:font script="Phag" typeface="Phagspa"/>
+        <a:font script="Syrn" typeface="Estrangelo Edessa"/>
+        <a:font script="Syrj" typeface="Estrangelo Edessa"/>
+        <a:font script="Syre" typeface="Estrangelo Edessa"/>
+        <a:font script="Sora" typeface="Nirmala UI"/>
+        <a:font script="Tale" typeface="Microsoft Tai Le"/>
+        <a:font script="Talu" typeface="Microsoft New Tai Lue"/>
+        <a:font script="Tfng" typeface="Ebrima"/>
+      </a:minorFont>
+    </a:fontScheme>
+    <a:fmtScheme name="Office">
+      <a:fillStyleLst>
+        <a:solidFill>
+          <a:schemeClr val="phClr"/>
+        </a:solidFill>
+        <a:gradFill rotWithShape="1">
+          <a:gsLst>
+            <a:gs pos="0">
+              <a:schemeClr val="phClr">
+                <a:lumMod val="110000"/>
+                <a:satMod val="105000"/>
+                <a:tint val="67000"/>
+              </a:schemeClr>
+            </a:gs>
+            <a:gs pos="50000">
+              <a:schemeClr val="phClr">
+                <a:lumMod val="105000"/>
+                <a:satMod val="103000"/>
+                <a:tint val="73000"/>
+              </a:schemeClr>
+            </a:gs>
+            <a:gs pos="100000">
+              <a:schemeClr val="phClr">
+                <a:lumMod val="105000"/>
+                <a:satMod val="109000"/>
+                <a:tint val="81000"/>
+              </a:schemeClr>
+            </a:gs>
+          </a:gsLst>
+          <a:lin ang="5400000" scaled="0"/>
+        </a:gradFill>
+        <a:gradFill rotWithShape="1">
+          <a:gsLst>
+            <a:gs pos="0">
+              <a:schemeClr val="phClr">
+                <a:satMod val="103000"/>
+                <a:lumMod val="102000"/>
+                <a:tint val="94000"/>
+              </a:schemeClr>
+            </a:gs>
+            <a:gs pos="50000">
+              <a:schemeClr val="phClr">
+                <a:satMod val="110000"/>
+                <a:lumMod val="100000"/>
+                <a:shade val="100000"/>
+              </a:schemeClr>
+            </a:gs>
+            <a:gs pos="100000">
+              <a:schemeClr val="phClr">
+                <a:lumMod val="99000"/>
+                <a:satMod val="120000"/>
+                <a:shade val="78000"/>
+              </a:schemeClr>
+            </a:gs>
+          </a:gsLst>
+          <a:lin ang="5400000" scaled="0"/>
+        </a:gradFill>
+      </a:fillStyleLst>
+      <a:lnStyleLst>
+        <a:ln w="12700" cap="flat" cmpd="sng" algn="ctr">
+          <a:solidFill>
+            <a:schemeClr val="phClr"/>
+          </a:solidFill>
+          <a:prstDash val="solid"/>
+          <a:miter lim="800000"/>
+        </a:ln>
+        <a:ln w="19050" cap="flat" cmpd="sng" algn="ctr">
+          <a:solidFill>
+            <a:schemeClr val="phClr"/>
+          </a:solidFill>
+          <a:prstDash val="solid"/>
+          <a:miter lim="800000"/>
+        </a:ln>
+        <a:ln w="25400" cap="flat" cmpd="sng" algn="ctr">
+          <a:solidFill>
+            <a:schemeClr val="phClr"/>
+          </a:solidFill>
+          <a:prstDash val="solid"/>
+          <a:miter lim="800000"/>
+        </a:ln>
+      </a:lnStyleLst>
+      <a:effectStyleLst>
+        <a:effectStyle>
+          <a:effectLst/>
+        </a:effectStyle>
+        <a:effectStyle>
+          <a:effectLst/>
+        </a:effectStyle>
+        <a:effectStyle>
+          <a:effectLst>
+            <a:outerShdw blurRad="57150" dist="19050" dir="5400000" algn="ctr" rotWithShape="0">
+              <a:srgbClr val="000000">
+                <a:alpha val="63000"/>
+              </a:srgbClr>
+            </a:outerShdw>
+          </a:effectLst>
+        </a:effectStyle>
+      </a:effectStyleLst>
+      <a:bgFillStyleLst>
+        <a:solidFill>
+          <a:schemeClr val="phClr"/>
+        </a:solidFill>
+        <a:solidFill>
+          <a:schemeClr val="phClr">
+            <a:tint val="95000"/>
+            <a:satMod val="170000"/>
+          </a:schemeClr>
+        </a:solidFill>
+        <a:gradFill rotWithShape="1">
+          <a:gsLst>
+            <a:gs pos="0">
+              <a:schemeClr val="phClr">
+                <a:tint val="93000"/>
+                <a:satMod val="150000"/>
+                <a:shade val="98000"/>
+                <a:lumMod val="102000"/>
+              </a:schemeClr>
+            </a:gs>
+            <a:gs pos="50000">
+              <a:schemeClr val="phClr">
+                <a:tint val="98000"/>
+                <a:satMod val="130000"/>
+                <a:shade val="90000"/>
+                <a:lumMod val="103000"/>
+              </a:schemeClr>
+            </a:gs>
+            <a:gs pos="100000">
+              <a:schemeClr val="phClr">
+                <a:shade val="63000"/>
+                <a:satMod val="120000"/>
+              </a:schemeClr>
+            </a:gs>
+          </a:gsLst>
+          <a:lin ang="5400000" scaled="0"/>
+        </a:gradFill>
+      </a:bgFillStyleLst>
+    </a:fmtScheme>
+  </a:themeElements>
+  <a:objectDefaults>
+    <a:lnDef>
+      <a:spPr/>
+      <a:bodyPr/>
+      <a:lstStyle/>
+      <a:style>
+        <a:lnRef idx="2">
+          <a:schemeClr val="accent1"/>
+        </a:lnRef>
+        <a:fillRef idx="0">
+          <a:schemeClr val="accent1"/>
+        </a:fillRef>
+        <a:effectRef idx="1">
+          <a:schemeClr val="accent1"/>
+        </a:effectRef>
+        <a:fontRef idx="minor">
+          <a:schemeClr val="tx1"/>
+        </a:fontRef>
+      </a:style>
+    </a:lnDef>
+  </a:objectDefaults>
+  <a:extraClrSchemeLst/>
+  <a:extLst>
+    <a:ext uri="{05A4C25C-085E-4340-85A3-A5531E510DB2}">
+      <thm15:themeFamily xmlns:thm15="http://schemas.microsoft.com/office/thememl/2012/main" name="Office Theme" id="{2E142A2C-CD16-42D6-873A-C26D2A0506FA}" vid="{1BDDFF52-6CD6-40A5-AB3C-68EB2F1E4D0A}"/>
+    </a:ext>
+  </a:extLst>
+</a:theme>
 </file>